--- a/docs/content/wrangling/wrangling_lecture.pptx
+++ b/docs/content/wrangling/wrangling_lecture.pptx
@@ -3356,7 +3356,7 @@
             </a:pPr>
             <a:r>
               <a:rPr/>
-              <a:t>2026-09-04</a:t>
+              <a:t>2026-09-08</a:t>
             </a:r>
           </a:p>
         </p:txBody>

--- a/docs/content/wrangling/wrangling_lecture.pptx
+++ b/docs/content/wrangling/wrangling_lecture.pptx
@@ -3468,7 +3468,7 @@
                 </a:solidFill>
                 <a:latin typeface="Courier"/>
               </a:rPr>
-              <a:t>tree_df </a:t>
+              <a:t>leaf_df </a:t>
             </a:r>
             <a:r>
               <a:rPr>
@@ -3513,7 +3513,7 @@
                 </a:solidFill>
                 <a:latin typeface="Courier"/>
               </a:rPr>
-              <a:t>side =</a:t>
+              <a:t>shade =</a:t>
             </a:r>
             <a:r>
               <a:rPr>
@@ -3585,7 +3585,7 @@
                 </a:solidFill>
                 <a:latin typeface="Courier"/>
               </a:rPr>
-              <a:t>tree_df </a:t>
+              <a:t>leaf_df </a:t>
             </a:r>
             <a:r>
               <a:rPr>
@@ -3621,7 +3621,7 @@
                 </a:solidFill>
                 <a:latin typeface="Courier"/>
               </a:rPr>
-              <a:t>(side </a:t>
+              <a:t>(shade </a:t>
             </a:r>
             <a:r>
               <a:rPr>
@@ -3712,7 +3712,7 @@
               <a:rPr sz="2000">
                 <a:latin typeface="Courier"/>
               </a:rPr>
-              <a:t>filter(side = "sunny")</a:t>
+              <a:t>filter(shade = "sunny")</a:t>
             </a:r>
             <a:r>
               <a:rPr sz="2000"/>
@@ -3858,7 +3858,7 @@
                 </a:solidFill>
                 <a:latin typeface="Courier"/>
               </a:rPr>
-              <a:t># Keep only side and weight</a:t>
+              <a:t># Keep only shade and mass</a:t>
             </a:r>
             <a:br/>
             <a:r>
@@ -3868,7 +3868,7 @@
                 </a:solidFill>
                 <a:latin typeface="Courier"/>
               </a:rPr>
-              <a:t>tree_df </a:t>
+              <a:t>leaf_df </a:t>
             </a:r>
             <a:r>
               <a:rPr>
@@ -3904,7 +3904,7 @@
                 </a:solidFill>
                 <a:latin typeface="Courier"/>
               </a:rPr>
-              <a:t>(side, weight_g) </a:t>
+              <a:t>(shade, mass_g) </a:t>
             </a:r>
             <a:r>
               <a:rPr>
@@ -3952,14 +3952,14 @@
                 <a:latin typeface="Courier"/>
               </a:rPr>
               <a:t># A tibble: 6 × 2
-  side  weight_g
-  &lt;chr&gt;    &lt;dbl&gt;
-1 sunny        4
-2 sunny        3
-3 sunny        5
-4 sunny        3
-5 sunny        4
-6 sunny        3</a:t>
+  shade mass_g
+  &lt;chr&gt;  &lt;dbl&gt;
+1 sunny   0.4 
+2 sunny   0.48
+3 sunny   0.34
+4 sunny   0.65
+5 sunny   0.27
+6 sunny   0.43</a:t>
             </a:r>
           </a:p>
           <a:p>
@@ -3973,7 +3973,7 @@
                 </a:solidFill>
                 <a:latin typeface="Courier"/>
               </a:rPr>
-              <a:t># Drop the index column (use minus sign)</a:t>
+              <a:t># Drop the paper_mass_g column (use minus sign)</a:t>
             </a:r>
             <a:br/>
             <a:r>
@@ -3983,7 +3983,7 @@
                 </a:solidFill>
                 <a:latin typeface="Courier"/>
               </a:rPr>
-              <a:t>tree_df </a:t>
+              <a:t>leaf_df </a:t>
             </a:r>
             <a:r>
               <a:rPr>
@@ -4037,7 +4037,7 @@
                 </a:solidFill>
                 <a:latin typeface="Courier"/>
               </a:rPr>
-              <a:t>index) </a:t>
+              <a:t>paper_mass_g) </a:t>
             </a:r>
             <a:r>
               <a:rPr>
@@ -4084,15 +4084,15 @@
               <a:rPr>
                 <a:latin typeface="Courier"/>
               </a:rPr>
-              <a:t># A tibble: 6 × 4
-  side  weight_g width_cm height_cm
-  &lt;chr&gt;    &lt;dbl&gt;    &lt;dbl&gt;     &lt;dbl&gt;
-1 sunny        4       12        21
-2 sunny        3       14        22
-3 sunny        5       12        21
-4 sunny        3       13        23
-5 sunny        4       15        22
-6 sunny        3       13        23</a:t>
+              <a:t># A tibble: 6 × 7
+  twig_id leaf_id teams shade mass_g petiole_mm thickness_mm
+  &lt;chr&gt;   &lt;chr&gt;   &lt;chr&gt; &lt;chr&gt;  &lt;dbl&gt;      &lt;dbl&gt;        &lt;dbl&gt;
+1 &lt;NA&gt;    &lt;NA&gt;    12345 sunny   0.4          79         0.15
+2 &lt;NA&gt;    &lt;NA&gt;    12345 sunny   0.48         63         0.14
+3 &lt;NA&gt;    &lt;NA&gt;    12345 sunny   0.34         68         0.14
+4 &lt;NA&gt;    &lt;NA&gt;    12345 sunny   0.65         35         0.15
+5 &lt;NA&gt;    &lt;NA&gt;    12345 sunny   0.27         34         0.11
+6 &lt;NA&gt;    &lt;NA&gt;    12345 sunny   0.43         40         0.16</a:t>
             </a:r>
           </a:p>
           <a:p>
@@ -4116,7 +4116,7 @@
                 </a:solidFill>
                 <a:latin typeface="Courier"/>
               </a:rPr>
-              <a:t>tree_df </a:t>
+              <a:t>leaf_df </a:t>
             </a:r>
             <a:r>
               <a:rPr>
@@ -4179,7 +4179,7 @@
                 </a:solidFill>
                 <a:latin typeface="Courier"/>
               </a:rPr>
-              <a:t>"weight"</a:t>
+              <a:t>"mass"</a:t>
             </a:r>
             <a:r>
               <a:rPr>
@@ -4236,14 +4236,14 @@
                 <a:latin typeface="Courier"/>
               </a:rPr>
               <a:t># A tibble: 6 × 1
-  weight_g
-     &lt;dbl&gt;
-1        4
-2        3
-3        5
-4        3
-5        4
-6        3</a:t>
+  mass_g
+   &lt;dbl&gt;
+1   0.4 
+2   0.48
+3   0.34
+4   0.65
+5   0.27
+6   0.43</a:t>
             </a:r>
           </a:p>
         </p:txBody>
@@ -4332,11 +4332,11 @@
               <a:rPr>
                 <a:latin typeface="Courier"/>
               </a:rPr>
-              <a:t>ends_with("_g")</a:t>
+              <a:t>ends_with("_mm")</a:t>
             </a:r>
             <a:r>
               <a:rPr/>
-              <a:t> — columns ending with “_g”</a:t>
+              <a:t> — columns ending with “_mm”</a:t>
             </a:r>
           </a:p>
           <a:p>
@@ -4345,11 +4345,11 @@
               <a:rPr>
                 <a:latin typeface="Courier"/>
               </a:rPr>
-              <a:t>contains("cm")</a:t>
+              <a:t>contains("mass")</a:t>
             </a:r>
             <a:r>
               <a:rPr/>
-              <a:t> — columns containing “cm”</a:t>
+              <a:t> — columns containing “mass”</a:t>
             </a:r>
           </a:p>
           <a:p>
@@ -4466,7 +4466,7 @@
               <a:rPr sz="2000">
                 <a:latin typeface="Courier"/>
               </a:rPr>
-              <a:t>weight_g * 1000</a:t>
+              <a:t>mass_g * 1000</a:t>
             </a:r>
             <a:r>
               <a:rPr sz="2000"/>
@@ -4494,7 +4494,7 @@
               <a:rPr sz="2000">
                 <a:latin typeface="Courier"/>
               </a:rPr>
-              <a:t>weight_g</a:t>
+              <a:t>mass_g</a:t>
             </a:r>
             <a:r>
               <a:rPr sz="2000"/>
@@ -4579,7 +4579,7 @@
                 </a:solidFill>
                 <a:latin typeface="Courier"/>
               </a:rPr>
-              <a:t>tree_df </a:t>
+              <a:t>leaf_df </a:t>
             </a:r>
             <a:r>
               <a:rPr>
@@ -4625,16 +4625,16 @@
                 </a:solidFill>
                 <a:latin typeface="Courier"/>
               </a:rPr>
-              <a:t>weight_mg =</a:t>
-            </a:r>
-            <a:r>
-              <a:rPr>
-                <a:solidFill>
-                  <a:srgbClr val="003B4F"/>
-                </a:solidFill>
-                <a:latin typeface="Courier"/>
-              </a:rPr>
-              <a:t> weight_g </a:t>
+              <a:t>mass_mg =</a:t>
+            </a:r>
+            <a:r>
+              <a:rPr>
+                <a:solidFill>
+                  <a:srgbClr val="003B4F"/>
+                </a:solidFill>
+                <a:latin typeface="Courier"/>
+              </a:rPr>
+              <a:t> mass_g </a:t>
             </a:r>
             <a:r>
               <a:rPr>
@@ -4718,15 +4718,16 @@
               <a:rPr>
                 <a:latin typeface="Courier"/>
               </a:rPr>
-              <a:t># A tibble: 6 × 6
-  index side  weight_g width_cm height_cm weight_mg
-  &lt;dbl&gt; &lt;chr&gt;    &lt;dbl&gt;    &lt;dbl&gt;     &lt;dbl&gt;     &lt;dbl&gt;
-1     1 sunny        4       12        21      4000
-2     2 sunny        3       14        22      3000
-3     3 sunny        5       12        21      5000
-4     4 sunny        3       13        23      3000
-5     5 sunny        4       15        22      4000
-6     6 sunny        3       13        23      3000</a:t>
+              <a:t># A tibble: 6 × 9
+  twig_id leaf_id teams shade mass_g petiole_mm thickness_mm paper_mass_g
+  &lt;chr&gt;   &lt;chr&gt;   &lt;chr&gt; &lt;chr&gt;  &lt;dbl&gt;      &lt;dbl&gt;        &lt;dbl&gt;        &lt;dbl&gt;
+1 &lt;NA&gt;    &lt;NA&gt;    12345 sunny   0.4          79         0.15         0.21
+2 &lt;NA&gt;    &lt;NA&gt;    12345 sunny   0.48         63         0.14         0.21
+3 &lt;NA&gt;    &lt;NA&gt;    12345 sunny   0.34         68         0.14         0.21
+4 &lt;NA&gt;    &lt;NA&gt;    12345 sunny   0.65         35         0.15         0.24
+5 &lt;NA&gt;    &lt;NA&gt;    12345 sunny   0.27         34         0.11         0.15
+6 &lt;NA&gt;    &lt;NA&gt;    12345 sunny   0.43         40         0.16         0.34
+# ℹ 1 more variable: mass_mg &lt;dbl&gt;</a:t>
             </a:r>
           </a:p>
           <a:p>
@@ -4740,7 +4741,7 @@
                 </a:solidFill>
                 <a:latin typeface="Courier"/>
               </a:rPr>
-              <a:t># Add a size category based on weight</a:t>
+              <a:t># Add a size category based on mass</a:t>
             </a:r>
             <a:br/>
             <a:r>
@@ -4750,7 +4751,7 @@
                 </a:solidFill>
                 <a:latin typeface="Courier"/>
               </a:rPr>
-              <a:t>tree_df </a:t>
+              <a:t>leaf_df </a:t>
             </a:r>
             <a:r>
               <a:rPr>
@@ -4823,7 +4824,7 @@
                 </a:solidFill>
                 <a:latin typeface="Courier"/>
               </a:rPr>
-              <a:t>(weight_g </a:t>
+              <a:t>(mass_g </a:t>
             </a:r>
             <a:r>
               <a:rPr>
@@ -4850,7 +4851,7 @@
                 </a:solidFill>
                 <a:latin typeface="Courier"/>
               </a:rPr>
-              <a:t>5</a:t>
+              <a:t>0.5</a:t>
             </a:r>
             <a:r>
               <a:rPr>
@@ -4943,15 +4944,16 @@
               <a:rPr>
                 <a:latin typeface="Courier"/>
               </a:rPr>
-              <a:t># A tibble: 6 × 6
-  index side  weight_g width_cm height_cm size_class
-  &lt;dbl&gt; &lt;chr&gt;    &lt;dbl&gt;    &lt;dbl&gt;     &lt;dbl&gt; &lt;chr&gt;     
-1     1 sunny        4       12        21 small     
-2     2 sunny        3       14        22 small     
-3     3 sunny        5       12        21 small     
-4     4 sunny        3       13        23 small     
-5     5 sunny        4       15        22 small     
-6     6 sunny        3       13        23 small     </a:t>
+              <a:t># A tibble: 6 × 9
+  twig_id leaf_id teams shade mass_g petiole_mm thickness_mm paper_mass_g
+  &lt;chr&gt;   &lt;chr&gt;   &lt;chr&gt; &lt;chr&gt;  &lt;dbl&gt;      &lt;dbl&gt;        &lt;dbl&gt;        &lt;dbl&gt;
+1 &lt;NA&gt;    &lt;NA&gt;    12345 sunny   0.4          79         0.15         0.21
+2 &lt;NA&gt;    &lt;NA&gt;    12345 sunny   0.48         63         0.14         0.21
+3 &lt;NA&gt;    &lt;NA&gt;    12345 sunny   0.34         68         0.14         0.21
+4 &lt;NA&gt;    &lt;NA&gt;    12345 sunny   0.65         35         0.15         0.24
+5 &lt;NA&gt;    &lt;NA&gt;    12345 sunny   0.27         34         0.11         0.15
+6 &lt;NA&gt;    &lt;NA&gt;    12345 sunny   0.43         40         0.16         0.34
+# ℹ 1 more variable: size_class &lt;chr&gt;</a:t>
             </a:r>
           </a:p>
           <a:p>
@@ -4965,7 +4967,7 @@
                 </a:solidFill>
                 <a:latin typeface="Courier"/>
               </a:rPr>
-              <a:t># mutate() can reference multiple existing columns</a:t>
+              <a:t># mutate() can create several new columns at once</a:t>
             </a:r>
             <a:br/>
             <a:r>
@@ -4975,7 +4977,7 @@
                 </a:solidFill>
                 <a:latin typeface="Courier"/>
               </a:rPr>
-              <a:t>tree_df </a:t>
+              <a:t>leaf_df </a:t>
             </a:r>
             <a:r>
               <a:rPr>
@@ -5031,16 +5033,16 @@
                 </a:solidFill>
                 <a:latin typeface="Courier"/>
               </a:rPr>
-              <a:t>weight_mg =</a:t>
-            </a:r>
-            <a:r>
-              <a:rPr>
-                <a:solidFill>
-                  <a:srgbClr val="003B4F"/>
-                </a:solidFill>
-                <a:latin typeface="Courier"/>
-              </a:rPr>
-              <a:t> weight_g </a:t>
+              <a:t>mass_mg    =</a:t>
+            </a:r>
+            <a:r>
+              <a:rPr>
+                <a:solidFill>
+                  <a:srgbClr val="003B4F"/>
+                </a:solidFill>
+                <a:latin typeface="Courier"/>
+              </a:rPr>
+              <a:t> mass_g </a:t>
             </a:r>
             <a:r>
               <a:rPr>
@@ -5095,16 +5097,16 @@
                 </a:solidFill>
                 <a:latin typeface="Courier"/>
               </a:rPr>
-              <a:t>area_approx =</a:t>
-            </a:r>
-            <a:r>
-              <a:rPr>
-                <a:solidFill>
-                  <a:srgbClr val="003B4F"/>
-                </a:solidFill>
-                <a:latin typeface="Courier"/>
-              </a:rPr>
-              <a:t> width_cm </a:t>
+              <a:t>petiole_cm =</a:t>
+            </a:r>
+            <a:r>
+              <a:rPr>
+                <a:solidFill>
+                  <a:srgbClr val="003B4F"/>
+                </a:solidFill>
+                <a:latin typeface="Courier"/>
+              </a:rPr>
+              <a:t> petiole_mm </a:t>
             </a:r>
             <a:r>
               <a:rPr>
@@ -5113,16 +5115,34 @@
                 </a:solidFill>
                 <a:latin typeface="Courier"/>
               </a:rPr>
-              <a:t>*</a:t>
-            </a:r>
-            <a:r>
-              <a:rPr>
-                <a:solidFill>
-                  <a:srgbClr val="003B4F"/>
-                </a:solidFill>
-                <a:latin typeface="Courier"/>
-              </a:rPr>
-              <a:t> height_cm </a:t>
+              <a:t>/</a:t>
+            </a:r>
+            <a:r>
+              <a:rPr>
+                <a:solidFill>
+                  <a:srgbClr val="003B4F"/>
+                </a:solidFill>
+                <a:latin typeface="Courier"/>
+              </a:rPr>
+              <a:t> </a:t>
+            </a:r>
+            <a:r>
+              <a:rPr>
+                <a:solidFill>
+                  <a:srgbClr val="AD0000"/>
+                </a:solidFill>
+                <a:latin typeface="Courier"/>
+              </a:rPr>
+              <a:t>10</a:t>
+            </a:r>
+            <a:r>
+              <a:rPr>
+                <a:solidFill>
+                  <a:srgbClr val="003B4F"/>
+                </a:solidFill>
+                <a:latin typeface="Courier"/>
+              </a:rPr>
+              <a:t> </a:t>
             </a:r>
             <a:r>
               <a:rPr>
@@ -5131,7 +5151,7 @@
                 </a:solidFill>
                 <a:latin typeface="Courier"/>
               </a:rPr>
-              <a:t># rough area estimate</a:t>
+              <a:t># petiole length in cm</a:t>
             </a:r>
             <a:br/>
             <a:r>
@@ -5189,15 +5209,16 @@
               <a:rPr>
                 <a:latin typeface="Courier"/>
               </a:rPr>
-              <a:t># A tibble: 6 × 7
-  index side  weight_g width_cm height_cm weight_mg area_approx
-  &lt;dbl&gt; &lt;chr&gt;    &lt;dbl&gt;    &lt;dbl&gt;     &lt;dbl&gt;     &lt;dbl&gt;       &lt;dbl&gt;
-1     1 sunny        4       12        21      4000         252
-2     2 sunny        3       14        22      3000         308
-3     3 sunny        5       12        21      5000         252
-4     4 sunny        3       13        23      3000         299
-5     5 sunny        4       15        22      4000         330
-6     6 sunny        3       13        23      3000         299</a:t>
+              <a:t># A tibble: 6 × 10
+  twig_id leaf_id teams shade mass_g petiole_mm thickness_mm paper_mass_g
+  &lt;chr&gt;   &lt;chr&gt;   &lt;chr&gt; &lt;chr&gt;  &lt;dbl&gt;      &lt;dbl&gt;        &lt;dbl&gt;        &lt;dbl&gt;
+1 &lt;NA&gt;    &lt;NA&gt;    12345 sunny   0.4          79         0.15         0.21
+2 &lt;NA&gt;    &lt;NA&gt;    12345 sunny   0.48         63         0.14         0.21
+3 &lt;NA&gt;    &lt;NA&gt;    12345 sunny   0.34         68         0.14         0.21
+4 &lt;NA&gt;    &lt;NA&gt;    12345 sunny   0.65         35         0.15         0.24
+5 &lt;NA&gt;    &lt;NA&gt;    12345 sunny   0.27         34         0.11         0.15
+6 &lt;NA&gt;    &lt;NA&gt;    12345 sunny   0.43         40         0.16         0.34
+# ℹ 2 more variables: mass_mg &lt;dbl&gt;, petiole_cm &lt;dbl&gt;</a:t>
             </a:r>
           </a:p>
         </p:txBody>
@@ -5290,7 +5311,7 @@
               <a:rPr sz="2000">
                 <a:latin typeface="Courier"/>
               </a:rPr>
-              <a:t>tree_df</a:t>
+              <a:t>leaf_df</a:t>
             </a:r>
             <a:r>
               <a:rPr sz="2000"/>
@@ -5309,7 +5330,7 @@
               <a:rPr sz="2000">
                 <a:latin typeface="Courier"/>
               </a:rPr>
-              <a:t>mutate(weight_g = round(weight_g, 1))</a:t>
+              <a:t>mutate(mass_g = round(mass_g, 2))</a:t>
             </a:r>
           </a:p>
           <a:p>
@@ -5436,7 +5457,7 @@
                 </a:solidFill>
                 <a:latin typeface="Courier"/>
               </a:rPr>
-              <a:t>tree_df </a:t>
+              <a:t>leaf_df </a:t>
             </a:r>
             <a:r>
               <a:rPr>
@@ -5472,7 +5493,7 @@
                 </a:solidFill>
                 <a:latin typeface="Courier"/>
               </a:rPr>
-              <a:t>(weight_g)</a:t>
+              <a:t>(mass_g)</a:t>
             </a:r>
           </a:p>
           <a:p>
@@ -5483,29 +5504,20 @@
               <a:rPr>
                 <a:latin typeface="Courier"/>
               </a:rPr>
-              <a:t># A tibble: 20 × 5
-   index side  weight_g width_cm height_cm
-   &lt;dbl&gt; &lt;chr&gt;    &lt;dbl&gt;    &lt;dbl&gt;     &lt;dbl&gt;
- 1     2 sunny        3       14        22
- 2     4 sunny        3       13        23
- 3     6 sunny        3       13        23
- 4     9 sunny        3       14        23
- 5     1 sunny        4       12        21
- 6     5 sunny        4       15        22
- 7     8 sunny        4       13        24
- 8    10 sunny        4       15        23
- 9     3 sunny        5       12        21
-10     7 sunny        5       16        21
-11    13 shady        6       17        27
-12    11 shady        7        9        28
-13    16 shady        7       19        28
-14    20 shady        7       19        29
-15    12 shady        8       18        29
-16    15 shady        8       19        27
-17    17 shady        8       18        29
-18    14 shady        9       18        28
-19    18 shady        9       17        27
-20    19 shady        9       19        27</a:t>
+              <a:t># A tibble: 53 × 8
+   twig_id leaf_id teams       shade mass_g petiole_mm thickness_mm paper_mass_g
+   &lt;chr&gt;   &lt;chr&gt;   &lt;chr&gt;       &lt;chr&gt;  &lt;dbl&gt;      &lt;dbl&gt;        &lt;dbl&gt;        &lt;dbl&gt;
+ 1 twig_6  l06     fighting_m… sunny  0.193       29           0.13        0.113
+ 2 &lt;NA&gt;    4       Oscar_Karl  sunny  0.230       35.7         0.36       NA    
+ 3 &lt;NA&gt;    &lt;NA&gt;    12345       sunny  0.27        34           0.11        0.15 
+ 4 &lt;NA&gt;    6       Oscar_Karl  sunny  0.282       46.9         0.4        NA    
+ 5 &lt;NA&gt;    5       Oscar_Karl  sunny  0.304       51.3         0.43       NA    
+ 6 &lt;NA&gt;    &lt;NA&gt;    12345       sunny  0.34        68           0.14        0.21 
+ 7 &lt;NA&gt;    &lt;NA&gt;    12345       shady  0.34        58           0.15        0.23 
+ 8 &lt;NA&gt;    &lt;NA&gt;    12345       shady  0.34        45           0.13        0.27 
+ 9 &lt;NA&gt;    &lt;NA&gt;    leaf_oglers shady  0.344       48.3         0.67        0.196
+10 &lt;NA&gt;    5       Oscar_Karl  shady  0.344       37.0         0.25       NA    
+# ℹ 43 more rows</a:t>
             </a:r>
           </a:p>
           <a:p>
@@ -5529,7 +5541,7 @@
                 </a:solidFill>
                 <a:latin typeface="Courier"/>
               </a:rPr>
-              <a:t>tree_df </a:t>
+              <a:t>leaf_df </a:t>
             </a:r>
             <a:r>
               <a:rPr>
@@ -5583,7 +5595,7 @@
                 </a:solidFill>
                 <a:latin typeface="Courier"/>
               </a:rPr>
-              <a:t>(weight_g))</a:t>
+              <a:t>(mass_g))</a:t>
             </a:r>
           </a:p>
           <a:p>
@@ -5594,29 +5606,20 @@
               <a:rPr>
                 <a:latin typeface="Courier"/>
               </a:rPr>
-              <a:t># A tibble: 20 × 5
-   index side  weight_g width_cm height_cm
-   &lt;dbl&gt; &lt;chr&gt;    &lt;dbl&gt;    &lt;dbl&gt;     &lt;dbl&gt;
- 1    14 shady        9       18        28
- 2    18 shady        9       17        27
- 3    19 shady        9       19        27
- 4    12 shady        8       18        29
- 5    15 shady        8       19        27
- 6    17 shady        8       18        29
- 7    11 shady        7        9        28
- 8    16 shady        7       19        28
- 9    20 shady        7       19        29
-10    13 shady        6       17        27
-11     3 sunny        5       12        21
-12     7 sunny        5       16        21
-13     1 sunny        4       12        21
-14     5 sunny        4       15        22
-15     8 sunny        4       13        24
-16    10 sunny        4       15        23
-17     2 sunny        3       14        22
-18     4 sunny        3       13        23
-19     6 sunny        3       13        23
-20     9 sunny        3       14        23</a:t>
+              <a:t># A tibble: 53 × 8
+   twig_id leaf_id teams       shade mass_g petiole_mm thickness_mm paper_mass_g
+   &lt;chr&gt;   &lt;chr&gt;   &lt;chr&gt;       &lt;chr&gt;  &lt;dbl&gt;      &lt;dbl&gt;        &lt;dbl&gt;        &lt;dbl&gt;
+ 1 &lt;NA&gt;    &lt;NA&gt;    still_load… sunny  1.08      84             0.68        0.420
+ 2 twig_2  l09     fighting_m… shady  0.920      0.383        NA          NA    
+ 3 &lt;NA&gt;    &lt;NA&gt;    leaf_oglers shady  0.8       41.2           0.5         0.3  
+ 4 &lt;NA&gt;    &lt;NA&gt;    leaf_oglers sunny  0.791     53.9           0.23        0.332
+ 5 twig_2  l10     fighting_m… shady  0.782     67             0.27        0.342
+ 6 twig_5  l04     fighting_m… sunny  0.76      79             0.16        0.312
+ 7 twig_4  l01     fighting_m… sunny  0.737     75             0.24        0.303
+ 8 &lt;NA&gt;    &lt;NA&gt;    leaf_oglers sunny  0.688     45.3           0.19        0.372
+ 9 &lt;NA&gt;    &lt;NA&gt;    leaf_oglers shady  0.68      61.2           0.47        0.32 
+10 &lt;NA&gt;    &lt;NA&gt;    still_load… sunny  0.665     64             0.69        0.427
+# ℹ 43 more rows</a:t>
             </a:r>
           </a:p>
           <a:p>
@@ -5630,7 +5633,7 @@
                 </a:solidFill>
                 <a:latin typeface="Courier"/>
               </a:rPr>
-              <a:t># Sort by side, then by weight within each side</a:t>
+              <a:t># Sort by shade, then by mass within each shade</a:t>
             </a:r>
             <a:br/>
             <a:r>
@@ -5640,7 +5643,7 @@
                 </a:solidFill>
                 <a:latin typeface="Courier"/>
               </a:rPr>
-              <a:t>tree_df </a:t>
+              <a:t>leaf_df </a:t>
             </a:r>
             <a:r>
               <a:rPr>
@@ -5676,7 +5679,7 @@
                 </a:solidFill>
                 <a:latin typeface="Courier"/>
               </a:rPr>
-              <a:t>(side, </a:t>
+              <a:t>(shade, </a:t>
             </a:r>
             <a:r>
               <a:rPr>
@@ -5694,7 +5697,7 @@
                 </a:solidFill>
                 <a:latin typeface="Courier"/>
               </a:rPr>
-              <a:t>(weight_g))</a:t>
+              <a:t>(mass_g))</a:t>
             </a:r>
           </a:p>
           <a:p>
@@ -5705,29 +5708,20 @@
               <a:rPr>
                 <a:latin typeface="Courier"/>
               </a:rPr>
-              <a:t># A tibble: 20 × 5
-   index side  weight_g width_cm height_cm
-   &lt;dbl&gt; &lt;chr&gt;    &lt;dbl&gt;    &lt;dbl&gt;     &lt;dbl&gt;
- 1    14 shady        9       18        28
- 2    18 shady        9       17        27
- 3    19 shady        9       19        27
- 4    12 shady        8       18        29
- 5    15 shady        8       19        27
- 6    17 shady        8       18        29
- 7    11 shady        7        9        28
- 8    16 shady        7       19        28
- 9    20 shady        7       19        29
-10    13 shady        6       17        27
-11     3 sunny        5       12        21
-12     7 sunny        5       16        21
-13     1 sunny        4       12        21
-14     5 sunny        4       15        22
-15     8 sunny        4       13        24
-16    10 sunny        4       15        23
-17     2 sunny        3       14        22
-18     4 sunny        3       13        23
-19     6 sunny        3       13        23
-20     9 sunny        3       14        23</a:t>
+              <a:t># A tibble: 53 × 8
+   twig_id leaf_id teams       shade mass_g petiole_mm thickness_mm paper_mass_g
+   &lt;chr&gt;   &lt;chr&gt;   &lt;chr&gt;       &lt;chr&gt;  &lt;dbl&gt;      &lt;dbl&gt;        &lt;dbl&gt;        &lt;dbl&gt;
+ 1 twig_2  l09     fighting_m… shady  0.920      0.383        NA          NA    
+ 2 &lt;NA&gt;    &lt;NA&gt;    leaf_oglers shady  0.8       41.2           0.5         0.3  
+ 3 twig_2  l10     fighting_m… shady  0.782     67             0.27        0.342
+ 4 &lt;NA&gt;    &lt;NA&gt;    leaf_oglers shady  0.68      61.2           0.47        0.32 
+ 5 &lt;NA&gt;    &lt;NA&gt;    leaf_oglers shady  0.61      59.4           0.23        0.25 
+ 6 &lt;NA&gt;    &lt;NA&gt;    still_load… shady  0.607     82             0.32        0.301
+ 7 &lt;NA&gt;    &lt;NA&gt;    12345       shady  0.6       68             0.12        0.23 
+ 8 twig_1  l07     fighting_m… shady  0.589     66             0.32        0.257
+ 9 twig_3  l11     fighting_m… shady  0.585     68             0.41        0.26 
+10 &lt;NA&gt;    &lt;NA&gt;    12345       shady  0.57      73             0.14        0.28 
+# ℹ 43 more rows</a:t>
             </a:r>
           </a:p>
         </p:txBody>
@@ -5924,7 +5918,7 @@
                 </a:solidFill>
                 <a:latin typeface="Courier"/>
               </a:rPr>
-              <a:t>wrangled_df &lt;- tree_df </a:t>
+              <a:t>wrangled_df &lt;- leaf_df </a:t>
             </a:r>
             <a:r>
               <a:rPr>
@@ -5961,7 +5955,7 @@
                 </a:solidFill>
                 <a:latin typeface="Courier"/>
               </a:rPr>
-              <a:t>(weight_g </a:t>
+              <a:t>(mass_g </a:t>
             </a:r>
             <a:r>
               <a:rPr>
@@ -6052,7 +6046,7 @@
                 </a:solidFill>
                 <a:latin typeface="Courier"/>
               </a:rPr>
-              <a:t>(side, weight_g, height_cm) </a:t>
+              <a:t>(shade, mass_g, thickness_mm) </a:t>
             </a:r>
             <a:r>
               <a:rPr>
@@ -6126,16 +6120,16 @@
                 </a:solidFill>
                 <a:latin typeface="Courier"/>
               </a:rPr>
-              <a:t>weight_mg =</a:t>
-            </a:r>
-            <a:r>
-              <a:rPr>
-                <a:solidFill>
-                  <a:srgbClr val="003B4F"/>
-                </a:solidFill>
-                <a:latin typeface="Courier"/>
-              </a:rPr>
-              <a:t> weight_g </a:t>
+              <a:t>mass_mg =</a:t>
+            </a:r>
+            <a:r>
+              <a:rPr>
+                <a:solidFill>
+                  <a:srgbClr val="003B4F"/>
+                </a:solidFill>
+                <a:latin typeface="Courier"/>
+              </a:rPr>
+              <a:t> mass_g </a:t>
             </a:r>
             <a:r>
               <a:rPr>
@@ -6217,7 +6211,7 @@
                 </a:solidFill>
                 <a:latin typeface="Courier"/>
               </a:rPr>
-              <a:t>(weight_g </a:t>
+              <a:t>(mass_g </a:t>
             </a:r>
             <a:r>
               <a:rPr>
@@ -6244,7 +6238,7 @@
                 </a:solidFill>
                 <a:latin typeface="Courier"/>
               </a:rPr>
-              <a:t>5</a:t>
+              <a:t>0.5</a:t>
             </a:r>
             <a:r>
               <a:rPr>
@@ -6336,7 +6330,7 @@
                 </a:solidFill>
                 <a:latin typeface="Courier"/>
               </a:rPr>
-              <a:t>(side, </a:t>
+              <a:t>(shade, </a:t>
             </a:r>
             <a:r>
               <a:rPr>
@@ -6354,7 +6348,7 @@
                 </a:solidFill>
                 <a:latin typeface="Courier"/>
               </a:rPr>
-              <a:t>(weight_g)) </a:t>
+              <a:t>(mass_g)) </a:t>
             </a:r>
             <a:r>
               <a:rPr>
@@ -6363,7 +6357,7 @@
                 </a:solidFill>
                 <a:latin typeface="Courier"/>
               </a:rPr>
-              <a:t># sort by side, then weight</a:t>
+              <a:t># sort by shade, then mass</a:t>
             </a:r>
             <a:br/>
             <a:br/>
@@ -6395,14 +6389,14 @@
                 <a:latin typeface="Courier"/>
               </a:rPr>
               <a:t># A tibble: 6 × 5
-  side  weight_g height_cm weight_mg size_class
-  &lt;chr&gt;    &lt;dbl&gt;     &lt;dbl&gt;     &lt;dbl&gt; &lt;chr&gt;     
-1 shady        9        28      9000 large     
-2 shady        9        27      9000 large     
-3 shady        9        27      9000 large     
-4 shady        8        29      8000 large     
-5 shady        8        27      8000 large     
-6 shady        8        29      8000 large     </a:t>
+  shade mass_g thickness_mm mass_mg size_class
+  &lt;chr&gt;  &lt;dbl&gt;        &lt;dbl&gt;   &lt;dbl&gt; &lt;chr&gt;     
+1 shady  0.920        NA       920. large     
+2 shady  0.8           0.5     800  large     
+3 shady  0.782         0.27    782. large     
+4 shady  0.68          0.47    680  large     
+5 shady  0.61          0.23    610  large     
+6 shady  0.607         0.32    607. large     </a:t>
             </a:r>
           </a:p>
         </p:txBody>
@@ -6440,7 +6434,7 @@
               <a:rPr>
                 <a:latin typeface="Courier"/>
               </a:rPr>
-              <a:t>tree_df</a:t>
+              <a:t>leaf_df</a:t>
             </a:r>
             <a:r>
               <a:rPr/>
@@ -6455,7 +6449,7 @@
             </a:r>
             <a:r>
               <a:rPr/>
-              <a:t> filter to non-zero weights,</a:t>
+              <a:t> filter to non-zero masses,</a:t>
             </a:r>
           </a:p>
           <a:p>
@@ -6488,7 +6482,7 @@
             </a:r>
             <a:r>
               <a:rPr/>
-              <a:t> sort by side and weight.</a:t>
+              <a:t> sort by shade and mass.</a:t>
             </a:r>
           </a:p>
           <a:p>
@@ -6521,7 +6515,7 @@
               <a:rPr sz="2000">
                 <a:latin typeface="Courier"/>
               </a:rPr>
-              <a:t>arrange(mutate(select(filter(tree_df, weight_g &gt; 0), side, weight_g, height_cm), weight_mg = weight_g * 1000, size_class = if_else(weight_g &gt; 5, "large", "small")), side, desc(weight_g))</a:t>
+              <a:t>arrange(mutate(select(filter(leaf_df, mass_g &gt; 0), shade, mass_g, thickness_mm), mass_mg = mass_g * 1000, size_class = if_else(mass_g &gt; 0.5, "large", "small")), shade, desc(mass_g))</a:t>
             </a:r>
             <a:r>
               <a:rPr sz="2000"/>
@@ -6897,7 +6891,7 @@
             </a:pPr>
             <a:r>
               <a:rPr/>
-              <a:t>Close the slides. Open the Activity 5 worksheet and work through </a:t>
+              <a:t>Close the slides. Open the Activity 5 and work through </a:t>
             </a:r>
             <a:r>
               <a:rPr>
@@ -6937,7 +6931,7 @@
             </a:r>
             <a:r>
               <a:rPr/>
-              <a:t>, and the full pipeline. Type every line yourself; predict before you run.</a:t>
+              <a:t>, and the full pipeline. Type every line yourself into your script; predict before you run.</a:t>
             </a:r>
           </a:p>
         </p:txBody>
@@ -7343,33 +7337,13 @@
             </a:r>
             <a:r>
               <a:rPr/>
-              <a:t>; inspecting with </a:t>
+              <a:t>; a first look with </a:t>
             </a:r>
             <a:r>
               <a:rPr>
                 <a:latin typeface="Courier"/>
               </a:rPr>
               <a:t>glimpse()</a:t>
-            </a:r>
-            <a:r>
-              <a:rPr/>
-              <a:t>, </a:t>
-            </a:r>
-            <a:r>
-              <a:rPr>
-                <a:latin typeface="Courier"/>
-              </a:rPr>
-              <a:t>head()</a:t>
-            </a:r>
-            <a:r>
-              <a:rPr/>
-              <a:t>, </a:t>
-            </a:r>
-            <a:r>
-              <a:rPr>
-                <a:latin typeface="Courier"/>
-              </a:rPr>
-              <a:t>dim()</a:t>
             </a:r>
           </a:p>
           <a:p>
@@ -7871,7 +7845,7 @@
             </a:r>
             <a:r>
               <a:rPr/>
-              <a:t> — one focused idea, wrangling, done properly. You will switch to the activity worksheet once, at the end, and type the code yourself there.</a:t>
+              <a:t> — one focused idea, wrangling, done properly. You will switch to the activity once, at the end, and type the code yourself into your R script there.</a:t>
             </a:r>
           </a:p>
           <a:p>
@@ -8153,6 +8127,34 @@
               </a:rPr>
               <a:t># data wrangling + ggplot2</a:t>
             </a:r>
+            <a:br/>
+            <a:r>
+              <a:rPr>
+                <a:solidFill>
+                  <a:srgbClr val="4758AB"/>
+                </a:solidFill>
+                <a:latin typeface="Courier"/>
+              </a:rPr>
+              <a:t>library</a:t>
+            </a:r>
+            <a:r>
+              <a:rPr>
+                <a:solidFill>
+                  <a:srgbClr val="003B4F"/>
+                </a:solidFill>
+                <a:latin typeface="Courier"/>
+              </a:rPr>
+              <a:t>(janitor) </a:t>
+            </a:r>
+            <a:r>
+              <a:rPr>
+                <a:solidFill>
+                  <a:srgbClr val="5E5E5E"/>
+                </a:solidFill>
+                <a:latin typeface="Courier"/>
+              </a:rPr>
+              <a:t># clean_names()</a:t>
+            </a:r>
           </a:p>
           <a:p>
             <a:pPr lvl="0" indent="0">
@@ -8175,7 +8177,7 @@
                 </a:solidFill>
                 <a:latin typeface="Courier"/>
               </a:rPr>
-              <a:t>tree_df &lt;- </a:t>
+              <a:t>leaf_df &lt;- </a:t>
             </a:r>
             <a:r>
               <a:rPr>
@@ -8202,16 +8204,53 @@
                 </a:solidFill>
                 <a:latin typeface="Courier"/>
               </a:rPr>
-              <a:t>"data/2026_06_25_tree_experiment_raw_data.xlsx"</a:t>
-            </a:r>
-            <a:r>
-              <a:rPr>
-                <a:solidFill>
-                  <a:srgbClr val="003B4F"/>
-                </a:solidFill>
-                <a:latin typeface="Courier"/>
-              </a:rPr>
-              <a:t>)</a:t>
+              <a:t>"data/2026_09_03_data_sci_leaf_area.xlsx"</a:t>
+            </a:r>
+            <a:r>
+              <a:rPr>
+                <a:solidFill>
+                  <a:srgbClr val="003B4F"/>
+                </a:solidFill>
+                <a:latin typeface="Courier"/>
+              </a:rPr>
+              <a:t>) </a:t>
+            </a:r>
+            <a:r>
+              <a:rPr>
+                <a:solidFill>
+                  <a:srgbClr val="5E5E5E"/>
+                </a:solidFill>
+                <a:latin typeface="Courier"/>
+              </a:rPr>
+              <a:t>%&gt;%</a:t>
+            </a:r>
+            <a:br/>
+            <a:r>
+              <a:rPr>
+                <a:solidFill>
+                  <a:srgbClr val="003B4F"/>
+                </a:solidFill>
+                <a:latin typeface="Courier"/>
+              </a:rPr>
+              <a:t>  </a:t>
+            </a:r>
+            <a:r>
+              <a:rPr>
+                <a:solidFill>
+                  <a:srgbClr val="4758AB"/>
+                </a:solidFill>
+                <a:latin typeface="Courier"/>
+              </a:rPr>
+              <a:t>clean_names</a:t>
+            </a:r>
+            <a:r>
+              <a:rPr>
+                <a:solidFill>
+                  <a:srgbClr val="003B4F"/>
+                </a:solidFill>
+                <a:latin typeface="Courier"/>
+              </a:rPr>
+              <a:t>()</a:t>
             </a:r>
           </a:p>
         </p:txBody>
@@ -8251,11 +8290,8 @@
         <p:spPr>
           <a:xfrm>
             <a:off x="0" y="0"/>
-            <a:ext cx="9144000" cy="602780"/>
+            <a:ext cx="9144000" cy="582780"/>
           </a:xfrm>
-          <a:solidFill>
-            <a:srgbClr val="1A1A2E"/>
-          </a:solidFill>
         </p:spPr>
         <p:txBody>
           <a:bodyPr/>
@@ -8266,7 +8302,7 @@
             </a:pPr>
             <a:r>
               <a:rPr/>
-              <a:t>Inspect the Data</a:t>
+              <a:t>Take a First Look</a:t>
             </a:r>
           </a:p>
         </p:txBody>
@@ -8278,7 +8314,7 @@
             <a:spLocks noGrp="1"/>
           </p:cNvSpPr>
           <p:nvPr>
-            <p:ph idx="1" sz="half"/>
+            <p:ph idx="1"/>
           </p:nvPr>
         </p:nvSpPr>
         <p:spPr/>
@@ -8296,7 +8332,7 @@
                 </a:solidFill>
                 <a:latin typeface="Courier"/>
               </a:rPr>
-              <a:t># Preview the first rows ----------------------------</a:t>
+              <a:t># glimpse(): one row per column — name, type, first values</a:t>
             </a:r>
             <a:br/>
             <a:r>
@@ -8306,16 +8342,16 @@
                 </a:solidFill>
                 <a:latin typeface="Courier"/>
               </a:rPr>
-              <a:t>head</a:t>
-            </a:r>
-            <a:r>
-              <a:rPr>
-                <a:solidFill>
-                  <a:srgbClr val="003B4F"/>
-                </a:solidFill>
-                <a:latin typeface="Courier"/>
-              </a:rPr>
-              <a:t>(tree_df)</a:t>
+              <a:t>glimpse</a:t>
+            </a:r>
+            <a:r>
+              <a:rPr>
+                <a:solidFill>
+                  <a:srgbClr val="003B4F"/>
+                </a:solidFill>
+                <a:latin typeface="Courier"/>
+              </a:rPr>
+              <a:t>(leaf_df)</a:t>
             </a:r>
           </a:p>
           <a:p>
@@ -8326,125 +8362,16 @@
               <a:rPr>
                 <a:latin typeface="Courier"/>
               </a:rPr>
-              <a:t># A tibble: 6 × 5
-  index side  weight_g width_cm height_cm
-  &lt;dbl&gt; &lt;chr&gt;    &lt;dbl&gt;    &lt;dbl&gt;     &lt;dbl&gt;
-1     1 sunny        4       12        21
-2     2 sunny        3       14        22
-3     3 sunny        5       12        21
-4     4 sunny        3       13        23
-5     5 sunny        4       15        22
-6     6 sunny        3       13        23</a:t>
-            </a:r>
-          </a:p>
-        </p:txBody>
-      </p:sp>
-      <p:sp>
-        <p:nvSpPr>
-          <p:cNvPr id="4" name="Content Placeholder 3"/>
-          <p:cNvSpPr>
-            <a:spLocks noGrp="1"/>
-          </p:cNvSpPr>
-          <p:nvPr>
-            <p:ph idx="2" sz="half"/>
-          </p:nvPr>
-        </p:nvSpPr>
-        <p:spPr/>
-        <p:txBody>
-          <a:bodyPr/>
-          <a:lstStyle/>
-          <a:p>
-            <a:pPr lvl="0" indent="0">
-              <a:buNone/>
-            </a:pPr>
-            <a:r>
-              <a:rPr>
-                <a:solidFill>
-                  <a:srgbClr val="5E5E5E"/>
-                </a:solidFill>
-                <a:latin typeface="Courier"/>
-              </a:rPr>
-              <a:t># Column names, types, first values -----------------</a:t>
-            </a:r>
-            <a:br/>
-            <a:r>
-              <a:rPr>
-                <a:solidFill>
-                  <a:srgbClr val="4758AB"/>
-                </a:solidFill>
-                <a:latin typeface="Courier"/>
-              </a:rPr>
-              <a:t>glimpse</a:t>
-            </a:r>
-            <a:r>
-              <a:rPr>
-                <a:solidFill>
-                  <a:srgbClr val="003B4F"/>
-                </a:solidFill>
-                <a:latin typeface="Courier"/>
-              </a:rPr>
-              <a:t>(tree_df)</a:t>
-            </a:r>
-          </a:p>
-          <a:p>
-            <a:pPr lvl="0" indent="0">
-              <a:buNone/>
-            </a:pPr>
-            <a:r>
-              <a:rPr>
-                <a:latin typeface="Courier"/>
-              </a:rPr>
-              <a:t>Rows: 20
-Columns: 5
-$ index     &lt;dbl&gt; 1, 2, 3, 4, 5, 6, 7, 8, 9, 10, 11, 12, 13, 14, 15, 16, 17, 1…
-$ side      &lt;chr&gt; "sunny", "sunny", "sunny", "sunny", "sunny", "sunny", "sunny…
-$ weight_g  &lt;dbl&gt; 4, 3, 5, 3, 4, 3, 5, 4, 3, 4, 7, 8, 6, 9, 8, 7, 8, 9, 9, 7
-$ width_cm  &lt;dbl&gt; 12, 14, 12, 13, 15, 13, 16, 13, 14, 15, 9, 18, 17, 18, 19, 1…
-$ height_cm &lt;dbl&gt; 21, 22, 21, 23, 22, 23, 21, 24, 23, 23, 28, 29, 27, 28, 27, …</a:t>
-            </a:r>
-          </a:p>
-          <a:p>
-            <a:pPr lvl="0" indent="0">
-              <a:buNone/>
-            </a:pPr>
-            <a:r>
-              <a:rPr>
-                <a:solidFill>
-                  <a:srgbClr val="5E5E5E"/>
-                </a:solidFill>
-                <a:latin typeface="Courier"/>
-              </a:rPr>
-              <a:t># Rows × columns</a:t>
-            </a:r>
-            <a:br/>
-            <a:r>
-              <a:rPr>
-                <a:solidFill>
-                  <a:srgbClr val="4758AB"/>
-                </a:solidFill>
-                <a:latin typeface="Courier"/>
-              </a:rPr>
-              <a:t>dim</a:t>
-            </a:r>
-            <a:r>
-              <a:rPr>
-                <a:solidFill>
-                  <a:srgbClr val="003B4F"/>
-                </a:solidFill>
-                <a:latin typeface="Courier"/>
-              </a:rPr>
-              <a:t>(tree_df)</a:t>
-            </a:r>
-          </a:p>
-          <a:p>
-            <a:pPr lvl="0" indent="0">
-              <a:buNone/>
-            </a:pPr>
-            <a:r>
-              <a:rPr>
-                <a:latin typeface="Courier"/>
-              </a:rPr>
-              <a:t>[1] 20  5</a:t>
+              <a:t>Rows: 53
+Columns: 8
+$ twig_id      &lt;chr&gt; NA, NA, NA, NA, NA, NA, NA, NA, NA, NA, NA, NA, "twig_1",…
+$ leaf_id      &lt;chr&gt; NA, NA, NA, NA, NA, NA, NA, NA, NA, NA, NA, NA, "l07", "l…
+$ teams        &lt;chr&gt; "12345", "12345", "12345", "12345", "12345", "12345", "12…
+$ shade        &lt;chr&gt; "sunny", "sunny", "sunny", "sunny", "sunny", "sunny", "sh…
+$ mass_g       &lt;dbl&gt; 0.4000, 0.4800, 0.3400, 0.6500, 0.2700, 0.4300, 0.3900, 0…
+$ petiole_mm   &lt;dbl&gt; 79.0000, 63.0000, 68.0000, 35.0000, 34.0000, 40.0000, 40.…
+$ thickness_mm &lt;dbl&gt; 0.15, 0.14, 0.14, 0.15, 0.11, 0.16, 0.14, 0.15, 0.12, 0.1…
+$ paper_mass_g &lt;dbl&gt; 0.2100, 0.2100, 0.2100, 0.2400, 0.1500, 0.3400, 0.2900, 0…</a:t>
             </a:r>
           </a:p>
           <a:p>
@@ -8457,7 +8384,27 @@
             </a:r>
             <a:r>
               <a:rPr/>
-              <a:t> = character</a:t>
+              <a:t> = character (</a:t>
+            </a:r>
+            <a:r>
+              <a:rPr>
+                <a:latin typeface="Courier"/>
+              </a:rPr>
+              <a:t>shade</a:t>
+            </a:r>
+            <a:r>
+              <a:rPr/>
+              <a:t>, </a:t>
+            </a:r>
+            <a:r>
+              <a:rPr>
+                <a:latin typeface="Courier"/>
+              </a:rPr>
+              <a:t>teams</a:t>
+            </a:r>
+            <a:r>
+              <a:rPr/>
+              <a:t>)</a:t>
             </a:r>
           </a:p>
           <a:p>
@@ -8470,7 +8417,47 @@
             </a:r>
             <a:r>
               <a:rPr/>
-              <a:t> = numeric</a:t>
+              <a:t> = numeric (</a:t>
+            </a:r>
+            <a:r>
+              <a:rPr>
+                <a:latin typeface="Courier"/>
+              </a:rPr>
+              <a:t>mass_g</a:t>
+            </a:r>
+            <a:r>
+              <a:rPr/>
+              <a:t>, </a:t>
+            </a:r>
+            <a:r>
+              <a:rPr>
+                <a:latin typeface="Courier"/>
+              </a:rPr>
+              <a:t>petiole_mm</a:t>
+            </a:r>
+            <a:r>
+              <a:rPr/>
+              <a:t>, </a:t>
+            </a:r>
+            <a:r>
+              <a:rPr>
+                <a:latin typeface="Courier"/>
+              </a:rPr>
+              <a:t>thickness_mm</a:t>
+            </a:r>
+            <a:r>
+              <a:rPr/>
+              <a:t>, </a:t>
+            </a:r>
+            <a:r>
+              <a:rPr>
+                <a:latin typeface="Courier"/>
+              </a:rPr>
+              <a:t>paper_mass_g</a:t>
+            </a:r>
+            <a:r>
+              <a:rPr/>
+              <a:t>)</a:t>
             </a:r>
           </a:p>
         </p:txBody>
@@ -9080,13 +9067,13 @@
             </a:r>
             <a:r>
               <a:rPr sz="2000"/>
-              <a:t> We have 20 leaves. Before you run it, guess how many rows </a:t>
+              <a:t> We have 53 leaves. Before you run it, guess how many rows </a:t>
             </a:r>
             <a:r>
               <a:rPr sz="2000">
                 <a:latin typeface="Courier"/>
               </a:rPr>
-              <a:t>filter(side == "sunny")</a:t>
+              <a:t>filter(shade == "sunny")</a:t>
             </a:r>
             <a:r>
               <a:rPr sz="2000"/>
@@ -9163,7 +9150,7 @@
                 </a:solidFill>
                 <a:latin typeface="Courier"/>
               </a:rPr>
-              <a:t>tree_df </a:t>
+              <a:t>leaf_df </a:t>
             </a:r>
             <a:r>
               <a:rPr>
@@ -9199,7 +9186,7 @@
                 </a:solidFill>
                 <a:latin typeface="Courier"/>
               </a:rPr>
-              <a:t>(side </a:t>
+              <a:t>(shade </a:t>
             </a:r>
             <a:r>
               <a:rPr>
@@ -9282,15 +9269,15 @@
               <a:rPr>
                 <a:latin typeface="Courier"/>
               </a:rPr>
-              <a:t># A tibble: 6 × 5
-  index side  weight_g width_cm height_cm
-  &lt;dbl&gt; &lt;chr&gt;    &lt;dbl&gt;    &lt;dbl&gt;     &lt;dbl&gt;
-1     1 sunny        4       12        21
-2     2 sunny        3       14        22
-3     3 sunny        5       12        21
-4     4 sunny        3       13        23
-5     5 sunny        4       15        22
-6     6 sunny        3       13        23</a:t>
+              <a:t># A tibble: 6 × 8
+  twig_id leaf_id teams shade mass_g petiole_mm thickness_mm paper_mass_g
+  &lt;chr&gt;   &lt;chr&gt;   &lt;chr&gt; &lt;chr&gt;  &lt;dbl&gt;      &lt;dbl&gt;        &lt;dbl&gt;        &lt;dbl&gt;
+1 &lt;NA&gt;    &lt;NA&gt;    12345 sunny   0.4          79         0.15         0.21
+2 &lt;NA&gt;    &lt;NA&gt;    12345 sunny   0.48         63         0.14         0.21
+3 &lt;NA&gt;    &lt;NA&gt;    12345 sunny   0.34         68         0.14         0.21
+4 &lt;NA&gt;    &lt;NA&gt;    12345 sunny   0.65         35         0.15         0.24
+5 &lt;NA&gt;    &lt;NA&gt;    12345 sunny   0.27         34         0.11         0.15
+6 &lt;NA&gt;    &lt;NA&gt;    12345 sunny   0.43         40         0.16         0.34</a:t>
             </a:r>
           </a:p>
           <a:p>
@@ -9304,7 +9291,7 @@
                 </a:solidFill>
                 <a:latin typeface="Courier"/>
               </a:rPr>
-              <a:t># Keep only leaves heavier than 5 g</a:t>
+              <a:t># Keep only leaves heavier than 0.5 g</a:t>
             </a:r>
             <a:br/>
             <a:r>
@@ -9314,7 +9301,7 @@
                 </a:solidFill>
                 <a:latin typeface="Courier"/>
               </a:rPr>
-              <a:t>tree_df </a:t>
+              <a:t>leaf_df </a:t>
             </a:r>
             <a:r>
               <a:rPr>
@@ -9350,7 +9337,7 @@
                 </a:solidFill>
                 <a:latin typeface="Courier"/>
               </a:rPr>
-              <a:t>(weight_g </a:t>
+              <a:t>(mass_g </a:t>
             </a:r>
             <a:r>
               <a:rPr>
@@ -9377,7 +9364,7 @@
                 </a:solidFill>
                 <a:latin typeface="Courier"/>
               </a:rPr>
-              <a:t>5</a:t>
+              <a:t>0.5</a:t>
             </a:r>
             <a:r>
               <a:rPr>
@@ -9433,15 +9420,15 @@
               <a:rPr>
                 <a:latin typeface="Courier"/>
               </a:rPr>
-              <a:t># A tibble: 6 × 5
-  index side  weight_g width_cm height_cm
-  &lt;dbl&gt; &lt;chr&gt;    &lt;dbl&gt;    &lt;dbl&gt;     &lt;dbl&gt;
-1    11 shady        7        9        28
-2    12 shady        8       18        29
-3    13 shady        6       17        27
-4    14 shady        9       18        28
-5    15 shady        8       19        27
-6    16 shady        7       19        28</a:t>
+              <a:t># A tibble: 6 × 8
+  twig_id leaf_id teams        shade mass_g petiole_mm thickness_mm paper_mass_g
+  &lt;chr&gt;   &lt;chr&gt;   &lt;chr&gt;        &lt;chr&gt;  &lt;dbl&gt;      &lt;dbl&gt;        &lt;dbl&gt;        &lt;dbl&gt;
+1 &lt;NA&gt;    &lt;NA&gt;    12345        sunny  0.65      35             0.15        0.24 
+2 &lt;NA&gt;    &lt;NA&gt;    12345        shady  0.6       68             0.12        0.23 
+3 &lt;NA&gt;    &lt;NA&gt;    12345        shady  0.57      73             0.14        0.28 
+4 twig_1  l07     fighting_mo… shady  0.589     66             0.32        0.257
+5 twig_1  l08     fighting_mo… shady  0.511     51             0.25        0.249
+6 twig_2  l09     fighting_mo… shady  0.920      0.383        NA          NA    </a:t>
             </a:r>
           </a:p>
           <a:p>
@@ -9455,7 +9442,7 @@
                 </a:solidFill>
                 <a:latin typeface="Courier"/>
               </a:rPr>
-              <a:t># Combine two conditions with &amp; (AND)</a:t>
+              <a:t># Combine two conditions with , (AND)</a:t>
             </a:r>
             <a:br/>
             <a:r>
@@ -9465,7 +9452,7 @@
                 </a:solidFill>
                 <a:latin typeface="Courier"/>
               </a:rPr>
-              <a:t>tree_df </a:t>
+              <a:t>leaf_df </a:t>
             </a:r>
             <a:r>
               <a:rPr>
@@ -9501,7 +9488,7 @@
                 </a:solidFill>
                 <a:latin typeface="Courier"/>
               </a:rPr>
-              <a:t>(side </a:t>
+              <a:t>(shade </a:t>
             </a:r>
             <a:r>
               <a:rPr>
@@ -9537,7 +9524,7 @@
                 </a:solidFill>
                 <a:latin typeface="Courier"/>
               </a:rPr>
-              <a:t>, weight_g </a:t>
+              <a:t>, mass_g </a:t>
             </a:r>
             <a:r>
               <a:rPr>
@@ -9564,7 +9551,7 @@
                 </a:solidFill>
                 <a:latin typeface="Courier"/>
               </a:rPr>
-              <a:t>7</a:t>
+              <a:t>0.5</a:t>
             </a:r>
             <a:r>
               <a:rPr>
@@ -9620,15 +9607,15 @@
               <a:rPr>
                 <a:latin typeface="Courier"/>
               </a:rPr>
-              <a:t># A tibble: 6 × 5
-  index side  weight_g width_cm height_cm
-  &lt;dbl&gt; &lt;chr&gt;    &lt;dbl&gt;    &lt;dbl&gt;     &lt;dbl&gt;
-1    12 shady        8       18        29
-2    14 shady        9       18        28
-3    15 shady        8       19        27
-4    17 shady        8       18        29
-5    18 shady        9       17        27
-6    19 shady        9       19        27</a:t>
+              <a:t># A tibble: 6 × 8
+  twig_id leaf_id teams        shade mass_g petiole_mm thickness_mm paper_mass_g
+  &lt;chr&gt;   &lt;chr&gt;   &lt;chr&gt;        &lt;chr&gt;  &lt;dbl&gt;      &lt;dbl&gt;        &lt;dbl&gt;        &lt;dbl&gt;
+1 &lt;NA&gt;    &lt;NA&gt;    12345        shady  0.6       68             0.12        0.23 
+2 &lt;NA&gt;    &lt;NA&gt;    12345        shady  0.57      73             0.14        0.28 
+3 twig_1  l07     fighting_mo… shady  0.589     66             0.32        0.257
+4 twig_1  l08     fighting_mo… shady  0.511     51             0.25        0.249
+5 twig_2  l09     fighting_mo… shady  0.920      0.383        NA          NA    
+6 twig_2  l10     fighting_mo… shady  0.782     67             0.27        0.342</a:t>
             </a:r>
           </a:p>
         </p:txBody>
@@ -10008,7 +9995,7 @@
               <a:rPr sz="2000">
                 <a:latin typeface="Courier"/>
               </a:rPr>
-              <a:t>filter(side = "sunny")</a:t>
+              <a:t>filter(shade = "sunny")</a:t>
             </a:r>
             <a:r>
               <a:rPr sz="2000"/>
@@ -10021,7 +10008,7 @@
               <a:rPr sz="2000">
                 <a:latin typeface="Courier"/>
               </a:rPr>
-              <a:t>filter(side == "sunny")</a:t>
+              <a:t>filter(shade == "sunny")</a:t>
             </a:r>
             <a:r>
               <a:rPr sz="2000"/>

--- a/docs/content/wrangling/wrangling_lecture.pptx
+++ b/docs/content/wrangling/wrangling_lecture.pptx
@@ -3356,7 +3356,7 @@
             </a:pPr>
             <a:r>
               <a:rPr/>
-              <a:t>2026-09-08</a:t>
+              <a:t>2026-09-10</a:t>
             </a:r>
           </a:p>
         </p:txBody>

--- a/docs/content/wrangling/wrangling_lecture.pptx
+++ b/docs/content/wrangling/wrangling_lecture.pptx
@@ -3356,7 +3356,7 @@
             </a:pPr>
             <a:r>
               <a:rPr/>
-              <a:t>2026-09-10</a:t>
+              <a:t>2026-09-14</a:t>
             </a:r>
           </a:p>
         </p:txBody>

--- a/docs/content/wrangling/wrangling_lecture.pptx
+++ b/docs/content/wrangling/wrangling_lecture.pptx
@@ -3356,7 +3356,7 @@
             </a:pPr>
             <a:r>
               <a:rPr/>
-              <a:t>2026-09-14</a:t>
+              <a:t>2026-09-21</a:t>
             </a:r>
           </a:p>
         </p:txBody>

--- a/docs/content/wrangling/wrangling_lecture.pptx
+++ b/docs/content/wrangling/wrangling_lecture.pptx
@@ -3356,7 +3356,7 @@
             </a:pPr>
             <a:r>
               <a:rPr/>
-              <a:t>2026-09-21</a:t>
+              <a:t>2026-09-22</a:t>
             </a:r>
           </a:p>
         </p:txBody>

--- a/docs/content/wrangling/wrangling_lecture.pptx
+++ b/docs/content/wrangling/wrangling_lecture.pptx
@@ -3356,7 +3356,7 @@
             </a:pPr>
             <a:r>
               <a:rPr/>
-              <a:t>2026-09-22</a:t>
+              <a:t>2026-09-23</a:t>
             </a:r>
           </a:p>
         </p:txBody>

--- a/docs/content/wrangling/wrangling_lecture.pptx
+++ b/docs/content/wrangling/wrangling_lecture.pptx
@@ -4719,15 +4719,15 @@
                 <a:latin typeface="Courier"/>
               </a:rPr>
               <a:t># A tibble: 6 × 9
-  twig_id leaf_id teams shade mass_g petiole_mm thickness_mm paper_mass_g
-  &lt;chr&gt;   &lt;chr&gt;   &lt;chr&gt; &lt;chr&gt;  &lt;dbl&gt;      &lt;dbl&gt;        &lt;dbl&gt;        &lt;dbl&gt;
-1 &lt;NA&gt;    &lt;NA&gt;    12345 sunny   0.4          79         0.15         0.21
-2 &lt;NA&gt;    &lt;NA&gt;    12345 sunny   0.48         63         0.14         0.21
-3 &lt;NA&gt;    &lt;NA&gt;    12345 sunny   0.34         68         0.14         0.21
-4 &lt;NA&gt;    &lt;NA&gt;    12345 sunny   0.65         35         0.15         0.24
-5 &lt;NA&gt;    &lt;NA&gt;    12345 sunny   0.27         34         0.11         0.15
-6 &lt;NA&gt;    &lt;NA&gt;    12345 sunny   0.43         40         0.16         0.34
-# ℹ 1 more variable: mass_mg &lt;dbl&gt;</a:t>
+  twig_id leaf_id teams shade mass_g petiole_mm thickness_mm
+  &lt;chr&gt;   &lt;chr&gt;   &lt;chr&gt; &lt;chr&gt;  &lt;dbl&gt;      &lt;dbl&gt;        &lt;dbl&gt;
+1 &lt;NA&gt;    &lt;NA&gt;    12345 sunny   0.4          79         0.15
+2 &lt;NA&gt;    &lt;NA&gt;    12345 sunny   0.48         63         0.14
+3 &lt;NA&gt;    &lt;NA&gt;    12345 sunny   0.34         68         0.14
+4 &lt;NA&gt;    &lt;NA&gt;    12345 sunny   0.65         35         0.15
+5 &lt;NA&gt;    &lt;NA&gt;    12345 sunny   0.27         34         0.11
+6 &lt;NA&gt;    &lt;NA&gt;    12345 sunny   0.43         40         0.16
+# ℹ 2 more variables: paper_mass_g &lt;dbl&gt;, mass_mg &lt;dbl&gt;</a:t>
             </a:r>
           </a:p>
           <a:p>
@@ -4878,7 +4878,17 @@
                 </a:solidFill>
                 <a:latin typeface="Courier"/>
               </a:rPr>
-              <a:t>, </a:t>
+              <a:t>,</a:t>
+            </a:r>
+            <a:br/>
+            <a:r>
+              <a:rPr>
+                <a:solidFill>
+                  <a:srgbClr val="003B4F"/>
+                </a:solidFill>
+                <a:latin typeface="Courier"/>
+              </a:rPr>
+              <a:t>                              </a:t>
             </a:r>
             <a:r>
               <a:rPr>
@@ -4945,15 +4955,15 @@
                 <a:latin typeface="Courier"/>
               </a:rPr>
               <a:t># A tibble: 6 × 9
-  twig_id leaf_id teams shade mass_g petiole_mm thickness_mm paper_mass_g
-  &lt;chr&gt;   &lt;chr&gt;   &lt;chr&gt; &lt;chr&gt;  &lt;dbl&gt;      &lt;dbl&gt;        &lt;dbl&gt;        &lt;dbl&gt;
-1 &lt;NA&gt;    &lt;NA&gt;    12345 sunny   0.4          79         0.15         0.21
-2 &lt;NA&gt;    &lt;NA&gt;    12345 sunny   0.48         63         0.14         0.21
-3 &lt;NA&gt;    &lt;NA&gt;    12345 sunny   0.34         68         0.14         0.21
-4 &lt;NA&gt;    &lt;NA&gt;    12345 sunny   0.65         35         0.15         0.24
-5 &lt;NA&gt;    &lt;NA&gt;    12345 sunny   0.27         34         0.11         0.15
-6 &lt;NA&gt;    &lt;NA&gt;    12345 sunny   0.43         40         0.16         0.34
-# ℹ 1 more variable: size_class &lt;chr&gt;</a:t>
+  twig_id leaf_id teams shade mass_g petiole_mm thickness_mm
+  &lt;chr&gt;   &lt;chr&gt;   &lt;chr&gt; &lt;chr&gt;  &lt;dbl&gt;      &lt;dbl&gt;        &lt;dbl&gt;
+1 &lt;NA&gt;    &lt;NA&gt;    12345 sunny   0.4          79         0.15
+2 &lt;NA&gt;    &lt;NA&gt;    12345 sunny   0.48         63         0.14
+3 &lt;NA&gt;    &lt;NA&gt;    12345 sunny   0.34         68         0.14
+4 &lt;NA&gt;    &lt;NA&gt;    12345 sunny   0.65         35         0.15
+5 &lt;NA&gt;    &lt;NA&gt;    12345 sunny   0.27         34         0.11
+6 &lt;NA&gt;    &lt;NA&gt;    12345 sunny   0.43         40         0.16
+# ℹ 2 more variables: paper_mass_g &lt;dbl&gt;, size_class &lt;chr&gt;</a:t>
             </a:r>
           </a:p>
           <a:p>
@@ -5210,15 +5220,16 @@
                 <a:latin typeface="Courier"/>
               </a:rPr>
               <a:t># A tibble: 6 × 10
-  twig_id leaf_id teams shade mass_g petiole_mm thickness_mm paper_mass_g
-  &lt;chr&gt;   &lt;chr&gt;   &lt;chr&gt; &lt;chr&gt;  &lt;dbl&gt;      &lt;dbl&gt;        &lt;dbl&gt;        &lt;dbl&gt;
-1 &lt;NA&gt;    &lt;NA&gt;    12345 sunny   0.4          79         0.15         0.21
-2 &lt;NA&gt;    &lt;NA&gt;    12345 sunny   0.48         63         0.14         0.21
-3 &lt;NA&gt;    &lt;NA&gt;    12345 sunny   0.34         68         0.14         0.21
-4 &lt;NA&gt;    &lt;NA&gt;    12345 sunny   0.65         35         0.15         0.24
-5 &lt;NA&gt;    &lt;NA&gt;    12345 sunny   0.27         34         0.11         0.15
-6 &lt;NA&gt;    &lt;NA&gt;    12345 sunny   0.43         40         0.16         0.34
-# ℹ 2 more variables: mass_mg &lt;dbl&gt;, petiole_cm &lt;dbl&gt;</a:t>
+  twig_id leaf_id teams shade mass_g petiole_mm thickness_mm
+  &lt;chr&gt;   &lt;chr&gt;   &lt;chr&gt; &lt;chr&gt;  &lt;dbl&gt;      &lt;dbl&gt;        &lt;dbl&gt;
+1 &lt;NA&gt;    &lt;NA&gt;    12345 sunny   0.4          79         0.15
+2 &lt;NA&gt;    &lt;NA&gt;    12345 sunny   0.48         63         0.14
+3 &lt;NA&gt;    &lt;NA&gt;    12345 sunny   0.34         68         0.14
+4 &lt;NA&gt;    &lt;NA&gt;    12345 sunny   0.65         35         0.15
+5 &lt;NA&gt;    &lt;NA&gt;    12345 sunny   0.27         34         0.11
+6 &lt;NA&gt;    &lt;NA&gt;    12345 sunny   0.43         40         0.16
+# ℹ 3 more variables: paper_mass_g &lt;dbl&gt;, mass_mg &lt;dbl&gt;,
+#   petiole_cm &lt;dbl&gt;</a:t>
             </a:r>
           </a:p>
         </p:txBody>
@@ -5505,19 +5516,20 @@
                 <a:latin typeface="Courier"/>
               </a:rPr>
               <a:t># A tibble: 53 × 8
-   twig_id leaf_id teams       shade mass_g petiole_mm thickness_mm paper_mass_g
-   &lt;chr&gt;   &lt;chr&gt;   &lt;chr&gt;       &lt;chr&gt;  &lt;dbl&gt;      &lt;dbl&gt;        &lt;dbl&gt;        &lt;dbl&gt;
- 1 twig_6  l06     fighting_m… sunny  0.193       29           0.13        0.113
- 2 &lt;NA&gt;    4       Oscar_Karl  sunny  0.230       35.7         0.36       NA    
- 3 &lt;NA&gt;    &lt;NA&gt;    12345       sunny  0.27        34           0.11        0.15 
- 4 &lt;NA&gt;    6       Oscar_Karl  sunny  0.282       46.9         0.4        NA    
- 5 &lt;NA&gt;    5       Oscar_Karl  sunny  0.304       51.3         0.43       NA    
- 6 &lt;NA&gt;    &lt;NA&gt;    12345       sunny  0.34        68           0.14        0.21 
- 7 &lt;NA&gt;    &lt;NA&gt;    12345       shady  0.34        58           0.15        0.23 
- 8 &lt;NA&gt;    &lt;NA&gt;    12345       shady  0.34        45           0.13        0.27 
- 9 &lt;NA&gt;    &lt;NA&gt;    leaf_oglers shady  0.344       48.3         0.67        0.196
-10 &lt;NA&gt;    5       Oscar_Karl  shady  0.344       37.0         0.25       NA    
-# ℹ 43 more rows</a:t>
+   twig_id leaf_id teams     shade mass_g petiole_mm thickness_mm
+   &lt;chr&gt;   &lt;chr&gt;   &lt;chr&gt;     &lt;chr&gt;  &lt;dbl&gt;      &lt;dbl&gt;        &lt;dbl&gt;
+ 1 twig_6  l06     fighting… sunny  0.193       29           0.13
+ 2 &lt;NA&gt;    4       Oscar_Ka… sunny  0.230       35.7         0.36
+ 3 &lt;NA&gt;    &lt;NA&gt;    12345     sunny  0.27        34           0.11
+ 4 &lt;NA&gt;    6       Oscar_Ka… sunny  0.282       46.9         0.4 
+ 5 &lt;NA&gt;    5       Oscar_Ka… sunny  0.304       51.3         0.43
+ 6 &lt;NA&gt;    &lt;NA&gt;    12345     sunny  0.34        68           0.14
+ 7 &lt;NA&gt;    &lt;NA&gt;    12345     shady  0.34        58           0.15
+ 8 &lt;NA&gt;    &lt;NA&gt;    12345     shady  0.34        45           0.13
+ 9 &lt;NA&gt;    &lt;NA&gt;    leaf_ogl… shady  0.344       48.3         0.67
+10 &lt;NA&gt;    5       Oscar_Ka… shady  0.344       37.0         0.25
+# ℹ 43 more rows
+# ℹ 1 more variable: paper_mass_g &lt;dbl&gt;</a:t>
             </a:r>
           </a:p>
           <a:p>
@@ -5607,19 +5619,20 @@
                 <a:latin typeface="Courier"/>
               </a:rPr>
               <a:t># A tibble: 53 × 8
-   twig_id leaf_id teams       shade mass_g petiole_mm thickness_mm paper_mass_g
-   &lt;chr&gt;   &lt;chr&gt;   &lt;chr&gt;       &lt;chr&gt;  &lt;dbl&gt;      &lt;dbl&gt;        &lt;dbl&gt;        &lt;dbl&gt;
- 1 &lt;NA&gt;    &lt;NA&gt;    still_load… sunny  1.08      84             0.68        0.420
- 2 twig_2  l09     fighting_m… shady  0.920      0.383        NA          NA    
- 3 &lt;NA&gt;    &lt;NA&gt;    leaf_oglers shady  0.8       41.2           0.5         0.3  
- 4 &lt;NA&gt;    &lt;NA&gt;    leaf_oglers sunny  0.791     53.9           0.23        0.332
- 5 twig_2  l10     fighting_m… shady  0.782     67             0.27        0.342
- 6 twig_5  l04     fighting_m… sunny  0.76      79             0.16        0.312
- 7 twig_4  l01     fighting_m… sunny  0.737     75             0.24        0.303
- 8 &lt;NA&gt;    &lt;NA&gt;    leaf_oglers sunny  0.688     45.3           0.19        0.372
- 9 &lt;NA&gt;    &lt;NA&gt;    leaf_oglers shady  0.68      61.2           0.47        0.32 
-10 &lt;NA&gt;    &lt;NA&gt;    still_load… sunny  0.665     64             0.69        0.427
-# ℹ 43 more rows</a:t>
+   twig_id leaf_id teams     shade mass_g petiole_mm thickness_mm
+   &lt;chr&gt;   &lt;chr&gt;   &lt;chr&gt;     &lt;chr&gt;  &lt;dbl&gt;      &lt;dbl&gt;        &lt;dbl&gt;
+ 1 &lt;NA&gt;    &lt;NA&gt;    still_lo… sunny  1.08      84             0.68
+ 2 twig_2  l09     fighting… shady  0.920      0.383        NA   
+ 3 &lt;NA&gt;    &lt;NA&gt;    leaf_ogl… shady  0.8       41.2           0.5 
+ 4 &lt;NA&gt;    &lt;NA&gt;    leaf_ogl… sunny  0.791     53.9           0.23
+ 5 twig_2  l10     fighting… shady  0.782     67             0.27
+ 6 twig_5  l04     fighting… sunny  0.76      79             0.16
+ 7 twig_4  l01     fighting… sunny  0.737     75             0.24
+ 8 &lt;NA&gt;    &lt;NA&gt;    leaf_ogl… sunny  0.688     45.3           0.19
+ 9 &lt;NA&gt;    &lt;NA&gt;    leaf_ogl… shady  0.68      61.2           0.47
+10 &lt;NA&gt;    &lt;NA&gt;    still_lo… sunny  0.665     64             0.69
+# ℹ 43 more rows
+# ℹ 1 more variable: paper_mass_g &lt;dbl&gt;</a:t>
             </a:r>
           </a:p>
           <a:p>
@@ -5709,19 +5722,20 @@
                 <a:latin typeface="Courier"/>
               </a:rPr>
               <a:t># A tibble: 53 × 8
-   twig_id leaf_id teams       shade mass_g petiole_mm thickness_mm paper_mass_g
-   &lt;chr&gt;   &lt;chr&gt;   &lt;chr&gt;       &lt;chr&gt;  &lt;dbl&gt;      &lt;dbl&gt;        &lt;dbl&gt;        &lt;dbl&gt;
- 1 twig_2  l09     fighting_m… shady  0.920      0.383        NA          NA    
- 2 &lt;NA&gt;    &lt;NA&gt;    leaf_oglers shady  0.8       41.2           0.5         0.3  
- 3 twig_2  l10     fighting_m… shady  0.782     67             0.27        0.342
- 4 &lt;NA&gt;    &lt;NA&gt;    leaf_oglers shady  0.68      61.2           0.47        0.32 
- 5 &lt;NA&gt;    &lt;NA&gt;    leaf_oglers shady  0.61      59.4           0.23        0.25 
- 6 &lt;NA&gt;    &lt;NA&gt;    still_load… shady  0.607     82             0.32        0.301
- 7 &lt;NA&gt;    &lt;NA&gt;    12345       shady  0.6       68             0.12        0.23 
- 8 twig_1  l07     fighting_m… shady  0.589     66             0.32        0.257
- 9 twig_3  l11     fighting_m… shady  0.585     68             0.41        0.26 
-10 &lt;NA&gt;    &lt;NA&gt;    12345       shady  0.57      73             0.14        0.28 
-# ℹ 43 more rows</a:t>
+   twig_id leaf_id teams     shade mass_g petiole_mm thickness_mm
+   &lt;chr&gt;   &lt;chr&gt;   &lt;chr&gt;     &lt;chr&gt;  &lt;dbl&gt;      &lt;dbl&gt;        &lt;dbl&gt;
+ 1 twig_2  l09     fighting… shady  0.920      0.383        NA   
+ 2 &lt;NA&gt;    &lt;NA&gt;    leaf_ogl… shady  0.8       41.2           0.5 
+ 3 twig_2  l10     fighting… shady  0.782     67             0.27
+ 4 &lt;NA&gt;    &lt;NA&gt;    leaf_ogl… shady  0.68      61.2           0.47
+ 5 &lt;NA&gt;    &lt;NA&gt;    leaf_ogl… shady  0.61      59.4           0.23
+ 6 &lt;NA&gt;    &lt;NA&gt;    still_lo… shady  0.607     82             0.32
+ 7 &lt;NA&gt;    &lt;NA&gt;    12345     shady  0.6       68             0.12
+ 8 twig_1  l07     fighting… shady  0.589     66             0.32
+ 9 twig_3  l11     fighting… shady  0.585     68             0.41
+10 &lt;NA&gt;    &lt;NA&gt;    12345     shady  0.57      73             0.14
+# ℹ 43 more rows
+# ℹ 1 more variable: paper_mass_g &lt;dbl&gt;</a:t>
             </a:r>
           </a:p>
         </p:txBody>
@@ -8177,7 +8191,17 @@
                 </a:solidFill>
                 <a:latin typeface="Courier"/>
               </a:rPr>
-              <a:t>leaf_df &lt;- </a:t>
+              <a:t>leaf_df &lt;-</a:t>
+            </a:r>
+            <a:br/>
+            <a:r>
+              <a:rPr>
+                <a:solidFill>
+                  <a:srgbClr val="003B4F"/>
+                </a:solidFill>
+                <a:latin typeface="Courier"/>
+              </a:rPr>
+              <a:t>  </a:t>
             </a:r>
             <a:r>
               <a:rPr>
@@ -8364,14 +8388,14 @@
               </a:rPr>
               <a:t>Rows: 53
 Columns: 8
-$ twig_id      &lt;chr&gt; NA, NA, NA, NA, NA, NA, NA, NA, NA, NA, NA, NA, "twig_1",…
-$ leaf_id      &lt;chr&gt; NA, NA, NA, NA, NA, NA, NA, NA, NA, NA, NA, NA, "l07", "l…
-$ teams        &lt;chr&gt; "12345", "12345", "12345", "12345", "12345", "12345", "12…
-$ shade        &lt;chr&gt; "sunny", "sunny", "sunny", "sunny", "sunny", "sunny", "sh…
-$ mass_g       &lt;dbl&gt; 0.4000, 0.4800, 0.3400, 0.6500, 0.2700, 0.4300, 0.3900, 0…
-$ petiole_mm   &lt;dbl&gt; 79.0000, 63.0000, 68.0000, 35.0000, 34.0000, 40.0000, 40.…
-$ thickness_mm &lt;dbl&gt; 0.15, 0.14, 0.14, 0.15, 0.11, 0.16, 0.14, 0.15, 0.12, 0.1…
-$ paper_mass_g &lt;dbl&gt; 0.2100, 0.2100, 0.2100, 0.2400, 0.1500, 0.3400, 0.2900, 0…</a:t>
+$ twig_id      &lt;chr&gt; NA, NA, NA, NA, NA, NA, NA, NA, NA, NA, NA…
+$ leaf_id      &lt;chr&gt; NA, NA, NA, NA, NA, NA, NA, NA, NA, NA, NA…
+$ teams        &lt;chr&gt; "12345", "12345", "12345", "12345", "12345…
+$ shade        &lt;chr&gt; "sunny", "sunny", "sunny", "sunny", "sunny…
+$ mass_g       &lt;dbl&gt; 0.4000, 0.4800, 0.3400, 0.6500, 0.2700, 0.…
+$ petiole_mm   &lt;dbl&gt; 79.0000, 63.0000, 68.0000, 35.0000, 34.000…
+$ thickness_mm &lt;dbl&gt; 0.15, 0.14, 0.14, 0.15, 0.11, 0.16, 0.14, …
+$ paper_mass_g &lt;dbl&gt; 0.2100, 0.2100, 0.2100, 0.2400, 0.1500, 0.…</a:t>
             </a:r>
           </a:p>
           <a:p>
@@ -9270,14 +9294,15 @@
                 <a:latin typeface="Courier"/>
               </a:rPr>
               <a:t># A tibble: 6 × 8
-  twig_id leaf_id teams shade mass_g petiole_mm thickness_mm paper_mass_g
-  &lt;chr&gt;   &lt;chr&gt;   &lt;chr&gt; &lt;chr&gt;  &lt;dbl&gt;      &lt;dbl&gt;        &lt;dbl&gt;        &lt;dbl&gt;
-1 &lt;NA&gt;    &lt;NA&gt;    12345 sunny   0.4          79         0.15         0.21
-2 &lt;NA&gt;    &lt;NA&gt;    12345 sunny   0.48         63         0.14         0.21
-3 &lt;NA&gt;    &lt;NA&gt;    12345 sunny   0.34         68         0.14         0.21
-4 &lt;NA&gt;    &lt;NA&gt;    12345 sunny   0.65         35         0.15         0.24
-5 &lt;NA&gt;    &lt;NA&gt;    12345 sunny   0.27         34         0.11         0.15
-6 &lt;NA&gt;    &lt;NA&gt;    12345 sunny   0.43         40         0.16         0.34</a:t>
+  twig_id leaf_id teams shade mass_g petiole_mm thickness_mm
+  &lt;chr&gt;   &lt;chr&gt;   &lt;chr&gt; &lt;chr&gt;  &lt;dbl&gt;      &lt;dbl&gt;        &lt;dbl&gt;
+1 &lt;NA&gt;    &lt;NA&gt;    12345 sunny   0.4          79         0.15
+2 &lt;NA&gt;    &lt;NA&gt;    12345 sunny   0.48         63         0.14
+3 &lt;NA&gt;    &lt;NA&gt;    12345 sunny   0.34         68         0.14
+4 &lt;NA&gt;    &lt;NA&gt;    12345 sunny   0.65         35         0.15
+5 &lt;NA&gt;    &lt;NA&gt;    12345 sunny   0.27         34         0.11
+6 &lt;NA&gt;    &lt;NA&gt;    12345 sunny   0.43         40         0.16
+# ℹ 1 more variable: paper_mass_g &lt;dbl&gt;</a:t>
             </a:r>
           </a:p>
           <a:p>
@@ -9421,14 +9446,15 @@
                 <a:latin typeface="Courier"/>
               </a:rPr>
               <a:t># A tibble: 6 × 8
-  twig_id leaf_id teams        shade mass_g petiole_mm thickness_mm paper_mass_g
-  &lt;chr&gt;   &lt;chr&gt;   &lt;chr&gt;        &lt;chr&gt;  &lt;dbl&gt;      &lt;dbl&gt;        &lt;dbl&gt;        &lt;dbl&gt;
-1 &lt;NA&gt;    &lt;NA&gt;    12345        sunny  0.65      35             0.15        0.24 
-2 &lt;NA&gt;    &lt;NA&gt;    12345        shady  0.6       68             0.12        0.23 
-3 &lt;NA&gt;    &lt;NA&gt;    12345        shady  0.57      73             0.14        0.28 
-4 twig_1  l07     fighting_mo… shady  0.589     66             0.32        0.257
-5 twig_1  l08     fighting_mo… shady  0.511     51             0.25        0.249
-6 twig_2  l09     fighting_mo… shady  0.920      0.383        NA          NA    </a:t>
+  twig_id leaf_id teams      shade mass_g petiole_mm thickness_mm
+  &lt;chr&gt;   &lt;chr&gt;   &lt;chr&gt;      &lt;chr&gt;  &lt;dbl&gt;      &lt;dbl&gt;        &lt;dbl&gt;
+1 &lt;NA&gt;    &lt;NA&gt;    12345      sunny  0.65      35             0.15
+2 &lt;NA&gt;    &lt;NA&gt;    12345      shady  0.6       68             0.12
+3 &lt;NA&gt;    &lt;NA&gt;    12345      shady  0.57      73             0.14
+4 twig_1  l07     fighting_… shady  0.589     66             0.32
+5 twig_1  l08     fighting_… shady  0.511     51             0.25
+6 twig_2  l09     fighting_… shady  0.920      0.383        NA   
+# ℹ 1 more variable: paper_mass_g &lt;dbl&gt;</a:t>
             </a:r>
           </a:p>
           <a:p>
@@ -9608,14 +9634,15 @@
                 <a:latin typeface="Courier"/>
               </a:rPr>
               <a:t># A tibble: 6 × 8
-  twig_id leaf_id teams        shade mass_g petiole_mm thickness_mm paper_mass_g
-  &lt;chr&gt;   &lt;chr&gt;   &lt;chr&gt;        &lt;chr&gt;  &lt;dbl&gt;      &lt;dbl&gt;        &lt;dbl&gt;        &lt;dbl&gt;
-1 &lt;NA&gt;    &lt;NA&gt;    12345        shady  0.6       68             0.12        0.23 
-2 &lt;NA&gt;    &lt;NA&gt;    12345        shady  0.57      73             0.14        0.28 
-3 twig_1  l07     fighting_mo… shady  0.589     66             0.32        0.257
-4 twig_1  l08     fighting_mo… shady  0.511     51             0.25        0.249
-5 twig_2  l09     fighting_mo… shady  0.920      0.383        NA          NA    
-6 twig_2  l10     fighting_mo… shady  0.782     67             0.27        0.342</a:t>
+  twig_id leaf_id teams      shade mass_g petiole_mm thickness_mm
+  &lt;chr&gt;   &lt;chr&gt;   &lt;chr&gt;      &lt;chr&gt;  &lt;dbl&gt;      &lt;dbl&gt;        &lt;dbl&gt;
+1 &lt;NA&gt;    &lt;NA&gt;    12345      shady  0.6       68             0.12
+2 &lt;NA&gt;    &lt;NA&gt;    12345      shady  0.57      73             0.14
+3 twig_1  l07     fighting_… shady  0.589     66             0.32
+4 twig_1  l08     fighting_… shady  0.511     51             0.25
+5 twig_2  l09     fighting_… shady  0.920      0.383        NA   
+6 twig_2  l10     fighting_… shady  0.782     67             0.27
+# ℹ 1 more variable: paper_mass_g &lt;dbl&gt;</a:t>
             </a:r>
           </a:p>
         </p:txBody>

--- a/docs/content/wrangling/wrangling_lecture.pptx
+++ b/docs/content/wrangling/wrangling_lecture.pptx
@@ -3356,7 +3356,7 @@
             </a:pPr>
             <a:r>
               <a:rPr/>
-              <a:t>2026-09-23</a:t>
+              <a:t>2026-09-24</a:t>
             </a:r>
           </a:p>
         </p:txBody>

--- a/docs/content/wrangling/wrangling_lecture.pptx
+++ b/docs/content/wrangling/wrangling_lecture.pptx
@@ -3356,7 +3356,7 @@
             </a:pPr>
             <a:r>
               <a:rPr/>
-              <a:t>2026-09-24</a:t>
+              <a:t>2026-09-29</a:t>
             </a:r>
           </a:p>
         </p:txBody>

--- a/docs/content/wrangling/wrangling_lecture.pptx
+++ b/docs/content/wrangling/wrangling_lecture.pptx
@@ -3356,7 +3356,7 @@
             </a:pPr>
             <a:r>
               <a:rPr/>
-              <a:t>2026-09-29</a:t>
+              <a:t>2026-10-01</a:t>
             </a:r>
           </a:p>
         </p:txBody>

--- a/docs/content/wrangling/wrangling_lecture.pptx
+++ b/docs/content/wrangling/wrangling_lecture.pptx
@@ -22,6 +22,9 @@
     <p:sldId id="270" r:id="rId16"/>
     <p:sldId id="271" r:id="rId17"/>
     <p:sldId id="272" r:id="rId18"/>
+    <p:sldId id="273" r:id="rId19"/>
+    <p:sldId id="274" r:id="rId20"/>
+    <p:sldId id="275" r:id="rId21"/>
   </p:sldIdLst>
   <p:sldSz cx="9144000" cy="5143500" type="screen16x9"/>
   <p:notesSz cx="6858000" cy="9144000"/>
@@ -3356,7 +3359,7 @@
             </a:pPr>
             <a:r>
               <a:rPr/>
-              <a:t>2026-10-01</a:t>
+              <a:t>2026-10-05</a:t>
             </a:r>
           </a:p>
         </p:txBody>
@@ -3410,8 +3413,14 @@
               <a:buNone/>
             </a:pPr>
             <a:r>
-              <a:rPr/>
-              <a:t>Live Demo — Watch It Break (on purpose)</a:t>
+              <a:rPr>
+                <a:latin typeface="Courier"/>
+              </a:rPr>
+              <a:t>filter()</a:t>
+            </a:r>
+            <a:r>
+              <a:rPr/>
+              <a:t> — Numbers and Two Conditions</a:t>
             </a:r>
           </a:p>
         </p:txBody>
@@ -3431,20 +3440,153 @@
           <a:bodyPr/>
           <a:lstStyle/>
           <a:p>
-            <a:pPr lvl="0" indent="0" marL="0">
+            <a:pPr lvl="0" indent="0">
               <a:buNone/>
             </a:pPr>
             <a:r>
-              <a:rPr/>
-              <a:t>I will type this </a:t>
-            </a:r>
-            <a:r>
-              <a:rPr b="1"/>
-              <a:t>wrong</a:t>
-            </a:r>
-            <a:r>
-              <a:rPr/>
-              <a:t> on purpose:</a:t>
+              <a:rPr>
+                <a:solidFill>
+                  <a:srgbClr val="5E5E5E"/>
+                </a:solidFill>
+                <a:latin typeface="Courier"/>
+              </a:rPr>
+              <a:t># Keep only leaves heavier than 0.5 g</a:t>
+            </a:r>
+            <a:br/>
+            <a:r>
+              <a:rPr>
+                <a:solidFill>
+                  <a:srgbClr val="003B4F"/>
+                </a:solidFill>
+                <a:latin typeface="Courier"/>
+              </a:rPr>
+              <a:t>leaf_df </a:t>
+            </a:r>
+            <a:r>
+              <a:rPr>
+                <a:solidFill>
+                  <a:srgbClr val="5E5E5E"/>
+                </a:solidFill>
+                <a:latin typeface="Courier"/>
+              </a:rPr>
+              <a:t>%&gt;%</a:t>
+            </a:r>
+            <a:r>
+              <a:rPr>
+                <a:solidFill>
+                  <a:srgbClr val="003B4F"/>
+                </a:solidFill>
+                <a:latin typeface="Courier"/>
+              </a:rPr>
+              <a:t> </a:t>
+            </a:r>
+            <a:r>
+              <a:rPr>
+                <a:solidFill>
+                  <a:srgbClr val="4758AB"/>
+                </a:solidFill>
+                <a:latin typeface="Courier"/>
+              </a:rPr>
+              <a:t>filter</a:t>
+            </a:r>
+            <a:r>
+              <a:rPr>
+                <a:solidFill>
+                  <a:srgbClr val="003B4F"/>
+                </a:solidFill>
+                <a:latin typeface="Courier"/>
+              </a:rPr>
+              <a:t>(mass_g </a:t>
+            </a:r>
+            <a:r>
+              <a:rPr>
+                <a:solidFill>
+                  <a:srgbClr val="5E5E5E"/>
+                </a:solidFill>
+                <a:latin typeface="Courier"/>
+              </a:rPr>
+              <a:t>&gt;</a:t>
+            </a:r>
+            <a:r>
+              <a:rPr>
+                <a:solidFill>
+                  <a:srgbClr val="003B4F"/>
+                </a:solidFill>
+                <a:latin typeface="Courier"/>
+              </a:rPr>
+              <a:t> </a:t>
+            </a:r>
+            <a:r>
+              <a:rPr>
+                <a:solidFill>
+                  <a:srgbClr val="AD0000"/>
+                </a:solidFill>
+                <a:latin typeface="Courier"/>
+              </a:rPr>
+              <a:t>0.5</a:t>
+            </a:r>
+            <a:r>
+              <a:rPr>
+                <a:solidFill>
+                  <a:srgbClr val="003B4F"/>
+                </a:solidFill>
+                <a:latin typeface="Courier"/>
+              </a:rPr>
+              <a:t>) </a:t>
+            </a:r>
+            <a:r>
+              <a:rPr>
+                <a:solidFill>
+                  <a:srgbClr val="5E5E5E"/>
+                </a:solidFill>
+                <a:latin typeface="Courier"/>
+              </a:rPr>
+              <a:t>%&gt;%</a:t>
+            </a:r>
+            <a:r>
+              <a:rPr>
+                <a:solidFill>
+                  <a:srgbClr val="003B4F"/>
+                </a:solidFill>
+                <a:latin typeface="Courier"/>
+              </a:rPr>
+              <a:t> </a:t>
+            </a:r>
+            <a:r>
+              <a:rPr>
+                <a:solidFill>
+                  <a:srgbClr val="4758AB"/>
+                </a:solidFill>
+                <a:latin typeface="Courier"/>
+              </a:rPr>
+              <a:t>head</a:t>
+            </a:r>
+            <a:r>
+              <a:rPr>
+                <a:solidFill>
+                  <a:srgbClr val="003B4F"/>
+                </a:solidFill>
+                <a:latin typeface="Courier"/>
+              </a:rPr>
+              <a:t>(</a:t>
+            </a:r>
+            <a:r>
+              <a:rPr>
+                <a:solidFill>
+                  <a:srgbClr val="AD0000"/>
+                </a:solidFill>
+                <a:latin typeface="Courier"/>
+              </a:rPr>
+              <a:t>3</a:t>
+            </a:r>
+            <a:r>
+              <a:rPr>
+                <a:solidFill>
+                  <a:srgbClr val="003B4F"/>
+                </a:solidFill>
+                <a:latin typeface="Courier"/>
+              </a:rPr>
+              <a:t>)</a:t>
             </a:r>
           </a:p>
           <a:p>
@@ -3453,12 +3595,28 @@
             </a:pPr>
             <a:r>
               <a:rPr>
+                <a:latin typeface="Courier"/>
+              </a:rPr>
+              <a:t># A tibble: 3 × 8
+  twig_id leaf_id teams shade mass_g petiole_mm thickness_mm paper_mass_g
+  &lt;chr&gt;   &lt;chr&gt;   &lt;chr&gt; &lt;chr&gt;  &lt;dbl&gt;      &lt;dbl&gt;        &lt;dbl&gt;        &lt;dbl&gt;
+1 &lt;NA&gt;    &lt;NA&gt;    12345 sunny   0.65         35         0.15         0.24
+2 &lt;NA&gt;    &lt;NA&gt;    12345 shady   0.6          68         0.12         0.23
+3 &lt;NA&gt;    &lt;NA&gt;    12345 shady   0.57         73         0.14         0.28</a:t>
+            </a:r>
+          </a:p>
+          <a:p>
+            <a:pPr lvl="0" indent="0">
+              <a:buNone/>
+            </a:pPr>
+            <a:r>
+              <a:rPr>
                 <a:solidFill>
                   <a:srgbClr val="5E5E5E"/>
                 </a:solidFill>
                 <a:latin typeface="Courier"/>
               </a:rPr>
-              <a:t># One equals sign — a very common mistake</a:t>
+              <a:t># Combine two conditions with , (AND)</a:t>
             </a:r>
             <a:br/>
             <a:r>
@@ -3479,6 +3637,43 @@
               </a:rPr>
               <a:t>%&gt;%</a:t>
             </a:r>
+            <a:br/>
+            <a:r>
+              <a:rPr>
+                <a:solidFill>
+                  <a:srgbClr val="003B4F"/>
+                </a:solidFill>
+                <a:latin typeface="Courier"/>
+              </a:rPr>
+              <a:t>  </a:t>
+            </a:r>
+            <a:r>
+              <a:rPr>
+                <a:solidFill>
+                  <a:srgbClr val="4758AB"/>
+                </a:solidFill>
+                <a:latin typeface="Courier"/>
+              </a:rPr>
+              <a:t>filter</a:t>
+            </a:r>
+            <a:r>
+              <a:rPr>
+                <a:solidFill>
+                  <a:srgbClr val="003B4F"/>
+                </a:solidFill>
+                <a:latin typeface="Courier"/>
+              </a:rPr>
+              <a:t>(shade </a:t>
+            </a:r>
+            <a:r>
+              <a:rPr>
+                <a:solidFill>
+                  <a:srgbClr val="5E5E5E"/>
+                </a:solidFill>
+                <a:latin typeface="Courier"/>
+              </a:rPr>
+              <a:t>==</a:t>
+            </a:r>
             <a:r>
               <a:rPr>
                 <a:solidFill>
@@ -3491,11 +3686,84 @@
             <a:r>
               <a:rPr>
                 <a:solidFill>
+                  <a:srgbClr val="20794D"/>
+                </a:solidFill>
+                <a:latin typeface="Courier"/>
+              </a:rPr>
+              <a:t>"shady"</a:t>
+            </a:r>
+            <a:r>
+              <a:rPr>
+                <a:solidFill>
+                  <a:srgbClr val="003B4F"/>
+                </a:solidFill>
+                <a:latin typeface="Courier"/>
+              </a:rPr>
+              <a:t>, mass_g </a:t>
+            </a:r>
+            <a:r>
+              <a:rPr>
+                <a:solidFill>
+                  <a:srgbClr val="5E5E5E"/>
+                </a:solidFill>
+                <a:latin typeface="Courier"/>
+              </a:rPr>
+              <a:t>&gt;</a:t>
+            </a:r>
+            <a:r>
+              <a:rPr>
+                <a:solidFill>
+                  <a:srgbClr val="003B4F"/>
+                </a:solidFill>
+                <a:latin typeface="Courier"/>
+              </a:rPr>
+              <a:t> </a:t>
+            </a:r>
+            <a:r>
+              <a:rPr>
+                <a:solidFill>
+                  <a:srgbClr val="AD0000"/>
+                </a:solidFill>
+                <a:latin typeface="Courier"/>
+              </a:rPr>
+              <a:t>0.5</a:t>
+            </a:r>
+            <a:r>
+              <a:rPr>
+                <a:solidFill>
+                  <a:srgbClr val="003B4F"/>
+                </a:solidFill>
+                <a:latin typeface="Courier"/>
+              </a:rPr>
+              <a:t>) </a:t>
+            </a:r>
+            <a:r>
+              <a:rPr>
+                <a:solidFill>
+                  <a:srgbClr val="5E5E5E"/>
+                </a:solidFill>
+                <a:latin typeface="Courier"/>
+              </a:rPr>
+              <a:t>%&gt;%</a:t>
+            </a:r>
+            <a:br/>
+            <a:r>
+              <a:rPr>
+                <a:solidFill>
+                  <a:srgbClr val="003B4F"/>
+                </a:solidFill>
+                <a:latin typeface="Courier"/>
+              </a:rPr>
+              <a:t>  </a:t>
+            </a:r>
+            <a:r>
+              <a:rPr>
+                <a:solidFill>
                   <a:srgbClr val="4758AB"/>
                 </a:solidFill>
                 <a:latin typeface="Courier"/>
               </a:rPr>
-              <a:t>filter</a:t>
+              <a:t>head</a:t>
             </a:r>
             <a:r>
               <a:rPr>
@@ -3509,29 +3777,11 @@
             <a:r>
               <a:rPr>
                 <a:solidFill>
-                  <a:srgbClr val="657422"/>
-                </a:solidFill>
-                <a:latin typeface="Courier"/>
-              </a:rPr>
-              <a:t>shade =</a:t>
-            </a:r>
-            <a:r>
-              <a:rPr>
-                <a:solidFill>
-                  <a:srgbClr val="003B4F"/>
-                </a:solidFill>
-                <a:latin typeface="Courier"/>
-              </a:rPr>
-              <a:t> </a:t>
-            </a:r>
-            <a:r>
-              <a:rPr>
-                <a:solidFill>
-                  <a:srgbClr val="20794D"/>
-                </a:solidFill>
-                <a:latin typeface="Courier"/>
-              </a:rPr>
-              <a:t>"sunny"</a:t>
+                  <a:srgbClr val="AD0000"/>
+                </a:solidFill>
+                <a:latin typeface="Courier"/>
+              </a:rPr>
+              <a:t>3</a:t>
             </a:r>
             <a:r>
               <a:rPr>
@@ -3544,120 +3794,19 @@
             </a:r>
           </a:p>
           <a:p>
-            <a:pPr lvl="0" indent="0" marL="0">
+            <a:pPr lvl="0" indent="0">
               <a:buNone/>
             </a:pPr>
             <a:r>
-              <a:rPr/>
-              <a:t>R stops and tells us:</a:t>
-            </a:r>
-          </a:p>
-          <a:p>
-            <a:pPr lvl="0" indent="0">
-              <a:buNone/>
-            </a:pPr>
-            <a:r>
-              <a:rPr>
-                <a:latin typeface="Courier"/>
-              </a:rPr>
-              <a:t>Error in `filter()`:
-! We detected a named input.
-i This usually means that you've used `=` instead of `==`.</a:t>
-            </a:r>
-          </a:p>
-          <a:p>
-            <a:pPr lvl="0" indent="0" marL="0">
-              <a:buNone/>
-            </a:pPr>
-            <a:r>
-              <a:rPr/>
-              <a:t>Now the fix — two equals signs:</a:t>
-            </a:r>
-          </a:p>
-          <a:p>
-            <a:pPr lvl="0" indent="0">
-              <a:buNone/>
-            </a:pPr>
-            <a:r>
-              <a:rPr>
-                <a:solidFill>
-                  <a:srgbClr val="003B4F"/>
-                </a:solidFill>
-                <a:latin typeface="Courier"/>
-              </a:rPr>
-              <a:t>leaf_df </a:t>
-            </a:r>
-            <a:r>
-              <a:rPr>
-                <a:solidFill>
-                  <a:srgbClr val="5E5E5E"/>
-                </a:solidFill>
-                <a:latin typeface="Courier"/>
-              </a:rPr>
-              <a:t>%&gt;%</a:t>
-            </a:r>
-            <a:r>
-              <a:rPr>
-                <a:solidFill>
-                  <a:srgbClr val="003B4F"/>
-                </a:solidFill>
-                <a:latin typeface="Courier"/>
-              </a:rPr>
-              <a:t> </a:t>
-            </a:r>
-            <a:r>
-              <a:rPr>
-                <a:solidFill>
-                  <a:srgbClr val="4758AB"/>
-                </a:solidFill>
-                <a:latin typeface="Courier"/>
-              </a:rPr>
-              <a:t>filter</a:t>
-            </a:r>
-            <a:r>
-              <a:rPr>
-                <a:solidFill>
-                  <a:srgbClr val="003B4F"/>
-                </a:solidFill>
-                <a:latin typeface="Courier"/>
-              </a:rPr>
-              <a:t>(shade </a:t>
-            </a:r>
-            <a:r>
-              <a:rPr>
-                <a:solidFill>
-                  <a:srgbClr val="5E5E5E"/>
-                </a:solidFill>
-                <a:latin typeface="Courier"/>
-              </a:rPr>
-              <a:t>==</a:t>
-            </a:r>
-            <a:r>
-              <a:rPr>
-                <a:solidFill>
-                  <a:srgbClr val="003B4F"/>
-                </a:solidFill>
-                <a:latin typeface="Courier"/>
-              </a:rPr>
-              <a:t> </a:t>
-            </a:r>
-            <a:r>
-              <a:rPr>
-                <a:solidFill>
-                  <a:srgbClr val="20794D"/>
-                </a:solidFill>
-                <a:latin typeface="Courier"/>
-              </a:rPr>
-              <a:t>"sunny"</a:t>
-            </a:r>
-            <a:r>
-              <a:rPr>
-                <a:solidFill>
-                  <a:srgbClr val="003B4F"/>
-                </a:solidFill>
-                <a:latin typeface="Courier"/>
-              </a:rPr>
-              <a:t>)</a:t>
+              <a:rPr>
+                <a:latin typeface="Courier"/>
+              </a:rPr>
+              <a:t># A tibble: 3 × 8
+  twig_id leaf_id teams        shade mass_g petiole_mm thickness_mm paper_mass_g
+  &lt;chr&gt;   &lt;chr&gt;   &lt;chr&gt;        &lt;chr&gt;  &lt;dbl&gt;      &lt;dbl&gt;        &lt;dbl&gt;        &lt;dbl&gt;
+1 &lt;NA&gt;    &lt;NA&gt;    12345        shady  0.6           68         0.12        0.23 
+2 &lt;NA&gt;    &lt;NA&gt;    12345        shady  0.57          73         0.14        0.28 
+3 twig_1  l07     fighting_mo… shady  0.589         66         0.32        0.257</a:t>
             </a:r>
           </a:p>
         </p:txBody>
@@ -3677,12 +3826,38 @@
           <a:bodyPr/>
           <a:lstStyle/>
           <a:p>
+            <a:pPr lvl="0"/>
+            <a:r>
+              <a:rPr/>
+              <a:t>A </a:t>
+            </a:r>
+            <a:r>
+              <a:rPr b="1"/>
+              <a:t>comma</a:t>
+            </a:r>
+            <a:r>
+              <a:rPr/>
+              <a:t> between conditions means </a:t>
+            </a:r>
+            <a:r>
+              <a:rPr b="1"/>
+              <a:t>AND</a:t>
+            </a:r>
+          </a:p>
+          <a:p>
+            <a:pPr lvl="1"/>
+            <a:r>
+              <a:rPr/>
+              <a:t>both have to be true for the row to stay</a:t>
+            </a:r>
+          </a:p>
+          <a:p>
             <a:pPr lvl="0" indent="0" marL="1270000">
               <a:buNone/>
             </a:pPr>
             <a:r>
               <a:rPr sz="2000" b="1"/>
-              <a:t>Tip</a:t>
+              <a:t>Warning</a:t>
             </a:r>
           </a:p>
           <a:p>
@@ -3691,72 +3866,59 @@
             </a:pPr>
             <a:r>
               <a:rPr sz="2000" b="1"/>
-              <a:t>✅ Why show a broken </a:t>
-            </a:r>
-            <a:r>
-              <a:rPr sz="2000" b="1">
-                <a:latin typeface="Courier"/>
-              </a:rPr>
-              <a:t>filter()</a:t>
-            </a:r>
-            <a:r>
-              <a:rPr sz="2000" b="1"/>
-              <a:t>?</a:t>
-            </a:r>
-          </a:p>
-          <a:p>
-            <a:pPr lvl="0" indent="0" marL="1270000">
-              <a:buNone/>
-            </a:pPr>
+              <a:t>⚠️ Watch out!</a:t>
+            </a:r>
+          </a:p>
+          <a:p>
+            <a:pPr lvl="0"/>
             <a:r>
               <a:rPr sz="2000">
                 <a:latin typeface="Courier"/>
               </a:rPr>
+              <a:t>=</a:t>
+            </a:r>
+            <a:r>
+              <a:rPr sz="2000"/>
+              <a:t> assigns a value.</a:t>
+            </a:r>
+          </a:p>
+          <a:p>
+            <a:pPr lvl="0"/>
+            <a:r>
+              <a:rPr sz="2000">
+                <a:latin typeface="Courier"/>
+              </a:rPr>
+              <a:t>==</a:t>
+            </a:r>
+            <a:r>
+              <a:rPr sz="2000"/>
+              <a:t> tests equality.</a:t>
+            </a:r>
+          </a:p>
+          <a:p>
+            <a:pPr lvl="0"/>
+            <a:r>
+              <a:rPr sz="2000">
+                <a:latin typeface="Courier"/>
+              </a:rPr>
               <a:t>filter(shade = "sunny")</a:t>
             </a:r>
             <a:r>
               <a:rPr sz="2000"/>
-              <a:t> is the single most common typo in this whole unit, because </a:t>
-            </a:r>
+              <a:t> → error.</a:t>
+            </a:r>
+          </a:p>
+          <a:p>
+            <a:pPr lvl="0"/>
             <a:r>
               <a:rPr sz="2000">
                 <a:latin typeface="Courier"/>
               </a:rPr>
-              <a:t>=</a:t>
+              <a:t>filter(shade == "sunny")</a:t>
             </a:r>
             <a:r>
               <a:rPr sz="2000"/>
-              <a:t> and </a:t>
-            </a:r>
-            <a:r>
-              <a:rPr sz="2000">
-                <a:latin typeface="Courier"/>
-              </a:rPr>
-              <a:t>==</a:t>
-            </a:r>
-            <a:r>
-              <a:rPr sz="2000"/>
-              <a:t> look almost identical and only one of them tests equality. dplyr’s error message actually names the mistake — “you’ve used </a:t>
-            </a:r>
-            <a:r>
-              <a:rPr sz="2000">
-                <a:latin typeface="Courier"/>
-              </a:rPr>
-              <a:t>=</a:t>
-            </a:r>
-            <a:r>
-              <a:rPr sz="2000"/>
-              <a:t> instead of </a:t>
-            </a:r>
-            <a:r>
-              <a:rPr sz="2000">
-                <a:latin typeface="Courier"/>
-              </a:rPr>
-              <a:t>==</a:t>
-            </a:r>
-            <a:r>
-              <a:rPr sz="2000"/>
-              <a:t>” — so once you’ve seen it fixed here, the next time R prints it at you it’s a fix, not a mystery.</a:t>
+              <a:t> → correct.</a:t>
             </a:r>
           </a:p>
         </p:txBody>
@@ -3810,14 +3972,8 @@
               <a:buNone/>
             </a:pPr>
             <a:r>
-              <a:rPr>
-                <a:latin typeface="Courier"/>
-              </a:rPr>
-              <a:t>select()</a:t>
-            </a:r>
-            <a:r>
-              <a:rPr/>
-              <a:t> — Picking Columns</a:t>
+              <a:rPr/>
+              <a:t>Live Demo — Watch It Break (on purpose)</a:t>
             </a:r>
           </a:p>
         </p:txBody>
@@ -3837,6 +3993,23 @@
           <a:bodyPr/>
           <a:lstStyle/>
           <a:p>
+            <a:pPr lvl="0" indent="0" marL="0">
+              <a:buNone/>
+            </a:pPr>
+            <a:r>
+              <a:rPr/>
+              <a:t>I will type this </a:t>
+            </a:r>
+            <a:r>
+              <a:rPr b="1"/>
+              <a:t>wrong</a:t>
+            </a:r>
+            <a:r>
+              <a:rPr/>
+              <a:t> on purpose:</a:t>
+            </a:r>
+          </a:p>
+          <a:p>
             <a:pPr lvl="0" indent="0">
               <a:buNone/>
             </a:pPr>
@@ -3847,10 +4020,18 @@
                 </a:solidFill>
                 <a:latin typeface="Courier"/>
               </a:rPr>
-              <a:t># select() keeps the columns you name ------------------</a:t>
+              <a:t># One equals sign — a very common mistake</a:t>
             </a:r>
             <a:br/>
-            <a:br/>
+            <a:r>
+              <a:rPr>
+                <a:solidFill>
+                  <a:srgbClr val="003B4F"/>
+                </a:solidFill>
+                <a:latin typeface="Courier"/>
+              </a:rPr>
+              <a:t>leaf_df </a:t>
+            </a:r>
             <a:r>
               <a:rPr>
                 <a:solidFill>
@@ -3858,9 +4039,107 @@
                 </a:solidFill>
                 <a:latin typeface="Courier"/>
               </a:rPr>
-              <a:t># Keep only shade and mass</a:t>
-            </a:r>
-            <a:br/>
+              <a:t>%&gt;%</a:t>
+            </a:r>
+            <a:r>
+              <a:rPr>
+                <a:solidFill>
+                  <a:srgbClr val="003B4F"/>
+                </a:solidFill>
+                <a:latin typeface="Courier"/>
+              </a:rPr>
+              <a:t> </a:t>
+            </a:r>
+            <a:r>
+              <a:rPr>
+                <a:solidFill>
+                  <a:srgbClr val="4758AB"/>
+                </a:solidFill>
+                <a:latin typeface="Courier"/>
+              </a:rPr>
+              <a:t>filter</a:t>
+            </a:r>
+            <a:r>
+              <a:rPr>
+                <a:solidFill>
+                  <a:srgbClr val="003B4F"/>
+                </a:solidFill>
+                <a:latin typeface="Courier"/>
+              </a:rPr>
+              <a:t>(</a:t>
+            </a:r>
+            <a:r>
+              <a:rPr>
+                <a:solidFill>
+                  <a:srgbClr val="657422"/>
+                </a:solidFill>
+                <a:latin typeface="Courier"/>
+              </a:rPr>
+              <a:t>shade =</a:t>
+            </a:r>
+            <a:r>
+              <a:rPr>
+                <a:solidFill>
+                  <a:srgbClr val="003B4F"/>
+                </a:solidFill>
+                <a:latin typeface="Courier"/>
+              </a:rPr>
+              <a:t> </a:t>
+            </a:r>
+            <a:r>
+              <a:rPr>
+                <a:solidFill>
+                  <a:srgbClr val="20794D"/>
+                </a:solidFill>
+                <a:latin typeface="Courier"/>
+              </a:rPr>
+              <a:t>"sunny"</a:t>
+            </a:r>
+            <a:r>
+              <a:rPr>
+                <a:solidFill>
+                  <a:srgbClr val="003B4F"/>
+                </a:solidFill>
+                <a:latin typeface="Courier"/>
+              </a:rPr>
+              <a:t>)</a:t>
+            </a:r>
+          </a:p>
+          <a:p>
+            <a:pPr lvl="0" indent="0" marL="0">
+              <a:buNone/>
+            </a:pPr>
+            <a:r>
+              <a:rPr/>
+              <a:t>R stops and tells us:</a:t>
+            </a:r>
+          </a:p>
+          <a:p>
+            <a:pPr lvl="0" indent="0">
+              <a:buNone/>
+            </a:pPr>
+            <a:r>
+              <a:rPr>
+                <a:latin typeface="Courier"/>
+              </a:rPr>
+              <a:t>Error in `filter()`:
+! We detected a named input.
+i This usually means that you've used `=` instead of `==`.</a:t>
+            </a:r>
+          </a:p>
+          <a:p>
+            <a:pPr lvl="0" indent="0" marL="0">
+              <a:buNone/>
+            </a:pPr>
+            <a:r>
+              <a:rPr/>
+              <a:t>Now the fix — two equals signs:</a:t>
+            </a:r>
+          </a:p>
+          <a:p>
+            <a:pPr lvl="0" indent="0">
+              <a:buNone/>
+            </a:pPr>
             <a:r>
               <a:rPr>
                 <a:solidFill>
@@ -3895,16 +4174,16 @@
                 </a:solidFill>
                 <a:latin typeface="Courier"/>
               </a:rPr>
-              <a:t>select</a:t>
-            </a:r>
-            <a:r>
-              <a:rPr>
-                <a:solidFill>
-                  <a:srgbClr val="003B4F"/>
-                </a:solidFill>
-                <a:latin typeface="Courier"/>
-              </a:rPr>
-              <a:t>(shade, mass_g) </a:t>
+              <a:t>filter</a:t>
+            </a:r>
+            <a:r>
+              <a:rPr>
+                <a:solidFill>
+                  <a:srgbClr val="003B4F"/>
+                </a:solidFill>
+                <a:latin typeface="Courier"/>
+              </a:rPr>
+              <a:t>(shade </a:t>
             </a:r>
             <a:r>
               <a:rPr>
@@ -3913,7 +4192,7 @@
                 </a:solidFill>
                 <a:latin typeface="Courier"/>
               </a:rPr>
-              <a:t>%&gt;%</a:t>
+              <a:t>==</a:t>
             </a:r>
             <a:r>
               <a:rPr>
@@ -3927,323 +4206,20 @@
             <a:r>
               <a:rPr>
                 <a:solidFill>
-                  <a:srgbClr val="4758AB"/>
-                </a:solidFill>
-                <a:latin typeface="Courier"/>
-              </a:rPr>
-              <a:t>head</a:t>
-            </a:r>
-            <a:r>
-              <a:rPr>
-                <a:solidFill>
-                  <a:srgbClr val="003B4F"/>
-                </a:solidFill>
-                <a:latin typeface="Courier"/>
-              </a:rPr>
-              <a:t>()</a:t>
-            </a:r>
-          </a:p>
-          <a:p>
-            <a:pPr lvl="0" indent="0">
-              <a:buNone/>
-            </a:pPr>
-            <a:r>
-              <a:rPr>
-                <a:latin typeface="Courier"/>
-              </a:rPr>
-              <a:t># A tibble: 6 × 2
-  shade mass_g
-  &lt;chr&gt;  &lt;dbl&gt;
-1 sunny   0.4 
-2 sunny   0.48
-3 sunny   0.34
-4 sunny   0.65
-5 sunny   0.27
-6 sunny   0.43</a:t>
-            </a:r>
-          </a:p>
-          <a:p>
-            <a:pPr lvl="0" indent="0">
-              <a:buNone/>
-            </a:pPr>
-            <a:r>
-              <a:rPr>
-                <a:solidFill>
-                  <a:srgbClr val="5E5E5E"/>
-                </a:solidFill>
-                <a:latin typeface="Courier"/>
-              </a:rPr>
-              <a:t># Drop the paper_mass_g column (use minus sign)</a:t>
-            </a:r>
-            <a:br/>
-            <a:r>
-              <a:rPr>
-                <a:solidFill>
-                  <a:srgbClr val="003B4F"/>
-                </a:solidFill>
-                <a:latin typeface="Courier"/>
-              </a:rPr>
-              <a:t>leaf_df </a:t>
-            </a:r>
-            <a:r>
-              <a:rPr>
-                <a:solidFill>
-                  <a:srgbClr val="5E5E5E"/>
-                </a:solidFill>
-                <a:latin typeface="Courier"/>
-              </a:rPr>
-              <a:t>%&gt;%</a:t>
-            </a:r>
-            <a:r>
-              <a:rPr>
-                <a:solidFill>
-                  <a:srgbClr val="003B4F"/>
-                </a:solidFill>
-                <a:latin typeface="Courier"/>
-              </a:rPr>
-              <a:t> </a:t>
-            </a:r>
-            <a:r>
-              <a:rPr>
-                <a:solidFill>
-                  <a:srgbClr val="4758AB"/>
-                </a:solidFill>
-                <a:latin typeface="Courier"/>
-              </a:rPr>
-              <a:t>select</a:t>
-            </a:r>
-            <a:r>
-              <a:rPr>
-                <a:solidFill>
-                  <a:srgbClr val="003B4F"/>
-                </a:solidFill>
-                <a:latin typeface="Courier"/>
-              </a:rPr>
-              <a:t>(</a:t>
-            </a:r>
-            <a:r>
-              <a:rPr>
-                <a:solidFill>
-                  <a:srgbClr val="5E5E5E"/>
-                </a:solidFill>
-                <a:latin typeface="Courier"/>
-              </a:rPr>
-              <a:t>-</a:t>
-            </a:r>
-            <a:r>
-              <a:rPr>
-                <a:solidFill>
-                  <a:srgbClr val="003B4F"/>
-                </a:solidFill>
-                <a:latin typeface="Courier"/>
-              </a:rPr>
-              <a:t>paper_mass_g) </a:t>
-            </a:r>
-            <a:r>
-              <a:rPr>
-                <a:solidFill>
-                  <a:srgbClr val="5E5E5E"/>
-                </a:solidFill>
-                <a:latin typeface="Courier"/>
-              </a:rPr>
-              <a:t>%&gt;%</a:t>
-            </a:r>
-            <a:r>
-              <a:rPr>
-                <a:solidFill>
-                  <a:srgbClr val="003B4F"/>
-                </a:solidFill>
-                <a:latin typeface="Courier"/>
-              </a:rPr>
-              <a:t> </a:t>
-            </a:r>
-            <a:r>
-              <a:rPr>
-                <a:solidFill>
-                  <a:srgbClr val="4758AB"/>
-                </a:solidFill>
-                <a:latin typeface="Courier"/>
-              </a:rPr>
-              <a:t>head</a:t>
-            </a:r>
-            <a:r>
-              <a:rPr>
-                <a:solidFill>
-                  <a:srgbClr val="003B4F"/>
-                </a:solidFill>
-                <a:latin typeface="Courier"/>
-              </a:rPr>
-              <a:t>()</a:t>
-            </a:r>
-          </a:p>
-          <a:p>
-            <a:pPr lvl="0" indent="0">
-              <a:buNone/>
-            </a:pPr>
-            <a:r>
-              <a:rPr>
-                <a:latin typeface="Courier"/>
-              </a:rPr>
-              <a:t># A tibble: 6 × 7
-  twig_id leaf_id teams shade mass_g petiole_mm thickness_mm
-  &lt;chr&gt;   &lt;chr&gt;   &lt;chr&gt; &lt;chr&gt;  &lt;dbl&gt;      &lt;dbl&gt;        &lt;dbl&gt;
-1 &lt;NA&gt;    &lt;NA&gt;    12345 sunny   0.4          79         0.15
-2 &lt;NA&gt;    &lt;NA&gt;    12345 sunny   0.48         63         0.14
-3 &lt;NA&gt;    &lt;NA&gt;    12345 sunny   0.34         68         0.14
-4 &lt;NA&gt;    &lt;NA&gt;    12345 sunny   0.65         35         0.15
-5 &lt;NA&gt;    &lt;NA&gt;    12345 sunny   0.27         34         0.11
-6 &lt;NA&gt;    &lt;NA&gt;    12345 sunny   0.43         40         0.16</a:t>
-            </a:r>
-          </a:p>
-          <a:p>
-            <a:pPr lvl="0" indent="0">
-              <a:buNone/>
-            </a:pPr>
-            <a:r>
-              <a:rPr>
-                <a:solidFill>
-                  <a:srgbClr val="5E5E5E"/>
-                </a:solidFill>
-                <a:latin typeface="Courier"/>
-              </a:rPr>
-              <a:t># Keep columns that start with a word</a:t>
-            </a:r>
-            <a:br/>
-            <a:r>
-              <a:rPr>
-                <a:solidFill>
-                  <a:srgbClr val="003B4F"/>
-                </a:solidFill>
-                <a:latin typeface="Courier"/>
-              </a:rPr>
-              <a:t>leaf_df </a:t>
-            </a:r>
-            <a:r>
-              <a:rPr>
-                <a:solidFill>
-                  <a:srgbClr val="5E5E5E"/>
-                </a:solidFill>
-                <a:latin typeface="Courier"/>
-              </a:rPr>
-              <a:t>%&gt;%</a:t>
-            </a:r>
-            <a:r>
-              <a:rPr>
-                <a:solidFill>
-                  <a:srgbClr val="003B4F"/>
-                </a:solidFill>
-                <a:latin typeface="Courier"/>
-              </a:rPr>
-              <a:t> </a:t>
-            </a:r>
-            <a:r>
-              <a:rPr>
-                <a:solidFill>
-                  <a:srgbClr val="4758AB"/>
-                </a:solidFill>
-                <a:latin typeface="Courier"/>
-              </a:rPr>
-              <a:t>select</a:t>
-            </a:r>
-            <a:r>
-              <a:rPr>
-                <a:solidFill>
-                  <a:srgbClr val="003B4F"/>
-                </a:solidFill>
-                <a:latin typeface="Courier"/>
-              </a:rPr>
-              <a:t>(</a:t>
-            </a:r>
-            <a:r>
-              <a:rPr>
-                <a:solidFill>
-                  <a:srgbClr val="4758AB"/>
-                </a:solidFill>
-                <a:latin typeface="Courier"/>
-              </a:rPr>
-              <a:t>starts_with</a:t>
-            </a:r>
-            <a:r>
-              <a:rPr>
-                <a:solidFill>
-                  <a:srgbClr val="003B4F"/>
-                </a:solidFill>
-                <a:latin typeface="Courier"/>
-              </a:rPr>
-              <a:t>(</a:t>
-            </a:r>
-            <a:r>
-              <a:rPr>
-                <a:solidFill>
                   <a:srgbClr val="20794D"/>
                 </a:solidFill>
                 <a:latin typeface="Courier"/>
               </a:rPr>
-              <a:t>"mass"</a:t>
-            </a:r>
-            <a:r>
-              <a:rPr>
-                <a:solidFill>
-                  <a:srgbClr val="003B4F"/>
-                </a:solidFill>
-                <a:latin typeface="Courier"/>
-              </a:rPr>
-              <a:t>)) </a:t>
-            </a:r>
-            <a:r>
-              <a:rPr>
-                <a:solidFill>
-                  <a:srgbClr val="5E5E5E"/>
-                </a:solidFill>
-                <a:latin typeface="Courier"/>
-              </a:rPr>
-              <a:t>%&gt;%</a:t>
-            </a:r>
-            <a:r>
-              <a:rPr>
-                <a:solidFill>
-                  <a:srgbClr val="003B4F"/>
-                </a:solidFill>
-                <a:latin typeface="Courier"/>
-              </a:rPr>
-              <a:t> </a:t>
-            </a:r>
-            <a:r>
-              <a:rPr>
-                <a:solidFill>
-                  <a:srgbClr val="4758AB"/>
-                </a:solidFill>
-                <a:latin typeface="Courier"/>
-              </a:rPr>
-              <a:t>head</a:t>
-            </a:r>
-            <a:r>
-              <a:rPr>
-                <a:solidFill>
-                  <a:srgbClr val="003B4F"/>
-                </a:solidFill>
-                <a:latin typeface="Courier"/>
-              </a:rPr>
-              <a:t>()</a:t>
-            </a:r>
-          </a:p>
-          <a:p>
-            <a:pPr lvl="0" indent="0">
-              <a:buNone/>
-            </a:pPr>
-            <a:r>
-              <a:rPr>
-                <a:latin typeface="Courier"/>
-              </a:rPr>
-              <a:t># A tibble: 6 × 1
-  mass_g
-   &lt;dbl&gt;
-1   0.4 
-2   0.48
-3   0.34
-4   0.65
-5   0.27
-6   0.43</a:t>
+              <a:t>"sunny"</a:t>
+            </a:r>
+            <a:r>
+              <a:rPr>
+                <a:solidFill>
+                  <a:srgbClr val="003B4F"/>
+                </a:solidFill>
+                <a:latin typeface="Courier"/>
+              </a:rPr>
+              <a:t>)</a:t>
             </a:r>
           </a:p>
         </p:txBody>
@@ -4263,108 +4239,86 @@
           <a:bodyPr/>
           <a:lstStyle/>
           <a:p>
-            <a:pPr lvl="0"/>
-            <a:r>
-              <a:rPr b="1"/>
-              <a:t>Why </a:t>
-            </a:r>
-            <a:r>
-              <a:rPr b="1">
-                <a:latin typeface="Courier"/>
-              </a:rPr>
-              <a:t>select()</a:t>
-            </a:r>
-            <a:r>
-              <a:rPr b="1"/>
-              <a:t> matters:</a:t>
-            </a:r>
-          </a:p>
-          <a:p>
-            <a:pPr lvl="1"/>
-            <a:r>
-              <a:rPr/>
-              <a:t>Real datasets often have 50–100+ columns</a:t>
-            </a:r>
-          </a:p>
-          <a:p>
-            <a:pPr lvl="1"/>
-            <a:r>
-              <a:rPr/>
-              <a:t>You rarely need all of them</a:t>
-            </a:r>
-          </a:p>
-          <a:p>
-            <a:pPr lvl="1"/>
-            <a:r>
-              <a:rPr>
-                <a:latin typeface="Courier"/>
-              </a:rPr>
-              <a:t>select()</a:t>
-            </a:r>
-            <a:r>
-              <a:rPr/>
-              <a:t> keeps your workspace clean</a:t>
-            </a:r>
-          </a:p>
-          <a:p>
-            <a:pPr lvl="0"/>
-            <a:r>
-              <a:rPr b="1"/>
-              <a:t>Useful helpers:</a:t>
-            </a:r>
-          </a:p>
-          <a:p>
-            <a:pPr lvl="1"/>
-            <a:r>
-              <a:rPr>
-                <a:latin typeface="Courier"/>
-              </a:rPr>
-              <a:t>starts_with("x")</a:t>
-            </a:r>
-            <a:r>
-              <a:rPr/>
-              <a:t> — columns starting with “x”</a:t>
-            </a:r>
-          </a:p>
-          <a:p>
-            <a:pPr lvl="1"/>
-            <a:r>
-              <a:rPr>
-                <a:latin typeface="Courier"/>
-              </a:rPr>
-              <a:t>ends_with("_mm")</a:t>
-            </a:r>
-            <a:r>
-              <a:rPr/>
-              <a:t> — columns ending with “_mm”</a:t>
-            </a:r>
-          </a:p>
-          <a:p>
-            <a:pPr lvl="1"/>
-            <a:r>
-              <a:rPr>
-                <a:latin typeface="Courier"/>
-              </a:rPr>
-              <a:t>contains("mass")</a:t>
-            </a:r>
-            <a:r>
-              <a:rPr/>
-              <a:t> — columns containing “mass”</a:t>
-            </a:r>
-          </a:p>
-          <a:p>
-            <a:pPr lvl="0" indent="0" marL="0">
+            <a:pPr lvl="0" indent="0" marL="1270000">
               <a:buNone/>
             </a:pPr>
             <a:r>
-              <a:rPr/>
-              <a:t>📖 </a:t>
-            </a:r>
-            <a:r>
-              <a:rPr>
-                <a:hlinkClick r:id="rId2"/>
-              </a:rPr>
-              <a:t>R4DS §3.3</a:t>
+              <a:rPr sz="2000" b="1"/>
+              <a:t>Tip</a:t>
+            </a:r>
+          </a:p>
+          <a:p>
+            <a:pPr lvl="0" indent="0" marL="1270000">
+              <a:buNone/>
+            </a:pPr>
+            <a:r>
+              <a:rPr sz="2000" b="1"/>
+              <a:t>✅ Why show a broken </a:t>
+            </a:r>
+            <a:r>
+              <a:rPr sz="2000" b="1">
+                <a:latin typeface="Courier"/>
+              </a:rPr>
+              <a:t>filter()</a:t>
+            </a:r>
+            <a:r>
+              <a:rPr sz="2000" b="1"/>
+              <a:t>?</a:t>
+            </a:r>
+          </a:p>
+          <a:p>
+            <a:pPr lvl="0" indent="0" marL="1270000">
+              <a:buNone/>
+            </a:pPr>
+            <a:r>
+              <a:rPr sz="2000">
+                <a:latin typeface="Courier"/>
+              </a:rPr>
+              <a:t>filter(shade = "sunny")</a:t>
+            </a:r>
+            <a:r>
+              <a:rPr sz="2000"/>
+              <a:t> is the single most common typo in this whole unit, because </a:t>
+            </a:r>
+            <a:r>
+              <a:rPr sz="2000">
+                <a:latin typeface="Courier"/>
+              </a:rPr>
+              <a:t>=</a:t>
+            </a:r>
+            <a:r>
+              <a:rPr sz="2000"/>
+              <a:t> and </a:t>
+            </a:r>
+            <a:r>
+              <a:rPr sz="2000">
+                <a:latin typeface="Courier"/>
+              </a:rPr>
+              <a:t>==</a:t>
+            </a:r>
+            <a:r>
+              <a:rPr sz="2000"/>
+              <a:t> look almost identical and only one of them tests equality. dplyr’s error message actually names the mistake — “you’ve used </a:t>
+            </a:r>
+            <a:r>
+              <a:rPr sz="2000">
+                <a:latin typeface="Courier"/>
+              </a:rPr>
+              <a:t>=</a:t>
+            </a:r>
+            <a:r>
+              <a:rPr sz="2000"/>
+              <a:t> instead of </a:t>
+            </a:r>
+            <a:r>
+              <a:rPr sz="2000">
+                <a:latin typeface="Courier"/>
+              </a:rPr>
+              <a:t>==</a:t>
+            </a:r>
+            <a:r>
+              <a:rPr sz="2000"/>
+              <a:t>” — so once you’ve seen it fixed here, the next time R prints it at you it’s a fix, not a mystery.</a:t>
             </a:r>
           </a:p>
         </p:txBody>
@@ -4404,8 +4358,11 @@
         <p:spPr>
           <a:xfrm>
             <a:off x="0" y="0"/>
-            <a:ext cx="9144000" cy="582780"/>
+            <a:ext cx="9144000" cy="602780"/>
           </a:xfrm>
+          <a:solidFill>
+            <a:srgbClr val="1A1A2E"/>
+          </a:solidFill>
         </p:spPr>
         <p:txBody>
           <a:bodyPr/>
@@ -4418,11 +4375,11 @@
               <a:rPr>
                 <a:latin typeface="Courier"/>
               </a:rPr>
-              <a:t>mutate()</a:t>
-            </a:r>
-            <a:r>
-              <a:rPr/>
-              <a:t> — Creating New Columns</a:t>
+              <a:t>select()</a:t>
+            </a:r>
+            <a:r>
+              <a:rPr/>
+              <a:t> — Picking Columns</a:t>
             </a:r>
           </a:p>
         </p:txBody>
@@ -4434,7 +4391,7 @@
             <a:spLocks noGrp="1"/>
           </p:cNvSpPr>
           <p:nvPr>
-            <p:ph idx="1"/>
+            <p:ph idx="1" sz="half"/>
           </p:nvPr>
         </p:nvSpPr>
         <p:spPr/>
@@ -4442,71 +4399,522 @@
           <a:bodyPr/>
           <a:lstStyle/>
           <a:p>
-            <a:pPr lvl="0" indent="0" marL="1270000">
+            <a:pPr lvl="0" indent="0">
               <a:buNone/>
             </a:pPr>
             <a:r>
-              <a:rPr sz="2000" b="1"/>
-              <a:t>Note</a:t>
-            </a:r>
-          </a:p>
-          <a:p>
-            <a:pPr lvl="0" indent="0" marL="1270000">
+              <a:rPr>
+                <a:solidFill>
+                  <a:srgbClr val="5E5E5E"/>
+                </a:solidFill>
+                <a:latin typeface="Courier"/>
+              </a:rPr>
+              <a:t># select() keeps the columns you name ------------------</a:t>
+            </a:r>
+            <a:br/>
+            <a:br/>
+            <a:r>
+              <a:rPr>
+                <a:solidFill>
+                  <a:srgbClr val="5E5E5E"/>
+                </a:solidFill>
+                <a:latin typeface="Courier"/>
+              </a:rPr>
+              <a:t># Keep only shade and mass</a:t>
+            </a:r>
+            <a:br/>
+            <a:r>
+              <a:rPr>
+                <a:solidFill>
+                  <a:srgbClr val="003B4F"/>
+                </a:solidFill>
+                <a:latin typeface="Courier"/>
+              </a:rPr>
+              <a:t>leaf_df </a:t>
+            </a:r>
+            <a:r>
+              <a:rPr>
+                <a:solidFill>
+                  <a:srgbClr val="5E5E5E"/>
+                </a:solidFill>
+                <a:latin typeface="Courier"/>
+              </a:rPr>
+              <a:t>%&gt;%</a:t>
+            </a:r>
+            <a:r>
+              <a:rPr>
+                <a:solidFill>
+                  <a:srgbClr val="003B4F"/>
+                </a:solidFill>
+                <a:latin typeface="Courier"/>
+              </a:rPr>
+              <a:t> </a:t>
+            </a:r>
+            <a:r>
+              <a:rPr>
+                <a:solidFill>
+                  <a:srgbClr val="4758AB"/>
+                </a:solidFill>
+                <a:latin typeface="Courier"/>
+              </a:rPr>
+              <a:t>select</a:t>
+            </a:r>
+            <a:r>
+              <a:rPr>
+                <a:solidFill>
+                  <a:srgbClr val="003B4F"/>
+                </a:solidFill>
+                <a:latin typeface="Courier"/>
+              </a:rPr>
+              <a:t>(shade, mass_g) </a:t>
+            </a:r>
+            <a:r>
+              <a:rPr>
+                <a:solidFill>
+                  <a:srgbClr val="5E5E5E"/>
+                </a:solidFill>
+                <a:latin typeface="Courier"/>
+              </a:rPr>
+              <a:t>%&gt;%</a:t>
+            </a:r>
+            <a:r>
+              <a:rPr>
+                <a:solidFill>
+                  <a:srgbClr val="003B4F"/>
+                </a:solidFill>
+                <a:latin typeface="Courier"/>
+              </a:rPr>
+              <a:t> </a:t>
+            </a:r>
+            <a:r>
+              <a:rPr>
+                <a:solidFill>
+                  <a:srgbClr val="4758AB"/>
+                </a:solidFill>
+                <a:latin typeface="Courier"/>
+              </a:rPr>
+              <a:t>head</a:t>
+            </a:r>
+            <a:r>
+              <a:rPr>
+                <a:solidFill>
+                  <a:srgbClr val="003B4F"/>
+                </a:solidFill>
+                <a:latin typeface="Courier"/>
+              </a:rPr>
+              <a:t>(</a:t>
+            </a:r>
+            <a:r>
+              <a:rPr>
+                <a:solidFill>
+                  <a:srgbClr val="AD0000"/>
+                </a:solidFill>
+                <a:latin typeface="Courier"/>
+              </a:rPr>
+              <a:t>2</a:t>
+            </a:r>
+            <a:r>
+              <a:rPr>
+                <a:solidFill>
+                  <a:srgbClr val="003B4F"/>
+                </a:solidFill>
+                <a:latin typeface="Courier"/>
+              </a:rPr>
+              <a:t>)</a:t>
+            </a:r>
+          </a:p>
+          <a:p>
+            <a:pPr lvl="0" indent="0">
               <a:buNone/>
             </a:pPr>
             <a:r>
-              <a:rPr sz="2000" b="1"/>
-              <a:t>🔮 Predict first:</a:t>
-            </a:r>
-            <a:r>
-              <a:rPr sz="2000"/>
+              <a:rPr>
+                <a:latin typeface="Courier"/>
+              </a:rPr>
+              <a:t># A tibble: 2 × 2
+  shade mass_g
+  &lt;chr&gt;  &lt;dbl&gt;
+1 sunny   0.4 
+2 sunny   0.48</a:t>
+            </a:r>
+          </a:p>
+          <a:p>
+            <a:pPr lvl="0" indent="0">
+              <a:buNone/>
+            </a:pPr>
+            <a:r>
+              <a:rPr>
+                <a:solidFill>
+                  <a:srgbClr val="5E5E5E"/>
+                </a:solidFill>
+                <a:latin typeface="Courier"/>
+              </a:rPr>
+              <a:t># Drop a column with a minus sign - what is left?</a:t>
+            </a:r>
+            <a:br/>
+            <a:r>
+              <a:rPr>
+                <a:solidFill>
+                  <a:srgbClr val="003B4F"/>
+                </a:solidFill>
+                <a:latin typeface="Courier"/>
+              </a:rPr>
+              <a:t>leaf_df </a:t>
+            </a:r>
+            <a:r>
+              <a:rPr>
+                <a:solidFill>
+                  <a:srgbClr val="5E5E5E"/>
+                </a:solidFill>
+                <a:latin typeface="Courier"/>
+              </a:rPr>
+              <a:t>%&gt;%</a:t>
+            </a:r>
+            <a:r>
+              <a:rPr>
+                <a:solidFill>
+                  <a:srgbClr val="003B4F"/>
+                </a:solidFill>
+                <a:latin typeface="Courier"/>
+              </a:rPr>
               <a:t> </a:t>
             </a:r>
             <a:r>
-              <a:rPr sz="2000">
-                <a:latin typeface="Courier"/>
-              </a:rPr>
-              <a:t>mass_g * 1000</a:t>
-            </a:r>
-            <a:r>
-              <a:rPr sz="2000"/>
-              <a:t> converts grams to milligrams. Before running: will </a:t>
-            </a:r>
-            <a:r>
-              <a:rPr sz="2000">
-                <a:latin typeface="Courier"/>
-              </a:rPr>
-              <a:t>mutate()</a:t>
-            </a:r>
-            <a:r>
-              <a:rPr sz="2000"/>
+              <a:rPr>
+                <a:solidFill>
+                  <a:srgbClr val="4758AB"/>
+                </a:solidFill>
+                <a:latin typeface="Courier"/>
+              </a:rPr>
+              <a:t>select</a:t>
+            </a:r>
+            <a:r>
+              <a:rPr>
+                <a:solidFill>
+                  <a:srgbClr val="003B4F"/>
+                </a:solidFill>
+                <a:latin typeface="Courier"/>
+              </a:rPr>
+              <a:t>(</a:t>
+            </a:r>
+            <a:r>
+              <a:rPr>
+                <a:solidFill>
+                  <a:srgbClr val="5E5E5E"/>
+                </a:solidFill>
+                <a:latin typeface="Courier"/>
+              </a:rPr>
+              <a:t>-</a:t>
+            </a:r>
+            <a:r>
+              <a:rPr>
+                <a:solidFill>
+                  <a:srgbClr val="003B4F"/>
+                </a:solidFill>
+                <a:latin typeface="Courier"/>
+              </a:rPr>
+              <a:t>paper_mass_g) </a:t>
+            </a:r>
+            <a:r>
+              <a:rPr>
+                <a:solidFill>
+                  <a:srgbClr val="5E5E5E"/>
+                </a:solidFill>
+                <a:latin typeface="Courier"/>
+              </a:rPr>
+              <a:t>%&gt;%</a:t>
+            </a:r>
+            <a:r>
+              <a:rPr>
+                <a:solidFill>
+                  <a:srgbClr val="003B4F"/>
+                </a:solidFill>
+                <a:latin typeface="Courier"/>
+              </a:rPr>
               <a:t> </a:t>
             </a:r>
             <a:r>
-              <a:rPr sz="2000" b="1"/>
-              <a:t>replace</a:t>
-            </a:r>
-            <a:r>
-              <a:rPr sz="2000"/>
+              <a:rPr>
+                <a:solidFill>
+                  <a:srgbClr val="4758AB"/>
+                </a:solidFill>
+                <a:latin typeface="Courier"/>
+              </a:rPr>
+              <a:t>names</a:t>
+            </a:r>
+            <a:r>
+              <a:rPr>
+                <a:solidFill>
+                  <a:srgbClr val="003B4F"/>
+                </a:solidFill>
+                <a:latin typeface="Courier"/>
+              </a:rPr>
+              <a:t>()</a:t>
+            </a:r>
+          </a:p>
+          <a:p>
+            <a:pPr lvl="0" indent="0">
+              <a:buNone/>
+            </a:pPr>
+            <a:r>
+              <a:rPr>
+                <a:latin typeface="Courier"/>
+              </a:rPr>
+              <a:t>[1] "twig_id"      "leaf_id"      "teams"        "shade"        "mass_g"      
+[6] "petiole_mm"   "thickness_mm"</a:t>
+            </a:r>
+          </a:p>
+          <a:p>
+            <a:pPr lvl="0" indent="0">
+              <a:buNone/>
+            </a:pPr>
+            <a:r>
+              <a:rPr>
+                <a:solidFill>
+                  <a:srgbClr val="5E5E5E"/>
+                </a:solidFill>
+                <a:latin typeface="Courier"/>
+              </a:rPr>
+              <a:t># Keep columns that start with a word</a:t>
+            </a:r>
+            <a:br/>
+            <a:r>
+              <a:rPr>
+                <a:solidFill>
+                  <a:srgbClr val="003B4F"/>
+                </a:solidFill>
+                <a:latin typeface="Courier"/>
+              </a:rPr>
+              <a:t>leaf_df </a:t>
+            </a:r>
+            <a:r>
+              <a:rPr>
+                <a:solidFill>
+                  <a:srgbClr val="5E5E5E"/>
+                </a:solidFill>
+                <a:latin typeface="Courier"/>
+              </a:rPr>
+              <a:t>%&gt;%</a:t>
+            </a:r>
+            <a:r>
+              <a:rPr>
+                <a:solidFill>
+                  <a:srgbClr val="003B4F"/>
+                </a:solidFill>
+                <a:latin typeface="Courier"/>
+              </a:rPr>
               <a:t> </a:t>
             </a:r>
             <a:r>
-              <a:rPr sz="2000">
-                <a:latin typeface="Courier"/>
-              </a:rPr>
-              <a:t>mass_g</a:t>
-            </a:r>
-            <a:r>
-              <a:rPr sz="2000"/>
-              <a:t> or </a:t>
-            </a:r>
-            <a:r>
-              <a:rPr sz="2000" b="1"/>
-              <a:t>add</a:t>
-            </a:r>
-            <a:r>
-              <a:rPr sz="2000"/>
-              <a:t> a new column? How many columns will the result have?</a:t>
+              <a:rPr>
+                <a:solidFill>
+                  <a:srgbClr val="4758AB"/>
+                </a:solidFill>
+                <a:latin typeface="Courier"/>
+              </a:rPr>
+              <a:t>select</a:t>
+            </a:r>
+            <a:r>
+              <a:rPr>
+                <a:solidFill>
+                  <a:srgbClr val="003B4F"/>
+                </a:solidFill>
+                <a:latin typeface="Courier"/>
+              </a:rPr>
+              <a:t>(</a:t>
+            </a:r>
+            <a:r>
+              <a:rPr>
+                <a:solidFill>
+                  <a:srgbClr val="4758AB"/>
+                </a:solidFill>
+                <a:latin typeface="Courier"/>
+              </a:rPr>
+              <a:t>starts_with</a:t>
+            </a:r>
+            <a:r>
+              <a:rPr>
+                <a:solidFill>
+                  <a:srgbClr val="003B4F"/>
+                </a:solidFill>
+                <a:latin typeface="Courier"/>
+              </a:rPr>
+              <a:t>(</a:t>
+            </a:r>
+            <a:r>
+              <a:rPr>
+                <a:solidFill>
+                  <a:srgbClr val="20794D"/>
+                </a:solidFill>
+                <a:latin typeface="Courier"/>
+              </a:rPr>
+              <a:t>"mass"</a:t>
+            </a:r>
+            <a:r>
+              <a:rPr>
+                <a:solidFill>
+                  <a:srgbClr val="003B4F"/>
+                </a:solidFill>
+                <a:latin typeface="Courier"/>
+              </a:rPr>
+              <a:t>)) </a:t>
+            </a:r>
+            <a:r>
+              <a:rPr>
+                <a:solidFill>
+                  <a:srgbClr val="5E5E5E"/>
+                </a:solidFill>
+                <a:latin typeface="Courier"/>
+              </a:rPr>
+              <a:t>%&gt;%</a:t>
+            </a:r>
+            <a:r>
+              <a:rPr>
+                <a:solidFill>
+                  <a:srgbClr val="003B4F"/>
+                </a:solidFill>
+                <a:latin typeface="Courier"/>
+              </a:rPr>
+              <a:t> </a:t>
+            </a:r>
+            <a:r>
+              <a:rPr>
+                <a:solidFill>
+                  <a:srgbClr val="4758AB"/>
+                </a:solidFill>
+                <a:latin typeface="Courier"/>
+              </a:rPr>
+              <a:t>head</a:t>
+            </a:r>
+            <a:r>
+              <a:rPr>
+                <a:solidFill>
+                  <a:srgbClr val="003B4F"/>
+                </a:solidFill>
+                <a:latin typeface="Courier"/>
+              </a:rPr>
+              <a:t>(</a:t>
+            </a:r>
+            <a:r>
+              <a:rPr>
+                <a:solidFill>
+                  <a:srgbClr val="AD0000"/>
+                </a:solidFill>
+                <a:latin typeface="Courier"/>
+              </a:rPr>
+              <a:t>2</a:t>
+            </a:r>
+            <a:r>
+              <a:rPr>
+                <a:solidFill>
+                  <a:srgbClr val="003B4F"/>
+                </a:solidFill>
+                <a:latin typeface="Courier"/>
+              </a:rPr>
+              <a:t>)</a:t>
+            </a:r>
+          </a:p>
+          <a:p>
+            <a:pPr lvl="0" indent="0">
+              <a:buNone/>
+            </a:pPr>
+            <a:r>
+              <a:rPr>
+                <a:latin typeface="Courier"/>
+              </a:rPr>
+              <a:t># A tibble: 2 × 1
+  mass_g
+   &lt;dbl&gt;
+1   0.4 
+2   0.48</a:t>
+            </a:r>
+          </a:p>
+        </p:txBody>
+      </p:sp>
+      <p:sp>
+        <p:nvSpPr>
+          <p:cNvPr id="4" name="Content Placeholder 3"/>
+          <p:cNvSpPr>
+            <a:spLocks noGrp="1"/>
+          </p:cNvSpPr>
+          <p:nvPr>
+            <p:ph idx="2" sz="half"/>
+          </p:nvPr>
+        </p:nvSpPr>
+        <p:spPr/>
+        <p:txBody>
+          <a:bodyPr/>
+          <a:lstStyle/>
+          <a:p>
+            <a:pPr lvl="0"/>
+            <a:r>
+              <a:rPr b="1"/>
+              <a:t>Why it matters:</a:t>
+            </a:r>
+            <a:r>
+              <a:rPr/>
+              <a:t> real data sets have 50–100+ columns and you rarely need all of them</a:t>
+            </a:r>
+          </a:p>
+          <a:p>
+            <a:pPr lvl="0"/>
+            <a:r>
+              <a:rPr b="1"/>
+              <a:t>Useful helpers:</a:t>
+            </a:r>
+          </a:p>
+          <a:p>
+            <a:pPr lvl="1"/>
+            <a:r>
+              <a:rPr>
+                <a:latin typeface="Courier"/>
+              </a:rPr>
+              <a:t>starts_with("x")</a:t>
+            </a:r>
+            <a:r>
+              <a:rPr/>
+              <a:t> — columns starting with “x”</a:t>
+            </a:r>
+          </a:p>
+          <a:p>
+            <a:pPr lvl="1"/>
+            <a:r>
+              <a:rPr>
+                <a:latin typeface="Courier"/>
+              </a:rPr>
+              <a:t>ends_with("_mm")</a:t>
+            </a:r>
+            <a:r>
+              <a:rPr/>
+              <a:t> — columns ending with “_mm”</a:t>
+            </a:r>
+          </a:p>
+          <a:p>
+            <a:pPr lvl="1"/>
+            <a:r>
+              <a:rPr>
+                <a:latin typeface="Courier"/>
+              </a:rPr>
+              <a:t>contains("mass")</a:t>
+            </a:r>
+            <a:r>
+              <a:rPr/>
+              <a:t> — columns containing “mass”</a:t>
+            </a:r>
+          </a:p>
+          <a:p>
+            <a:pPr lvl="0" indent="0" marL="0">
+              <a:buNone/>
+            </a:pPr>
+            <a:r>
+              <a:rPr/>
+              <a:t>📖 </a:t>
+            </a:r>
+            <a:r>
+              <a:rPr>
+                <a:hlinkClick r:id="rId2"/>
+              </a:rPr>
+              <a:t>R4DS §3.3</a:t>
             </a:r>
           </a:p>
         </p:txBody>
@@ -4535,713 +4943,48 @@
       </p:grpSpPr>
       <p:sp>
         <p:nvSpPr>
-          <p:cNvPr id="3" name="Content Placeholder 2"/>
-          <p:cNvSpPr>
-            <a:spLocks noGrp="1"/>
-          </p:cNvSpPr>
-          <p:nvPr>
-            <p:ph idx="1" sz="half"/>
-          </p:nvPr>
-        </p:nvSpPr>
-        <p:spPr/>
+          <p:cNvPr id="2" name="Title 1"/>
+          <p:cNvSpPr>
+            <a:spLocks noGrp="1"/>
+          </p:cNvSpPr>
+          <p:nvPr>
+            <p:ph type="title"/>
+          </p:nvPr>
+        </p:nvSpPr>
+        <p:spPr>
+          <a:xfrm>
+            <a:off x="0" y="0"/>
+            <a:ext cx="9144000" cy="582780"/>
+          </a:xfrm>
+        </p:spPr>
         <p:txBody>
           <a:bodyPr/>
           <a:lstStyle/>
           <a:p>
-            <a:pPr lvl="0" indent="0">
+            <a:pPr lvl="0" indent="0" marL="0">
               <a:buNone/>
             </a:pPr>
             <a:r>
               <a:rPr>
-                <a:solidFill>
-                  <a:srgbClr val="5E5E5E"/>
-                </a:solidFill>
-                <a:latin typeface="Courier"/>
-              </a:rPr>
-              <a:t># mutate() adds a new column to the data frame ---------</a:t>
-            </a:r>
-            <a:br/>
-            <a:br/>
-            <a:r>
-              <a:rPr>
-                <a:solidFill>
-                  <a:srgbClr val="5E5E5E"/>
-                </a:solidFill>
-                <a:latin typeface="Courier"/>
-              </a:rPr>
-              <a:t># Convert grams to milligrams</a:t>
-            </a:r>
-            <a:br/>
-            <a:r>
-              <a:rPr>
-                <a:solidFill>
-                  <a:srgbClr val="003B4F"/>
-                </a:solidFill>
-                <a:latin typeface="Courier"/>
-              </a:rPr>
-              <a:t>leaf_df </a:t>
-            </a:r>
-            <a:r>
-              <a:rPr>
-                <a:solidFill>
-                  <a:srgbClr val="5E5E5E"/>
-                </a:solidFill>
-                <a:latin typeface="Courier"/>
-              </a:rPr>
-              <a:t>%&gt;%</a:t>
-            </a:r>
-            <a:br/>
-            <a:r>
-              <a:rPr>
-                <a:solidFill>
-                  <a:srgbClr val="003B4F"/>
-                </a:solidFill>
-                <a:latin typeface="Courier"/>
-              </a:rPr>
-              <a:t>  </a:t>
-            </a:r>
-            <a:r>
-              <a:rPr>
-                <a:solidFill>
-                  <a:srgbClr val="4758AB"/>
-                </a:solidFill>
-                <a:latin typeface="Courier"/>
-              </a:rPr>
-              <a:t>mutate</a:t>
-            </a:r>
-            <a:r>
-              <a:rPr>
-                <a:solidFill>
-                  <a:srgbClr val="003B4F"/>
-                </a:solidFill>
-                <a:latin typeface="Courier"/>
-              </a:rPr>
-              <a:t>(</a:t>
-            </a:r>
-            <a:r>
-              <a:rPr>
-                <a:solidFill>
-                  <a:srgbClr val="657422"/>
-                </a:solidFill>
-                <a:latin typeface="Courier"/>
-              </a:rPr>
-              <a:t>mass_mg =</a:t>
-            </a:r>
-            <a:r>
-              <a:rPr>
-                <a:solidFill>
-                  <a:srgbClr val="003B4F"/>
-                </a:solidFill>
-                <a:latin typeface="Courier"/>
-              </a:rPr>
-              <a:t> mass_g </a:t>
-            </a:r>
-            <a:r>
-              <a:rPr>
-                <a:solidFill>
-                  <a:srgbClr val="5E5E5E"/>
-                </a:solidFill>
-                <a:latin typeface="Courier"/>
-              </a:rPr>
-              <a:t>*</a:t>
-            </a:r>
-            <a:r>
-              <a:rPr>
-                <a:solidFill>
-                  <a:srgbClr val="003B4F"/>
-                </a:solidFill>
-                <a:latin typeface="Courier"/>
-              </a:rPr>
-              <a:t> </a:t>
-            </a:r>
-            <a:r>
-              <a:rPr>
-                <a:solidFill>
-                  <a:srgbClr val="AD0000"/>
-                </a:solidFill>
-                <a:latin typeface="Courier"/>
-              </a:rPr>
-              <a:t>1000</a:t>
-            </a:r>
-            <a:r>
-              <a:rPr>
-                <a:solidFill>
-                  <a:srgbClr val="003B4F"/>
-                </a:solidFill>
-                <a:latin typeface="Courier"/>
-              </a:rPr>
-              <a:t>) </a:t>
-            </a:r>
-            <a:r>
-              <a:rPr>
-                <a:solidFill>
-                  <a:srgbClr val="5E5E5E"/>
-                </a:solidFill>
-                <a:latin typeface="Courier"/>
-              </a:rPr>
-              <a:t>%&gt;%</a:t>
-            </a:r>
-            <a:br/>
-            <a:r>
-              <a:rPr>
-                <a:solidFill>
-                  <a:srgbClr val="003B4F"/>
-                </a:solidFill>
-                <a:latin typeface="Courier"/>
-              </a:rPr>
-              <a:t>  </a:t>
-            </a:r>
-            <a:r>
-              <a:rPr>
-                <a:solidFill>
-                  <a:srgbClr val="4758AB"/>
-                </a:solidFill>
-                <a:latin typeface="Courier"/>
-              </a:rPr>
-              <a:t>head</a:t>
-            </a:r>
-            <a:r>
-              <a:rPr>
-                <a:solidFill>
-                  <a:srgbClr val="003B4F"/>
-                </a:solidFill>
-                <a:latin typeface="Courier"/>
-              </a:rPr>
-              <a:t>()</a:t>
-            </a:r>
-          </a:p>
-          <a:p>
-            <a:pPr lvl="0" indent="0">
-              <a:buNone/>
-            </a:pPr>
-            <a:r>
-              <a:rPr>
-                <a:latin typeface="Courier"/>
-              </a:rPr>
-              <a:t># A tibble: 6 × 9
-  twig_id leaf_id teams shade mass_g petiole_mm thickness_mm
-  &lt;chr&gt;   &lt;chr&gt;   &lt;chr&gt; &lt;chr&gt;  &lt;dbl&gt;      &lt;dbl&gt;        &lt;dbl&gt;
-1 &lt;NA&gt;    &lt;NA&gt;    12345 sunny   0.4          79         0.15
-2 &lt;NA&gt;    &lt;NA&gt;    12345 sunny   0.48         63         0.14
-3 &lt;NA&gt;    &lt;NA&gt;    12345 sunny   0.34         68         0.14
-4 &lt;NA&gt;    &lt;NA&gt;    12345 sunny   0.65         35         0.15
-5 &lt;NA&gt;    &lt;NA&gt;    12345 sunny   0.27         34         0.11
-6 &lt;NA&gt;    &lt;NA&gt;    12345 sunny   0.43         40         0.16
-# ℹ 2 more variables: paper_mass_g &lt;dbl&gt;, mass_mg &lt;dbl&gt;</a:t>
-            </a:r>
-          </a:p>
-          <a:p>
-            <a:pPr lvl="0" indent="0">
-              <a:buNone/>
-            </a:pPr>
-            <a:r>
-              <a:rPr>
-                <a:solidFill>
-                  <a:srgbClr val="5E5E5E"/>
-                </a:solidFill>
-                <a:latin typeface="Courier"/>
-              </a:rPr>
-              <a:t># Add a size category based on mass</a:t>
-            </a:r>
-            <a:br/>
-            <a:r>
-              <a:rPr>
-                <a:solidFill>
-                  <a:srgbClr val="003B4F"/>
-                </a:solidFill>
-                <a:latin typeface="Courier"/>
-              </a:rPr>
-              <a:t>leaf_df </a:t>
-            </a:r>
-            <a:r>
-              <a:rPr>
-                <a:solidFill>
-                  <a:srgbClr val="5E5E5E"/>
-                </a:solidFill>
-                <a:latin typeface="Courier"/>
-              </a:rPr>
-              <a:t>%&gt;%</a:t>
-            </a:r>
-            <a:br/>
-            <a:r>
-              <a:rPr>
-                <a:solidFill>
-                  <a:srgbClr val="003B4F"/>
-                </a:solidFill>
-                <a:latin typeface="Courier"/>
-              </a:rPr>
-              <a:t>  </a:t>
-            </a:r>
-            <a:r>
-              <a:rPr>
-                <a:solidFill>
-                  <a:srgbClr val="4758AB"/>
-                </a:solidFill>
-                <a:latin typeface="Courier"/>
-              </a:rPr>
-              <a:t>mutate</a:t>
-            </a:r>
-            <a:r>
-              <a:rPr>
-                <a:solidFill>
-                  <a:srgbClr val="003B4F"/>
-                </a:solidFill>
-                <a:latin typeface="Courier"/>
-              </a:rPr>
-              <a:t>(</a:t>
-            </a:r>
-            <a:r>
-              <a:rPr>
-                <a:solidFill>
-                  <a:srgbClr val="657422"/>
-                </a:solidFill>
-                <a:latin typeface="Courier"/>
-              </a:rPr>
-              <a:t>size_class =</a:t>
-            </a:r>
-            <a:r>
-              <a:rPr>
-                <a:solidFill>
-                  <a:srgbClr val="003B4F"/>
-                </a:solidFill>
-                <a:latin typeface="Courier"/>
-              </a:rPr>
-              <a:t> </a:t>
-            </a:r>
-            <a:r>
-              <a:rPr>
-                <a:solidFill>
-                  <a:srgbClr val="4758AB"/>
-                </a:solidFill>
-                <a:latin typeface="Courier"/>
-              </a:rPr>
-              <a:t>if_else</a:t>
-            </a:r>
-            <a:r>
-              <a:rPr>
-                <a:solidFill>
-                  <a:srgbClr val="003B4F"/>
-                </a:solidFill>
-                <a:latin typeface="Courier"/>
-              </a:rPr>
-              <a:t>(mass_g </a:t>
-            </a:r>
-            <a:r>
-              <a:rPr>
-                <a:solidFill>
-                  <a:srgbClr val="5E5E5E"/>
-                </a:solidFill>
-                <a:latin typeface="Courier"/>
-              </a:rPr>
-              <a:t>&gt;</a:t>
-            </a:r>
-            <a:r>
-              <a:rPr>
-                <a:solidFill>
-                  <a:srgbClr val="003B4F"/>
-                </a:solidFill>
-                <a:latin typeface="Courier"/>
-              </a:rPr>
-              <a:t> </a:t>
-            </a:r>
-            <a:r>
-              <a:rPr>
-                <a:solidFill>
-                  <a:srgbClr val="AD0000"/>
-                </a:solidFill>
-                <a:latin typeface="Courier"/>
-              </a:rPr>
-              <a:t>0.5</a:t>
-            </a:r>
-            <a:r>
-              <a:rPr>
-                <a:solidFill>
-                  <a:srgbClr val="003B4F"/>
-                </a:solidFill>
-                <a:latin typeface="Courier"/>
-              </a:rPr>
-              <a:t>, </a:t>
-            </a:r>
-            <a:r>
-              <a:rPr>
-                <a:solidFill>
-                  <a:srgbClr val="20794D"/>
-                </a:solidFill>
-                <a:latin typeface="Courier"/>
-              </a:rPr>
-              <a:t>"large"</a:t>
-            </a:r>
-            <a:r>
-              <a:rPr>
-                <a:solidFill>
-                  <a:srgbClr val="003B4F"/>
-                </a:solidFill>
-                <a:latin typeface="Courier"/>
-              </a:rPr>
-              <a:t>,</a:t>
-            </a:r>
-            <a:br/>
-            <a:r>
-              <a:rPr>
-                <a:solidFill>
-                  <a:srgbClr val="003B4F"/>
-                </a:solidFill>
-                <a:latin typeface="Courier"/>
-              </a:rPr>
-              <a:t>                              </a:t>
-            </a:r>
-            <a:r>
-              <a:rPr>
-                <a:solidFill>
-                  <a:srgbClr val="20794D"/>
-                </a:solidFill>
-                <a:latin typeface="Courier"/>
-              </a:rPr>
-              <a:t>"small"</a:t>
-            </a:r>
-            <a:r>
-              <a:rPr>
-                <a:solidFill>
-                  <a:srgbClr val="003B4F"/>
-                </a:solidFill>
-                <a:latin typeface="Courier"/>
-              </a:rPr>
-              <a:t>)) </a:t>
-            </a:r>
-            <a:r>
-              <a:rPr>
-                <a:solidFill>
-                  <a:srgbClr val="5E5E5E"/>
-                </a:solidFill>
-                <a:latin typeface="Courier"/>
-              </a:rPr>
-              <a:t>%&gt;%</a:t>
-            </a:r>
-            <a:br/>
-            <a:r>
-              <a:rPr>
-                <a:solidFill>
-                  <a:srgbClr val="003B4F"/>
-                </a:solidFill>
-                <a:latin typeface="Courier"/>
-              </a:rPr>
-              <a:t>  </a:t>
-            </a:r>
-            <a:r>
-              <a:rPr>
-                <a:solidFill>
-                  <a:srgbClr val="4758AB"/>
-                </a:solidFill>
-                <a:latin typeface="Courier"/>
-              </a:rPr>
-              <a:t>head</a:t>
-            </a:r>
-            <a:r>
-              <a:rPr>
-                <a:solidFill>
-                  <a:srgbClr val="003B4F"/>
-                </a:solidFill>
-                <a:latin typeface="Courier"/>
-              </a:rPr>
-              <a:t>()</a:t>
-            </a:r>
-          </a:p>
-          <a:p>
-            <a:pPr lvl="0" indent="0">
-              <a:buNone/>
-            </a:pPr>
-            <a:r>
-              <a:rPr>
-                <a:latin typeface="Courier"/>
-              </a:rPr>
-              <a:t># A tibble: 6 × 9
-  twig_id leaf_id teams shade mass_g petiole_mm thickness_mm
-  &lt;chr&gt;   &lt;chr&gt;   &lt;chr&gt; &lt;chr&gt;  &lt;dbl&gt;      &lt;dbl&gt;        &lt;dbl&gt;
-1 &lt;NA&gt;    &lt;NA&gt;    12345 sunny   0.4          79         0.15
-2 &lt;NA&gt;    &lt;NA&gt;    12345 sunny   0.48         63         0.14
-3 &lt;NA&gt;    &lt;NA&gt;    12345 sunny   0.34         68         0.14
-4 &lt;NA&gt;    &lt;NA&gt;    12345 sunny   0.65         35         0.15
-5 &lt;NA&gt;    &lt;NA&gt;    12345 sunny   0.27         34         0.11
-6 &lt;NA&gt;    &lt;NA&gt;    12345 sunny   0.43         40         0.16
-# ℹ 2 more variables: paper_mass_g &lt;dbl&gt;, size_class &lt;chr&gt;</a:t>
-            </a:r>
-          </a:p>
-          <a:p>
-            <a:pPr lvl="0" indent="0">
-              <a:buNone/>
-            </a:pPr>
-            <a:r>
-              <a:rPr>
-                <a:solidFill>
-                  <a:srgbClr val="5E5E5E"/>
-                </a:solidFill>
-                <a:latin typeface="Courier"/>
-              </a:rPr>
-              <a:t># mutate() can create several new columns at once</a:t>
-            </a:r>
-            <a:br/>
-            <a:r>
-              <a:rPr>
-                <a:solidFill>
-                  <a:srgbClr val="003B4F"/>
-                </a:solidFill>
-                <a:latin typeface="Courier"/>
-              </a:rPr>
-              <a:t>leaf_df </a:t>
-            </a:r>
-            <a:r>
-              <a:rPr>
-                <a:solidFill>
-                  <a:srgbClr val="5E5E5E"/>
-                </a:solidFill>
-                <a:latin typeface="Courier"/>
-              </a:rPr>
-              <a:t>%&gt;%</a:t>
-            </a:r>
-            <a:br/>
-            <a:r>
-              <a:rPr>
-                <a:solidFill>
-                  <a:srgbClr val="003B4F"/>
-                </a:solidFill>
-                <a:latin typeface="Courier"/>
-              </a:rPr>
-              <a:t>  </a:t>
-            </a:r>
-            <a:r>
-              <a:rPr>
-                <a:solidFill>
-                  <a:srgbClr val="4758AB"/>
-                </a:solidFill>
-                <a:latin typeface="Courier"/>
-              </a:rPr>
-              <a:t>mutate</a:t>
-            </a:r>
-            <a:r>
-              <a:rPr>
-                <a:solidFill>
-                  <a:srgbClr val="003B4F"/>
-                </a:solidFill>
-                <a:latin typeface="Courier"/>
-              </a:rPr>
-              <a:t>(</a:t>
-            </a:r>
-            <a:br/>
-            <a:r>
-              <a:rPr>
-                <a:solidFill>
-                  <a:srgbClr val="003B4F"/>
-                </a:solidFill>
-                <a:latin typeface="Courier"/>
-              </a:rPr>
-              <a:t>    </a:t>
-            </a:r>
-            <a:r>
-              <a:rPr>
-                <a:solidFill>
-                  <a:srgbClr val="657422"/>
-                </a:solidFill>
-                <a:latin typeface="Courier"/>
-              </a:rPr>
-              <a:t>mass_mg    =</a:t>
-            </a:r>
-            <a:r>
-              <a:rPr>
-                <a:solidFill>
-                  <a:srgbClr val="003B4F"/>
-                </a:solidFill>
-                <a:latin typeface="Courier"/>
-              </a:rPr>
-              <a:t> mass_g </a:t>
-            </a:r>
-            <a:r>
-              <a:rPr>
-                <a:solidFill>
-                  <a:srgbClr val="5E5E5E"/>
-                </a:solidFill>
-                <a:latin typeface="Courier"/>
-              </a:rPr>
-              <a:t>*</a:t>
-            </a:r>
-            <a:r>
-              <a:rPr>
-                <a:solidFill>
-                  <a:srgbClr val="003B4F"/>
-                </a:solidFill>
-                <a:latin typeface="Courier"/>
-              </a:rPr>
-              <a:t> </a:t>
-            </a:r>
-            <a:r>
-              <a:rPr>
-                <a:solidFill>
-                  <a:srgbClr val="AD0000"/>
-                </a:solidFill>
-                <a:latin typeface="Courier"/>
-              </a:rPr>
-              <a:t>1000</a:t>
-            </a:r>
-            <a:r>
-              <a:rPr>
-                <a:solidFill>
-                  <a:srgbClr val="003B4F"/>
-                </a:solidFill>
-                <a:latin typeface="Courier"/>
-              </a:rPr>
-              <a:t>,</a:t>
-            </a:r>
-            <a:br/>
-            <a:r>
-              <a:rPr>
-                <a:solidFill>
-                  <a:srgbClr val="003B4F"/>
-                </a:solidFill>
-                <a:latin typeface="Courier"/>
-              </a:rPr>
-              <a:t>    </a:t>
-            </a:r>
-            <a:r>
-              <a:rPr>
-                <a:solidFill>
-                  <a:srgbClr val="657422"/>
-                </a:solidFill>
-                <a:latin typeface="Courier"/>
-              </a:rPr>
-              <a:t>petiole_cm =</a:t>
-            </a:r>
-            <a:r>
-              <a:rPr>
-                <a:solidFill>
-                  <a:srgbClr val="003B4F"/>
-                </a:solidFill>
-                <a:latin typeface="Courier"/>
-              </a:rPr>
-              <a:t> petiole_mm </a:t>
-            </a:r>
-            <a:r>
-              <a:rPr>
-                <a:solidFill>
-                  <a:srgbClr val="5E5E5E"/>
-                </a:solidFill>
-                <a:latin typeface="Courier"/>
-              </a:rPr>
-              <a:t>/</a:t>
-            </a:r>
-            <a:r>
-              <a:rPr>
-                <a:solidFill>
-                  <a:srgbClr val="003B4F"/>
-                </a:solidFill>
-                <a:latin typeface="Courier"/>
-              </a:rPr>
-              <a:t> </a:t>
-            </a:r>
-            <a:r>
-              <a:rPr>
-                <a:solidFill>
-                  <a:srgbClr val="AD0000"/>
-                </a:solidFill>
-                <a:latin typeface="Courier"/>
-              </a:rPr>
-              <a:t>10</a:t>
-            </a:r>
-            <a:r>
-              <a:rPr>
-                <a:solidFill>
-                  <a:srgbClr val="003B4F"/>
-                </a:solidFill>
-                <a:latin typeface="Courier"/>
-              </a:rPr>
-              <a:t> </a:t>
-            </a:r>
-            <a:r>
-              <a:rPr>
-                <a:solidFill>
-                  <a:srgbClr val="5E5E5E"/>
-                </a:solidFill>
-                <a:latin typeface="Courier"/>
-              </a:rPr>
-              <a:t># petiole length in cm</a:t>
-            </a:r>
-            <a:br/>
-            <a:r>
-              <a:rPr>
-                <a:solidFill>
-                  <a:srgbClr val="003B4F"/>
-                </a:solidFill>
-                <a:latin typeface="Courier"/>
-              </a:rPr>
-              <a:t>  ) </a:t>
-            </a:r>
-            <a:r>
-              <a:rPr>
-                <a:solidFill>
-                  <a:srgbClr val="5E5E5E"/>
-                </a:solidFill>
-                <a:latin typeface="Courier"/>
-              </a:rPr>
-              <a:t>%&gt;%</a:t>
-            </a:r>
-            <a:br/>
-            <a:r>
-              <a:rPr>
-                <a:solidFill>
-                  <a:srgbClr val="003B4F"/>
-                </a:solidFill>
-                <a:latin typeface="Courier"/>
-              </a:rPr>
-              <a:t>  </a:t>
-            </a:r>
-            <a:r>
-              <a:rPr>
-                <a:solidFill>
-                  <a:srgbClr val="4758AB"/>
-                </a:solidFill>
-                <a:latin typeface="Courier"/>
-              </a:rPr>
-              <a:t>head</a:t>
-            </a:r>
-            <a:r>
-              <a:rPr>
-                <a:solidFill>
-                  <a:srgbClr val="003B4F"/>
-                </a:solidFill>
-                <a:latin typeface="Courier"/>
-              </a:rPr>
-              <a:t>()</a:t>
-            </a:r>
-          </a:p>
-          <a:p>
-            <a:pPr lvl="0" indent="0">
-              <a:buNone/>
-            </a:pPr>
-            <a:r>
-              <a:rPr>
-                <a:latin typeface="Courier"/>
-              </a:rPr>
-              <a:t># A tibble: 6 × 10
-  twig_id leaf_id teams shade mass_g petiole_mm thickness_mm
-  &lt;chr&gt;   &lt;chr&gt;   &lt;chr&gt; &lt;chr&gt;  &lt;dbl&gt;      &lt;dbl&gt;        &lt;dbl&gt;
-1 &lt;NA&gt;    &lt;NA&gt;    12345 sunny   0.4          79         0.15
-2 &lt;NA&gt;    &lt;NA&gt;    12345 sunny   0.48         63         0.14
-3 &lt;NA&gt;    &lt;NA&gt;    12345 sunny   0.34         68         0.14
-4 &lt;NA&gt;    &lt;NA&gt;    12345 sunny   0.65         35         0.15
-5 &lt;NA&gt;    &lt;NA&gt;    12345 sunny   0.27         34         0.11
-6 &lt;NA&gt;    &lt;NA&gt;    12345 sunny   0.43         40         0.16
-# ℹ 3 more variables: paper_mass_g &lt;dbl&gt;, mass_mg &lt;dbl&gt;,
-#   petiole_cm &lt;dbl&gt;</a:t>
-            </a:r>
-          </a:p>
-        </p:txBody>
-      </p:sp>
-      <p:sp>
-        <p:nvSpPr>
-          <p:cNvPr id="4" name="Content Placeholder 3"/>
-          <p:cNvSpPr>
-            <a:spLocks noGrp="1"/>
-          </p:cNvSpPr>
-          <p:nvPr>
-            <p:ph idx="2" sz="half"/>
+                <a:latin typeface="Courier"/>
+              </a:rPr>
+              <a:t>mutate()</a:t>
+            </a:r>
+            <a:r>
+              <a:rPr/>
+              <a:t> — Creating New Columns</a:t>
+            </a:r>
+          </a:p>
+        </p:txBody>
+      </p:sp>
+      <p:sp>
+        <p:nvSpPr>
+          <p:cNvPr id="3" name="Content Placeholder 2"/>
+          <p:cNvSpPr>
+            <a:spLocks noGrp="1"/>
+          </p:cNvSpPr>
+          <p:nvPr>
+            <p:ph idx="1"/>
           </p:nvPr>
         </p:nvSpPr>
         <p:spPr/>
@@ -5249,44 +4992,6 @@
           <a:bodyPr/>
           <a:lstStyle/>
           <a:p>
-            <a:pPr lvl="0"/>
-            <a:r>
-              <a:rPr>
-                <a:latin typeface="Courier"/>
-              </a:rPr>
-              <a:t>mutate()</a:t>
-            </a:r>
-            <a:r>
-              <a:rPr/>
-              <a:t> keeps </a:t>
-            </a:r>
-            <a:r>
-              <a:rPr b="1"/>
-              <a:t>all existing columns</a:t>
-            </a:r>
-            <a:r>
-              <a:rPr/>
-              <a:t> and adds new ones</a:t>
-            </a:r>
-          </a:p>
-          <a:p>
-            <a:pPr lvl="0"/>
-            <a:r>
-              <a:rPr b="1"/>
-              <a:t>Use </a:t>
-            </a:r>
-            <a:r>
-              <a:rPr b="1">
-                <a:latin typeface="Courier"/>
-              </a:rPr>
-              <a:t>if_else(condition, value_if_true, value_if_false)</a:t>
-            </a:r>
-            <a:r>
-              <a:rPr b="1"/>
-              <a:t> to create categories</a:t>
-            </a:r>
-          </a:p>
-          <a:p>
             <a:pPr lvl="0" indent="0" marL="1270000">
               <a:buNone/>
             </a:pPr>
@@ -5301,62 +5006,57 @@
             </a:pPr>
             <a:r>
               <a:rPr sz="2000" b="1"/>
-              <a:t>✅ Watch the column count</a:t>
-            </a:r>
-          </a:p>
-          <a:p>
-            <a:pPr lvl="0" indent="0" marL="1270000">
-              <a:buNone/>
-            </a:pPr>
+              <a:t>🔮 Predict first:</a:t>
+            </a:r>
+            <a:r>
+              <a:rPr sz="2000"/>
+              <a:t> </a:t>
+            </a:r>
             <a:r>
               <a:rPr sz="2000">
                 <a:latin typeface="Courier"/>
               </a:rPr>
+              <a:t>mass_g * 1000</a:t>
+            </a:r>
+            <a:r>
+              <a:rPr sz="2000"/>
+              <a:t> converts grams to milligrams. Before running: will </a:t>
+            </a:r>
+            <a:r>
+              <a:rPr sz="2000">
+                <a:latin typeface="Courier"/>
+              </a:rPr>
               <a:t>mutate()</a:t>
             </a:r>
             <a:r>
               <a:rPr sz="2000"/>
-              <a:t> never removes columns — it adds to the right of your data frame, so </a:t>
+              <a:t> </a:t>
+            </a:r>
+            <a:r>
+              <a:rPr sz="2000" b="1"/>
+              <a:t>replace</a:t>
+            </a:r>
+            <a:r>
+              <a:rPr sz="2000"/>
+              <a:t> </a:t>
             </a:r>
             <a:r>
               <a:rPr sz="2000">
                 <a:latin typeface="Courier"/>
               </a:rPr>
-              <a:t>leaf_df</a:t>
+              <a:t>mass_g</a:t>
             </a:r>
             <a:r>
               <a:rPr sz="2000"/>
-              <a:t> gains one column per new variable you create.</a:t>
-            </a:r>
-          </a:p>
-          <a:p>
-            <a:pPr lvl="0" indent="0" marL="1270000">
-              <a:buNone/>
-            </a:pPr>
+              <a:t> or </a:t>
+            </a:r>
+            <a:r>
+              <a:rPr sz="2000" b="1"/>
+              <a:t>add</a:t>
+            </a:r>
             <a:r>
               <a:rPr sz="2000"/>
-              <a:t>To overwrite a column instead of adding one, reuse the same name on the left: </a:t>
-            </a:r>
-            <a:r>
-              <a:rPr sz="2000">
-                <a:latin typeface="Courier"/>
-              </a:rPr>
-              <a:t>mutate(mass_g = round(mass_g, 2))</a:t>
-            </a:r>
-          </a:p>
-          <a:p>
-            <a:pPr lvl="0" indent="0" marL="0">
-              <a:buNone/>
-            </a:pPr>
-            <a:r>
-              <a:rPr/>
-              <a:t>📖 </a:t>
-            </a:r>
-            <a:r>
-              <a:rPr>
-                <a:hlinkClick r:id="rId2"/>
-              </a:rPr>
-              <a:t>R4DS §3.3</a:t>
+              <a:t> a new column? How many columns will the result have?</a:t>
             </a:r>
           </a:p>
         </p:txBody>
@@ -5385,51 +5085,226 @@
       </p:grpSpPr>
       <p:sp>
         <p:nvSpPr>
-          <p:cNvPr id="2" name="Title 1"/>
-          <p:cNvSpPr>
-            <a:spLocks noGrp="1"/>
-          </p:cNvSpPr>
-          <p:nvPr>
-            <p:ph type="title"/>
-          </p:nvPr>
-        </p:nvSpPr>
-        <p:spPr>
-          <a:xfrm>
-            <a:off x="0" y="0"/>
-            <a:ext cx="9144000" cy="602780"/>
-          </a:xfrm>
-          <a:solidFill>
-            <a:srgbClr val="1A1A2E"/>
-          </a:solidFill>
-        </p:spPr>
+          <p:cNvPr id="3" name="Content Placeholder 2"/>
+          <p:cNvSpPr>
+            <a:spLocks noGrp="1"/>
+          </p:cNvSpPr>
+          <p:nvPr>
+            <p:ph idx="1" sz="half"/>
+          </p:nvPr>
+        </p:nvSpPr>
+        <p:spPr/>
         <p:txBody>
           <a:bodyPr/>
           <a:lstStyle/>
           <a:p>
-            <a:pPr lvl="0" indent="0" marL="0">
+            <a:pPr lvl="0" indent="0">
               <a:buNone/>
             </a:pPr>
             <a:r>
               <a:rPr>
-                <a:latin typeface="Courier"/>
-              </a:rPr>
-              <a:t>arrange()</a:t>
-            </a:r>
-            <a:r>
-              <a:rPr/>
-              <a:t> — Sorting Rows</a:t>
-            </a:r>
-          </a:p>
-        </p:txBody>
-      </p:sp>
-      <p:sp>
-        <p:nvSpPr>
-          <p:cNvPr id="3" name="Content Placeholder 2"/>
-          <p:cNvSpPr>
-            <a:spLocks noGrp="1"/>
-          </p:cNvSpPr>
-          <p:nvPr>
-            <p:ph idx="1" sz="half"/>
+                <a:solidFill>
+                  <a:srgbClr val="5E5E5E"/>
+                </a:solidFill>
+                <a:latin typeface="Courier"/>
+              </a:rPr>
+              <a:t># mutate() adds a new column to the data frame ---------</a:t>
+            </a:r>
+            <a:br/>
+            <a:br/>
+            <a:r>
+              <a:rPr>
+                <a:solidFill>
+                  <a:srgbClr val="5E5E5E"/>
+                </a:solidFill>
+                <a:latin typeface="Courier"/>
+              </a:rPr>
+              <a:t># Convert grams to milligrams</a:t>
+            </a:r>
+            <a:br/>
+            <a:r>
+              <a:rPr>
+                <a:solidFill>
+                  <a:srgbClr val="003B4F"/>
+                </a:solidFill>
+                <a:latin typeface="Courier"/>
+              </a:rPr>
+              <a:t>leaf_df </a:t>
+            </a:r>
+            <a:r>
+              <a:rPr>
+                <a:solidFill>
+                  <a:srgbClr val="5E5E5E"/>
+                </a:solidFill>
+                <a:latin typeface="Courier"/>
+              </a:rPr>
+              <a:t>%&gt;%</a:t>
+            </a:r>
+            <a:br/>
+            <a:r>
+              <a:rPr>
+                <a:solidFill>
+                  <a:srgbClr val="003B4F"/>
+                </a:solidFill>
+                <a:latin typeface="Courier"/>
+              </a:rPr>
+              <a:t>  </a:t>
+            </a:r>
+            <a:r>
+              <a:rPr>
+                <a:solidFill>
+                  <a:srgbClr val="4758AB"/>
+                </a:solidFill>
+                <a:latin typeface="Courier"/>
+              </a:rPr>
+              <a:t>mutate</a:t>
+            </a:r>
+            <a:r>
+              <a:rPr>
+                <a:solidFill>
+                  <a:srgbClr val="003B4F"/>
+                </a:solidFill>
+                <a:latin typeface="Courier"/>
+              </a:rPr>
+              <a:t>(</a:t>
+            </a:r>
+            <a:r>
+              <a:rPr>
+                <a:solidFill>
+                  <a:srgbClr val="657422"/>
+                </a:solidFill>
+                <a:latin typeface="Courier"/>
+              </a:rPr>
+              <a:t>mass_mg =</a:t>
+            </a:r>
+            <a:r>
+              <a:rPr>
+                <a:solidFill>
+                  <a:srgbClr val="003B4F"/>
+                </a:solidFill>
+                <a:latin typeface="Courier"/>
+              </a:rPr>
+              <a:t> mass_g </a:t>
+            </a:r>
+            <a:r>
+              <a:rPr>
+                <a:solidFill>
+                  <a:srgbClr val="5E5E5E"/>
+                </a:solidFill>
+                <a:latin typeface="Courier"/>
+              </a:rPr>
+              <a:t>*</a:t>
+            </a:r>
+            <a:r>
+              <a:rPr>
+                <a:solidFill>
+                  <a:srgbClr val="003B4F"/>
+                </a:solidFill>
+                <a:latin typeface="Courier"/>
+              </a:rPr>
+              <a:t> </a:t>
+            </a:r>
+            <a:r>
+              <a:rPr>
+                <a:solidFill>
+                  <a:srgbClr val="AD0000"/>
+                </a:solidFill>
+                <a:latin typeface="Courier"/>
+              </a:rPr>
+              <a:t>1000</a:t>
+            </a:r>
+            <a:r>
+              <a:rPr>
+                <a:solidFill>
+                  <a:srgbClr val="003B4F"/>
+                </a:solidFill>
+                <a:latin typeface="Courier"/>
+              </a:rPr>
+              <a:t>) </a:t>
+            </a:r>
+            <a:r>
+              <a:rPr>
+                <a:solidFill>
+                  <a:srgbClr val="5E5E5E"/>
+                </a:solidFill>
+                <a:latin typeface="Courier"/>
+              </a:rPr>
+              <a:t>%&gt;%</a:t>
+            </a:r>
+            <a:br/>
+            <a:r>
+              <a:rPr>
+                <a:solidFill>
+                  <a:srgbClr val="003B4F"/>
+                </a:solidFill>
+                <a:latin typeface="Courier"/>
+              </a:rPr>
+              <a:t>  </a:t>
+            </a:r>
+            <a:r>
+              <a:rPr>
+                <a:solidFill>
+                  <a:srgbClr val="4758AB"/>
+                </a:solidFill>
+                <a:latin typeface="Courier"/>
+              </a:rPr>
+              <a:t>head</a:t>
+            </a:r>
+            <a:r>
+              <a:rPr>
+                <a:solidFill>
+                  <a:srgbClr val="003B4F"/>
+                </a:solidFill>
+                <a:latin typeface="Courier"/>
+              </a:rPr>
+              <a:t>(</a:t>
+            </a:r>
+            <a:r>
+              <a:rPr>
+                <a:solidFill>
+                  <a:srgbClr val="AD0000"/>
+                </a:solidFill>
+                <a:latin typeface="Courier"/>
+              </a:rPr>
+              <a:t>3</a:t>
+            </a:r>
+            <a:r>
+              <a:rPr>
+                <a:solidFill>
+                  <a:srgbClr val="003B4F"/>
+                </a:solidFill>
+                <a:latin typeface="Courier"/>
+              </a:rPr>
+              <a:t>)</a:t>
+            </a:r>
+          </a:p>
+          <a:p>
+            <a:pPr lvl="0" indent="0">
+              <a:buNone/>
+            </a:pPr>
+            <a:r>
+              <a:rPr>
+                <a:latin typeface="Courier"/>
+              </a:rPr>
+              <a:t># A tibble: 3 × 9
+  twig_id leaf_id teams shade mass_g petiole_mm thickness_mm paper_mass_g
+  &lt;chr&gt;   &lt;chr&gt;   &lt;chr&gt; &lt;chr&gt;  &lt;dbl&gt;      &lt;dbl&gt;        &lt;dbl&gt;        &lt;dbl&gt;
+1 &lt;NA&gt;    &lt;NA&gt;    12345 sunny   0.4          79         0.15         0.21
+2 &lt;NA&gt;    &lt;NA&gt;    12345 sunny   0.48         63         0.14         0.21
+3 &lt;NA&gt;    &lt;NA&gt;    12345 sunny   0.34         68         0.14         0.21
+# ℹ 1 more variable: mass_mg &lt;dbl&gt;</a:t>
+            </a:r>
+          </a:p>
+        </p:txBody>
+      </p:sp>
+      <p:sp>
+        <p:nvSpPr>
+          <p:cNvPr id="4" name="Content Placeholder 3"/>
+          <p:cNvSpPr>
+            <a:spLocks noGrp="1"/>
+          </p:cNvSpPr>
+          <p:nvPr>
+            <p:ph idx="2" sz="half"/>
           </p:nvPr>
         </p:nvSpPr>
         <p:spPr/>
@@ -5437,396 +5312,101 @@
           <a:bodyPr/>
           <a:lstStyle/>
           <a:p>
-            <a:pPr lvl="0" indent="0">
+            <a:pPr lvl="0"/>
+            <a:r>
+              <a:rPr>
+                <a:latin typeface="Courier"/>
+              </a:rPr>
+              <a:t>mutate()</a:t>
+            </a:r>
+            <a:r>
+              <a:rPr/>
+              <a:t> keeps </a:t>
+            </a:r>
+            <a:r>
+              <a:rPr b="1"/>
+              <a:t>all existing columns</a:t>
+            </a:r>
+            <a:r>
+              <a:rPr/>
+              <a:t> and adds new ones</a:t>
+            </a:r>
+          </a:p>
+          <a:p>
+            <a:pPr lvl="0" indent="0" marL="1270000">
               <a:buNone/>
             </a:pPr>
             <a:r>
-              <a:rPr>
-                <a:solidFill>
-                  <a:srgbClr val="5E5E5E"/>
-                </a:solidFill>
-                <a:latin typeface="Courier"/>
-              </a:rPr>
-              <a:t># arrange() sorts rows by one or more columns ----------</a:t>
-            </a:r>
-            <a:br/>
-            <a:br/>
-            <a:r>
-              <a:rPr>
-                <a:solidFill>
-                  <a:srgbClr val="5E5E5E"/>
-                </a:solidFill>
-                <a:latin typeface="Courier"/>
-              </a:rPr>
-              <a:t># Lightest leaves first</a:t>
-            </a:r>
-            <a:br/>
-            <a:r>
-              <a:rPr>
-                <a:solidFill>
-                  <a:srgbClr val="003B4F"/>
-                </a:solidFill>
-                <a:latin typeface="Courier"/>
-              </a:rPr>
-              <a:t>leaf_df </a:t>
-            </a:r>
-            <a:r>
-              <a:rPr>
-                <a:solidFill>
-                  <a:srgbClr val="5E5E5E"/>
-                </a:solidFill>
-                <a:latin typeface="Courier"/>
-              </a:rPr>
-              <a:t>%&gt;%</a:t>
-            </a:r>
-            <a:r>
-              <a:rPr>
-                <a:solidFill>
-                  <a:srgbClr val="003B4F"/>
-                </a:solidFill>
-                <a:latin typeface="Courier"/>
-              </a:rPr>
-              <a:t> </a:t>
-            </a:r>
-            <a:r>
-              <a:rPr>
-                <a:solidFill>
-                  <a:srgbClr val="4758AB"/>
-                </a:solidFill>
-                <a:latin typeface="Courier"/>
-              </a:rPr>
-              <a:t>arrange</a:t>
-            </a:r>
-            <a:r>
-              <a:rPr>
-                <a:solidFill>
-                  <a:srgbClr val="003B4F"/>
-                </a:solidFill>
-                <a:latin typeface="Courier"/>
-              </a:rPr>
-              <a:t>(mass_g)</a:t>
-            </a:r>
-          </a:p>
-          <a:p>
-            <a:pPr lvl="0" indent="0">
+              <a:rPr sz="2000" b="1"/>
+              <a:t>Note</a:t>
+            </a:r>
+          </a:p>
+          <a:p>
+            <a:pPr lvl="0" indent="0" marL="1270000">
               <a:buNone/>
             </a:pPr>
             <a:r>
-              <a:rPr>
-                <a:latin typeface="Courier"/>
-              </a:rPr>
-              <a:t># A tibble: 53 × 8
-   twig_id leaf_id teams     shade mass_g petiole_mm thickness_mm
-   &lt;chr&gt;   &lt;chr&gt;   &lt;chr&gt;     &lt;chr&gt;  &lt;dbl&gt;      &lt;dbl&gt;        &lt;dbl&gt;
- 1 twig_6  l06     fighting… sunny  0.193       29           0.13
- 2 &lt;NA&gt;    4       Oscar_Ka… sunny  0.230       35.7         0.36
- 3 &lt;NA&gt;    &lt;NA&gt;    12345     sunny  0.27        34           0.11
- 4 &lt;NA&gt;    6       Oscar_Ka… sunny  0.282       46.9         0.4 
- 5 &lt;NA&gt;    5       Oscar_Ka… sunny  0.304       51.3         0.43
- 6 &lt;NA&gt;    &lt;NA&gt;    12345     sunny  0.34        68           0.14
- 7 &lt;NA&gt;    &lt;NA&gt;    12345     shady  0.34        58           0.15
- 8 &lt;NA&gt;    &lt;NA&gt;    12345     shady  0.34        45           0.13
- 9 &lt;NA&gt;    &lt;NA&gt;    leaf_ogl… shady  0.344       48.3         0.67
-10 &lt;NA&gt;    5       Oscar_Ka… shady  0.344       37.0         0.25
-# ℹ 43 more rows
-# ℹ 1 more variable: paper_mass_g &lt;dbl&gt;</a:t>
-            </a:r>
-          </a:p>
-          <a:p>
-            <a:pPr lvl="0" indent="0">
-              <a:buNone/>
-            </a:pPr>
-            <a:r>
-              <a:rPr>
-                <a:solidFill>
-                  <a:srgbClr val="5E5E5E"/>
-                </a:solidFill>
-                <a:latin typeface="Courier"/>
-              </a:rPr>
-              <a:t># Heaviest leaves first (use desc() to reverse)</a:t>
-            </a:r>
-            <a:br/>
-            <a:r>
-              <a:rPr>
-                <a:solidFill>
-                  <a:srgbClr val="003B4F"/>
-                </a:solidFill>
-                <a:latin typeface="Courier"/>
-              </a:rPr>
-              <a:t>leaf_df </a:t>
-            </a:r>
-            <a:r>
-              <a:rPr>
-                <a:solidFill>
-                  <a:srgbClr val="5E5E5E"/>
-                </a:solidFill>
-                <a:latin typeface="Courier"/>
-              </a:rPr>
-              <a:t>%&gt;%</a:t>
-            </a:r>
-            <a:r>
-              <a:rPr>
-                <a:solidFill>
-                  <a:srgbClr val="003B4F"/>
-                </a:solidFill>
-                <a:latin typeface="Courier"/>
-              </a:rPr>
-              <a:t> </a:t>
-            </a:r>
-            <a:r>
-              <a:rPr>
-                <a:solidFill>
-                  <a:srgbClr val="4758AB"/>
-                </a:solidFill>
-                <a:latin typeface="Courier"/>
-              </a:rPr>
-              <a:t>arrange</a:t>
-            </a:r>
-            <a:r>
-              <a:rPr>
-                <a:solidFill>
-                  <a:srgbClr val="003B4F"/>
-                </a:solidFill>
-                <a:latin typeface="Courier"/>
-              </a:rPr>
-              <a:t>(</a:t>
-            </a:r>
-            <a:r>
-              <a:rPr>
-                <a:solidFill>
-                  <a:srgbClr val="4758AB"/>
-                </a:solidFill>
-                <a:latin typeface="Courier"/>
-              </a:rPr>
-              <a:t>desc</a:t>
-            </a:r>
-            <a:r>
-              <a:rPr>
-                <a:solidFill>
-                  <a:srgbClr val="003B4F"/>
-                </a:solidFill>
-                <a:latin typeface="Courier"/>
-              </a:rPr>
-              <a:t>(mass_g))</a:t>
-            </a:r>
-          </a:p>
-          <a:p>
-            <a:pPr lvl="0" indent="0">
-              <a:buNone/>
-            </a:pPr>
-            <a:r>
-              <a:rPr>
-                <a:latin typeface="Courier"/>
-              </a:rPr>
-              <a:t># A tibble: 53 × 8
-   twig_id leaf_id teams     shade mass_g petiole_mm thickness_mm
-   &lt;chr&gt;   &lt;chr&gt;   &lt;chr&gt;     &lt;chr&gt;  &lt;dbl&gt;      &lt;dbl&gt;        &lt;dbl&gt;
- 1 &lt;NA&gt;    &lt;NA&gt;    still_lo… sunny  1.08      84             0.68
- 2 twig_2  l09     fighting… shady  0.920      0.383        NA   
- 3 &lt;NA&gt;    &lt;NA&gt;    leaf_ogl… shady  0.8       41.2           0.5 
- 4 &lt;NA&gt;    &lt;NA&gt;    leaf_ogl… sunny  0.791     53.9           0.23
- 5 twig_2  l10     fighting… shady  0.782     67             0.27
- 6 twig_5  l04     fighting… sunny  0.76      79             0.16
- 7 twig_4  l01     fighting… sunny  0.737     75             0.24
- 8 &lt;NA&gt;    &lt;NA&gt;    leaf_ogl… sunny  0.688     45.3           0.19
- 9 &lt;NA&gt;    &lt;NA&gt;    leaf_ogl… shady  0.68      61.2           0.47
-10 &lt;NA&gt;    &lt;NA&gt;    still_lo… sunny  0.665     64             0.69
-# ℹ 43 more rows
-# ℹ 1 more variable: paper_mass_g &lt;dbl&gt;</a:t>
-            </a:r>
-          </a:p>
-          <a:p>
-            <a:pPr lvl="0" indent="0">
-              <a:buNone/>
-            </a:pPr>
-            <a:r>
-              <a:rPr>
-                <a:solidFill>
-                  <a:srgbClr val="5E5E5E"/>
-                </a:solidFill>
-                <a:latin typeface="Courier"/>
-              </a:rPr>
-              <a:t># Sort by shade, then by mass within each shade</a:t>
-            </a:r>
-            <a:br/>
-            <a:r>
-              <a:rPr>
-                <a:solidFill>
-                  <a:srgbClr val="003B4F"/>
-                </a:solidFill>
-                <a:latin typeface="Courier"/>
-              </a:rPr>
-              <a:t>leaf_df </a:t>
-            </a:r>
-            <a:r>
-              <a:rPr>
-                <a:solidFill>
-                  <a:srgbClr val="5E5E5E"/>
-                </a:solidFill>
-                <a:latin typeface="Courier"/>
-              </a:rPr>
-              <a:t>%&gt;%</a:t>
-            </a:r>
-            <a:r>
-              <a:rPr>
-                <a:solidFill>
-                  <a:srgbClr val="003B4F"/>
-                </a:solidFill>
-                <a:latin typeface="Courier"/>
-              </a:rPr>
-              <a:t> </a:t>
-            </a:r>
-            <a:r>
-              <a:rPr>
-                <a:solidFill>
-                  <a:srgbClr val="4758AB"/>
-                </a:solidFill>
-                <a:latin typeface="Courier"/>
-              </a:rPr>
-              <a:t>arrange</a:t>
-            </a:r>
-            <a:r>
-              <a:rPr>
-                <a:solidFill>
-                  <a:srgbClr val="003B4F"/>
-                </a:solidFill>
-                <a:latin typeface="Courier"/>
-              </a:rPr>
-              <a:t>(shade, </a:t>
-            </a:r>
-            <a:r>
-              <a:rPr>
-                <a:solidFill>
-                  <a:srgbClr val="4758AB"/>
-                </a:solidFill>
-                <a:latin typeface="Courier"/>
-              </a:rPr>
-              <a:t>desc</a:t>
-            </a:r>
-            <a:r>
-              <a:rPr>
-                <a:solidFill>
-                  <a:srgbClr val="003B4F"/>
-                </a:solidFill>
-                <a:latin typeface="Courier"/>
-              </a:rPr>
-              <a:t>(mass_g))</a:t>
-            </a:r>
-          </a:p>
-          <a:p>
-            <a:pPr lvl="0" indent="0">
-              <a:buNone/>
-            </a:pPr>
-            <a:r>
-              <a:rPr>
-                <a:latin typeface="Courier"/>
-              </a:rPr>
-              <a:t># A tibble: 53 × 8
-   twig_id leaf_id teams     shade mass_g petiole_mm thickness_mm
-   &lt;chr&gt;   &lt;chr&gt;   &lt;chr&gt;     &lt;chr&gt;  &lt;dbl&gt;      &lt;dbl&gt;        &lt;dbl&gt;
- 1 twig_2  l09     fighting… shady  0.920      0.383        NA   
- 2 &lt;NA&gt;    &lt;NA&gt;    leaf_ogl… shady  0.8       41.2           0.5 
- 3 twig_2  l10     fighting… shady  0.782     67             0.27
- 4 &lt;NA&gt;    &lt;NA&gt;    leaf_ogl… shady  0.68      61.2           0.47
- 5 &lt;NA&gt;    &lt;NA&gt;    leaf_ogl… shady  0.61      59.4           0.23
- 6 &lt;NA&gt;    &lt;NA&gt;    still_lo… shady  0.607     82             0.32
- 7 &lt;NA&gt;    &lt;NA&gt;    12345     shady  0.6       68             0.12
- 8 twig_1  l07     fighting… shady  0.589     66             0.32
- 9 twig_3  l11     fighting… shady  0.585     68             0.41
-10 &lt;NA&gt;    &lt;NA&gt;    12345     shady  0.57      73             0.14
-# ℹ 43 more rows
-# ℹ 1 more variable: paper_mass_g &lt;dbl&gt;</a:t>
-            </a:r>
-          </a:p>
-        </p:txBody>
-      </p:sp>
-      <p:sp>
-        <p:nvSpPr>
-          <p:cNvPr id="4" name="Content Placeholder 3"/>
-          <p:cNvSpPr>
-            <a:spLocks noGrp="1"/>
-          </p:cNvSpPr>
-          <p:nvPr>
-            <p:ph idx="2" sz="half"/>
-          </p:nvPr>
-        </p:nvSpPr>
-        <p:spPr/>
-        <p:txBody>
-          <a:bodyPr/>
-          <a:lstStyle/>
+              <a:rPr sz="2000" b="1"/>
+              <a:t>✅ Watch the column count</a:t>
+            </a:r>
+          </a:p>
           <a:p>
             <a:pPr lvl="0"/>
             <a:r>
-              <a:rPr/>
-              <a:t>Default: </a:t>
-            </a:r>
-            <a:r>
-              <a:rPr b="1"/>
-              <a:t>ascending</a:t>
-            </a:r>
-            <a:r>
-              <a:rPr/>
-              <a:t> order (smallest first)</a:t>
+              <a:rPr sz="2000">
+                <a:latin typeface="Courier"/>
+              </a:rPr>
+              <a:t>mutate()</a:t>
+            </a:r>
+            <a:r>
+              <a:rPr sz="2000"/>
+              <a:t> never removes columns</a:t>
+            </a:r>
+          </a:p>
+          <a:p>
+            <a:pPr lvl="1"/>
+            <a:r>
+              <a:rPr sz="2000"/>
+              <a:t>it adds to the </a:t>
+            </a:r>
+            <a:r>
+              <a:rPr sz="2000" b="1"/>
+              <a:t>right</a:t>
+            </a:r>
+            <a:r>
+              <a:rPr sz="2000"/>
+              <a:t> of your data frame</a:t>
+            </a:r>
+          </a:p>
+          <a:p>
+            <a:pPr lvl="1"/>
+            <a:r>
+              <a:rPr sz="2000"/>
+              <a:t>one new column per variable you create</a:t>
             </a:r>
           </a:p>
           <a:p>
             <a:pPr lvl="0"/>
             <a:r>
-              <a:rPr>
-                <a:latin typeface="Courier"/>
-              </a:rPr>
-              <a:t>desc(column)</a:t>
-            </a:r>
-            <a:r>
-              <a:rPr/>
-              <a:t> → </a:t>
-            </a:r>
-            <a:r>
-              <a:rPr b="1"/>
-              <a:t>descending</a:t>
-            </a:r>
-            <a:r>
-              <a:rPr/>
-              <a:t> order (largest first)</a:t>
-            </a:r>
-          </a:p>
-          <a:p>
-            <a:pPr lvl="0"/>
-            <a:r>
-              <a:rPr/>
-              <a:t>Very useful before printing a table or checking outliers</a:t>
-            </a:r>
-          </a:p>
-          <a:p>
-            <a:pPr lvl="0" indent="0" marL="1270000">
-              <a:buNone/>
-            </a:pPr>
+              <a:rPr sz="2000"/>
+              <a:t>To </a:t>
+            </a:r>
             <a:r>
               <a:rPr sz="2000" b="1"/>
-              <a:t>Tip</a:t>
-            </a:r>
-          </a:p>
-          <a:p>
-            <a:pPr lvl="0" indent="0" marL="1270000">
-              <a:buNone/>
-            </a:pPr>
+              <a:t>overwrite</a:t>
+            </a:r>
+            <a:r>
+              <a:rPr sz="2000"/>
+              <a:t> instead, reuse the name on the left:</a:t>
+            </a:r>
+          </a:p>
+          <a:p>
+            <a:pPr lvl="1"/>
             <a:r>
               <a:rPr sz="2000">
                 <a:latin typeface="Courier"/>
               </a:rPr>
-              <a:t>arrange()</a:t>
-            </a:r>
-            <a:r>
-              <a:rPr sz="2000"/>
-              <a:t> is rarely used in the middle of an analysis pipeline — it is most useful at the </a:t>
-            </a:r>
-            <a:r>
-              <a:rPr sz="2000" b="1"/>
-              <a:t>end</a:t>
-            </a:r>
-            <a:r>
-              <a:rPr sz="2000"/>
-              <a:t> when you want to inspect your results in a specific order.</a:t>
+              <a:t>mutate(mass_g = round(mass_g, 2))</a:t>
             </a:r>
           </a:p>
         </p:txBody>
@@ -5880,8 +5460,14 @@
               <a:buNone/>
             </a:pPr>
             <a:r>
-              <a:rPr/>
-              <a:t>The Full Pipeline</a:t>
+              <a:rPr>
+                <a:latin typeface="Courier"/>
+              </a:rPr>
+              <a:t>mutate()</a:t>
+            </a:r>
+            <a:r>
+              <a:rPr/>
+              <a:t> — Categories and Several at Once</a:t>
             </a:r>
           </a:p>
         </p:txBody>
@@ -5911,38 +5497,818 @@
                 </a:solidFill>
                 <a:latin typeface="Courier"/>
               </a:rPr>
-              <a:t># Chain all the verbs together -------------------------</a:t>
+              <a:t># Add a size category based on mass</a:t>
             </a:r>
             <a:br/>
             <a:r>
               <a:rPr>
                 <a:solidFill>
+                  <a:srgbClr val="003B4F"/>
+                </a:solidFill>
+                <a:latin typeface="Courier"/>
+              </a:rPr>
+              <a:t>leaf_df </a:t>
+            </a:r>
+            <a:r>
+              <a:rPr>
+                <a:solidFill>
                   <a:srgbClr val="5E5E5E"/>
                 </a:solidFill>
                 <a:latin typeface="Courier"/>
               </a:rPr>
-              <a:t># Read it top to bottom like a recipe</a:t>
+              <a:t>%&gt;%</a:t>
+            </a:r>
+            <a:br/>
+            <a:r>
+              <a:rPr>
+                <a:solidFill>
+                  <a:srgbClr val="003B4F"/>
+                </a:solidFill>
+                <a:latin typeface="Courier"/>
+              </a:rPr>
+              <a:t>  </a:t>
+            </a:r>
+            <a:r>
+              <a:rPr>
+                <a:solidFill>
+                  <a:srgbClr val="4758AB"/>
+                </a:solidFill>
+                <a:latin typeface="Courier"/>
+              </a:rPr>
+              <a:t>mutate</a:t>
+            </a:r>
+            <a:r>
+              <a:rPr>
+                <a:solidFill>
+                  <a:srgbClr val="003B4F"/>
+                </a:solidFill>
+                <a:latin typeface="Courier"/>
+              </a:rPr>
+              <a:t>(</a:t>
+            </a:r>
+            <a:r>
+              <a:rPr>
+                <a:solidFill>
+                  <a:srgbClr val="657422"/>
+                </a:solidFill>
+                <a:latin typeface="Courier"/>
+              </a:rPr>
+              <a:t>size_class =</a:t>
+            </a:r>
+            <a:r>
+              <a:rPr>
+                <a:solidFill>
+                  <a:srgbClr val="003B4F"/>
+                </a:solidFill>
+                <a:latin typeface="Courier"/>
+              </a:rPr>
+              <a:t> </a:t>
+            </a:r>
+            <a:r>
+              <a:rPr>
+                <a:solidFill>
+                  <a:srgbClr val="4758AB"/>
+                </a:solidFill>
+                <a:latin typeface="Courier"/>
+              </a:rPr>
+              <a:t>if_else</a:t>
+            </a:r>
+            <a:r>
+              <a:rPr>
+                <a:solidFill>
+                  <a:srgbClr val="003B4F"/>
+                </a:solidFill>
+                <a:latin typeface="Courier"/>
+              </a:rPr>
+              <a:t>(mass_g </a:t>
+            </a:r>
+            <a:r>
+              <a:rPr>
+                <a:solidFill>
+                  <a:srgbClr val="5E5E5E"/>
+                </a:solidFill>
+                <a:latin typeface="Courier"/>
+              </a:rPr>
+              <a:t>&gt;</a:t>
+            </a:r>
+            <a:r>
+              <a:rPr>
+                <a:solidFill>
+                  <a:srgbClr val="003B4F"/>
+                </a:solidFill>
+                <a:latin typeface="Courier"/>
+              </a:rPr>
+              <a:t> </a:t>
+            </a:r>
+            <a:r>
+              <a:rPr>
+                <a:solidFill>
+                  <a:srgbClr val="AD0000"/>
+                </a:solidFill>
+                <a:latin typeface="Courier"/>
+              </a:rPr>
+              <a:t>0.5</a:t>
+            </a:r>
+            <a:r>
+              <a:rPr>
+                <a:solidFill>
+                  <a:srgbClr val="003B4F"/>
+                </a:solidFill>
+                <a:latin typeface="Courier"/>
+              </a:rPr>
+              <a:t>, </a:t>
+            </a:r>
+            <a:r>
+              <a:rPr>
+                <a:solidFill>
+                  <a:srgbClr val="20794D"/>
+                </a:solidFill>
+                <a:latin typeface="Courier"/>
+              </a:rPr>
+              <a:t>"large"</a:t>
+            </a:r>
+            <a:r>
+              <a:rPr>
+                <a:solidFill>
+                  <a:srgbClr val="003B4F"/>
+                </a:solidFill>
+                <a:latin typeface="Courier"/>
+              </a:rPr>
+              <a:t>,</a:t>
+            </a:r>
+            <a:br/>
+            <a:r>
+              <a:rPr>
+                <a:solidFill>
+                  <a:srgbClr val="003B4F"/>
+                </a:solidFill>
+                <a:latin typeface="Courier"/>
+              </a:rPr>
+              <a:t>                              </a:t>
+            </a:r>
+            <a:r>
+              <a:rPr>
+                <a:solidFill>
+                  <a:srgbClr val="20794D"/>
+                </a:solidFill>
+                <a:latin typeface="Courier"/>
+              </a:rPr>
+              <a:t>"small"</a:t>
+            </a:r>
+            <a:r>
+              <a:rPr>
+                <a:solidFill>
+                  <a:srgbClr val="003B4F"/>
+                </a:solidFill>
+                <a:latin typeface="Courier"/>
+              </a:rPr>
+              <a:t>)) </a:t>
+            </a:r>
+            <a:r>
+              <a:rPr>
+                <a:solidFill>
+                  <a:srgbClr val="5E5E5E"/>
+                </a:solidFill>
+                <a:latin typeface="Courier"/>
+              </a:rPr>
+              <a:t>%&gt;%</a:t>
+            </a:r>
+            <a:br/>
+            <a:r>
+              <a:rPr>
+                <a:solidFill>
+                  <a:srgbClr val="003B4F"/>
+                </a:solidFill>
+                <a:latin typeface="Courier"/>
+              </a:rPr>
+              <a:t>  </a:t>
+            </a:r>
+            <a:r>
+              <a:rPr>
+                <a:solidFill>
+                  <a:srgbClr val="4758AB"/>
+                </a:solidFill>
+                <a:latin typeface="Courier"/>
+              </a:rPr>
+              <a:t>head</a:t>
+            </a:r>
+            <a:r>
+              <a:rPr>
+                <a:solidFill>
+                  <a:srgbClr val="003B4F"/>
+                </a:solidFill>
+                <a:latin typeface="Courier"/>
+              </a:rPr>
+              <a:t>(</a:t>
+            </a:r>
+            <a:r>
+              <a:rPr>
+                <a:solidFill>
+                  <a:srgbClr val="AD0000"/>
+                </a:solidFill>
+                <a:latin typeface="Courier"/>
+              </a:rPr>
+              <a:t>2</a:t>
+            </a:r>
+            <a:r>
+              <a:rPr>
+                <a:solidFill>
+                  <a:srgbClr val="003B4F"/>
+                </a:solidFill>
+                <a:latin typeface="Courier"/>
+              </a:rPr>
+              <a:t>)</a:t>
+            </a:r>
+          </a:p>
+          <a:p>
+            <a:pPr lvl="0" indent="0">
+              <a:buNone/>
+            </a:pPr>
+            <a:r>
+              <a:rPr>
+                <a:latin typeface="Courier"/>
+              </a:rPr>
+              <a:t># A tibble: 2 × 9
+  twig_id leaf_id teams shade mass_g petiole_mm thickness_mm paper_mass_g
+  &lt;chr&gt;   &lt;chr&gt;   &lt;chr&gt; &lt;chr&gt;  &lt;dbl&gt;      &lt;dbl&gt;        &lt;dbl&gt;        &lt;dbl&gt;
+1 &lt;NA&gt;    &lt;NA&gt;    12345 sunny   0.4          79         0.15         0.21
+2 &lt;NA&gt;    &lt;NA&gt;    12345 sunny   0.48         63         0.14         0.21
+# ℹ 1 more variable: size_class &lt;chr&gt;</a:t>
+            </a:r>
+          </a:p>
+          <a:p>
+            <a:pPr lvl="0" indent="0">
+              <a:buNone/>
+            </a:pPr>
+            <a:r>
+              <a:rPr>
+                <a:solidFill>
+                  <a:srgbClr val="5E5E5E"/>
+                </a:solidFill>
+                <a:latin typeface="Courier"/>
+              </a:rPr>
+              <a:t># mutate() can create several new columns at once</a:t>
+            </a:r>
+            <a:br/>
+            <a:r>
+              <a:rPr>
+                <a:solidFill>
+                  <a:srgbClr val="003B4F"/>
+                </a:solidFill>
+                <a:latin typeface="Courier"/>
+              </a:rPr>
+              <a:t>leaf_df </a:t>
+            </a:r>
+            <a:r>
+              <a:rPr>
+                <a:solidFill>
+                  <a:srgbClr val="5E5E5E"/>
+                </a:solidFill>
+                <a:latin typeface="Courier"/>
+              </a:rPr>
+              <a:t>%&gt;%</a:t>
+            </a:r>
+            <a:br/>
+            <a:r>
+              <a:rPr>
+                <a:solidFill>
+                  <a:srgbClr val="003B4F"/>
+                </a:solidFill>
+                <a:latin typeface="Courier"/>
+              </a:rPr>
+              <a:t>  </a:t>
+            </a:r>
+            <a:r>
+              <a:rPr>
+                <a:solidFill>
+                  <a:srgbClr val="4758AB"/>
+                </a:solidFill>
+                <a:latin typeface="Courier"/>
+              </a:rPr>
+              <a:t>mutate</a:t>
+            </a:r>
+            <a:r>
+              <a:rPr>
+                <a:solidFill>
+                  <a:srgbClr val="003B4F"/>
+                </a:solidFill>
+                <a:latin typeface="Courier"/>
+              </a:rPr>
+              <a:t>(</a:t>
+            </a:r>
+            <a:br/>
+            <a:r>
+              <a:rPr>
+                <a:solidFill>
+                  <a:srgbClr val="003B4F"/>
+                </a:solidFill>
+                <a:latin typeface="Courier"/>
+              </a:rPr>
+              <a:t>    </a:t>
+            </a:r>
+            <a:r>
+              <a:rPr>
+                <a:solidFill>
+                  <a:srgbClr val="657422"/>
+                </a:solidFill>
+                <a:latin typeface="Courier"/>
+              </a:rPr>
+              <a:t>mass_mg    =</a:t>
+            </a:r>
+            <a:r>
+              <a:rPr>
+                <a:solidFill>
+                  <a:srgbClr val="003B4F"/>
+                </a:solidFill>
+                <a:latin typeface="Courier"/>
+              </a:rPr>
+              <a:t> mass_g </a:t>
+            </a:r>
+            <a:r>
+              <a:rPr>
+                <a:solidFill>
+                  <a:srgbClr val="5E5E5E"/>
+                </a:solidFill>
+                <a:latin typeface="Courier"/>
+              </a:rPr>
+              <a:t>*</a:t>
+            </a:r>
+            <a:r>
+              <a:rPr>
+                <a:solidFill>
+                  <a:srgbClr val="003B4F"/>
+                </a:solidFill>
+                <a:latin typeface="Courier"/>
+              </a:rPr>
+              <a:t> </a:t>
+            </a:r>
+            <a:r>
+              <a:rPr>
+                <a:solidFill>
+                  <a:srgbClr val="AD0000"/>
+                </a:solidFill>
+                <a:latin typeface="Courier"/>
+              </a:rPr>
+              <a:t>1000</a:t>
+            </a:r>
+            <a:r>
+              <a:rPr>
+                <a:solidFill>
+                  <a:srgbClr val="003B4F"/>
+                </a:solidFill>
+                <a:latin typeface="Courier"/>
+              </a:rPr>
+              <a:t>,</a:t>
+            </a:r>
+            <a:br/>
+            <a:r>
+              <a:rPr>
+                <a:solidFill>
+                  <a:srgbClr val="003B4F"/>
+                </a:solidFill>
+                <a:latin typeface="Courier"/>
+              </a:rPr>
+              <a:t>    </a:t>
+            </a:r>
+            <a:r>
+              <a:rPr>
+                <a:solidFill>
+                  <a:srgbClr val="657422"/>
+                </a:solidFill>
+                <a:latin typeface="Courier"/>
+              </a:rPr>
+              <a:t>petiole_cm =</a:t>
+            </a:r>
+            <a:r>
+              <a:rPr>
+                <a:solidFill>
+                  <a:srgbClr val="003B4F"/>
+                </a:solidFill>
+                <a:latin typeface="Courier"/>
+              </a:rPr>
+              <a:t> petiole_mm </a:t>
+            </a:r>
+            <a:r>
+              <a:rPr>
+                <a:solidFill>
+                  <a:srgbClr val="5E5E5E"/>
+                </a:solidFill>
+                <a:latin typeface="Courier"/>
+              </a:rPr>
+              <a:t>/</a:t>
+            </a:r>
+            <a:r>
+              <a:rPr>
+                <a:solidFill>
+                  <a:srgbClr val="003B4F"/>
+                </a:solidFill>
+                <a:latin typeface="Courier"/>
+              </a:rPr>
+              <a:t> </a:t>
+            </a:r>
+            <a:r>
+              <a:rPr>
+                <a:solidFill>
+                  <a:srgbClr val="AD0000"/>
+                </a:solidFill>
+                <a:latin typeface="Courier"/>
+              </a:rPr>
+              <a:t>10</a:t>
+            </a:r>
+            <a:r>
+              <a:rPr>
+                <a:solidFill>
+                  <a:srgbClr val="003B4F"/>
+                </a:solidFill>
+                <a:latin typeface="Courier"/>
+              </a:rPr>
+              <a:t> </a:t>
+            </a:r>
+            <a:r>
+              <a:rPr>
+                <a:solidFill>
+                  <a:srgbClr val="5E5E5E"/>
+                </a:solidFill>
+                <a:latin typeface="Courier"/>
+              </a:rPr>
+              <a:t># petiole length in cm</a:t>
+            </a:r>
+            <a:br/>
+            <a:r>
+              <a:rPr>
+                <a:solidFill>
+                  <a:srgbClr val="003B4F"/>
+                </a:solidFill>
+                <a:latin typeface="Courier"/>
+              </a:rPr>
+              <a:t>  ) </a:t>
+            </a:r>
+            <a:r>
+              <a:rPr>
+                <a:solidFill>
+                  <a:srgbClr val="5E5E5E"/>
+                </a:solidFill>
+                <a:latin typeface="Courier"/>
+              </a:rPr>
+              <a:t>%&gt;%</a:t>
+            </a:r>
+            <a:br/>
+            <a:r>
+              <a:rPr>
+                <a:solidFill>
+                  <a:srgbClr val="003B4F"/>
+                </a:solidFill>
+                <a:latin typeface="Courier"/>
+              </a:rPr>
+              <a:t>  </a:t>
+            </a:r>
+            <a:r>
+              <a:rPr>
+                <a:solidFill>
+                  <a:srgbClr val="4758AB"/>
+                </a:solidFill>
+                <a:latin typeface="Courier"/>
+              </a:rPr>
+              <a:t>head</a:t>
+            </a:r>
+            <a:r>
+              <a:rPr>
+                <a:solidFill>
+                  <a:srgbClr val="003B4F"/>
+                </a:solidFill>
+                <a:latin typeface="Courier"/>
+              </a:rPr>
+              <a:t>(</a:t>
+            </a:r>
+            <a:r>
+              <a:rPr>
+                <a:solidFill>
+                  <a:srgbClr val="AD0000"/>
+                </a:solidFill>
+                <a:latin typeface="Courier"/>
+              </a:rPr>
+              <a:t>2</a:t>
+            </a:r>
+            <a:r>
+              <a:rPr>
+                <a:solidFill>
+                  <a:srgbClr val="003B4F"/>
+                </a:solidFill>
+                <a:latin typeface="Courier"/>
+              </a:rPr>
+              <a:t>)</a:t>
+            </a:r>
+          </a:p>
+          <a:p>
+            <a:pPr lvl="0" indent="0">
+              <a:buNone/>
+            </a:pPr>
+            <a:r>
+              <a:rPr>
+                <a:latin typeface="Courier"/>
+              </a:rPr>
+              <a:t># A tibble: 2 × 10
+  twig_id leaf_id teams shade mass_g petiole_mm thickness_mm paper_mass_g
+  &lt;chr&gt;   &lt;chr&gt;   &lt;chr&gt; &lt;chr&gt;  &lt;dbl&gt;      &lt;dbl&gt;        &lt;dbl&gt;        &lt;dbl&gt;
+1 &lt;NA&gt;    &lt;NA&gt;    12345 sunny   0.4          79         0.15         0.21
+2 &lt;NA&gt;    &lt;NA&gt;    12345 sunny   0.48         63         0.14         0.21
+# ℹ 2 more variables: mass_mg &lt;dbl&gt;, petiole_cm &lt;dbl&gt;</a:t>
+            </a:r>
+          </a:p>
+        </p:txBody>
+      </p:sp>
+      <p:sp>
+        <p:nvSpPr>
+          <p:cNvPr id="4" name="Content Placeholder 3"/>
+          <p:cNvSpPr>
+            <a:spLocks noGrp="1"/>
+          </p:cNvSpPr>
+          <p:nvPr>
+            <p:ph idx="2" sz="half"/>
+          </p:nvPr>
+        </p:nvSpPr>
+        <p:spPr/>
+        <p:txBody>
+          <a:bodyPr/>
+          <a:lstStyle/>
+          <a:p>
+            <a:pPr lvl="0"/>
+            <a:r>
+              <a:rPr b="1"/>
+              <a:t>Use </a:t>
+            </a:r>
+            <a:r>
+              <a:rPr b="1">
+                <a:latin typeface="Courier"/>
+              </a:rPr>
+              <a:t>if_else(condition, value_if_true, value_if_false)</a:t>
+            </a:r>
+            <a:r>
+              <a:rPr/>
+              <a:t> to create categories</a:t>
+            </a:r>
+          </a:p>
+          <a:p>
+            <a:pPr lvl="0"/>
+            <a:r>
+              <a:rPr/>
+              <a:t>Separate several new columns with </a:t>
+            </a:r>
+            <a:r>
+              <a:rPr b="1"/>
+              <a:t>commas</a:t>
+            </a:r>
+            <a:r>
+              <a:rPr/>
+              <a:t>, like the arguments they are</a:t>
+            </a:r>
+          </a:p>
+          <a:p>
+            <a:pPr lvl="0" indent="0" marL="0">
+              <a:buNone/>
+            </a:pPr>
+            <a:r>
+              <a:rPr/>
+              <a:t>📖 </a:t>
+            </a:r>
+            <a:r>
+              <a:rPr>
+                <a:hlinkClick r:id="rId2"/>
+              </a:rPr>
+              <a:t>R4DS §3.3</a:t>
+            </a:r>
+          </a:p>
+        </p:txBody>
+      </p:sp>
+    </p:spTree>
+  </p:cSld>
+</p:sld>
+</file>
+
+<file path=ppt/slides/slide16.xml><?xml version="1.0" encoding="utf-8"?>
+<p:sld xmlns:a="http://schemas.openxmlformats.org/drawingml/2006/main" xmlns:r="http://schemas.openxmlformats.org/officeDocument/2006/relationships" xmlns:p="http://schemas.openxmlformats.org/presentationml/2006/main">
+  <p:cSld>
+    <p:spTree>
+      <p:nvGrpSpPr>
+        <p:cNvPr id="1" name=""/>
+        <p:cNvGrpSpPr/>
+        <p:nvPr/>
+      </p:nvGrpSpPr>
+      <p:grpSpPr>
+        <a:xfrm>
+          <a:off x="0" y="0"/>
+          <a:ext cx="0" cy="0"/>
+          <a:chOff x="0" y="0"/>
+          <a:chExt cx="0" cy="0"/>
+        </a:xfrm>
+      </p:grpSpPr>
+      <p:sp>
+        <p:nvSpPr>
+          <p:cNvPr id="2" name="Title 1"/>
+          <p:cNvSpPr>
+            <a:spLocks noGrp="1"/>
+          </p:cNvSpPr>
+          <p:nvPr>
+            <p:ph type="title"/>
+          </p:nvPr>
+        </p:nvSpPr>
+        <p:spPr>
+          <a:xfrm>
+            <a:off x="0" y="0"/>
+            <a:ext cx="9144000" cy="602780"/>
+          </a:xfrm>
+          <a:solidFill>
+            <a:srgbClr val="1A1A2E"/>
+          </a:solidFill>
+        </p:spPr>
+        <p:txBody>
+          <a:bodyPr/>
+          <a:lstStyle/>
+          <a:p>
+            <a:pPr lvl="0" indent="0" marL="0">
+              <a:buNone/>
+            </a:pPr>
+            <a:r>
+              <a:rPr>
+                <a:latin typeface="Courier"/>
+              </a:rPr>
+              <a:t>arrange()</a:t>
+            </a:r>
+            <a:r>
+              <a:rPr/>
+              <a:t> — Sorting Rows</a:t>
+            </a:r>
+          </a:p>
+        </p:txBody>
+      </p:sp>
+      <p:sp>
+        <p:nvSpPr>
+          <p:cNvPr id="3" name="Content Placeholder 2"/>
+          <p:cNvSpPr>
+            <a:spLocks noGrp="1"/>
+          </p:cNvSpPr>
+          <p:nvPr>
+            <p:ph idx="1" sz="half"/>
+          </p:nvPr>
+        </p:nvSpPr>
+        <p:spPr/>
+        <p:txBody>
+          <a:bodyPr/>
+          <a:lstStyle/>
+          <a:p>
+            <a:pPr lvl="0" indent="0">
+              <a:buNone/>
+            </a:pPr>
+            <a:r>
+              <a:rPr>
+                <a:solidFill>
+                  <a:srgbClr val="5E5E5E"/>
+                </a:solidFill>
+                <a:latin typeface="Courier"/>
+              </a:rPr>
+              <a:t># arrange() sorts rows by one or more columns ----------</a:t>
             </a:r>
             <a:br/>
             <a:br/>
             <a:r>
               <a:rPr>
                 <a:solidFill>
-                  <a:srgbClr val="003B4F"/>
-                </a:solidFill>
-                <a:latin typeface="Courier"/>
-              </a:rPr>
-              <a:t>wrangled_df &lt;- leaf_df </a:t>
-            </a:r>
-            <a:r>
-              <a:rPr>
-                <a:solidFill>
                   <a:srgbClr val="5E5E5E"/>
                 </a:solidFill>
                 <a:latin typeface="Courier"/>
               </a:rPr>
+              <a:t># Lightest leaves first</a:t>
+            </a:r>
+            <a:br/>
+            <a:r>
+              <a:rPr>
+                <a:solidFill>
+                  <a:srgbClr val="003B4F"/>
+                </a:solidFill>
+                <a:latin typeface="Courier"/>
+              </a:rPr>
+              <a:t>leaf_df </a:t>
+            </a:r>
+            <a:r>
+              <a:rPr>
+                <a:solidFill>
+                  <a:srgbClr val="5E5E5E"/>
+                </a:solidFill>
+                <a:latin typeface="Courier"/>
+              </a:rPr>
               <a:t>%&gt;%</a:t>
             </a:r>
+            <a:r>
+              <a:rPr>
+                <a:solidFill>
+                  <a:srgbClr val="003B4F"/>
+                </a:solidFill>
+                <a:latin typeface="Courier"/>
+              </a:rPr>
+              <a:t> </a:t>
+            </a:r>
+            <a:r>
+              <a:rPr>
+                <a:solidFill>
+                  <a:srgbClr val="4758AB"/>
+                </a:solidFill>
+                <a:latin typeface="Courier"/>
+              </a:rPr>
+              <a:t>arrange</a:t>
+            </a:r>
+            <a:r>
+              <a:rPr>
+                <a:solidFill>
+                  <a:srgbClr val="003B4F"/>
+                </a:solidFill>
+                <a:latin typeface="Courier"/>
+              </a:rPr>
+              <a:t>(mass_g) </a:t>
+            </a:r>
+            <a:r>
+              <a:rPr>
+                <a:solidFill>
+                  <a:srgbClr val="5E5E5E"/>
+                </a:solidFill>
+                <a:latin typeface="Courier"/>
+              </a:rPr>
+              <a:t>%&gt;%</a:t>
+            </a:r>
+            <a:r>
+              <a:rPr>
+                <a:solidFill>
+                  <a:srgbClr val="003B4F"/>
+                </a:solidFill>
+                <a:latin typeface="Courier"/>
+              </a:rPr>
+              <a:t> </a:t>
+            </a:r>
+            <a:r>
+              <a:rPr>
+                <a:solidFill>
+                  <a:srgbClr val="4758AB"/>
+                </a:solidFill>
+                <a:latin typeface="Courier"/>
+              </a:rPr>
+              <a:t>head</a:t>
+            </a:r>
+            <a:r>
+              <a:rPr>
+                <a:solidFill>
+                  <a:srgbClr val="003B4F"/>
+                </a:solidFill>
+                <a:latin typeface="Courier"/>
+              </a:rPr>
+              <a:t>(</a:t>
+            </a:r>
+            <a:r>
+              <a:rPr>
+                <a:solidFill>
+                  <a:srgbClr val="AD0000"/>
+                </a:solidFill>
+                <a:latin typeface="Courier"/>
+              </a:rPr>
+              <a:t>3</a:t>
+            </a:r>
+            <a:r>
+              <a:rPr>
+                <a:solidFill>
+                  <a:srgbClr val="003B4F"/>
+                </a:solidFill>
+                <a:latin typeface="Courier"/>
+              </a:rPr>
+              <a:t>)</a:t>
+            </a:r>
+          </a:p>
+          <a:p>
+            <a:pPr lvl="0" indent="0">
+              <a:buNone/>
+            </a:pPr>
+            <a:r>
+              <a:rPr>
+                <a:latin typeface="Courier"/>
+              </a:rPr>
+              <a:t># A tibble: 3 × 8
+  twig_id leaf_id teams        shade mass_g petiole_mm thickness_mm paper_mass_g
+  &lt;chr&gt;   &lt;chr&gt;   &lt;chr&gt;        &lt;chr&gt;  &lt;dbl&gt;      &lt;dbl&gt;        &lt;dbl&gt;        &lt;dbl&gt;
+1 twig_6  l06     fighting_mo… sunny  0.193       29           0.13        0.113
+2 &lt;NA&gt;    4       Oscar_Karl   sunny  0.230       35.7         0.36       NA    
+3 &lt;NA&gt;    &lt;NA&gt;    12345        sunny  0.27        34           0.11        0.15 </a:t>
+            </a:r>
+          </a:p>
+          <a:p>
+            <a:pPr lvl="0" indent="0">
+              <a:buNone/>
+            </a:pPr>
+            <a:r>
+              <a:rPr>
+                <a:solidFill>
+                  <a:srgbClr val="5E5E5E"/>
+                </a:solidFill>
+                <a:latin typeface="Courier"/>
+              </a:rPr>
+              <a:t># Heaviest leaves first (use desc() to reverse)</a:t>
+            </a:r>
             <a:br/>
             <a:r>
               <a:rPr>
@@ -5951,7 +6317,25 @@
                 </a:solidFill>
                 <a:latin typeface="Courier"/>
               </a:rPr>
-              <a:t>  </a:t>
+              <a:t>leaf_df </a:t>
+            </a:r>
+            <a:r>
+              <a:rPr>
+                <a:solidFill>
+                  <a:srgbClr val="5E5E5E"/>
+                </a:solidFill>
+                <a:latin typeface="Courier"/>
+              </a:rPr>
+              <a:t>%&gt;%</a:t>
+            </a:r>
+            <a:r>
+              <a:rPr>
+                <a:solidFill>
+                  <a:srgbClr val="003B4F"/>
+                </a:solidFill>
+                <a:latin typeface="Courier"/>
+              </a:rPr>
+              <a:t> </a:t>
             </a:r>
             <a:r>
               <a:rPr>
@@ -5960,16 +6344,34 @@
                 </a:solidFill>
                 <a:latin typeface="Courier"/>
               </a:rPr>
-              <a:t>filter</a:t>
-            </a:r>
-            <a:r>
-              <a:rPr>
-                <a:solidFill>
-                  <a:srgbClr val="003B4F"/>
-                </a:solidFill>
-                <a:latin typeface="Courier"/>
-              </a:rPr>
-              <a:t>(mass_g </a:t>
+              <a:t>arrange</a:t>
+            </a:r>
+            <a:r>
+              <a:rPr>
+                <a:solidFill>
+                  <a:srgbClr val="003B4F"/>
+                </a:solidFill>
+                <a:latin typeface="Courier"/>
+              </a:rPr>
+              <a:t>(</a:t>
+            </a:r>
+            <a:r>
+              <a:rPr>
+                <a:solidFill>
+                  <a:srgbClr val="4758AB"/>
+                </a:solidFill>
+                <a:latin typeface="Courier"/>
+              </a:rPr>
+              <a:t>desc</a:t>
+            </a:r>
+            <a:r>
+              <a:rPr>
+                <a:solidFill>
+                  <a:srgbClr val="003B4F"/>
+                </a:solidFill>
+                <a:latin typeface="Courier"/>
+              </a:rPr>
+              <a:t>(mass_g)) </a:t>
             </a:r>
             <a:r>
               <a:rPr>
@@ -5978,7 +6380,7 @@
                 </a:solidFill>
                 <a:latin typeface="Courier"/>
               </a:rPr>
-              <a:t>&gt;</a:t>
+              <a:t>%&gt;%</a:t>
             </a:r>
             <a:r>
               <a:rPr>
@@ -5992,21 +6394,228 @@
             <a:r>
               <a:rPr>
                 <a:solidFill>
+                  <a:srgbClr val="4758AB"/>
+                </a:solidFill>
+                <a:latin typeface="Courier"/>
+              </a:rPr>
+              <a:t>head</a:t>
+            </a:r>
+            <a:r>
+              <a:rPr>
+                <a:solidFill>
+                  <a:srgbClr val="003B4F"/>
+                </a:solidFill>
+                <a:latin typeface="Courier"/>
+              </a:rPr>
+              <a:t>(</a:t>
+            </a:r>
+            <a:r>
+              <a:rPr>
+                <a:solidFill>
                   <a:srgbClr val="AD0000"/>
                 </a:solidFill>
                 <a:latin typeface="Courier"/>
               </a:rPr>
-              <a:t>0</a:t>
-            </a:r>
-            <a:r>
-              <a:rPr>
-                <a:solidFill>
-                  <a:srgbClr val="003B4F"/>
-                </a:solidFill>
-                <a:latin typeface="Courier"/>
-              </a:rPr>
-              <a:t>) </a:t>
-            </a:r>
+              <a:t>3</a:t>
+            </a:r>
+            <a:r>
+              <a:rPr>
+                <a:solidFill>
+                  <a:srgbClr val="003B4F"/>
+                </a:solidFill>
+                <a:latin typeface="Courier"/>
+              </a:rPr>
+              <a:t>)</a:t>
+            </a:r>
+          </a:p>
+          <a:p>
+            <a:pPr lvl="0" indent="0">
+              <a:buNone/>
+            </a:pPr>
+            <a:r>
+              <a:rPr>
+                <a:latin typeface="Courier"/>
+              </a:rPr>
+              <a:t># A tibble: 3 × 8
+  twig_id leaf_id teams        shade mass_g petiole_mm thickness_mm paper_mass_g
+  &lt;chr&gt;   &lt;chr&gt;   &lt;chr&gt;        &lt;chr&gt;  &lt;dbl&gt;      &lt;dbl&gt;        &lt;dbl&gt;        &lt;dbl&gt;
+1 &lt;NA&gt;    &lt;NA&gt;    still_loadi… sunny  1.08      84             0.68        0.420
+2 twig_2  l09     fighting_mo… shady  0.920      0.383        NA          NA    
+3 &lt;NA&gt;    &lt;NA&gt;    leaf_oglers  shady  0.8       41.2           0.5         0.3  </a:t>
+            </a:r>
+          </a:p>
+        </p:txBody>
+      </p:sp>
+      <p:sp>
+        <p:nvSpPr>
+          <p:cNvPr id="4" name="Content Placeholder 3"/>
+          <p:cNvSpPr>
+            <a:spLocks noGrp="1"/>
+          </p:cNvSpPr>
+          <p:nvPr>
+            <p:ph idx="2" sz="half"/>
+          </p:nvPr>
+        </p:nvSpPr>
+        <p:spPr/>
+        <p:txBody>
+          <a:bodyPr/>
+          <a:lstStyle/>
+          <a:p>
+            <a:pPr lvl="0"/>
+            <a:r>
+              <a:rPr/>
+              <a:t>Default: </a:t>
+            </a:r>
+            <a:r>
+              <a:rPr b="1"/>
+              <a:t>ascending</a:t>
+            </a:r>
+            <a:r>
+              <a:rPr/>
+              <a:t> order (smallest first)</a:t>
+            </a:r>
+          </a:p>
+          <a:p>
+            <a:pPr lvl="0"/>
+            <a:r>
+              <a:rPr>
+                <a:latin typeface="Courier"/>
+              </a:rPr>
+              <a:t>desc(column)</a:t>
+            </a:r>
+            <a:r>
+              <a:rPr/>
+              <a:t> → </a:t>
+            </a:r>
+            <a:r>
+              <a:rPr b="1"/>
+              <a:t>descending</a:t>
+            </a:r>
+            <a:r>
+              <a:rPr/>
+              <a:t> order (largest first)</a:t>
+            </a:r>
+          </a:p>
+          <a:p>
+            <a:pPr lvl="0"/>
+            <a:r>
+              <a:rPr/>
+              <a:t>Very useful before printing a table or checking outliers</a:t>
+            </a:r>
+          </a:p>
+          <a:p>
+            <a:pPr lvl="0" indent="0" marL="1270000">
+              <a:buNone/>
+            </a:pPr>
+            <a:r>
+              <a:rPr sz="2000" b="1"/>
+              <a:t>Tip</a:t>
+            </a:r>
+          </a:p>
+          <a:p>
+            <a:pPr lvl="0" indent="0" marL="1270000">
+              <a:buNone/>
+            </a:pPr>
+            <a:r>
+              <a:rPr sz="2000">
+                <a:latin typeface="Courier"/>
+              </a:rPr>
+              <a:t>arrange()</a:t>
+            </a:r>
+            <a:r>
+              <a:rPr sz="2000"/>
+              <a:t> is rarely used in the middle of a pipeline — it is most useful at the </a:t>
+            </a:r>
+            <a:r>
+              <a:rPr sz="2000" b="1"/>
+              <a:t>end</a:t>
+            </a:r>
+            <a:r>
+              <a:rPr sz="2000"/>
+              <a:t>, when you want to inspect your results in a specific order.</a:t>
+            </a:r>
+          </a:p>
+        </p:txBody>
+      </p:sp>
+    </p:spTree>
+  </p:cSld>
+</p:sld>
+</file>
+
+<file path=ppt/slides/slide17.xml><?xml version="1.0" encoding="utf-8"?>
+<p:sld xmlns:a="http://schemas.openxmlformats.org/drawingml/2006/main" xmlns:r="http://schemas.openxmlformats.org/officeDocument/2006/relationships" xmlns:p="http://schemas.openxmlformats.org/presentationml/2006/main">
+  <p:cSld>
+    <p:spTree>
+      <p:nvGrpSpPr>
+        <p:cNvPr id="1" name=""/>
+        <p:cNvGrpSpPr/>
+        <p:nvPr/>
+      </p:nvGrpSpPr>
+      <p:grpSpPr>
+        <a:xfrm>
+          <a:off x="0" y="0"/>
+          <a:ext cx="0" cy="0"/>
+          <a:chOff x="0" y="0"/>
+          <a:chExt cx="0" cy="0"/>
+        </a:xfrm>
+      </p:grpSpPr>
+      <p:sp>
+        <p:nvSpPr>
+          <p:cNvPr id="2" name="Title 1"/>
+          <p:cNvSpPr>
+            <a:spLocks noGrp="1"/>
+          </p:cNvSpPr>
+          <p:nvPr>
+            <p:ph type="title"/>
+          </p:nvPr>
+        </p:nvSpPr>
+        <p:spPr>
+          <a:xfrm>
+            <a:off x="0" y="0"/>
+            <a:ext cx="9144000" cy="602780"/>
+          </a:xfrm>
+          <a:solidFill>
+            <a:srgbClr val="1A1A2E"/>
+          </a:solidFill>
+        </p:spPr>
+        <p:txBody>
+          <a:bodyPr/>
+          <a:lstStyle/>
+          <a:p>
+            <a:pPr lvl="0" indent="0" marL="0">
+              <a:buNone/>
+            </a:pPr>
+            <a:r>
+              <a:rPr>
+                <a:latin typeface="Courier"/>
+              </a:rPr>
+              <a:t>arrange()</a:t>
+            </a:r>
+            <a:r>
+              <a:rPr/>
+              <a:t> — Sorting by Two Columns</a:t>
+            </a:r>
+          </a:p>
+        </p:txBody>
+      </p:sp>
+      <p:sp>
+        <p:nvSpPr>
+          <p:cNvPr id="3" name="Content Placeholder 2"/>
+          <p:cNvSpPr>
+            <a:spLocks noGrp="1"/>
+          </p:cNvSpPr>
+          <p:nvPr>
+            <p:ph idx="1" sz="half"/>
+          </p:nvPr>
+        </p:nvSpPr>
+        <p:spPr/>
+        <p:txBody>
+          <a:bodyPr/>
+          <a:lstStyle/>
+          <a:p>
+            <a:pPr lvl="0" indent="0">
+              <a:buNone/>
+            </a:pPr>
             <a:r>
               <a:rPr>
                 <a:solidFill>
@@ -6014,6 +6623,25 @@
                 </a:solidFill>
                 <a:latin typeface="Courier"/>
               </a:rPr>
+              <a:t># Sort by shade, then by mass within each shade</a:t>
+            </a:r>
+            <a:br/>
+            <a:r>
+              <a:rPr>
+                <a:solidFill>
+                  <a:srgbClr val="003B4F"/>
+                </a:solidFill>
+                <a:latin typeface="Courier"/>
+              </a:rPr>
+              <a:t>leaf_df </a:t>
+            </a:r>
+            <a:r>
+              <a:rPr>
+                <a:solidFill>
+                  <a:srgbClr val="5E5E5E"/>
+                </a:solidFill>
+                <a:latin typeface="Courier"/>
+              </a:rPr>
               <a:t>%&gt;%</a:t>
             </a:r>
             <a:r>
@@ -6028,360 +6656,752 @@
             <a:r>
               <a:rPr>
                 <a:solidFill>
+                  <a:srgbClr val="4758AB"/>
+                </a:solidFill>
+                <a:latin typeface="Courier"/>
+              </a:rPr>
+              <a:t>arrange</a:t>
+            </a:r>
+            <a:r>
+              <a:rPr>
+                <a:solidFill>
+                  <a:srgbClr val="003B4F"/>
+                </a:solidFill>
+                <a:latin typeface="Courier"/>
+              </a:rPr>
+              <a:t>(shade, </a:t>
+            </a:r>
+            <a:r>
+              <a:rPr>
+                <a:solidFill>
+                  <a:srgbClr val="4758AB"/>
+                </a:solidFill>
+                <a:latin typeface="Courier"/>
+              </a:rPr>
+              <a:t>desc</a:t>
+            </a:r>
+            <a:r>
+              <a:rPr>
+                <a:solidFill>
+                  <a:srgbClr val="003B4F"/>
+                </a:solidFill>
+                <a:latin typeface="Courier"/>
+              </a:rPr>
+              <a:t>(mass_g)) </a:t>
+            </a:r>
+            <a:r>
+              <a:rPr>
+                <a:solidFill>
                   <a:srgbClr val="5E5E5E"/>
                 </a:solidFill>
                 <a:latin typeface="Courier"/>
               </a:rPr>
-              <a:t># remove any zeros</a:t>
+              <a:t>%&gt;%</a:t>
+            </a:r>
+            <a:r>
+              <a:rPr>
+                <a:solidFill>
+                  <a:srgbClr val="003B4F"/>
+                </a:solidFill>
+                <a:latin typeface="Courier"/>
+              </a:rPr>
+              <a:t> </a:t>
+            </a:r>
+            <a:r>
+              <a:rPr>
+                <a:solidFill>
+                  <a:srgbClr val="4758AB"/>
+                </a:solidFill>
+                <a:latin typeface="Courier"/>
+              </a:rPr>
+              <a:t>head</a:t>
+            </a:r>
+            <a:r>
+              <a:rPr>
+                <a:solidFill>
+                  <a:srgbClr val="003B4F"/>
+                </a:solidFill>
+                <a:latin typeface="Courier"/>
+              </a:rPr>
+              <a:t>(</a:t>
+            </a:r>
+            <a:r>
+              <a:rPr>
+                <a:solidFill>
+                  <a:srgbClr val="AD0000"/>
+                </a:solidFill>
+                <a:latin typeface="Courier"/>
+              </a:rPr>
+              <a:t>3</a:t>
+            </a:r>
+            <a:r>
+              <a:rPr>
+                <a:solidFill>
+                  <a:srgbClr val="003B4F"/>
+                </a:solidFill>
+                <a:latin typeface="Courier"/>
+              </a:rPr>
+              <a:t>)</a:t>
+            </a:r>
+          </a:p>
+          <a:p>
+            <a:pPr lvl="0" indent="0">
+              <a:buNone/>
+            </a:pPr>
+            <a:r>
+              <a:rPr>
+                <a:latin typeface="Courier"/>
+              </a:rPr>
+              <a:t># A tibble: 3 × 8
+  twig_id leaf_id teams        shade mass_g petiole_mm thickness_mm paper_mass_g
+  &lt;chr&gt;   &lt;chr&gt;   &lt;chr&gt;        &lt;chr&gt;  &lt;dbl&gt;      &lt;dbl&gt;        &lt;dbl&gt;        &lt;dbl&gt;
+1 twig_2  l09     fighting_mo… shady  0.920      0.383        NA          NA    
+2 &lt;NA&gt;    &lt;NA&gt;    leaf_oglers  shady  0.8       41.2           0.5         0.3  
+3 twig_2  l10     fighting_mo… shady  0.782     67             0.27        0.342</a:t>
+            </a:r>
+          </a:p>
+        </p:txBody>
+      </p:sp>
+      <p:sp>
+        <p:nvSpPr>
+          <p:cNvPr id="4" name="Content Placeholder 3"/>
+          <p:cNvSpPr>
+            <a:spLocks noGrp="1"/>
+          </p:cNvSpPr>
+          <p:nvPr>
+            <p:ph idx="2" sz="half"/>
+          </p:nvPr>
+        </p:nvSpPr>
+        <p:spPr/>
+        <p:txBody>
+          <a:bodyPr/>
+          <a:lstStyle/>
+          <a:p>
+            <a:pPr lvl="0"/>
+            <a:r>
+              <a:rPr/>
+              <a:t>The </a:t>
+            </a:r>
+            <a:r>
+              <a:rPr b="1"/>
+              <a:t>first</a:t>
+            </a:r>
+            <a:r>
+              <a:rPr/>
+              <a:t> column sorts the whole data frame</a:t>
+            </a:r>
+          </a:p>
+          <a:p>
+            <a:pPr lvl="0"/>
+            <a:r>
+              <a:rPr/>
+              <a:t>The </a:t>
+            </a:r>
+            <a:r>
+              <a:rPr b="1"/>
+              <a:t>second</a:t>
+            </a:r>
+            <a:r>
+              <a:rPr/>
+              <a:t> breaks ties </a:t>
+            </a:r>
+            <a:r>
+              <a:rPr i="1"/>
+              <a:t>inside</a:t>
+            </a:r>
+            <a:r>
+              <a:rPr/>
+              <a:t> each group of the first</a:t>
+            </a:r>
+          </a:p>
+          <a:p>
+            <a:pPr lvl="0"/>
+            <a:r>
+              <a:rPr/>
+              <a:t>Here: shady leaves first, and within shady, heaviest first</a:t>
+            </a:r>
+          </a:p>
+          <a:p>
+            <a:pPr lvl="0" indent="0" marL="1270000">
+              <a:buNone/>
+            </a:pPr>
+            <a:r>
+              <a:rPr sz="2000" b="1"/>
+              <a:t>Note</a:t>
+            </a:r>
+          </a:p>
+          <a:p>
+            <a:pPr lvl="0" indent="0" marL="1270000">
+              <a:buNone/>
+            </a:pPr>
+            <a:r>
+              <a:rPr sz="2000"/>
+              <a:t>You can mix directions — </a:t>
+            </a:r>
+            <a:r>
+              <a:rPr sz="2000">
+                <a:latin typeface="Courier"/>
+              </a:rPr>
+              <a:t>arrange(shade, desc(mass_g))</a:t>
+            </a:r>
+            <a:r>
+              <a:rPr sz="2000"/>
+              <a:t> sorts shade ascending and mass descending in the same call.</a:t>
+            </a:r>
+          </a:p>
+        </p:txBody>
+      </p:sp>
+    </p:spTree>
+  </p:cSld>
+</p:sld>
+</file>
+
+<file path=ppt/slides/slide18.xml><?xml version="1.0" encoding="utf-8"?>
+<p:sld xmlns:a="http://schemas.openxmlformats.org/drawingml/2006/main" xmlns:r="http://schemas.openxmlformats.org/officeDocument/2006/relationships" xmlns:p="http://schemas.openxmlformats.org/presentationml/2006/main">
+  <p:cSld>
+    <p:spTree>
+      <p:nvGrpSpPr>
+        <p:cNvPr id="1" name=""/>
+        <p:cNvGrpSpPr/>
+        <p:nvPr/>
+      </p:nvGrpSpPr>
+      <p:grpSpPr>
+        <a:xfrm>
+          <a:off x="0" y="0"/>
+          <a:ext cx="0" cy="0"/>
+          <a:chOff x="0" y="0"/>
+          <a:chExt cx="0" cy="0"/>
+        </a:xfrm>
+      </p:grpSpPr>
+      <p:sp>
+        <p:nvSpPr>
+          <p:cNvPr id="2" name="Title 1"/>
+          <p:cNvSpPr>
+            <a:spLocks noGrp="1"/>
+          </p:cNvSpPr>
+          <p:nvPr>
+            <p:ph type="title"/>
+          </p:nvPr>
+        </p:nvSpPr>
+        <p:spPr>
+          <a:xfrm>
+            <a:off x="0" y="0"/>
+            <a:ext cx="9144000" cy="602780"/>
+          </a:xfrm>
+          <a:solidFill>
+            <a:srgbClr val="1A1A2E"/>
+          </a:solidFill>
+        </p:spPr>
+        <p:txBody>
+          <a:bodyPr/>
+          <a:lstStyle/>
+          <a:p>
+            <a:pPr lvl="0" indent="0" marL="0">
+              <a:buNone/>
+            </a:pPr>
+            <a:r>
+              <a:rPr/>
+              <a:t>The Full Pipeline</a:t>
+            </a:r>
+          </a:p>
+        </p:txBody>
+      </p:sp>
+      <p:sp>
+        <p:nvSpPr>
+          <p:cNvPr id="3" name="Content Placeholder 2"/>
+          <p:cNvSpPr>
+            <a:spLocks noGrp="1"/>
+          </p:cNvSpPr>
+          <p:nvPr>
+            <p:ph idx="1" sz="half"/>
+          </p:nvPr>
+        </p:nvSpPr>
+        <p:spPr/>
+        <p:txBody>
+          <a:bodyPr/>
+          <a:lstStyle/>
+          <a:p>
+            <a:pPr lvl="0" indent="0">
+              <a:buNone/>
+            </a:pPr>
+            <a:r>
+              <a:rPr>
+                <a:solidFill>
+                  <a:srgbClr val="5E5E5E"/>
+                </a:solidFill>
+                <a:latin typeface="Courier"/>
+              </a:rPr>
+              <a:t># Chain all the verbs together -------------------------</a:t>
             </a:r>
             <a:br/>
             <a:r>
               <a:rPr>
                 <a:solidFill>
-                  <a:srgbClr val="003B4F"/>
-                </a:solidFill>
-                <a:latin typeface="Courier"/>
-              </a:rPr>
-              <a:t>  </a:t>
-            </a:r>
-            <a:r>
-              <a:rPr>
-                <a:solidFill>
-                  <a:srgbClr val="4758AB"/>
-                </a:solidFill>
-                <a:latin typeface="Courier"/>
-              </a:rPr>
-              <a:t>select</a:t>
-            </a:r>
-            <a:r>
-              <a:rPr>
-                <a:solidFill>
-                  <a:srgbClr val="003B4F"/>
-                </a:solidFill>
-                <a:latin typeface="Courier"/>
-              </a:rPr>
-              <a:t>(shade, mass_g, thickness_mm) </a:t>
-            </a:r>
-            <a:r>
-              <a:rPr>
-                <a:solidFill>
                   <a:srgbClr val="5E5E5E"/>
                 </a:solidFill>
                 <a:latin typeface="Courier"/>
               </a:rPr>
-              <a:t>%&gt;%</a:t>
-            </a:r>
-            <a:r>
-              <a:rPr>
-                <a:solidFill>
-                  <a:srgbClr val="003B4F"/>
-                </a:solidFill>
-                <a:latin typeface="Courier"/>
-              </a:rPr>
-              <a:t> </a:t>
-            </a:r>
-            <a:r>
-              <a:rPr>
-                <a:solidFill>
-                  <a:srgbClr val="5E5E5E"/>
-                </a:solidFill>
-                <a:latin typeface="Courier"/>
-              </a:rPr>
-              <a:t># keep only needed cols</a:t>
-            </a:r>
-            <a:br/>
-            <a:r>
-              <a:rPr>
-                <a:solidFill>
-                  <a:srgbClr val="003B4F"/>
-                </a:solidFill>
-                <a:latin typeface="Courier"/>
-              </a:rPr>
-              <a:t>  </a:t>
-            </a:r>
-            <a:r>
-              <a:rPr>
-                <a:solidFill>
-                  <a:srgbClr val="4758AB"/>
-                </a:solidFill>
-                <a:latin typeface="Courier"/>
-              </a:rPr>
-              <a:t>mutate</a:t>
-            </a:r>
-            <a:r>
-              <a:rPr>
-                <a:solidFill>
-                  <a:srgbClr val="003B4F"/>
-                </a:solidFill>
-                <a:latin typeface="Courier"/>
-              </a:rPr>
-              <a:t>(</a:t>
-            </a:r>
-            <a:br/>
-            <a:r>
-              <a:rPr>
-                <a:solidFill>
-                  <a:srgbClr val="003B4F"/>
-                </a:solidFill>
-                <a:latin typeface="Courier"/>
-              </a:rPr>
-              <a:t>    </a:t>
-            </a:r>
-            <a:r>
-              <a:rPr>
-                <a:solidFill>
-                  <a:srgbClr val="657422"/>
-                </a:solidFill>
-                <a:latin typeface="Courier"/>
-              </a:rPr>
-              <a:t>mass_mg =</a:t>
-            </a:r>
-            <a:r>
-              <a:rPr>
-                <a:solidFill>
-                  <a:srgbClr val="003B4F"/>
-                </a:solidFill>
-                <a:latin typeface="Courier"/>
-              </a:rPr>
-              <a:t> mass_g </a:t>
-            </a:r>
-            <a:r>
-              <a:rPr>
-                <a:solidFill>
-                  <a:srgbClr val="5E5E5E"/>
-                </a:solidFill>
-                <a:latin typeface="Courier"/>
-              </a:rPr>
-              <a:t>*</a:t>
-            </a:r>
-            <a:r>
-              <a:rPr>
-                <a:solidFill>
-                  <a:srgbClr val="003B4F"/>
-                </a:solidFill>
-                <a:latin typeface="Courier"/>
-              </a:rPr>
-              <a:t> </a:t>
-            </a:r>
-            <a:r>
-              <a:rPr>
-                <a:solidFill>
-                  <a:srgbClr val="AD0000"/>
-                </a:solidFill>
-                <a:latin typeface="Courier"/>
-              </a:rPr>
-              <a:t>1000</a:t>
-            </a:r>
-            <a:r>
-              <a:rPr>
-                <a:solidFill>
-                  <a:srgbClr val="003B4F"/>
-                </a:solidFill>
-                <a:latin typeface="Courier"/>
-              </a:rPr>
-              <a:t>,</a:t>
-            </a:r>
-            <a:br/>
-            <a:r>
-              <a:rPr>
-                <a:solidFill>
-                  <a:srgbClr val="003B4F"/>
-                </a:solidFill>
-                <a:latin typeface="Courier"/>
-              </a:rPr>
-              <a:t>    </a:t>
-            </a:r>
-            <a:r>
-              <a:rPr>
-                <a:solidFill>
-                  <a:srgbClr val="657422"/>
-                </a:solidFill>
-                <a:latin typeface="Courier"/>
-              </a:rPr>
-              <a:t>size_class =</a:t>
-            </a:r>
-            <a:r>
-              <a:rPr>
-                <a:solidFill>
-                  <a:srgbClr val="003B4F"/>
-                </a:solidFill>
-                <a:latin typeface="Courier"/>
-              </a:rPr>
-              <a:t> </a:t>
-            </a:r>
-            <a:r>
-              <a:rPr>
-                <a:solidFill>
-                  <a:srgbClr val="4758AB"/>
-                </a:solidFill>
-                <a:latin typeface="Courier"/>
-              </a:rPr>
-              <a:t>if_else</a:t>
-            </a:r>
-            <a:r>
-              <a:rPr>
-                <a:solidFill>
-                  <a:srgbClr val="003B4F"/>
-                </a:solidFill>
-                <a:latin typeface="Courier"/>
-              </a:rPr>
-              <a:t>(mass_g </a:t>
-            </a:r>
-            <a:r>
-              <a:rPr>
-                <a:solidFill>
-                  <a:srgbClr val="5E5E5E"/>
-                </a:solidFill>
-                <a:latin typeface="Courier"/>
-              </a:rPr>
-              <a:t>&gt;</a:t>
-            </a:r>
-            <a:r>
-              <a:rPr>
-                <a:solidFill>
-                  <a:srgbClr val="003B4F"/>
-                </a:solidFill>
-                <a:latin typeface="Courier"/>
-              </a:rPr>
-              <a:t> </a:t>
-            </a:r>
-            <a:r>
-              <a:rPr>
-                <a:solidFill>
-                  <a:srgbClr val="AD0000"/>
-                </a:solidFill>
-                <a:latin typeface="Courier"/>
-              </a:rPr>
-              <a:t>0.5</a:t>
-            </a:r>
-            <a:r>
-              <a:rPr>
-                <a:solidFill>
-                  <a:srgbClr val="003B4F"/>
-                </a:solidFill>
-                <a:latin typeface="Courier"/>
-              </a:rPr>
-              <a:t>, </a:t>
-            </a:r>
-            <a:r>
-              <a:rPr>
-                <a:solidFill>
-                  <a:srgbClr val="20794D"/>
-                </a:solidFill>
-                <a:latin typeface="Courier"/>
-              </a:rPr>
-              <a:t>"large"</a:t>
-            </a:r>
-            <a:r>
-              <a:rPr>
-                <a:solidFill>
-                  <a:srgbClr val="003B4F"/>
-                </a:solidFill>
-                <a:latin typeface="Courier"/>
-              </a:rPr>
-              <a:t>, </a:t>
-            </a:r>
-            <a:r>
-              <a:rPr>
-                <a:solidFill>
-                  <a:srgbClr val="20794D"/>
-                </a:solidFill>
-                <a:latin typeface="Courier"/>
-              </a:rPr>
-              <a:t>"small"</a:t>
-            </a:r>
-            <a:r>
-              <a:rPr>
-                <a:solidFill>
-                  <a:srgbClr val="003B4F"/>
-                </a:solidFill>
-                <a:latin typeface="Courier"/>
-              </a:rPr>
-              <a:t>)</a:t>
-            </a:r>
-            <a:br/>
-            <a:r>
-              <a:rPr>
-                <a:solidFill>
-                  <a:srgbClr val="003B4F"/>
-                </a:solidFill>
-                <a:latin typeface="Courier"/>
-              </a:rPr>
-              <a:t>  ) </a:t>
-            </a:r>
-            <a:r>
-              <a:rPr>
-                <a:solidFill>
-                  <a:srgbClr val="5E5E5E"/>
-                </a:solidFill>
-                <a:latin typeface="Courier"/>
-              </a:rPr>
-              <a:t>%&gt;%</a:t>
-            </a:r>
-            <a:br/>
-            <a:r>
-              <a:rPr>
-                <a:solidFill>
-                  <a:srgbClr val="003B4F"/>
-                </a:solidFill>
-                <a:latin typeface="Courier"/>
-              </a:rPr>
-              <a:t>  </a:t>
-            </a:r>
-            <a:r>
-              <a:rPr>
-                <a:solidFill>
-                  <a:srgbClr val="4758AB"/>
-                </a:solidFill>
-                <a:latin typeface="Courier"/>
-              </a:rPr>
-              <a:t>arrange</a:t>
-            </a:r>
-            <a:r>
-              <a:rPr>
-                <a:solidFill>
-                  <a:srgbClr val="003B4F"/>
-                </a:solidFill>
-                <a:latin typeface="Courier"/>
-              </a:rPr>
-              <a:t>(shade, </a:t>
-            </a:r>
-            <a:r>
-              <a:rPr>
-                <a:solidFill>
-                  <a:srgbClr val="4758AB"/>
-                </a:solidFill>
-                <a:latin typeface="Courier"/>
-              </a:rPr>
-              <a:t>desc</a:t>
-            </a:r>
-            <a:r>
-              <a:rPr>
-                <a:solidFill>
-                  <a:srgbClr val="003B4F"/>
-                </a:solidFill>
-                <a:latin typeface="Courier"/>
-              </a:rPr>
-              <a:t>(mass_g)) </a:t>
-            </a:r>
-            <a:r>
-              <a:rPr>
-                <a:solidFill>
-                  <a:srgbClr val="5E5E5E"/>
-                </a:solidFill>
-                <a:latin typeface="Courier"/>
-              </a:rPr>
-              <a:t># sort by shade, then mass</a:t>
+              <a:t># Read it top to bottom like a recipe</a:t>
             </a:r>
             <a:br/>
             <a:br/>
             <a:r>
               <a:rPr>
                 <a:solidFill>
+                  <a:srgbClr val="003B4F"/>
+                </a:solidFill>
+                <a:latin typeface="Courier"/>
+              </a:rPr>
+              <a:t>wrangled_df &lt;- leaf_df </a:t>
+            </a:r>
+            <a:r>
+              <a:rPr>
+                <a:solidFill>
+                  <a:srgbClr val="5E5E5E"/>
+                </a:solidFill>
+                <a:latin typeface="Courier"/>
+              </a:rPr>
+              <a:t>%&gt;%</a:t>
+            </a:r>
+            <a:br/>
+            <a:r>
+              <a:rPr>
+                <a:solidFill>
+                  <a:srgbClr val="003B4F"/>
+                </a:solidFill>
+                <a:latin typeface="Courier"/>
+              </a:rPr>
+              <a:t>  </a:t>
+            </a:r>
+            <a:r>
+              <a:rPr>
+                <a:solidFill>
                   <a:srgbClr val="4758AB"/>
                 </a:solidFill>
                 <a:latin typeface="Courier"/>
               </a:rPr>
+              <a:t>filter</a:t>
+            </a:r>
+            <a:r>
+              <a:rPr>
+                <a:solidFill>
+                  <a:srgbClr val="003B4F"/>
+                </a:solidFill>
+                <a:latin typeface="Courier"/>
+              </a:rPr>
+              <a:t>(mass_g </a:t>
+            </a:r>
+            <a:r>
+              <a:rPr>
+                <a:solidFill>
+                  <a:srgbClr val="5E5E5E"/>
+                </a:solidFill>
+                <a:latin typeface="Courier"/>
+              </a:rPr>
+              <a:t>&gt;</a:t>
+            </a:r>
+            <a:r>
+              <a:rPr>
+                <a:solidFill>
+                  <a:srgbClr val="003B4F"/>
+                </a:solidFill>
+                <a:latin typeface="Courier"/>
+              </a:rPr>
+              <a:t> </a:t>
+            </a:r>
+            <a:r>
+              <a:rPr>
+                <a:solidFill>
+                  <a:srgbClr val="AD0000"/>
+                </a:solidFill>
+                <a:latin typeface="Courier"/>
+              </a:rPr>
+              <a:t>0</a:t>
+            </a:r>
+            <a:r>
+              <a:rPr>
+                <a:solidFill>
+                  <a:srgbClr val="003B4F"/>
+                </a:solidFill>
+                <a:latin typeface="Courier"/>
+              </a:rPr>
+              <a:t>) </a:t>
+            </a:r>
+            <a:r>
+              <a:rPr>
+                <a:solidFill>
+                  <a:srgbClr val="5E5E5E"/>
+                </a:solidFill>
+                <a:latin typeface="Courier"/>
+              </a:rPr>
+              <a:t>%&gt;%</a:t>
+            </a:r>
+            <a:r>
+              <a:rPr>
+                <a:solidFill>
+                  <a:srgbClr val="003B4F"/>
+                </a:solidFill>
+                <a:latin typeface="Courier"/>
+              </a:rPr>
+              <a:t> </a:t>
+            </a:r>
+            <a:r>
+              <a:rPr>
+                <a:solidFill>
+                  <a:srgbClr val="5E5E5E"/>
+                </a:solidFill>
+                <a:latin typeface="Courier"/>
+              </a:rPr>
+              <a:t># remove any zeros</a:t>
+            </a:r>
+            <a:br/>
+            <a:r>
+              <a:rPr>
+                <a:solidFill>
+                  <a:srgbClr val="003B4F"/>
+                </a:solidFill>
+                <a:latin typeface="Courier"/>
+              </a:rPr>
+              <a:t>  </a:t>
+            </a:r>
+            <a:r>
+              <a:rPr>
+                <a:solidFill>
+                  <a:srgbClr val="4758AB"/>
+                </a:solidFill>
+                <a:latin typeface="Courier"/>
+              </a:rPr>
+              <a:t>select</a:t>
+            </a:r>
+            <a:r>
+              <a:rPr>
+                <a:solidFill>
+                  <a:srgbClr val="003B4F"/>
+                </a:solidFill>
+                <a:latin typeface="Courier"/>
+              </a:rPr>
+              <a:t>(shade, mass_g, thickness_mm) </a:t>
+            </a:r>
+            <a:r>
+              <a:rPr>
+                <a:solidFill>
+                  <a:srgbClr val="5E5E5E"/>
+                </a:solidFill>
+                <a:latin typeface="Courier"/>
+              </a:rPr>
+              <a:t>%&gt;%</a:t>
+            </a:r>
+            <a:r>
+              <a:rPr>
+                <a:solidFill>
+                  <a:srgbClr val="003B4F"/>
+                </a:solidFill>
+                <a:latin typeface="Courier"/>
+              </a:rPr>
+              <a:t> </a:t>
+            </a:r>
+            <a:r>
+              <a:rPr>
+                <a:solidFill>
+                  <a:srgbClr val="5E5E5E"/>
+                </a:solidFill>
+                <a:latin typeface="Courier"/>
+              </a:rPr>
+              <a:t># keep only needed cols</a:t>
+            </a:r>
+            <a:br/>
+            <a:r>
+              <a:rPr>
+                <a:solidFill>
+                  <a:srgbClr val="003B4F"/>
+                </a:solidFill>
+                <a:latin typeface="Courier"/>
+              </a:rPr>
+              <a:t>  </a:t>
+            </a:r>
+            <a:r>
+              <a:rPr>
+                <a:solidFill>
+                  <a:srgbClr val="4758AB"/>
+                </a:solidFill>
+                <a:latin typeface="Courier"/>
+              </a:rPr>
+              <a:t>mutate</a:t>
+            </a:r>
+            <a:r>
+              <a:rPr>
+                <a:solidFill>
+                  <a:srgbClr val="003B4F"/>
+                </a:solidFill>
+                <a:latin typeface="Courier"/>
+              </a:rPr>
+              <a:t>(</a:t>
+            </a:r>
+            <a:br/>
+            <a:r>
+              <a:rPr>
+                <a:solidFill>
+                  <a:srgbClr val="003B4F"/>
+                </a:solidFill>
+                <a:latin typeface="Courier"/>
+              </a:rPr>
+              <a:t>    </a:t>
+            </a:r>
+            <a:r>
+              <a:rPr>
+                <a:solidFill>
+                  <a:srgbClr val="657422"/>
+                </a:solidFill>
+                <a:latin typeface="Courier"/>
+              </a:rPr>
+              <a:t>mass_mg =</a:t>
+            </a:r>
+            <a:r>
+              <a:rPr>
+                <a:solidFill>
+                  <a:srgbClr val="003B4F"/>
+                </a:solidFill>
+                <a:latin typeface="Courier"/>
+              </a:rPr>
+              <a:t> mass_g </a:t>
+            </a:r>
+            <a:r>
+              <a:rPr>
+                <a:solidFill>
+                  <a:srgbClr val="5E5E5E"/>
+                </a:solidFill>
+                <a:latin typeface="Courier"/>
+              </a:rPr>
+              <a:t>*</a:t>
+            </a:r>
+            <a:r>
+              <a:rPr>
+                <a:solidFill>
+                  <a:srgbClr val="003B4F"/>
+                </a:solidFill>
+                <a:latin typeface="Courier"/>
+              </a:rPr>
+              <a:t> </a:t>
+            </a:r>
+            <a:r>
+              <a:rPr>
+                <a:solidFill>
+                  <a:srgbClr val="AD0000"/>
+                </a:solidFill>
+                <a:latin typeface="Courier"/>
+              </a:rPr>
+              <a:t>1000</a:t>
+            </a:r>
+            <a:r>
+              <a:rPr>
+                <a:solidFill>
+                  <a:srgbClr val="003B4F"/>
+                </a:solidFill>
+                <a:latin typeface="Courier"/>
+              </a:rPr>
+              <a:t>,</a:t>
+            </a:r>
+            <a:br/>
+            <a:r>
+              <a:rPr>
+                <a:solidFill>
+                  <a:srgbClr val="003B4F"/>
+                </a:solidFill>
+                <a:latin typeface="Courier"/>
+              </a:rPr>
+              <a:t>    </a:t>
+            </a:r>
+            <a:r>
+              <a:rPr>
+                <a:solidFill>
+                  <a:srgbClr val="657422"/>
+                </a:solidFill>
+                <a:latin typeface="Courier"/>
+              </a:rPr>
+              <a:t>size_class =</a:t>
+            </a:r>
+            <a:r>
+              <a:rPr>
+                <a:solidFill>
+                  <a:srgbClr val="003B4F"/>
+                </a:solidFill>
+                <a:latin typeface="Courier"/>
+              </a:rPr>
+              <a:t> </a:t>
+            </a:r>
+            <a:r>
+              <a:rPr>
+                <a:solidFill>
+                  <a:srgbClr val="4758AB"/>
+                </a:solidFill>
+                <a:latin typeface="Courier"/>
+              </a:rPr>
+              <a:t>if_else</a:t>
+            </a:r>
+            <a:r>
+              <a:rPr>
+                <a:solidFill>
+                  <a:srgbClr val="003B4F"/>
+                </a:solidFill>
+                <a:latin typeface="Courier"/>
+              </a:rPr>
+              <a:t>(mass_g </a:t>
+            </a:r>
+            <a:r>
+              <a:rPr>
+                <a:solidFill>
+                  <a:srgbClr val="5E5E5E"/>
+                </a:solidFill>
+                <a:latin typeface="Courier"/>
+              </a:rPr>
+              <a:t>&gt;</a:t>
+            </a:r>
+            <a:r>
+              <a:rPr>
+                <a:solidFill>
+                  <a:srgbClr val="003B4F"/>
+                </a:solidFill>
+                <a:latin typeface="Courier"/>
+              </a:rPr>
+              <a:t> </a:t>
+            </a:r>
+            <a:r>
+              <a:rPr>
+                <a:solidFill>
+                  <a:srgbClr val="AD0000"/>
+                </a:solidFill>
+                <a:latin typeface="Courier"/>
+              </a:rPr>
+              <a:t>0.5</a:t>
+            </a:r>
+            <a:r>
+              <a:rPr>
+                <a:solidFill>
+                  <a:srgbClr val="003B4F"/>
+                </a:solidFill>
+                <a:latin typeface="Courier"/>
+              </a:rPr>
+              <a:t>, </a:t>
+            </a:r>
+            <a:r>
+              <a:rPr>
+                <a:solidFill>
+                  <a:srgbClr val="20794D"/>
+                </a:solidFill>
+                <a:latin typeface="Courier"/>
+              </a:rPr>
+              <a:t>"large"</a:t>
+            </a:r>
+            <a:r>
+              <a:rPr>
+                <a:solidFill>
+                  <a:srgbClr val="003B4F"/>
+                </a:solidFill>
+                <a:latin typeface="Courier"/>
+              </a:rPr>
+              <a:t>, </a:t>
+            </a:r>
+            <a:r>
+              <a:rPr>
+                <a:solidFill>
+                  <a:srgbClr val="20794D"/>
+                </a:solidFill>
+                <a:latin typeface="Courier"/>
+              </a:rPr>
+              <a:t>"small"</a:t>
+            </a:r>
+            <a:r>
+              <a:rPr>
+                <a:solidFill>
+                  <a:srgbClr val="003B4F"/>
+                </a:solidFill>
+                <a:latin typeface="Courier"/>
+              </a:rPr>
+              <a:t>)</a:t>
+            </a:r>
+            <a:br/>
+            <a:r>
+              <a:rPr>
+                <a:solidFill>
+                  <a:srgbClr val="003B4F"/>
+                </a:solidFill>
+                <a:latin typeface="Courier"/>
+              </a:rPr>
+              <a:t>  ) </a:t>
+            </a:r>
+            <a:r>
+              <a:rPr>
+                <a:solidFill>
+                  <a:srgbClr val="5E5E5E"/>
+                </a:solidFill>
+                <a:latin typeface="Courier"/>
+              </a:rPr>
+              <a:t>%&gt;%</a:t>
+            </a:r>
+            <a:br/>
+            <a:r>
+              <a:rPr>
+                <a:solidFill>
+                  <a:srgbClr val="003B4F"/>
+                </a:solidFill>
+                <a:latin typeface="Courier"/>
+              </a:rPr>
+              <a:t>  </a:t>
+            </a:r>
+            <a:r>
+              <a:rPr>
+                <a:solidFill>
+                  <a:srgbClr val="4758AB"/>
+                </a:solidFill>
+                <a:latin typeface="Courier"/>
+              </a:rPr>
+              <a:t>arrange</a:t>
+            </a:r>
+            <a:r>
+              <a:rPr>
+                <a:solidFill>
+                  <a:srgbClr val="003B4F"/>
+                </a:solidFill>
+                <a:latin typeface="Courier"/>
+              </a:rPr>
+              <a:t>(shade, </a:t>
+            </a:r>
+            <a:r>
+              <a:rPr>
+                <a:solidFill>
+                  <a:srgbClr val="4758AB"/>
+                </a:solidFill>
+                <a:latin typeface="Courier"/>
+              </a:rPr>
+              <a:t>desc</a:t>
+            </a:r>
+            <a:r>
+              <a:rPr>
+                <a:solidFill>
+                  <a:srgbClr val="003B4F"/>
+                </a:solidFill>
+                <a:latin typeface="Courier"/>
+              </a:rPr>
+              <a:t>(mass_g)) </a:t>
+            </a:r>
+            <a:r>
+              <a:rPr>
+                <a:solidFill>
+                  <a:srgbClr val="5E5E5E"/>
+                </a:solidFill>
+                <a:latin typeface="Courier"/>
+              </a:rPr>
+              <a:t># sort by shade, then mass</a:t>
+            </a:r>
+            <a:br/>
+            <a:br/>
+            <a:r>
+              <a:rPr>
+                <a:solidFill>
+                  <a:srgbClr val="4758AB"/>
+                </a:solidFill>
+                <a:latin typeface="Courier"/>
+              </a:rPr>
               <a:t>head</a:t>
             </a:r>
             <a:r>
@@ -6391,7 +7411,25 @@
                 </a:solidFill>
                 <a:latin typeface="Courier"/>
               </a:rPr>
-              <a:t>(wrangled_df)</a:t>
+              <a:t>(wrangled_df, </a:t>
+            </a:r>
+            <a:r>
+              <a:rPr>
+                <a:solidFill>
+                  <a:srgbClr val="AD0000"/>
+                </a:solidFill>
+                <a:latin typeface="Courier"/>
+              </a:rPr>
+              <a:t>3</a:t>
+            </a:r>
+            <a:r>
+              <a:rPr>
+                <a:solidFill>
+                  <a:srgbClr val="003B4F"/>
+                </a:solidFill>
+                <a:latin typeface="Courier"/>
+              </a:rPr>
+              <a:t>)</a:t>
             </a:r>
           </a:p>
           <a:p>
@@ -6402,15 +7440,12 @@
               <a:rPr>
                 <a:latin typeface="Courier"/>
               </a:rPr>
-              <a:t># A tibble: 6 × 5
+              <a:t># A tibble: 3 × 5
   shade mass_g thickness_mm mass_mg size_class
   &lt;chr&gt;  &lt;dbl&gt;        &lt;dbl&gt;   &lt;dbl&gt; &lt;chr&gt;     
 1 shady  0.920        NA       920. large     
 2 shady  0.8           0.5     800  large     
-3 shady  0.782         0.27    782. large     
-4 shady  0.68          0.47    680  large     
-5 shady  0.61          0.23    610  large     
-6 shady  0.607         0.32    607. large     </a:t>
+3 shady  0.782         0.27    782. large     </a:t>
             </a:r>
           </a:p>
         </p:txBody>
@@ -6518,30 +7553,25 @@
             </a:r>
           </a:p>
           <a:p>
-            <a:pPr lvl="0" indent="0" marL="1270000">
-              <a:buNone/>
-            </a:pPr>
+            <a:pPr lvl="0"/>
             <a:r>
               <a:rPr sz="2000"/>
-              <a:t>Write the same pipeline as nested functions — </a:t>
-            </a:r>
-            <a:r>
-              <a:rPr sz="2000">
-                <a:latin typeface="Courier"/>
-              </a:rPr>
-              <a:t>arrange(mutate(select(filter(leaf_df, mass_g &gt; 0), shade, mass_g, thickness_mm), mass_mg = mass_g * 1000, size_class = if_else(mass_g &gt; 0.5, "large", "small")), shade, desc(mass_g))</a:t>
+              <a:t>Written as nested functions, the </a:t>
+            </a:r>
+            <a:r>
+              <a:rPr sz="2000" b="1"/>
+              <a:t>first</a:t>
             </a:r>
             <a:r>
               <a:rPr sz="2000"/>
-              <a:t> — and the </a:t>
-            </a:r>
-            <a:r>
-              <a:rPr sz="2000" i="1"/>
-              <a:t>first</a:t>
-            </a:r>
+              <a:t> step ends up buried in the middle</a:t>
+            </a:r>
+          </a:p>
+          <a:p>
+            <a:pPr lvl="0"/>
             <a:r>
               <a:rPr sz="2000"/>
-              <a:t> thing that runs is buried in the middle. The pipe lets you read top to bottom in the order R actually executes.</a:t>
+              <a:t>The pipe lets you read top to bottom, in the order R actually runs things</a:t>
             </a:r>
           </a:p>
         </p:txBody>
@@ -6829,7 +7859,7 @@
 </p:sld>
 </file>
 
-<file path=ppt/slides/slide16.xml><?xml version="1.0" encoding="utf-8"?>
+<file path=ppt/slides/slide19.xml><?xml version="1.0" encoding="utf-8"?>
 <p:sld xmlns:a="http://schemas.openxmlformats.org/drawingml/2006/main" xmlns:r="http://schemas.openxmlformats.org/officeDocument/2006/relationships" xmlns:p="http://schemas.openxmlformats.org/presentationml/2006/main">
   <p:cSld>
     <p:spTree>
@@ -6946,272 +7976,6 @@
             <a:r>
               <a:rPr/>
               <a:t>, and the full pipeline. Type every line yourself into your script; predict before you run.</a:t>
-            </a:r>
-          </a:p>
-        </p:txBody>
-      </p:sp>
-    </p:spTree>
-  </p:cSld>
-</p:sld>
-</file>
-
-<file path=ppt/slides/slide17.xml><?xml version="1.0" encoding="utf-8"?>
-<p:sld xmlns:a="http://schemas.openxmlformats.org/drawingml/2006/main" xmlns:r="http://schemas.openxmlformats.org/officeDocument/2006/relationships" xmlns:p="http://schemas.openxmlformats.org/presentationml/2006/main">
-  <p:cSld>
-    <p:spTree>
-      <p:nvGrpSpPr>
-        <p:cNvPr id="1" name=""/>
-        <p:cNvGrpSpPr/>
-        <p:nvPr/>
-      </p:nvGrpSpPr>
-      <p:grpSpPr>
-        <a:xfrm>
-          <a:off x="0" y="0"/>
-          <a:ext cx="0" cy="0"/>
-          <a:chOff x="0" y="0"/>
-          <a:chExt cx="0" cy="0"/>
-        </a:xfrm>
-      </p:grpSpPr>
-      <p:sp>
-        <p:nvSpPr>
-          <p:cNvPr id="2" name="Title 1"/>
-          <p:cNvSpPr>
-            <a:spLocks noGrp="1"/>
-          </p:cNvSpPr>
-          <p:nvPr>
-            <p:ph type="title"/>
-          </p:nvPr>
-        </p:nvSpPr>
-        <p:spPr>
-          <a:xfrm>
-            <a:off x="0" y="0"/>
-            <a:ext cx="9144000" cy="602780"/>
-          </a:xfrm>
-          <a:solidFill>
-            <a:srgbClr val="1A1A2E"/>
-          </a:solidFill>
-        </p:spPr>
-        <p:txBody>
-          <a:bodyPr/>
-          <a:lstStyle/>
-          <a:p>
-            <a:pPr lvl="0" indent="0" marL="0">
-              <a:buNone/>
-            </a:pPr>
-            <a:r>
-              <a:rPr/>
-              <a:t>What We Learned Today</a:t>
-            </a:r>
-          </a:p>
-        </p:txBody>
-      </p:sp>
-      <p:sp>
-        <p:nvSpPr>
-          <p:cNvPr id="3" name="Content Placeholder 2"/>
-          <p:cNvSpPr>
-            <a:spLocks noGrp="1"/>
-          </p:cNvSpPr>
-          <p:nvPr>
-            <p:ph idx="1" sz="half"/>
-          </p:nvPr>
-        </p:nvSpPr>
-        <p:spPr/>
-        <p:txBody>
-          <a:bodyPr/>
-          <a:lstStyle/>
-          <a:p>
-            <a:pPr lvl="0"/>
-            <a:r>
-              <a:rPr>
-                <a:latin typeface="Courier"/>
-              </a:rPr>
-              <a:t>filter()</a:t>
-            </a:r>
-            <a:r>
-              <a:rPr/>
-              <a:t> — keep rows by condition</a:t>
-            </a:r>
-          </a:p>
-          <a:p>
-            <a:pPr lvl="0"/>
-            <a:r>
-              <a:rPr>
-                <a:latin typeface="Courier"/>
-              </a:rPr>
-              <a:t>select()</a:t>
-            </a:r>
-            <a:r>
-              <a:rPr/>
-              <a:t> — keep columns by name</a:t>
-            </a:r>
-          </a:p>
-          <a:p>
-            <a:pPr lvl="0"/>
-            <a:r>
-              <a:rPr>
-                <a:latin typeface="Courier"/>
-              </a:rPr>
-              <a:t>mutate()</a:t>
-            </a:r>
-            <a:r>
-              <a:rPr/>
-              <a:t> — add new calculated columns</a:t>
-            </a:r>
-          </a:p>
-          <a:p>
-            <a:pPr lvl="0"/>
-            <a:r>
-              <a:rPr>
-                <a:latin typeface="Courier"/>
-              </a:rPr>
-              <a:t>arrange()</a:t>
-            </a:r>
-            <a:r>
-              <a:rPr/>
-              <a:t> — sort rows</a:t>
-            </a:r>
-          </a:p>
-          <a:p>
-            <a:pPr lvl="0"/>
-            <a:r>
-              <a:rPr/>
-              <a:t>Full pipeline: chain all verbs with </a:t>
-            </a:r>
-            <a:r>
-              <a:rPr>
-                <a:latin typeface="Courier"/>
-              </a:rPr>
-              <a:t>%&gt;%</a:t>
-            </a:r>
-          </a:p>
-        </p:txBody>
-      </p:sp>
-      <p:sp>
-        <p:nvSpPr>
-          <p:cNvPr id="4" name="Content Placeholder 3"/>
-          <p:cNvSpPr>
-            <a:spLocks noGrp="1"/>
-          </p:cNvSpPr>
-          <p:nvPr>
-            <p:ph idx="2" sz="half"/>
-          </p:nvPr>
-        </p:nvSpPr>
-        <p:spPr/>
-        <p:txBody>
-          <a:bodyPr/>
-          <a:lstStyle/>
-          <a:p>
-            <a:pPr lvl="0" indent="0" marL="0">
-              <a:buNone/>
-            </a:pPr>
-            <a:r>
-              <a:rPr b="1"/>
-              <a:t>References:</a:t>
-            </a:r>
-          </a:p>
-          <a:p>
-            <a:pPr lvl="0"/>
-            <a:r>
-              <a:rPr/>
-              <a:t>📖 </a:t>
-            </a:r>
-            <a:r>
-              <a:rPr>
-                <a:hlinkClick r:id="rId2"/>
-              </a:rPr>
-              <a:t>R4DS §3</a:t>
-            </a:r>
-            <a:r>
-              <a:rPr/>
-              <a:t> — Data Transformation</a:t>
-            </a:r>
-          </a:p>
-          <a:p>
-            <a:pPr lvl="0"/>
-            <a:r>
-              <a:rPr/>
-              <a:t>📖 </a:t>
-            </a:r>
-            <a:r>
-              <a:rPr>
-                <a:hlinkClick r:id="rId3"/>
-              </a:rPr>
-              <a:t>R4DS §5</a:t>
-            </a:r>
-            <a:r>
-              <a:rPr/>
-              <a:t> — Data Tidying</a:t>
-            </a:r>
-          </a:p>
-          <a:p>
-            <a:pPr lvl="0"/>
-            <a:r>
-              <a:rPr/>
-              <a:t>🌐 </a:t>
-            </a:r>
-            <a:r>
-              <a:rPr>
-                <a:hlinkClick r:id="rId4"/>
-              </a:rPr>
-              <a:t>Data Carpentry</a:t>
-            </a:r>
-          </a:p>
-          <a:p>
-            <a:pPr lvl="0" indent="0" marL="0">
-              <a:buNone/>
-            </a:pPr>
-            <a:r>
-              <a:rPr b="1"/>
-              <a:t>Up next — Lecture 06, Summary Statistics:</a:t>
-            </a:r>
-          </a:p>
-          <a:p>
-            <a:pPr lvl="0"/>
-            <a:r>
-              <a:rPr/>
-              <a:t>Mean, median, variance, SD, SE</a:t>
-            </a:r>
-          </a:p>
-          <a:p>
-            <a:pPr lvl="0"/>
-            <a:r>
-              <a:rPr/>
-              <a:t>Counting correctly with </a:t>
-            </a:r>
-            <a:r>
-              <a:rPr>
-                <a:latin typeface="Courier"/>
-              </a:rPr>
-              <a:t>sum(!is.na())</a:t>
-            </a:r>
-          </a:p>
-          <a:p>
-            <a:pPr lvl="0"/>
-            <a:r>
-              <a:rPr>
-                <a:latin typeface="Courier"/>
-              </a:rPr>
-              <a:t>group_by()</a:t>
-            </a:r>
-            <a:r>
-              <a:rPr/>
-              <a:t> + </a:t>
-            </a:r>
-            <a:r>
-              <a:rPr>
-                <a:latin typeface="Courier"/>
-              </a:rPr>
-              <a:t>summarize()</a:t>
-            </a:r>
-            <a:r>
-              <a:rPr/>
-              <a:t>, and </a:t>
-            </a:r>
-            <a:r>
-              <a:rPr>
-                <a:latin typeface="Courier"/>
-              </a:rPr>
-              <a:t>skimr</a:t>
             </a:r>
           </a:p>
         </p:txBody>
@@ -7455,6 +8219,272 @@
             <a:r>
               <a:rPr sz="2000"/>
               <a:t>.</a:t>
+            </a:r>
+          </a:p>
+        </p:txBody>
+      </p:sp>
+    </p:spTree>
+  </p:cSld>
+</p:sld>
+</file>
+
+<file path=ppt/slides/slide20.xml><?xml version="1.0" encoding="utf-8"?>
+<p:sld xmlns:a="http://schemas.openxmlformats.org/drawingml/2006/main" xmlns:r="http://schemas.openxmlformats.org/officeDocument/2006/relationships" xmlns:p="http://schemas.openxmlformats.org/presentationml/2006/main">
+  <p:cSld>
+    <p:spTree>
+      <p:nvGrpSpPr>
+        <p:cNvPr id="1" name=""/>
+        <p:cNvGrpSpPr/>
+        <p:nvPr/>
+      </p:nvGrpSpPr>
+      <p:grpSpPr>
+        <a:xfrm>
+          <a:off x="0" y="0"/>
+          <a:ext cx="0" cy="0"/>
+          <a:chOff x="0" y="0"/>
+          <a:chExt cx="0" cy="0"/>
+        </a:xfrm>
+      </p:grpSpPr>
+      <p:sp>
+        <p:nvSpPr>
+          <p:cNvPr id="2" name="Title 1"/>
+          <p:cNvSpPr>
+            <a:spLocks noGrp="1"/>
+          </p:cNvSpPr>
+          <p:nvPr>
+            <p:ph type="title"/>
+          </p:nvPr>
+        </p:nvSpPr>
+        <p:spPr>
+          <a:xfrm>
+            <a:off x="0" y="0"/>
+            <a:ext cx="9144000" cy="602780"/>
+          </a:xfrm>
+          <a:solidFill>
+            <a:srgbClr val="1A1A2E"/>
+          </a:solidFill>
+        </p:spPr>
+        <p:txBody>
+          <a:bodyPr/>
+          <a:lstStyle/>
+          <a:p>
+            <a:pPr lvl="0" indent="0" marL="0">
+              <a:buNone/>
+            </a:pPr>
+            <a:r>
+              <a:rPr/>
+              <a:t>What We Learned Today</a:t>
+            </a:r>
+          </a:p>
+        </p:txBody>
+      </p:sp>
+      <p:sp>
+        <p:nvSpPr>
+          <p:cNvPr id="3" name="Content Placeholder 2"/>
+          <p:cNvSpPr>
+            <a:spLocks noGrp="1"/>
+          </p:cNvSpPr>
+          <p:nvPr>
+            <p:ph idx="1" sz="half"/>
+          </p:nvPr>
+        </p:nvSpPr>
+        <p:spPr/>
+        <p:txBody>
+          <a:bodyPr/>
+          <a:lstStyle/>
+          <a:p>
+            <a:pPr lvl="0"/>
+            <a:r>
+              <a:rPr>
+                <a:latin typeface="Courier"/>
+              </a:rPr>
+              <a:t>filter()</a:t>
+            </a:r>
+            <a:r>
+              <a:rPr/>
+              <a:t> — keep rows by condition</a:t>
+            </a:r>
+          </a:p>
+          <a:p>
+            <a:pPr lvl="0"/>
+            <a:r>
+              <a:rPr>
+                <a:latin typeface="Courier"/>
+              </a:rPr>
+              <a:t>select()</a:t>
+            </a:r>
+            <a:r>
+              <a:rPr/>
+              <a:t> — keep columns by name</a:t>
+            </a:r>
+          </a:p>
+          <a:p>
+            <a:pPr lvl="0"/>
+            <a:r>
+              <a:rPr>
+                <a:latin typeface="Courier"/>
+              </a:rPr>
+              <a:t>mutate()</a:t>
+            </a:r>
+            <a:r>
+              <a:rPr/>
+              <a:t> — add new calculated columns</a:t>
+            </a:r>
+          </a:p>
+          <a:p>
+            <a:pPr lvl="0"/>
+            <a:r>
+              <a:rPr>
+                <a:latin typeface="Courier"/>
+              </a:rPr>
+              <a:t>arrange()</a:t>
+            </a:r>
+            <a:r>
+              <a:rPr/>
+              <a:t> — sort rows</a:t>
+            </a:r>
+          </a:p>
+          <a:p>
+            <a:pPr lvl="0"/>
+            <a:r>
+              <a:rPr/>
+              <a:t>Full pipeline: chain all verbs with </a:t>
+            </a:r>
+            <a:r>
+              <a:rPr>
+                <a:latin typeface="Courier"/>
+              </a:rPr>
+              <a:t>%&gt;%</a:t>
+            </a:r>
+          </a:p>
+        </p:txBody>
+      </p:sp>
+      <p:sp>
+        <p:nvSpPr>
+          <p:cNvPr id="4" name="Content Placeholder 3"/>
+          <p:cNvSpPr>
+            <a:spLocks noGrp="1"/>
+          </p:cNvSpPr>
+          <p:nvPr>
+            <p:ph idx="2" sz="half"/>
+          </p:nvPr>
+        </p:nvSpPr>
+        <p:spPr/>
+        <p:txBody>
+          <a:bodyPr/>
+          <a:lstStyle/>
+          <a:p>
+            <a:pPr lvl="0" indent="0" marL="0">
+              <a:buNone/>
+            </a:pPr>
+            <a:r>
+              <a:rPr b="1"/>
+              <a:t>References:</a:t>
+            </a:r>
+          </a:p>
+          <a:p>
+            <a:pPr lvl="0"/>
+            <a:r>
+              <a:rPr/>
+              <a:t>📖 </a:t>
+            </a:r>
+            <a:r>
+              <a:rPr>
+                <a:hlinkClick r:id="rId2"/>
+              </a:rPr>
+              <a:t>R4DS §3</a:t>
+            </a:r>
+            <a:r>
+              <a:rPr/>
+              <a:t> — Data Transformation</a:t>
+            </a:r>
+          </a:p>
+          <a:p>
+            <a:pPr lvl="0"/>
+            <a:r>
+              <a:rPr/>
+              <a:t>📖 </a:t>
+            </a:r>
+            <a:r>
+              <a:rPr>
+                <a:hlinkClick r:id="rId3"/>
+              </a:rPr>
+              <a:t>R4DS §5</a:t>
+            </a:r>
+            <a:r>
+              <a:rPr/>
+              <a:t> — Data Tidying</a:t>
+            </a:r>
+          </a:p>
+          <a:p>
+            <a:pPr lvl="0"/>
+            <a:r>
+              <a:rPr/>
+              <a:t>🌐 </a:t>
+            </a:r>
+            <a:r>
+              <a:rPr>
+                <a:hlinkClick r:id="rId4"/>
+              </a:rPr>
+              <a:t>Data Carpentry</a:t>
+            </a:r>
+          </a:p>
+          <a:p>
+            <a:pPr lvl="0" indent="0" marL="0">
+              <a:buNone/>
+            </a:pPr>
+            <a:r>
+              <a:rPr b="1"/>
+              <a:t>Up next — Lecture 06, Summary Statistics:</a:t>
+            </a:r>
+          </a:p>
+          <a:p>
+            <a:pPr lvl="0"/>
+            <a:r>
+              <a:rPr/>
+              <a:t>Mean, median, variance, SD, SE</a:t>
+            </a:r>
+          </a:p>
+          <a:p>
+            <a:pPr lvl="0"/>
+            <a:r>
+              <a:rPr/>
+              <a:t>Counting correctly with </a:t>
+            </a:r>
+            <a:r>
+              <a:rPr>
+                <a:latin typeface="Courier"/>
+              </a:rPr>
+              <a:t>sum(!is.na())</a:t>
+            </a:r>
+          </a:p>
+          <a:p>
+            <a:pPr lvl="0"/>
+            <a:r>
+              <a:rPr>
+                <a:latin typeface="Courier"/>
+              </a:rPr>
+              <a:t>group_by()</a:t>
+            </a:r>
+            <a:r>
+              <a:rPr/>
+              <a:t> + </a:t>
+            </a:r>
+            <a:r>
+              <a:rPr>
+                <a:latin typeface="Courier"/>
+              </a:rPr>
+              <a:t>summarize()</a:t>
+            </a:r>
+            <a:r>
+              <a:rPr/>
+              <a:t>, and </a:t>
+            </a:r>
+            <a:r>
+              <a:rPr>
+                <a:latin typeface="Courier"/>
+              </a:rPr>
+              <a:t>skimr</a:t>
             </a:r>
           </a:p>
         </p:txBody>
@@ -9282,7 +10312,25 @@
                 </a:solidFill>
                 <a:latin typeface="Courier"/>
               </a:rPr>
-              <a:t>()</a:t>
+              <a:t>(</a:t>
+            </a:r>
+            <a:r>
+              <a:rPr>
+                <a:solidFill>
+                  <a:srgbClr val="AD0000"/>
+                </a:solidFill>
+                <a:latin typeface="Courier"/>
+              </a:rPr>
+              <a:t>3</a:t>
+            </a:r>
+            <a:r>
+              <a:rPr>
+                <a:solidFill>
+                  <a:srgbClr val="003B4F"/>
+                </a:solidFill>
+                <a:latin typeface="Courier"/>
+              </a:rPr>
+              <a:t>)</a:t>
             </a:r>
           </a:p>
           <a:p>
@@ -9293,356 +10341,12 @@
               <a:rPr>
                 <a:latin typeface="Courier"/>
               </a:rPr>
-              <a:t># A tibble: 6 × 8
-  twig_id leaf_id teams shade mass_g petiole_mm thickness_mm
-  &lt;chr&gt;   &lt;chr&gt;   &lt;chr&gt; &lt;chr&gt;  &lt;dbl&gt;      &lt;dbl&gt;        &lt;dbl&gt;
-1 &lt;NA&gt;    &lt;NA&gt;    12345 sunny   0.4          79         0.15
-2 &lt;NA&gt;    &lt;NA&gt;    12345 sunny   0.48         63         0.14
-3 &lt;NA&gt;    &lt;NA&gt;    12345 sunny   0.34         68         0.14
-4 &lt;NA&gt;    &lt;NA&gt;    12345 sunny   0.65         35         0.15
-5 &lt;NA&gt;    &lt;NA&gt;    12345 sunny   0.27         34         0.11
-6 &lt;NA&gt;    &lt;NA&gt;    12345 sunny   0.43         40         0.16
-# ℹ 1 more variable: paper_mass_g &lt;dbl&gt;</a:t>
-            </a:r>
-          </a:p>
-          <a:p>
-            <a:pPr lvl="0" indent="0">
-              <a:buNone/>
-            </a:pPr>
-            <a:r>
-              <a:rPr>
-                <a:solidFill>
-                  <a:srgbClr val="5E5E5E"/>
-                </a:solidFill>
-                <a:latin typeface="Courier"/>
-              </a:rPr>
-              <a:t># Keep only leaves heavier than 0.5 g</a:t>
-            </a:r>
-            <a:br/>
-            <a:r>
-              <a:rPr>
-                <a:solidFill>
-                  <a:srgbClr val="003B4F"/>
-                </a:solidFill>
-                <a:latin typeface="Courier"/>
-              </a:rPr>
-              <a:t>leaf_df </a:t>
-            </a:r>
-            <a:r>
-              <a:rPr>
-                <a:solidFill>
-                  <a:srgbClr val="5E5E5E"/>
-                </a:solidFill>
-                <a:latin typeface="Courier"/>
-              </a:rPr>
-              <a:t>%&gt;%</a:t>
-            </a:r>
-            <a:r>
-              <a:rPr>
-                <a:solidFill>
-                  <a:srgbClr val="003B4F"/>
-                </a:solidFill>
-                <a:latin typeface="Courier"/>
-              </a:rPr>
-              <a:t> </a:t>
-            </a:r>
-            <a:r>
-              <a:rPr>
-                <a:solidFill>
-                  <a:srgbClr val="4758AB"/>
-                </a:solidFill>
-                <a:latin typeface="Courier"/>
-              </a:rPr>
-              <a:t>filter</a:t>
-            </a:r>
-            <a:r>
-              <a:rPr>
-                <a:solidFill>
-                  <a:srgbClr val="003B4F"/>
-                </a:solidFill>
-                <a:latin typeface="Courier"/>
-              </a:rPr>
-              <a:t>(mass_g </a:t>
-            </a:r>
-            <a:r>
-              <a:rPr>
-                <a:solidFill>
-                  <a:srgbClr val="5E5E5E"/>
-                </a:solidFill>
-                <a:latin typeface="Courier"/>
-              </a:rPr>
-              <a:t>&gt;</a:t>
-            </a:r>
-            <a:r>
-              <a:rPr>
-                <a:solidFill>
-                  <a:srgbClr val="003B4F"/>
-                </a:solidFill>
-                <a:latin typeface="Courier"/>
-              </a:rPr>
-              <a:t> </a:t>
-            </a:r>
-            <a:r>
-              <a:rPr>
-                <a:solidFill>
-                  <a:srgbClr val="AD0000"/>
-                </a:solidFill>
-                <a:latin typeface="Courier"/>
-              </a:rPr>
-              <a:t>0.5</a:t>
-            </a:r>
-            <a:r>
-              <a:rPr>
-                <a:solidFill>
-                  <a:srgbClr val="003B4F"/>
-                </a:solidFill>
-                <a:latin typeface="Courier"/>
-              </a:rPr>
-              <a:t>) </a:t>
-            </a:r>
-            <a:r>
-              <a:rPr>
-                <a:solidFill>
-                  <a:srgbClr val="5E5E5E"/>
-                </a:solidFill>
-                <a:latin typeface="Courier"/>
-              </a:rPr>
-              <a:t>%&gt;%</a:t>
-            </a:r>
-            <a:r>
-              <a:rPr>
-                <a:solidFill>
-                  <a:srgbClr val="003B4F"/>
-                </a:solidFill>
-                <a:latin typeface="Courier"/>
-              </a:rPr>
-              <a:t> </a:t>
-            </a:r>
-            <a:r>
-              <a:rPr>
-                <a:solidFill>
-                  <a:srgbClr val="4758AB"/>
-                </a:solidFill>
-                <a:latin typeface="Courier"/>
-              </a:rPr>
-              <a:t>head</a:t>
-            </a:r>
-            <a:r>
-              <a:rPr>
-                <a:solidFill>
-                  <a:srgbClr val="003B4F"/>
-                </a:solidFill>
-                <a:latin typeface="Courier"/>
-              </a:rPr>
-              <a:t>()</a:t>
-            </a:r>
-          </a:p>
-          <a:p>
-            <a:pPr lvl="0" indent="0">
-              <a:buNone/>
-            </a:pPr>
-            <a:r>
-              <a:rPr>
-                <a:latin typeface="Courier"/>
-              </a:rPr>
-              <a:t># A tibble: 6 × 8
-  twig_id leaf_id teams      shade mass_g petiole_mm thickness_mm
-  &lt;chr&gt;   &lt;chr&gt;   &lt;chr&gt;      &lt;chr&gt;  &lt;dbl&gt;      &lt;dbl&gt;        &lt;dbl&gt;
-1 &lt;NA&gt;    &lt;NA&gt;    12345      sunny  0.65      35             0.15
-2 &lt;NA&gt;    &lt;NA&gt;    12345      shady  0.6       68             0.12
-3 &lt;NA&gt;    &lt;NA&gt;    12345      shady  0.57      73             0.14
-4 twig_1  l07     fighting_… shady  0.589     66             0.32
-5 twig_1  l08     fighting_… shady  0.511     51             0.25
-6 twig_2  l09     fighting_… shady  0.920      0.383        NA   
-# ℹ 1 more variable: paper_mass_g &lt;dbl&gt;</a:t>
-            </a:r>
-          </a:p>
-          <a:p>
-            <a:pPr lvl="0" indent="0">
-              <a:buNone/>
-            </a:pPr>
-            <a:r>
-              <a:rPr>
-                <a:solidFill>
-                  <a:srgbClr val="5E5E5E"/>
-                </a:solidFill>
-                <a:latin typeface="Courier"/>
-              </a:rPr>
-              <a:t># Combine two conditions with , (AND)</a:t>
-            </a:r>
-            <a:br/>
-            <a:r>
-              <a:rPr>
-                <a:solidFill>
-                  <a:srgbClr val="003B4F"/>
-                </a:solidFill>
-                <a:latin typeface="Courier"/>
-              </a:rPr>
-              <a:t>leaf_df </a:t>
-            </a:r>
-            <a:r>
-              <a:rPr>
-                <a:solidFill>
-                  <a:srgbClr val="5E5E5E"/>
-                </a:solidFill>
-                <a:latin typeface="Courier"/>
-              </a:rPr>
-              <a:t>%&gt;%</a:t>
-            </a:r>
-            <a:r>
-              <a:rPr>
-                <a:solidFill>
-                  <a:srgbClr val="003B4F"/>
-                </a:solidFill>
-                <a:latin typeface="Courier"/>
-              </a:rPr>
-              <a:t> </a:t>
-            </a:r>
-            <a:r>
-              <a:rPr>
-                <a:solidFill>
-                  <a:srgbClr val="4758AB"/>
-                </a:solidFill>
-                <a:latin typeface="Courier"/>
-              </a:rPr>
-              <a:t>filter</a:t>
-            </a:r>
-            <a:r>
-              <a:rPr>
-                <a:solidFill>
-                  <a:srgbClr val="003B4F"/>
-                </a:solidFill>
-                <a:latin typeface="Courier"/>
-              </a:rPr>
-              <a:t>(shade </a:t>
-            </a:r>
-            <a:r>
-              <a:rPr>
-                <a:solidFill>
-                  <a:srgbClr val="5E5E5E"/>
-                </a:solidFill>
-                <a:latin typeface="Courier"/>
-              </a:rPr>
-              <a:t>==</a:t>
-            </a:r>
-            <a:r>
-              <a:rPr>
-                <a:solidFill>
-                  <a:srgbClr val="003B4F"/>
-                </a:solidFill>
-                <a:latin typeface="Courier"/>
-              </a:rPr>
-              <a:t> </a:t>
-            </a:r>
-            <a:r>
-              <a:rPr>
-                <a:solidFill>
-                  <a:srgbClr val="20794D"/>
-                </a:solidFill>
-                <a:latin typeface="Courier"/>
-              </a:rPr>
-              <a:t>"shady"</a:t>
-            </a:r>
-            <a:r>
-              <a:rPr>
-                <a:solidFill>
-                  <a:srgbClr val="003B4F"/>
-                </a:solidFill>
-                <a:latin typeface="Courier"/>
-              </a:rPr>
-              <a:t>, mass_g </a:t>
-            </a:r>
-            <a:r>
-              <a:rPr>
-                <a:solidFill>
-                  <a:srgbClr val="5E5E5E"/>
-                </a:solidFill>
-                <a:latin typeface="Courier"/>
-              </a:rPr>
-              <a:t>&gt;</a:t>
-            </a:r>
-            <a:r>
-              <a:rPr>
-                <a:solidFill>
-                  <a:srgbClr val="003B4F"/>
-                </a:solidFill>
-                <a:latin typeface="Courier"/>
-              </a:rPr>
-              <a:t> </a:t>
-            </a:r>
-            <a:r>
-              <a:rPr>
-                <a:solidFill>
-                  <a:srgbClr val="AD0000"/>
-                </a:solidFill>
-                <a:latin typeface="Courier"/>
-              </a:rPr>
-              <a:t>0.5</a:t>
-            </a:r>
-            <a:r>
-              <a:rPr>
-                <a:solidFill>
-                  <a:srgbClr val="003B4F"/>
-                </a:solidFill>
-                <a:latin typeface="Courier"/>
-              </a:rPr>
-              <a:t>) </a:t>
-            </a:r>
-            <a:r>
-              <a:rPr>
-                <a:solidFill>
-                  <a:srgbClr val="5E5E5E"/>
-                </a:solidFill>
-                <a:latin typeface="Courier"/>
-              </a:rPr>
-              <a:t>%&gt;%</a:t>
-            </a:r>
-            <a:r>
-              <a:rPr>
-                <a:solidFill>
-                  <a:srgbClr val="003B4F"/>
-                </a:solidFill>
-                <a:latin typeface="Courier"/>
-              </a:rPr>
-              <a:t> </a:t>
-            </a:r>
-            <a:r>
-              <a:rPr>
-                <a:solidFill>
-                  <a:srgbClr val="4758AB"/>
-                </a:solidFill>
-                <a:latin typeface="Courier"/>
-              </a:rPr>
-              <a:t>head</a:t>
-            </a:r>
-            <a:r>
-              <a:rPr>
-                <a:solidFill>
-                  <a:srgbClr val="003B4F"/>
-                </a:solidFill>
-                <a:latin typeface="Courier"/>
-              </a:rPr>
-              <a:t>()</a:t>
-            </a:r>
-          </a:p>
-          <a:p>
-            <a:pPr lvl="0" indent="0">
-              <a:buNone/>
-            </a:pPr>
-            <a:r>
-              <a:rPr>
-                <a:latin typeface="Courier"/>
-              </a:rPr>
-              <a:t># A tibble: 6 × 8
-  twig_id leaf_id teams      shade mass_g petiole_mm thickness_mm
-  &lt;chr&gt;   &lt;chr&gt;   &lt;chr&gt;      &lt;chr&gt;  &lt;dbl&gt;      &lt;dbl&gt;        &lt;dbl&gt;
-1 &lt;NA&gt;    &lt;NA&gt;    12345      shady  0.6       68             0.12
-2 &lt;NA&gt;    &lt;NA&gt;    12345      shady  0.57      73             0.14
-3 twig_1  l07     fighting_… shady  0.589     66             0.32
-4 twig_1  l08     fighting_… shady  0.511     51             0.25
-5 twig_2  l09     fighting_… shady  0.920      0.383        NA   
-6 twig_2  l10     fighting_… shady  0.782     67             0.27
-# ℹ 1 more variable: paper_mass_g &lt;dbl&gt;</a:t>
+              <a:t># A tibble: 3 × 8
+  twig_id leaf_id teams shade mass_g petiole_mm thickness_mm paper_mass_g
+  &lt;chr&gt;   &lt;chr&gt;   &lt;chr&gt; &lt;chr&gt;  &lt;dbl&gt;      &lt;dbl&gt;        &lt;dbl&gt;        &lt;dbl&gt;
+1 &lt;NA&gt;    &lt;NA&gt;    12345 sunny   0.4          79         0.15         0.21
+2 &lt;NA&gt;    &lt;NA&gt;    12345 sunny   0.48         63         0.14         0.21
+3 &lt;NA&gt;    &lt;NA&gt;    12345 sunny   0.34         68         0.14         0.21</a:t>
             </a:r>
           </a:p>
         </p:txBody>
@@ -9693,8 +10397,8 @@
                 <a:tableStyleId>{5C22544A-7EE6-4342-B048-85BDC9FD1C3A}</a:tableStyleId>
               </a:tblPr>
               <a:tblGrid>
-                <a:gridCol w="2019300"/>
-                <a:gridCol w="2019300"/>
+                <a:gridCol w="1206500"/>
+                <a:gridCol w="2832100"/>
               </a:tblGrid>
               <a:tr h="0">
                 <a:tc>
@@ -9958,92 +10662,6 @@
           </a:graphicData>
         </a:graphic>
       </p:graphicFrame>
-      <p:sp>
-        <p:nvSpPr>
-          <p:cNvPr id="6" name="Content Placeholder 5"/>
-          <p:cNvSpPr>
-            <a:spLocks noGrp="1"/>
-          </p:cNvSpPr>
-          <p:nvPr>
-            <p:ph idx="4" sz="quarter"/>
-          </p:nvPr>
-        </p:nvSpPr>
-        <p:spPr/>
-        <p:txBody>
-          <a:bodyPr/>
-          <a:lstStyle/>
-          <a:p>
-            <a:pPr lvl="0" indent="0" marL="1270000">
-              <a:buNone/>
-            </a:pPr>
-            <a:r>
-              <a:rPr sz="2000" b="1"/>
-              <a:t>Warning</a:t>
-            </a:r>
-          </a:p>
-          <a:p>
-            <a:pPr lvl="0" indent="0" marL="1270000">
-              <a:buNone/>
-            </a:pPr>
-            <a:r>
-              <a:rPr sz="2000" b="1"/>
-              <a:t>⚠️ Watch out!</a:t>
-            </a:r>
-          </a:p>
-          <a:p>
-            <a:pPr lvl="0"/>
-            <a:r>
-              <a:rPr sz="2000">
-                <a:latin typeface="Courier"/>
-              </a:rPr>
-              <a:t>=</a:t>
-            </a:r>
-            <a:r>
-              <a:rPr sz="2000"/>
-              <a:t> assigns a value.</a:t>
-            </a:r>
-          </a:p>
-          <a:p>
-            <a:pPr lvl="0"/>
-            <a:r>
-              <a:rPr sz="2000">
-                <a:latin typeface="Courier"/>
-              </a:rPr>
-              <a:t>==</a:t>
-            </a:r>
-            <a:r>
-              <a:rPr sz="2000"/>
-              <a:t> tests equality.</a:t>
-            </a:r>
-          </a:p>
-          <a:p>
-            <a:pPr lvl="0"/>
-            <a:r>
-              <a:rPr sz="2000">
-                <a:latin typeface="Courier"/>
-              </a:rPr>
-              <a:t>filter(shade = "sunny")</a:t>
-            </a:r>
-            <a:r>
-              <a:rPr sz="2000"/>
-              <a:t> → error.</a:t>
-            </a:r>
-          </a:p>
-          <a:p>
-            <a:pPr lvl="0"/>
-            <a:r>
-              <a:rPr sz="2000">
-                <a:latin typeface="Courier"/>
-              </a:rPr>
-              <a:t>filter(shade == "sunny")</a:t>
-            </a:r>
-            <a:r>
-              <a:rPr sz="2000"/>
-              <a:t> → correct.</a:t>
-            </a:r>
-          </a:p>
-        </p:txBody>
-      </p:sp>
     </p:spTree>
   </p:cSld>
 </p:sld>

--- a/docs/content/wrangling/wrangling_lecture.pptx
+++ b/docs/content/wrangling/wrangling_lecture.pptx
@@ -3359,7 +3359,7 @@
             </a:pPr>
             <a:r>
               <a:rPr/>
-              <a:t>2026-10-05</a:t>
+              <a:t>2026-10-08</a:t>
             </a:r>
           </a:p>
         </p:txBody>

--- a/docs/content/wrangling/wrangling_lecture.pptx
+++ b/docs/content/wrangling/wrangling_lecture.pptx
@@ -3359,7 +3359,7 @@
             </a:pPr>
             <a:r>
               <a:rPr/>
-              <a:t>2026-10-08</a:t>
+              <a:t>2026-10-09</a:t>
             </a:r>
           </a:p>
         </p:txBody>

--- a/docs/content/wrangling/wrangling_lecture.pptx
+++ b/docs/content/wrangling/wrangling_lecture.pptx
@@ -3359,7 +3359,7 @@
             </a:pPr>
             <a:r>
               <a:rPr/>
-              <a:t>2026-10-09</a:t>
+              <a:t>2026-10-19</a:t>
             </a:r>
           </a:p>
         </p:txBody>

--- a/docs/content/wrangling/wrangling_lecture.pptx
+++ b/docs/content/wrangling/wrangling_lecture.pptx
@@ -24,7 +24,6 @@
     <p:sldId id="272" r:id="rId18"/>
     <p:sldId id="273" r:id="rId19"/>
     <p:sldId id="274" r:id="rId20"/>
-    <p:sldId id="275" r:id="rId21"/>
   </p:sldIdLst>
   <p:sldSz cx="9144000" cy="5143500" type="screen16x9"/>
   <p:notesSz cx="6858000" cy="9144000"/>
@@ -3972,8 +3971,14 @@
               <a:buNone/>
             </a:pPr>
             <a:r>
-              <a:rPr/>
-              <a:t>Live Demo — Watch It Break (on purpose)</a:t>
+              <a:rPr>
+                <a:latin typeface="Courier"/>
+              </a:rPr>
+              <a:t>select()</a:t>
+            </a:r>
+            <a:r>
+              <a:rPr/>
+              <a:t> — Picking Columns</a:t>
             </a:r>
           </a:p>
         </p:txBody>
@@ -3993,20 +3998,128 @@
           <a:bodyPr/>
           <a:lstStyle/>
           <a:p>
-            <a:pPr lvl="0" indent="0" marL="0">
+            <a:pPr lvl="0" indent="0">
               <a:buNone/>
             </a:pPr>
             <a:r>
-              <a:rPr/>
-              <a:t>I will type this </a:t>
-            </a:r>
-            <a:r>
-              <a:rPr b="1"/>
-              <a:t>wrong</a:t>
-            </a:r>
-            <a:r>
-              <a:rPr/>
-              <a:t> on purpose:</a:t>
+              <a:rPr>
+                <a:solidFill>
+                  <a:srgbClr val="5E5E5E"/>
+                </a:solidFill>
+                <a:latin typeface="Courier"/>
+              </a:rPr>
+              <a:t># select() keeps the columns you name ------------------</a:t>
+            </a:r>
+            <a:br/>
+            <a:br/>
+            <a:r>
+              <a:rPr>
+                <a:solidFill>
+                  <a:srgbClr val="5E5E5E"/>
+                </a:solidFill>
+                <a:latin typeface="Courier"/>
+              </a:rPr>
+              <a:t># Keep only shade and mass</a:t>
+            </a:r>
+            <a:br/>
+            <a:r>
+              <a:rPr>
+                <a:solidFill>
+                  <a:srgbClr val="003B4F"/>
+                </a:solidFill>
+                <a:latin typeface="Courier"/>
+              </a:rPr>
+              <a:t>leaf_df </a:t>
+            </a:r>
+            <a:r>
+              <a:rPr>
+                <a:solidFill>
+                  <a:srgbClr val="5E5E5E"/>
+                </a:solidFill>
+                <a:latin typeface="Courier"/>
+              </a:rPr>
+              <a:t>%&gt;%</a:t>
+            </a:r>
+            <a:r>
+              <a:rPr>
+                <a:solidFill>
+                  <a:srgbClr val="003B4F"/>
+                </a:solidFill>
+                <a:latin typeface="Courier"/>
+              </a:rPr>
+              <a:t> </a:t>
+            </a:r>
+            <a:r>
+              <a:rPr>
+                <a:solidFill>
+                  <a:srgbClr val="4758AB"/>
+                </a:solidFill>
+                <a:latin typeface="Courier"/>
+              </a:rPr>
+              <a:t>select</a:t>
+            </a:r>
+            <a:r>
+              <a:rPr>
+                <a:solidFill>
+                  <a:srgbClr val="003B4F"/>
+                </a:solidFill>
+                <a:latin typeface="Courier"/>
+              </a:rPr>
+              <a:t>(shade, mass_g) </a:t>
+            </a:r>
+            <a:r>
+              <a:rPr>
+                <a:solidFill>
+                  <a:srgbClr val="5E5E5E"/>
+                </a:solidFill>
+                <a:latin typeface="Courier"/>
+              </a:rPr>
+              <a:t>%&gt;%</a:t>
+            </a:r>
+            <a:r>
+              <a:rPr>
+                <a:solidFill>
+                  <a:srgbClr val="003B4F"/>
+                </a:solidFill>
+                <a:latin typeface="Courier"/>
+              </a:rPr>
+              <a:t> </a:t>
+            </a:r>
+            <a:r>
+              <a:rPr>
+                <a:solidFill>
+                  <a:srgbClr val="4758AB"/>
+                </a:solidFill>
+                <a:latin typeface="Courier"/>
+              </a:rPr>
+              <a:t>head</a:t>
+            </a:r>
+            <a:r>
+              <a:rPr>
+                <a:solidFill>
+                  <a:srgbClr val="003B4F"/>
+                </a:solidFill>
+                <a:latin typeface="Courier"/>
+              </a:rPr>
+              <a:t>(</a:t>
+            </a:r>
+            <a:r>
+              <a:rPr>
+                <a:solidFill>
+                  <a:srgbClr val="AD0000"/>
+                </a:solidFill>
+                <a:latin typeface="Courier"/>
+              </a:rPr>
+              <a:t>2</a:t>
+            </a:r>
+            <a:r>
+              <a:rPr>
+                <a:solidFill>
+                  <a:srgbClr val="003B4F"/>
+                </a:solidFill>
+                <a:latin typeface="Courier"/>
+              </a:rPr>
+              <a:t>)</a:t>
             </a:r>
           </a:p>
           <a:p>
@@ -4015,12 +4128,27 @@
             </a:pPr>
             <a:r>
               <a:rPr>
+                <a:latin typeface="Courier"/>
+              </a:rPr>
+              <a:t># A tibble: 2 × 2
+  shade mass_g
+  &lt;chr&gt;  &lt;dbl&gt;
+1 sunny   0.4 
+2 sunny   0.48</a:t>
+            </a:r>
+          </a:p>
+          <a:p>
+            <a:pPr lvl="0" indent="0">
+              <a:buNone/>
+            </a:pPr>
+            <a:r>
+              <a:rPr>
                 <a:solidFill>
                   <a:srgbClr val="5E5E5E"/>
                 </a:solidFill>
                 <a:latin typeface="Courier"/>
               </a:rPr>
-              <a:t># One equals sign — a very common mistake</a:t>
+              <a:t># Drop a column with a minus sign - what is left?</a:t>
             </a:r>
             <a:br/>
             <a:r>
@@ -4057,7 +4185,7 @@
                 </a:solidFill>
                 <a:latin typeface="Courier"/>
               </a:rPr>
-              <a:t>filter</a:t>
+              <a:t>select</a:t>
             </a:r>
             <a:r>
               <a:rPr>
@@ -4071,11 +4199,29 @@
             <a:r>
               <a:rPr>
                 <a:solidFill>
-                  <a:srgbClr val="657422"/>
-                </a:solidFill>
-                <a:latin typeface="Courier"/>
-              </a:rPr>
-              <a:t>shade =</a:t>
+                  <a:srgbClr val="5E5E5E"/>
+                </a:solidFill>
+                <a:latin typeface="Courier"/>
+              </a:rPr>
+              <a:t>-</a:t>
+            </a:r>
+            <a:r>
+              <a:rPr>
+                <a:solidFill>
+                  <a:srgbClr val="003B4F"/>
+                </a:solidFill>
+                <a:latin typeface="Courier"/>
+              </a:rPr>
+              <a:t>paper_mass_g) </a:t>
+            </a:r>
+            <a:r>
+              <a:rPr>
+                <a:solidFill>
+                  <a:srgbClr val="5E5E5E"/>
+                </a:solidFill>
+                <a:latin typeface="Courier"/>
+              </a:rPr>
+              <a:t>%&gt;%</a:t>
             </a:r>
             <a:r>
               <a:rPr>
@@ -4089,11 +4235,173 @@
             <a:r>
               <a:rPr>
                 <a:solidFill>
+                  <a:srgbClr val="4758AB"/>
+                </a:solidFill>
+                <a:latin typeface="Courier"/>
+              </a:rPr>
+              <a:t>names</a:t>
+            </a:r>
+            <a:r>
+              <a:rPr>
+                <a:solidFill>
+                  <a:srgbClr val="003B4F"/>
+                </a:solidFill>
+                <a:latin typeface="Courier"/>
+              </a:rPr>
+              <a:t>()</a:t>
+            </a:r>
+          </a:p>
+          <a:p>
+            <a:pPr lvl="0" indent="0">
+              <a:buNone/>
+            </a:pPr>
+            <a:r>
+              <a:rPr>
+                <a:latin typeface="Courier"/>
+              </a:rPr>
+              <a:t>[1] "twig_id"      "leaf_id"      "teams"        "shade"        "mass_g"      
+[6] "petiole_mm"   "thickness_mm"</a:t>
+            </a:r>
+          </a:p>
+          <a:p>
+            <a:pPr lvl="0" indent="0">
+              <a:buNone/>
+            </a:pPr>
+            <a:r>
+              <a:rPr>
+                <a:solidFill>
+                  <a:srgbClr val="5E5E5E"/>
+                </a:solidFill>
+                <a:latin typeface="Courier"/>
+              </a:rPr>
+              <a:t># Keep columns that start with a word</a:t>
+            </a:r>
+            <a:br/>
+            <a:r>
+              <a:rPr>
+                <a:solidFill>
+                  <a:srgbClr val="003B4F"/>
+                </a:solidFill>
+                <a:latin typeface="Courier"/>
+              </a:rPr>
+              <a:t>leaf_df </a:t>
+            </a:r>
+            <a:r>
+              <a:rPr>
+                <a:solidFill>
+                  <a:srgbClr val="5E5E5E"/>
+                </a:solidFill>
+                <a:latin typeface="Courier"/>
+              </a:rPr>
+              <a:t>%&gt;%</a:t>
+            </a:r>
+            <a:r>
+              <a:rPr>
+                <a:solidFill>
+                  <a:srgbClr val="003B4F"/>
+                </a:solidFill>
+                <a:latin typeface="Courier"/>
+              </a:rPr>
+              <a:t> </a:t>
+            </a:r>
+            <a:r>
+              <a:rPr>
+                <a:solidFill>
+                  <a:srgbClr val="4758AB"/>
+                </a:solidFill>
+                <a:latin typeface="Courier"/>
+              </a:rPr>
+              <a:t>select</a:t>
+            </a:r>
+            <a:r>
+              <a:rPr>
+                <a:solidFill>
+                  <a:srgbClr val="003B4F"/>
+                </a:solidFill>
+                <a:latin typeface="Courier"/>
+              </a:rPr>
+              <a:t>(</a:t>
+            </a:r>
+            <a:r>
+              <a:rPr>
+                <a:solidFill>
+                  <a:srgbClr val="4758AB"/>
+                </a:solidFill>
+                <a:latin typeface="Courier"/>
+              </a:rPr>
+              <a:t>starts_with</a:t>
+            </a:r>
+            <a:r>
+              <a:rPr>
+                <a:solidFill>
+                  <a:srgbClr val="003B4F"/>
+                </a:solidFill>
+                <a:latin typeface="Courier"/>
+              </a:rPr>
+              <a:t>(</a:t>
+            </a:r>
+            <a:r>
+              <a:rPr>
+                <a:solidFill>
                   <a:srgbClr val="20794D"/>
                 </a:solidFill>
                 <a:latin typeface="Courier"/>
               </a:rPr>
-              <a:t>"sunny"</a:t>
+              <a:t>"mass"</a:t>
+            </a:r>
+            <a:r>
+              <a:rPr>
+                <a:solidFill>
+                  <a:srgbClr val="003B4F"/>
+                </a:solidFill>
+                <a:latin typeface="Courier"/>
+              </a:rPr>
+              <a:t>)) </a:t>
+            </a:r>
+            <a:r>
+              <a:rPr>
+                <a:solidFill>
+                  <a:srgbClr val="5E5E5E"/>
+                </a:solidFill>
+                <a:latin typeface="Courier"/>
+              </a:rPr>
+              <a:t>%&gt;%</a:t>
+            </a:r>
+            <a:r>
+              <a:rPr>
+                <a:solidFill>
+                  <a:srgbClr val="003B4F"/>
+                </a:solidFill>
+                <a:latin typeface="Courier"/>
+              </a:rPr>
+              <a:t> </a:t>
+            </a:r>
+            <a:r>
+              <a:rPr>
+                <a:solidFill>
+                  <a:srgbClr val="4758AB"/>
+                </a:solidFill>
+                <a:latin typeface="Courier"/>
+              </a:rPr>
+              <a:t>head</a:t>
+            </a:r>
+            <a:r>
+              <a:rPr>
+                <a:solidFill>
+                  <a:srgbClr val="003B4F"/>
+                </a:solidFill>
+                <a:latin typeface="Courier"/>
+              </a:rPr>
+              <a:t>(</a:t>
+            </a:r>
+            <a:r>
+              <a:rPr>
+                <a:solidFill>
+                  <a:srgbClr val="AD0000"/>
+                </a:solidFill>
+                <a:latin typeface="Courier"/>
+              </a:rPr>
+              <a:t>2</a:t>
             </a:r>
             <a:r>
               <a:rPr>
@@ -4106,120 +4414,18 @@
             </a:r>
           </a:p>
           <a:p>
-            <a:pPr lvl="0" indent="0" marL="0">
+            <a:pPr lvl="0" indent="0">
               <a:buNone/>
             </a:pPr>
             <a:r>
-              <a:rPr/>
-              <a:t>R stops and tells us:</a:t>
-            </a:r>
-          </a:p>
-          <a:p>
-            <a:pPr lvl="0" indent="0">
-              <a:buNone/>
-            </a:pPr>
-            <a:r>
-              <a:rPr>
-                <a:latin typeface="Courier"/>
-              </a:rPr>
-              <a:t>Error in `filter()`:
-! We detected a named input.
-i This usually means that you've used `=` instead of `==`.</a:t>
-            </a:r>
-          </a:p>
-          <a:p>
-            <a:pPr lvl="0" indent="0" marL="0">
-              <a:buNone/>
-            </a:pPr>
-            <a:r>
-              <a:rPr/>
-              <a:t>Now the fix — two equals signs:</a:t>
-            </a:r>
-          </a:p>
-          <a:p>
-            <a:pPr lvl="0" indent="0">
-              <a:buNone/>
-            </a:pPr>
-            <a:r>
-              <a:rPr>
-                <a:solidFill>
-                  <a:srgbClr val="003B4F"/>
-                </a:solidFill>
-                <a:latin typeface="Courier"/>
-              </a:rPr>
-              <a:t>leaf_df </a:t>
-            </a:r>
-            <a:r>
-              <a:rPr>
-                <a:solidFill>
-                  <a:srgbClr val="5E5E5E"/>
-                </a:solidFill>
-                <a:latin typeface="Courier"/>
-              </a:rPr>
-              <a:t>%&gt;%</a:t>
-            </a:r>
-            <a:r>
-              <a:rPr>
-                <a:solidFill>
-                  <a:srgbClr val="003B4F"/>
-                </a:solidFill>
-                <a:latin typeface="Courier"/>
-              </a:rPr>
-              <a:t> </a:t>
-            </a:r>
-            <a:r>
-              <a:rPr>
-                <a:solidFill>
-                  <a:srgbClr val="4758AB"/>
-                </a:solidFill>
-                <a:latin typeface="Courier"/>
-              </a:rPr>
-              <a:t>filter</a:t>
-            </a:r>
-            <a:r>
-              <a:rPr>
-                <a:solidFill>
-                  <a:srgbClr val="003B4F"/>
-                </a:solidFill>
-                <a:latin typeface="Courier"/>
-              </a:rPr>
-              <a:t>(shade </a:t>
-            </a:r>
-            <a:r>
-              <a:rPr>
-                <a:solidFill>
-                  <a:srgbClr val="5E5E5E"/>
-                </a:solidFill>
-                <a:latin typeface="Courier"/>
-              </a:rPr>
-              <a:t>==</a:t>
-            </a:r>
-            <a:r>
-              <a:rPr>
-                <a:solidFill>
-                  <a:srgbClr val="003B4F"/>
-                </a:solidFill>
-                <a:latin typeface="Courier"/>
-              </a:rPr>
-              <a:t> </a:t>
-            </a:r>
-            <a:r>
-              <a:rPr>
-                <a:solidFill>
-                  <a:srgbClr val="20794D"/>
-                </a:solidFill>
-                <a:latin typeface="Courier"/>
-              </a:rPr>
-              <a:t>"sunny"</a:t>
-            </a:r>
-            <a:r>
-              <a:rPr>
-                <a:solidFill>
-                  <a:srgbClr val="003B4F"/>
-                </a:solidFill>
-                <a:latin typeface="Courier"/>
-              </a:rPr>
-              <a:t>)</a:t>
+              <a:rPr>
+                <a:latin typeface="Courier"/>
+              </a:rPr>
+              <a:t># A tibble: 2 × 1
+  mass_g
+   &lt;dbl&gt;
+1   0.4 
+2   0.48</a:t>
             </a:r>
           </a:p>
         </p:txBody>
@@ -4239,86 +4445,75 @@
           <a:bodyPr/>
           <a:lstStyle/>
           <a:p>
-            <a:pPr lvl="0" indent="0" marL="1270000">
+            <a:pPr lvl="0"/>
+            <a:r>
+              <a:rPr b="1"/>
+              <a:t>Why it matters:</a:t>
+            </a:r>
+            <a:r>
+              <a:rPr/>
+              <a:t> real data sets have 50–100+ columns and you rarely need all of them</a:t>
+            </a:r>
+          </a:p>
+          <a:p>
+            <a:pPr lvl="0"/>
+            <a:r>
+              <a:rPr b="1"/>
+              <a:t>Useful helpers:</a:t>
+            </a:r>
+          </a:p>
+          <a:p>
+            <a:pPr lvl="1"/>
+            <a:r>
+              <a:rPr>
+                <a:latin typeface="Courier"/>
+              </a:rPr>
+              <a:t>starts_with("x")</a:t>
+            </a:r>
+            <a:r>
+              <a:rPr/>
+              <a:t> — columns starting with “x”</a:t>
+            </a:r>
+          </a:p>
+          <a:p>
+            <a:pPr lvl="1"/>
+            <a:r>
+              <a:rPr>
+                <a:latin typeface="Courier"/>
+              </a:rPr>
+              <a:t>ends_with("_mm")</a:t>
+            </a:r>
+            <a:r>
+              <a:rPr/>
+              <a:t> — columns ending with “_mm”</a:t>
+            </a:r>
+          </a:p>
+          <a:p>
+            <a:pPr lvl="1"/>
+            <a:r>
+              <a:rPr>
+                <a:latin typeface="Courier"/>
+              </a:rPr>
+              <a:t>contains("mass")</a:t>
+            </a:r>
+            <a:r>
+              <a:rPr/>
+              <a:t> — columns containing “mass”</a:t>
+            </a:r>
+          </a:p>
+          <a:p>
+            <a:pPr lvl="0" indent="0" marL="0">
               <a:buNone/>
             </a:pPr>
             <a:r>
-              <a:rPr sz="2000" b="1"/>
-              <a:t>Tip</a:t>
-            </a:r>
-          </a:p>
-          <a:p>
-            <a:pPr lvl="0" indent="0" marL="1270000">
-              <a:buNone/>
-            </a:pPr>
-            <a:r>
-              <a:rPr sz="2000" b="1"/>
-              <a:t>✅ Why show a broken </a:t>
-            </a:r>
-            <a:r>
-              <a:rPr sz="2000" b="1">
-                <a:latin typeface="Courier"/>
-              </a:rPr>
-              <a:t>filter()</a:t>
-            </a:r>
-            <a:r>
-              <a:rPr sz="2000" b="1"/>
-              <a:t>?</a:t>
-            </a:r>
-          </a:p>
-          <a:p>
-            <a:pPr lvl="0" indent="0" marL="1270000">
-              <a:buNone/>
-            </a:pPr>
-            <a:r>
-              <a:rPr sz="2000">
-                <a:latin typeface="Courier"/>
-              </a:rPr>
-              <a:t>filter(shade = "sunny")</a:t>
-            </a:r>
-            <a:r>
-              <a:rPr sz="2000"/>
-              <a:t> is the single most common typo in this whole unit, because </a:t>
-            </a:r>
-            <a:r>
-              <a:rPr sz="2000">
-                <a:latin typeface="Courier"/>
-              </a:rPr>
-              <a:t>=</a:t>
-            </a:r>
-            <a:r>
-              <a:rPr sz="2000"/>
-              <a:t> and </a:t>
-            </a:r>
-            <a:r>
-              <a:rPr sz="2000">
-                <a:latin typeface="Courier"/>
-              </a:rPr>
-              <a:t>==</a:t>
-            </a:r>
-            <a:r>
-              <a:rPr sz="2000"/>
-              <a:t> look almost identical and only one of them tests equality. dplyr’s error message actually names the mistake — “you’ve used </a:t>
-            </a:r>
-            <a:r>
-              <a:rPr sz="2000">
-                <a:latin typeface="Courier"/>
-              </a:rPr>
-              <a:t>=</a:t>
-            </a:r>
-            <a:r>
-              <a:rPr sz="2000"/>
-              <a:t> instead of </a:t>
-            </a:r>
-            <a:r>
-              <a:rPr sz="2000">
-                <a:latin typeface="Courier"/>
-              </a:rPr>
-              <a:t>==</a:t>
-            </a:r>
-            <a:r>
-              <a:rPr sz="2000"/>
-              <a:t>” — so once you’ve seen it fixed here, the next time R prints it at you it’s a fix, not a mystery.</a:t>
+              <a:rPr/>
+              <a:t>📖 </a:t>
+            </a:r>
+            <a:r>
+              <a:rPr>
+                <a:hlinkClick r:id="rId2"/>
+              </a:rPr>
+              <a:t>R4DS §3.3</a:t>
             </a:r>
           </a:p>
         </p:txBody>
@@ -4358,11 +4553,8 @@
         <p:spPr>
           <a:xfrm>
             <a:off x="0" y="0"/>
-            <a:ext cx="9144000" cy="602780"/>
+            <a:ext cx="9144000" cy="582780"/>
           </a:xfrm>
-          <a:solidFill>
-            <a:srgbClr val="1A1A2E"/>
-          </a:solidFill>
         </p:spPr>
         <p:txBody>
           <a:bodyPr/>
@@ -4375,11 +4567,11 @@
               <a:rPr>
                 <a:latin typeface="Courier"/>
               </a:rPr>
-              <a:t>select()</a:t>
-            </a:r>
-            <a:r>
-              <a:rPr/>
-              <a:t> — Picking Columns</a:t>
+              <a:t>mutate()</a:t>
+            </a:r>
+            <a:r>
+              <a:rPr/>
+              <a:t> — Creating New Columns</a:t>
             </a:r>
           </a:p>
         </p:txBody>
@@ -4391,7 +4583,7 @@
             <a:spLocks noGrp="1"/>
           </p:cNvSpPr>
           <p:nvPr>
-            <p:ph idx="1" sz="half"/>
+            <p:ph idx="1"/>
           </p:nvPr>
         </p:nvSpPr>
         <p:spPr/>
@@ -4399,522 +4591,71 @@
           <a:bodyPr/>
           <a:lstStyle/>
           <a:p>
-            <a:pPr lvl="0" indent="0">
+            <a:pPr lvl="0" indent="0" marL="1270000">
               <a:buNone/>
             </a:pPr>
             <a:r>
-              <a:rPr>
-                <a:solidFill>
-                  <a:srgbClr val="5E5E5E"/>
-                </a:solidFill>
-                <a:latin typeface="Courier"/>
-              </a:rPr>
-              <a:t># select() keeps the columns you name ------------------</a:t>
-            </a:r>
-            <a:br/>
-            <a:br/>
-            <a:r>
-              <a:rPr>
-                <a:solidFill>
-                  <a:srgbClr val="5E5E5E"/>
-                </a:solidFill>
-                <a:latin typeface="Courier"/>
-              </a:rPr>
-              <a:t># Keep only shade and mass</a:t>
-            </a:r>
-            <a:br/>
-            <a:r>
-              <a:rPr>
-                <a:solidFill>
-                  <a:srgbClr val="003B4F"/>
-                </a:solidFill>
-                <a:latin typeface="Courier"/>
-              </a:rPr>
-              <a:t>leaf_df </a:t>
-            </a:r>
-            <a:r>
-              <a:rPr>
-                <a:solidFill>
-                  <a:srgbClr val="5E5E5E"/>
-                </a:solidFill>
-                <a:latin typeface="Courier"/>
-              </a:rPr>
-              <a:t>%&gt;%</a:t>
-            </a:r>
-            <a:r>
-              <a:rPr>
-                <a:solidFill>
-                  <a:srgbClr val="003B4F"/>
-                </a:solidFill>
-                <a:latin typeface="Courier"/>
-              </a:rPr>
+              <a:rPr sz="2000" b="1"/>
+              <a:t>Note</a:t>
+            </a:r>
+          </a:p>
+          <a:p>
+            <a:pPr lvl="0" indent="0" marL="1270000">
+              <a:buNone/>
+            </a:pPr>
+            <a:r>
+              <a:rPr sz="2000" b="1"/>
+              <a:t>🔮 Predict first:</a:t>
+            </a:r>
+            <a:r>
+              <a:rPr sz="2000"/>
               <a:t> </a:t>
             </a:r>
             <a:r>
-              <a:rPr>
-                <a:solidFill>
-                  <a:srgbClr val="4758AB"/>
-                </a:solidFill>
-                <a:latin typeface="Courier"/>
-              </a:rPr>
-              <a:t>select</a:t>
-            </a:r>
-            <a:r>
-              <a:rPr>
-                <a:solidFill>
-                  <a:srgbClr val="003B4F"/>
-                </a:solidFill>
-                <a:latin typeface="Courier"/>
-              </a:rPr>
-              <a:t>(shade, mass_g) </a:t>
-            </a:r>
-            <a:r>
-              <a:rPr>
-                <a:solidFill>
-                  <a:srgbClr val="5E5E5E"/>
-                </a:solidFill>
-                <a:latin typeface="Courier"/>
-              </a:rPr>
-              <a:t>%&gt;%</a:t>
-            </a:r>
-            <a:r>
-              <a:rPr>
-                <a:solidFill>
-                  <a:srgbClr val="003B4F"/>
-                </a:solidFill>
-                <a:latin typeface="Courier"/>
-              </a:rPr>
+              <a:rPr sz="2000">
+                <a:latin typeface="Courier"/>
+              </a:rPr>
+              <a:t>mass_g * 1000</a:t>
+            </a:r>
+            <a:r>
+              <a:rPr sz="2000"/>
+              <a:t> converts grams to milligrams. Before running: will </a:t>
+            </a:r>
+            <a:r>
+              <a:rPr sz="2000">
+                <a:latin typeface="Courier"/>
+              </a:rPr>
+              <a:t>mutate()</a:t>
+            </a:r>
+            <a:r>
+              <a:rPr sz="2000"/>
               <a:t> </a:t>
             </a:r>
             <a:r>
-              <a:rPr>
-                <a:solidFill>
-                  <a:srgbClr val="4758AB"/>
-                </a:solidFill>
-                <a:latin typeface="Courier"/>
-              </a:rPr>
-              <a:t>head</a:t>
-            </a:r>
-            <a:r>
-              <a:rPr>
-                <a:solidFill>
-                  <a:srgbClr val="003B4F"/>
-                </a:solidFill>
-                <a:latin typeface="Courier"/>
-              </a:rPr>
-              <a:t>(</a:t>
-            </a:r>
-            <a:r>
-              <a:rPr>
-                <a:solidFill>
-                  <a:srgbClr val="AD0000"/>
-                </a:solidFill>
-                <a:latin typeface="Courier"/>
-              </a:rPr>
-              <a:t>2</a:t>
-            </a:r>
-            <a:r>
-              <a:rPr>
-                <a:solidFill>
-                  <a:srgbClr val="003B4F"/>
-                </a:solidFill>
-                <a:latin typeface="Courier"/>
-              </a:rPr>
-              <a:t>)</a:t>
-            </a:r>
-          </a:p>
-          <a:p>
-            <a:pPr lvl="0" indent="0">
-              <a:buNone/>
-            </a:pPr>
-            <a:r>
-              <a:rPr>
-                <a:latin typeface="Courier"/>
-              </a:rPr>
-              <a:t># A tibble: 2 × 2
-  shade mass_g
-  &lt;chr&gt;  &lt;dbl&gt;
-1 sunny   0.4 
-2 sunny   0.48</a:t>
-            </a:r>
-          </a:p>
-          <a:p>
-            <a:pPr lvl="0" indent="0">
-              <a:buNone/>
-            </a:pPr>
-            <a:r>
-              <a:rPr>
-                <a:solidFill>
-                  <a:srgbClr val="5E5E5E"/>
-                </a:solidFill>
-                <a:latin typeface="Courier"/>
-              </a:rPr>
-              <a:t># Drop a column with a minus sign - what is left?</a:t>
-            </a:r>
-            <a:br/>
-            <a:r>
-              <a:rPr>
-                <a:solidFill>
-                  <a:srgbClr val="003B4F"/>
-                </a:solidFill>
-                <a:latin typeface="Courier"/>
-              </a:rPr>
-              <a:t>leaf_df </a:t>
-            </a:r>
-            <a:r>
-              <a:rPr>
-                <a:solidFill>
-                  <a:srgbClr val="5E5E5E"/>
-                </a:solidFill>
-                <a:latin typeface="Courier"/>
-              </a:rPr>
-              <a:t>%&gt;%</a:t>
-            </a:r>
-            <a:r>
-              <a:rPr>
-                <a:solidFill>
-                  <a:srgbClr val="003B4F"/>
-                </a:solidFill>
-                <a:latin typeface="Courier"/>
-              </a:rPr>
+              <a:rPr sz="2000" b="1"/>
+              <a:t>replace</a:t>
+            </a:r>
+            <a:r>
+              <a:rPr sz="2000"/>
               <a:t> </a:t>
             </a:r>
             <a:r>
-              <a:rPr>
-                <a:solidFill>
-                  <a:srgbClr val="4758AB"/>
-                </a:solidFill>
-                <a:latin typeface="Courier"/>
-              </a:rPr>
-              <a:t>select</a:t>
-            </a:r>
-            <a:r>
-              <a:rPr>
-                <a:solidFill>
-                  <a:srgbClr val="003B4F"/>
-                </a:solidFill>
-                <a:latin typeface="Courier"/>
-              </a:rPr>
-              <a:t>(</a:t>
-            </a:r>
-            <a:r>
-              <a:rPr>
-                <a:solidFill>
-                  <a:srgbClr val="5E5E5E"/>
-                </a:solidFill>
-                <a:latin typeface="Courier"/>
-              </a:rPr>
-              <a:t>-</a:t>
-            </a:r>
-            <a:r>
-              <a:rPr>
-                <a:solidFill>
-                  <a:srgbClr val="003B4F"/>
-                </a:solidFill>
-                <a:latin typeface="Courier"/>
-              </a:rPr>
-              <a:t>paper_mass_g) </a:t>
-            </a:r>
-            <a:r>
-              <a:rPr>
-                <a:solidFill>
-                  <a:srgbClr val="5E5E5E"/>
-                </a:solidFill>
-                <a:latin typeface="Courier"/>
-              </a:rPr>
-              <a:t>%&gt;%</a:t>
-            </a:r>
-            <a:r>
-              <a:rPr>
-                <a:solidFill>
-                  <a:srgbClr val="003B4F"/>
-                </a:solidFill>
-                <a:latin typeface="Courier"/>
-              </a:rPr>
-              <a:t> </a:t>
-            </a:r>
-            <a:r>
-              <a:rPr>
-                <a:solidFill>
-                  <a:srgbClr val="4758AB"/>
-                </a:solidFill>
-                <a:latin typeface="Courier"/>
-              </a:rPr>
-              <a:t>names</a:t>
-            </a:r>
-            <a:r>
-              <a:rPr>
-                <a:solidFill>
-                  <a:srgbClr val="003B4F"/>
-                </a:solidFill>
-                <a:latin typeface="Courier"/>
-              </a:rPr>
-              <a:t>()</a:t>
-            </a:r>
-          </a:p>
-          <a:p>
-            <a:pPr lvl="0" indent="0">
-              <a:buNone/>
-            </a:pPr>
-            <a:r>
-              <a:rPr>
-                <a:latin typeface="Courier"/>
-              </a:rPr>
-              <a:t>[1] "twig_id"      "leaf_id"      "teams"        "shade"        "mass_g"      
-[6] "petiole_mm"   "thickness_mm"</a:t>
-            </a:r>
-          </a:p>
-          <a:p>
-            <a:pPr lvl="0" indent="0">
-              <a:buNone/>
-            </a:pPr>
-            <a:r>
-              <a:rPr>
-                <a:solidFill>
-                  <a:srgbClr val="5E5E5E"/>
-                </a:solidFill>
-                <a:latin typeface="Courier"/>
-              </a:rPr>
-              <a:t># Keep columns that start with a word</a:t>
-            </a:r>
-            <a:br/>
-            <a:r>
-              <a:rPr>
-                <a:solidFill>
-                  <a:srgbClr val="003B4F"/>
-                </a:solidFill>
-                <a:latin typeface="Courier"/>
-              </a:rPr>
-              <a:t>leaf_df </a:t>
-            </a:r>
-            <a:r>
-              <a:rPr>
-                <a:solidFill>
-                  <a:srgbClr val="5E5E5E"/>
-                </a:solidFill>
-                <a:latin typeface="Courier"/>
-              </a:rPr>
-              <a:t>%&gt;%</a:t>
-            </a:r>
-            <a:r>
-              <a:rPr>
-                <a:solidFill>
-                  <a:srgbClr val="003B4F"/>
-                </a:solidFill>
-                <a:latin typeface="Courier"/>
-              </a:rPr>
-              <a:t> </a:t>
-            </a:r>
-            <a:r>
-              <a:rPr>
-                <a:solidFill>
-                  <a:srgbClr val="4758AB"/>
-                </a:solidFill>
-                <a:latin typeface="Courier"/>
-              </a:rPr>
-              <a:t>select</a:t>
-            </a:r>
-            <a:r>
-              <a:rPr>
-                <a:solidFill>
-                  <a:srgbClr val="003B4F"/>
-                </a:solidFill>
-                <a:latin typeface="Courier"/>
-              </a:rPr>
-              <a:t>(</a:t>
-            </a:r>
-            <a:r>
-              <a:rPr>
-                <a:solidFill>
-                  <a:srgbClr val="4758AB"/>
-                </a:solidFill>
-                <a:latin typeface="Courier"/>
-              </a:rPr>
-              <a:t>starts_with</a:t>
-            </a:r>
-            <a:r>
-              <a:rPr>
-                <a:solidFill>
-                  <a:srgbClr val="003B4F"/>
-                </a:solidFill>
-                <a:latin typeface="Courier"/>
-              </a:rPr>
-              <a:t>(</a:t>
-            </a:r>
-            <a:r>
-              <a:rPr>
-                <a:solidFill>
-                  <a:srgbClr val="20794D"/>
-                </a:solidFill>
-                <a:latin typeface="Courier"/>
-              </a:rPr>
-              <a:t>"mass"</a:t>
-            </a:r>
-            <a:r>
-              <a:rPr>
-                <a:solidFill>
-                  <a:srgbClr val="003B4F"/>
-                </a:solidFill>
-                <a:latin typeface="Courier"/>
-              </a:rPr>
-              <a:t>)) </a:t>
-            </a:r>
-            <a:r>
-              <a:rPr>
-                <a:solidFill>
-                  <a:srgbClr val="5E5E5E"/>
-                </a:solidFill>
-                <a:latin typeface="Courier"/>
-              </a:rPr>
-              <a:t>%&gt;%</a:t>
-            </a:r>
-            <a:r>
-              <a:rPr>
-                <a:solidFill>
-                  <a:srgbClr val="003B4F"/>
-                </a:solidFill>
-                <a:latin typeface="Courier"/>
-              </a:rPr>
-              <a:t> </a:t>
-            </a:r>
-            <a:r>
-              <a:rPr>
-                <a:solidFill>
-                  <a:srgbClr val="4758AB"/>
-                </a:solidFill>
-                <a:latin typeface="Courier"/>
-              </a:rPr>
-              <a:t>head</a:t>
-            </a:r>
-            <a:r>
-              <a:rPr>
-                <a:solidFill>
-                  <a:srgbClr val="003B4F"/>
-                </a:solidFill>
-                <a:latin typeface="Courier"/>
-              </a:rPr>
-              <a:t>(</a:t>
-            </a:r>
-            <a:r>
-              <a:rPr>
-                <a:solidFill>
-                  <a:srgbClr val="AD0000"/>
-                </a:solidFill>
-                <a:latin typeface="Courier"/>
-              </a:rPr>
-              <a:t>2</a:t>
-            </a:r>
-            <a:r>
-              <a:rPr>
-                <a:solidFill>
-                  <a:srgbClr val="003B4F"/>
-                </a:solidFill>
-                <a:latin typeface="Courier"/>
-              </a:rPr>
-              <a:t>)</a:t>
-            </a:r>
-          </a:p>
-          <a:p>
-            <a:pPr lvl="0" indent="0">
-              <a:buNone/>
-            </a:pPr>
-            <a:r>
-              <a:rPr>
-                <a:latin typeface="Courier"/>
-              </a:rPr>
-              <a:t># A tibble: 2 × 1
-  mass_g
-   &lt;dbl&gt;
-1   0.4 
-2   0.48</a:t>
-            </a:r>
-          </a:p>
-        </p:txBody>
-      </p:sp>
-      <p:sp>
-        <p:nvSpPr>
-          <p:cNvPr id="4" name="Content Placeholder 3"/>
-          <p:cNvSpPr>
-            <a:spLocks noGrp="1"/>
-          </p:cNvSpPr>
-          <p:nvPr>
-            <p:ph idx="2" sz="half"/>
-          </p:nvPr>
-        </p:nvSpPr>
-        <p:spPr/>
-        <p:txBody>
-          <a:bodyPr/>
-          <a:lstStyle/>
-          <a:p>
-            <a:pPr lvl="0"/>
-            <a:r>
-              <a:rPr b="1"/>
-              <a:t>Why it matters:</a:t>
-            </a:r>
-            <a:r>
-              <a:rPr/>
-              <a:t> real data sets have 50–100+ columns and you rarely need all of them</a:t>
-            </a:r>
-          </a:p>
-          <a:p>
-            <a:pPr lvl="0"/>
-            <a:r>
-              <a:rPr b="1"/>
-              <a:t>Useful helpers:</a:t>
-            </a:r>
-          </a:p>
-          <a:p>
-            <a:pPr lvl="1"/>
-            <a:r>
-              <a:rPr>
-                <a:latin typeface="Courier"/>
-              </a:rPr>
-              <a:t>starts_with("x")</a:t>
-            </a:r>
-            <a:r>
-              <a:rPr/>
-              <a:t> — columns starting with “x”</a:t>
-            </a:r>
-          </a:p>
-          <a:p>
-            <a:pPr lvl="1"/>
-            <a:r>
-              <a:rPr>
-                <a:latin typeface="Courier"/>
-              </a:rPr>
-              <a:t>ends_with("_mm")</a:t>
-            </a:r>
-            <a:r>
-              <a:rPr/>
-              <a:t> — columns ending with “_mm”</a:t>
-            </a:r>
-          </a:p>
-          <a:p>
-            <a:pPr lvl="1"/>
-            <a:r>
-              <a:rPr>
-                <a:latin typeface="Courier"/>
-              </a:rPr>
-              <a:t>contains("mass")</a:t>
-            </a:r>
-            <a:r>
-              <a:rPr/>
-              <a:t> — columns containing “mass”</a:t>
-            </a:r>
-          </a:p>
-          <a:p>
-            <a:pPr lvl="0" indent="0" marL="0">
-              <a:buNone/>
-            </a:pPr>
-            <a:r>
-              <a:rPr/>
-              <a:t>📖 </a:t>
-            </a:r>
-            <a:r>
-              <a:rPr>
-                <a:hlinkClick r:id="rId2"/>
-              </a:rPr>
-              <a:t>R4DS §3.3</a:t>
+              <a:rPr sz="2000">
+                <a:latin typeface="Courier"/>
+              </a:rPr>
+              <a:t>mass_g</a:t>
+            </a:r>
+            <a:r>
+              <a:rPr sz="2000"/>
+              <a:t> or </a:t>
+            </a:r>
+            <a:r>
+              <a:rPr sz="2000" b="1"/>
+              <a:t>add</a:t>
+            </a:r>
+            <a:r>
+              <a:rPr sz="2000"/>
+              <a:t> a new column? How many columns will the result have?</a:t>
             </a:r>
           </a:p>
         </p:txBody>
@@ -4943,48 +4684,226 @@
       </p:grpSpPr>
       <p:sp>
         <p:nvSpPr>
-          <p:cNvPr id="2" name="Title 1"/>
-          <p:cNvSpPr>
-            <a:spLocks noGrp="1"/>
-          </p:cNvSpPr>
-          <p:nvPr>
-            <p:ph type="title"/>
-          </p:nvPr>
-        </p:nvSpPr>
-        <p:spPr>
-          <a:xfrm>
-            <a:off x="0" y="0"/>
-            <a:ext cx="9144000" cy="582780"/>
-          </a:xfrm>
-        </p:spPr>
+          <p:cNvPr id="3" name="Content Placeholder 2"/>
+          <p:cNvSpPr>
+            <a:spLocks noGrp="1"/>
+          </p:cNvSpPr>
+          <p:nvPr>
+            <p:ph idx="1" sz="half"/>
+          </p:nvPr>
+        </p:nvSpPr>
+        <p:spPr/>
         <p:txBody>
           <a:bodyPr/>
           <a:lstStyle/>
           <a:p>
-            <a:pPr lvl="0" indent="0" marL="0">
+            <a:pPr lvl="0" indent="0">
               <a:buNone/>
             </a:pPr>
             <a:r>
               <a:rPr>
-                <a:latin typeface="Courier"/>
-              </a:rPr>
-              <a:t>mutate()</a:t>
-            </a:r>
-            <a:r>
-              <a:rPr/>
-              <a:t> — Creating New Columns</a:t>
-            </a:r>
-          </a:p>
-        </p:txBody>
-      </p:sp>
-      <p:sp>
-        <p:nvSpPr>
-          <p:cNvPr id="3" name="Content Placeholder 2"/>
-          <p:cNvSpPr>
-            <a:spLocks noGrp="1"/>
-          </p:cNvSpPr>
-          <p:nvPr>
-            <p:ph idx="1"/>
+                <a:solidFill>
+                  <a:srgbClr val="5E5E5E"/>
+                </a:solidFill>
+                <a:latin typeface="Courier"/>
+              </a:rPr>
+              <a:t># mutate() adds a new column to the data frame ---------</a:t>
+            </a:r>
+            <a:br/>
+            <a:br/>
+            <a:r>
+              <a:rPr>
+                <a:solidFill>
+                  <a:srgbClr val="5E5E5E"/>
+                </a:solidFill>
+                <a:latin typeface="Courier"/>
+              </a:rPr>
+              <a:t># Convert grams to milligrams</a:t>
+            </a:r>
+            <a:br/>
+            <a:r>
+              <a:rPr>
+                <a:solidFill>
+                  <a:srgbClr val="003B4F"/>
+                </a:solidFill>
+                <a:latin typeface="Courier"/>
+              </a:rPr>
+              <a:t>leaf_df </a:t>
+            </a:r>
+            <a:r>
+              <a:rPr>
+                <a:solidFill>
+                  <a:srgbClr val="5E5E5E"/>
+                </a:solidFill>
+                <a:latin typeface="Courier"/>
+              </a:rPr>
+              <a:t>%&gt;%</a:t>
+            </a:r>
+            <a:br/>
+            <a:r>
+              <a:rPr>
+                <a:solidFill>
+                  <a:srgbClr val="003B4F"/>
+                </a:solidFill>
+                <a:latin typeface="Courier"/>
+              </a:rPr>
+              <a:t>  </a:t>
+            </a:r>
+            <a:r>
+              <a:rPr>
+                <a:solidFill>
+                  <a:srgbClr val="4758AB"/>
+                </a:solidFill>
+                <a:latin typeface="Courier"/>
+              </a:rPr>
+              <a:t>mutate</a:t>
+            </a:r>
+            <a:r>
+              <a:rPr>
+                <a:solidFill>
+                  <a:srgbClr val="003B4F"/>
+                </a:solidFill>
+                <a:latin typeface="Courier"/>
+              </a:rPr>
+              <a:t>(</a:t>
+            </a:r>
+            <a:r>
+              <a:rPr>
+                <a:solidFill>
+                  <a:srgbClr val="657422"/>
+                </a:solidFill>
+                <a:latin typeface="Courier"/>
+              </a:rPr>
+              <a:t>mass_mg =</a:t>
+            </a:r>
+            <a:r>
+              <a:rPr>
+                <a:solidFill>
+                  <a:srgbClr val="003B4F"/>
+                </a:solidFill>
+                <a:latin typeface="Courier"/>
+              </a:rPr>
+              <a:t> mass_g </a:t>
+            </a:r>
+            <a:r>
+              <a:rPr>
+                <a:solidFill>
+                  <a:srgbClr val="5E5E5E"/>
+                </a:solidFill>
+                <a:latin typeface="Courier"/>
+              </a:rPr>
+              <a:t>*</a:t>
+            </a:r>
+            <a:r>
+              <a:rPr>
+                <a:solidFill>
+                  <a:srgbClr val="003B4F"/>
+                </a:solidFill>
+                <a:latin typeface="Courier"/>
+              </a:rPr>
+              <a:t> </a:t>
+            </a:r>
+            <a:r>
+              <a:rPr>
+                <a:solidFill>
+                  <a:srgbClr val="AD0000"/>
+                </a:solidFill>
+                <a:latin typeface="Courier"/>
+              </a:rPr>
+              <a:t>1000</a:t>
+            </a:r>
+            <a:r>
+              <a:rPr>
+                <a:solidFill>
+                  <a:srgbClr val="003B4F"/>
+                </a:solidFill>
+                <a:latin typeface="Courier"/>
+              </a:rPr>
+              <a:t>) </a:t>
+            </a:r>
+            <a:r>
+              <a:rPr>
+                <a:solidFill>
+                  <a:srgbClr val="5E5E5E"/>
+                </a:solidFill>
+                <a:latin typeface="Courier"/>
+              </a:rPr>
+              <a:t>%&gt;%</a:t>
+            </a:r>
+            <a:br/>
+            <a:r>
+              <a:rPr>
+                <a:solidFill>
+                  <a:srgbClr val="003B4F"/>
+                </a:solidFill>
+                <a:latin typeface="Courier"/>
+              </a:rPr>
+              <a:t>  </a:t>
+            </a:r>
+            <a:r>
+              <a:rPr>
+                <a:solidFill>
+                  <a:srgbClr val="4758AB"/>
+                </a:solidFill>
+                <a:latin typeface="Courier"/>
+              </a:rPr>
+              <a:t>head</a:t>
+            </a:r>
+            <a:r>
+              <a:rPr>
+                <a:solidFill>
+                  <a:srgbClr val="003B4F"/>
+                </a:solidFill>
+                <a:latin typeface="Courier"/>
+              </a:rPr>
+              <a:t>(</a:t>
+            </a:r>
+            <a:r>
+              <a:rPr>
+                <a:solidFill>
+                  <a:srgbClr val="AD0000"/>
+                </a:solidFill>
+                <a:latin typeface="Courier"/>
+              </a:rPr>
+              <a:t>3</a:t>
+            </a:r>
+            <a:r>
+              <a:rPr>
+                <a:solidFill>
+                  <a:srgbClr val="003B4F"/>
+                </a:solidFill>
+                <a:latin typeface="Courier"/>
+              </a:rPr>
+              <a:t>)</a:t>
+            </a:r>
+          </a:p>
+          <a:p>
+            <a:pPr lvl="0" indent="0">
+              <a:buNone/>
+            </a:pPr>
+            <a:r>
+              <a:rPr>
+                <a:latin typeface="Courier"/>
+              </a:rPr>
+              <a:t># A tibble: 3 × 9
+  twig_id leaf_id teams shade mass_g petiole_mm thickness_mm paper_mass_g
+  &lt;chr&gt;   &lt;chr&gt;   &lt;chr&gt; &lt;chr&gt;  &lt;dbl&gt;      &lt;dbl&gt;        &lt;dbl&gt;        &lt;dbl&gt;
+1 &lt;NA&gt;    &lt;NA&gt;    12345 sunny   0.4          79         0.15         0.21
+2 &lt;NA&gt;    &lt;NA&gt;    12345 sunny   0.48         63         0.14         0.21
+3 &lt;NA&gt;    &lt;NA&gt;    12345 sunny   0.34         68         0.14         0.21
+# ℹ 1 more variable: mass_mg &lt;dbl&gt;</a:t>
+            </a:r>
+          </a:p>
+        </p:txBody>
+      </p:sp>
+      <p:sp>
+        <p:nvSpPr>
+          <p:cNvPr id="4" name="Content Placeholder 3"/>
+          <p:cNvSpPr>
+            <a:spLocks noGrp="1"/>
+          </p:cNvSpPr>
+          <p:nvPr>
+            <p:ph idx="2" sz="half"/>
           </p:nvPr>
         </p:nvSpPr>
         <p:spPr/>
@@ -4992,6 +4911,27 @@
           <a:bodyPr/>
           <a:lstStyle/>
           <a:p>
+            <a:pPr lvl="0"/>
+            <a:r>
+              <a:rPr>
+                <a:latin typeface="Courier"/>
+              </a:rPr>
+              <a:t>mutate()</a:t>
+            </a:r>
+            <a:r>
+              <a:rPr/>
+              <a:t> keeps </a:t>
+            </a:r>
+            <a:r>
+              <a:rPr b="1"/>
+              <a:t>all existing columns</a:t>
+            </a:r>
+            <a:r>
+              <a:rPr/>
+              <a:t> and adds new ones</a:t>
+            </a:r>
+          </a:p>
+          <a:p>
             <a:pPr lvl="0" indent="0" marL="1270000">
               <a:buNone/>
             </a:pPr>
@@ -5006,57 +4946,66 @@
             </a:pPr>
             <a:r>
               <a:rPr sz="2000" b="1"/>
-              <a:t>🔮 Predict first:</a:t>
+              <a:t>✅ Watch the column count</a:t>
+            </a:r>
+          </a:p>
+          <a:p>
+            <a:pPr lvl="0"/>
+            <a:r>
+              <a:rPr sz="2000">
+                <a:latin typeface="Courier"/>
+              </a:rPr>
+              <a:t>mutate()</a:t>
             </a:r>
             <a:r>
               <a:rPr sz="2000"/>
-              <a:t> </a:t>
-            </a:r>
+              <a:t> never removes columns</a:t>
+            </a:r>
+          </a:p>
+          <a:p>
+            <a:pPr lvl="1"/>
+            <a:r>
+              <a:rPr sz="2000"/>
+              <a:t>it adds to the </a:t>
+            </a:r>
+            <a:r>
+              <a:rPr sz="2000" b="1"/>
+              <a:t>right</a:t>
+            </a:r>
+            <a:r>
+              <a:rPr sz="2000"/>
+              <a:t> of your data frame</a:t>
+            </a:r>
+          </a:p>
+          <a:p>
+            <a:pPr lvl="1"/>
+            <a:r>
+              <a:rPr sz="2000"/>
+              <a:t>one new column per variable you create</a:t>
+            </a:r>
+          </a:p>
+          <a:p>
+            <a:pPr lvl="0"/>
+            <a:r>
+              <a:rPr sz="2000"/>
+              <a:t>To </a:t>
+            </a:r>
+            <a:r>
+              <a:rPr sz="2000" b="1"/>
+              <a:t>overwrite</a:t>
+            </a:r>
+            <a:r>
+              <a:rPr sz="2000"/>
+              <a:t> instead, reuse the name on the left:</a:t>
+            </a:r>
+          </a:p>
+          <a:p>
+            <a:pPr lvl="1"/>
             <a:r>
               <a:rPr sz="2000">
                 <a:latin typeface="Courier"/>
               </a:rPr>
-              <a:t>mass_g * 1000</a:t>
-            </a:r>
-            <a:r>
-              <a:rPr sz="2000"/>
-              <a:t> converts grams to milligrams. Before running: will </a:t>
-            </a:r>
-            <a:r>
-              <a:rPr sz="2000">
-                <a:latin typeface="Courier"/>
-              </a:rPr>
-              <a:t>mutate()</a:t>
-            </a:r>
-            <a:r>
-              <a:rPr sz="2000"/>
-              <a:t> </a:t>
-            </a:r>
-            <a:r>
-              <a:rPr sz="2000" b="1"/>
-              <a:t>replace</a:t>
-            </a:r>
-            <a:r>
-              <a:rPr sz="2000"/>
-              <a:t> </a:t>
-            </a:r>
-            <a:r>
-              <a:rPr sz="2000">
-                <a:latin typeface="Courier"/>
-              </a:rPr>
-              <a:t>mass_g</a:t>
-            </a:r>
-            <a:r>
-              <a:rPr sz="2000"/>
-              <a:t> or </a:t>
-            </a:r>
-            <a:r>
-              <a:rPr sz="2000" b="1"/>
-              <a:t>add</a:t>
-            </a:r>
-            <a:r>
-              <a:rPr sz="2000"/>
-              <a:t> a new column? How many columns will the result have?</a:t>
+              <a:t>mutate(mass_g = round(mass_g, 2))</a:t>
             </a:r>
           </a:p>
         </p:txBody>
@@ -5085,19 +5034,58 @@
       </p:grpSpPr>
       <p:sp>
         <p:nvSpPr>
-          <p:cNvPr id="3" name="Content Placeholder 2"/>
-          <p:cNvSpPr>
-            <a:spLocks noGrp="1"/>
-          </p:cNvSpPr>
-          <p:nvPr>
-            <p:ph idx="1" sz="half"/>
-          </p:nvPr>
-        </p:nvSpPr>
-        <p:spPr/>
+          <p:cNvPr id="2" name="Title 1"/>
+          <p:cNvSpPr>
+            <a:spLocks noGrp="1"/>
+          </p:cNvSpPr>
+          <p:nvPr>
+            <p:ph type="title"/>
+          </p:nvPr>
+        </p:nvSpPr>
+        <p:spPr>
+          <a:xfrm>
+            <a:off x="0" y="0"/>
+            <a:ext cx="9144000" cy="602780"/>
+          </a:xfrm>
+          <a:solidFill>
+            <a:srgbClr val="1A1A2E"/>
+          </a:solidFill>
+        </p:spPr>
         <p:txBody>
           <a:bodyPr/>
           <a:lstStyle/>
           <a:p>
+            <a:pPr lvl="0" indent="0" marL="0">
+              <a:buNone/>
+            </a:pPr>
+            <a:r>
+              <a:rPr>
+                <a:latin typeface="Courier"/>
+              </a:rPr>
+              <a:t>mutate()</a:t>
+            </a:r>
+            <a:r>
+              <a:rPr/>
+              <a:t> — Categories and Several at Once</a:t>
+            </a:r>
+          </a:p>
+        </p:txBody>
+      </p:sp>
+      <p:sp>
+        <p:nvSpPr>
+          <p:cNvPr id="3" name="Content Placeholder 2"/>
+          <p:cNvSpPr>
+            <a:spLocks noGrp="1"/>
+          </p:cNvSpPr>
+          <p:nvPr>
+            <p:ph idx="1" sz="half"/>
+          </p:nvPr>
+        </p:nvSpPr>
+        <p:spPr/>
+        <p:txBody>
+          <a:bodyPr/>
+          <a:lstStyle/>
+          <a:p>
             <a:pPr lvl="0" indent="0">
               <a:buNone/>
             </a:pPr>
@@ -5108,18 +5096,144 @@
                 </a:solidFill>
                 <a:latin typeface="Courier"/>
               </a:rPr>
-              <a:t># mutate() adds a new column to the data frame ---------</a:t>
+              <a:t># Add a size category based on mass</a:t>
             </a:r>
             <a:br/>
+            <a:r>
+              <a:rPr>
+                <a:solidFill>
+                  <a:srgbClr val="003B4F"/>
+                </a:solidFill>
+                <a:latin typeface="Courier"/>
+              </a:rPr>
+              <a:t>leaf_df </a:t>
+            </a:r>
+            <a:r>
+              <a:rPr>
+                <a:solidFill>
+                  <a:srgbClr val="5E5E5E"/>
+                </a:solidFill>
+                <a:latin typeface="Courier"/>
+              </a:rPr>
+              <a:t>%&gt;%</a:t>
+            </a:r>
             <a:br/>
             <a:r>
               <a:rPr>
                 <a:solidFill>
+                  <a:srgbClr val="003B4F"/>
+                </a:solidFill>
+                <a:latin typeface="Courier"/>
+              </a:rPr>
+              <a:t>  </a:t>
+            </a:r>
+            <a:r>
+              <a:rPr>
+                <a:solidFill>
+                  <a:srgbClr val="4758AB"/>
+                </a:solidFill>
+                <a:latin typeface="Courier"/>
+              </a:rPr>
+              <a:t>mutate</a:t>
+            </a:r>
+            <a:r>
+              <a:rPr>
+                <a:solidFill>
+                  <a:srgbClr val="003B4F"/>
+                </a:solidFill>
+                <a:latin typeface="Courier"/>
+              </a:rPr>
+              <a:t>(</a:t>
+            </a:r>
+            <a:r>
+              <a:rPr>
+                <a:solidFill>
+                  <a:srgbClr val="657422"/>
+                </a:solidFill>
+                <a:latin typeface="Courier"/>
+              </a:rPr>
+              <a:t>size_class =</a:t>
+            </a:r>
+            <a:r>
+              <a:rPr>
+                <a:solidFill>
+                  <a:srgbClr val="003B4F"/>
+                </a:solidFill>
+                <a:latin typeface="Courier"/>
+              </a:rPr>
+              <a:t> </a:t>
+            </a:r>
+            <a:r>
+              <a:rPr>
+                <a:solidFill>
+                  <a:srgbClr val="4758AB"/>
+                </a:solidFill>
+                <a:latin typeface="Courier"/>
+              </a:rPr>
+              <a:t>if_else</a:t>
+            </a:r>
+            <a:r>
+              <a:rPr>
+                <a:solidFill>
+                  <a:srgbClr val="003B4F"/>
+                </a:solidFill>
+                <a:latin typeface="Courier"/>
+              </a:rPr>
+              <a:t>(mass_g </a:t>
+            </a:r>
+            <a:r>
+              <a:rPr>
+                <a:solidFill>
                   <a:srgbClr val="5E5E5E"/>
                 </a:solidFill>
                 <a:latin typeface="Courier"/>
               </a:rPr>
-              <a:t># Convert grams to milligrams</a:t>
+              <a:t>&gt;</a:t>
+            </a:r>
+            <a:r>
+              <a:rPr>
+                <a:solidFill>
+                  <a:srgbClr val="003B4F"/>
+                </a:solidFill>
+                <a:latin typeface="Courier"/>
+              </a:rPr>
+              <a:t> </a:t>
+            </a:r>
+            <a:r>
+              <a:rPr>
+                <a:solidFill>
+                  <a:srgbClr val="AD0000"/>
+                </a:solidFill>
+                <a:latin typeface="Courier"/>
+              </a:rPr>
+              <a:t>0.5</a:t>
+            </a:r>
+            <a:r>
+              <a:rPr>
+                <a:solidFill>
+                  <a:srgbClr val="003B4F"/>
+                </a:solidFill>
+                <a:latin typeface="Courier"/>
+              </a:rPr>
+              <a:t>, </a:t>
+            </a:r>
+            <a:r>
+              <a:rPr>
+                <a:solidFill>
+                  <a:srgbClr val="20794D"/>
+                </a:solidFill>
+                <a:latin typeface="Courier"/>
+              </a:rPr>
+              <a:t>"large"</a:t>
+            </a:r>
+            <a:r>
+              <a:rPr>
+                <a:solidFill>
+                  <a:srgbClr val="003B4F"/>
+                </a:solidFill>
+                <a:latin typeface="Courier"/>
+              </a:rPr>
+              <a:t>,</a:t>
             </a:r>
             <a:br/>
             <a:r>
@@ -5129,7 +5243,25 @@
                 </a:solidFill>
                 <a:latin typeface="Courier"/>
               </a:rPr>
-              <a:t>leaf_df </a:t>
+              <a:t>                              </a:t>
+            </a:r>
+            <a:r>
+              <a:rPr>
+                <a:solidFill>
+                  <a:srgbClr val="20794D"/>
+                </a:solidFill>
+                <a:latin typeface="Courier"/>
+              </a:rPr>
+              <a:t>"small"</a:t>
+            </a:r>
+            <a:r>
+              <a:rPr>
+                <a:solidFill>
+                  <a:srgbClr val="003B4F"/>
+                </a:solidFill>
+                <a:latin typeface="Courier"/>
+              </a:rPr>
+              <a:t>)) </a:t>
             </a:r>
             <a:r>
               <a:rPr>
@@ -5157,7 +5289,7 @@
                 </a:solidFill>
                 <a:latin typeface="Courier"/>
               </a:rPr>
-              <a:t>mutate</a:t>
+              <a:t>head</a:t>
             </a:r>
             <a:r>
               <a:rPr>
@@ -5171,102 +5303,11 @@
             <a:r>
               <a:rPr>
                 <a:solidFill>
-                  <a:srgbClr val="657422"/>
-                </a:solidFill>
-                <a:latin typeface="Courier"/>
-              </a:rPr>
-              <a:t>mass_mg =</a:t>
-            </a:r>
-            <a:r>
-              <a:rPr>
-                <a:solidFill>
-                  <a:srgbClr val="003B4F"/>
-                </a:solidFill>
-                <a:latin typeface="Courier"/>
-              </a:rPr>
-              <a:t> mass_g </a:t>
-            </a:r>
-            <a:r>
-              <a:rPr>
-                <a:solidFill>
-                  <a:srgbClr val="5E5E5E"/>
-                </a:solidFill>
-                <a:latin typeface="Courier"/>
-              </a:rPr>
-              <a:t>*</a:t>
-            </a:r>
-            <a:r>
-              <a:rPr>
-                <a:solidFill>
-                  <a:srgbClr val="003B4F"/>
-                </a:solidFill>
-                <a:latin typeface="Courier"/>
-              </a:rPr>
-              <a:t> </a:t>
-            </a:r>
-            <a:r>
-              <a:rPr>
-                <a:solidFill>
                   <a:srgbClr val="AD0000"/>
                 </a:solidFill>
                 <a:latin typeface="Courier"/>
               </a:rPr>
-              <a:t>1000</a:t>
-            </a:r>
-            <a:r>
-              <a:rPr>
-                <a:solidFill>
-                  <a:srgbClr val="003B4F"/>
-                </a:solidFill>
-                <a:latin typeface="Courier"/>
-              </a:rPr>
-              <a:t>) </a:t>
-            </a:r>
-            <a:r>
-              <a:rPr>
-                <a:solidFill>
-                  <a:srgbClr val="5E5E5E"/>
-                </a:solidFill>
-                <a:latin typeface="Courier"/>
-              </a:rPr>
-              <a:t>%&gt;%</a:t>
-            </a:r>
-            <a:br/>
-            <a:r>
-              <a:rPr>
-                <a:solidFill>
-                  <a:srgbClr val="003B4F"/>
-                </a:solidFill>
-                <a:latin typeface="Courier"/>
-              </a:rPr>
-              <a:t>  </a:t>
-            </a:r>
-            <a:r>
-              <a:rPr>
-                <a:solidFill>
-                  <a:srgbClr val="4758AB"/>
-                </a:solidFill>
-                <a:latin typeface="Courier"/>
-              </a:rPr>
-              <a:t>head</a:t>
-            </a:r>
-            <a:r>
-              <a:rPr>
-                <a:solidFill>
-                  <a:srgbClr val="003B4F"/>
-                </a:solidFill>
-                <a:latin typeface="Courier"/>
-              </a:rPr>
-              <a:t>(</a:t>
-            </a:r>
-            <a:r>
-              <a:rPr>
-                <a:solidFill>
-                  <a:srgbClr val="AD0000"/>
-                </a:solidFill>
-                <a:latin typeface="Courier"/>
-              </a:rPr>
-              <a:t>3</a:t>
+              <a:t>2</a:t>
             </a:r>
             <a:r>
               <a:rPr>
@@ -5286,13 +5327,291 @@
               <a:rPr>
                 <a:latin typeface="Courier"/>
               </a:rPr>
-              <a:t># A tibble: 3 × 9
+              <a:t># A tibble: 2 × 9
   twig_id leaf_id teams shade mass_g petiole_mm thickness_mm paper_mass_g
   &lt;chr&gt;   &lt;chr&gt;   &lt;chr&gt; &lt;chr&gt;  &lt;dbl&gt;      &lt;dbl&gt;        &lt;dbl&gt;        &lt;dbl&gt;
 1 &lt;NA&gt;    &lt;NA&gt;    12345 sunny   0.4          79         0.15         0.21
 2 &lt;NA&gt;    &lt;NA&gt;    12345 sunny   0.48         63         0.14         0.21
-3 &lt;NA&gt;    &lt;NA&gt;    12345 sunny   0.34         68         0.14         0.21
-# ℹ 1 more variable: mass_mg &lt;dbl&gt;</a:t>
+# ℹ 1 more variable: size_class &lt;chr&gt;</a:t>
+            </a:r>
+          </a:p>
+          <a:p>
+            <a:pPr lvl="0" indent="0">
+              <a:buNone/>
+            </a:pPr>
+            <a:r>
+              <a:rPr>
+                <a:solidFill>
+                  <a:srgbClr val="5E5E5E"/>
+                </a:solidFill>
+                <a:latin typeface="Courier"/>
+              </a:rPr>
+              <a:t># mutate() can create several new columns at once</a:t>
+            </a:r>
+            <a:br/>
+            <a:r>
+              <a:rPr>
+                <a:solidFill>
+                  <a:srgbClr val="003B4F"/>
+                </a:solidFill>
+                <a:latin typeface="Courier"/>
+              </a:rPr>
+              <a:t>leaf_df </a:t>
+            </a:r>
+            <a:r>
+              <a:rPr>
+                <a:solidFill>
+                  <a:srgbClr val="5E5E5E"/>
+                </a:solidFill>
+                <a:latin typeface="Courier"/>
+              </a:rPr>
+              <a:t>%&gt;%</a:t>
+            </a:r>
+            <a:br/>
+            <a:r>
+              <a:rPr>
+                <a:solidFill>
+                  <a:srgbClr val="003B4F"/>
+                </a:solidFill>
+                <a:latin typeface="Courier"/>
+              </a:rPr>
+              <a:t>  </a:t>
+            </a:r>
+            <a:r>
+              <a:rPr>
+                <a:solidFill>
+                  <a:srgbClr val="4758AB"/>
+                </a:solidFill>
+                <a:latin typeface="Courier"/>
+              </a:rPr>
+              <a:t>mutate</a:t>
+            </a:r>
+            <a:r>
+              <a:rPr>
+                <a:solidFill>
+                  <a:srgbClr val="003B4F"/>
+                </a:solidFill>
+                <a:latin typeface="Courier"/>
+              </a:rPr>
+              <a:t>(</a:t>
+            </a:r>
+            <a:br/>
+            <a:r>
+              <a:rPr>
+                <a:solidFill>
+                  <a:srgbClr val="003B4F"/>
+                </a:solidFill>
+                <a:latin typeface="Courier"/>
+              </a:rPr>
+              <a:t>    </a:t>
+            </a:r>
+            <a:r>
+              <a:rPr>
+                <a:solidFill>
+                  <a:srgbClr val="657422"/>
+                </a:solidFill>
+                <a:latin typeface="Courier"/>
+              </a:rPr>
+              <a:t>mass_mg    =</a:t>
+            </a:r>
+            <a:r>
+              <a:rPr>
+                <a:solidFill>
+                  <a:srgbClr val="003B4F"/>
+                </a:solidFill>
+                <a:latin typeface="Courier"/>
+              </a:rPr>
+              <a:t> mass_g </a:t>
+            </a:r>
+            <a:r>
+              <a:rPr>
+                <a:solidFill>
+                  <a:srgbClr val="5E5E5E"/>
+                </a:solidFill>
+                <a:latin typeface="Courier"/>
+              </a:rPr>
+              <a:t>*</a:t>
+            </a:r>
+            <a:r>
+              <a:rPr>
+                <a:solidFill>
+                  <a:srgbClr val="003B4F"/>
+                </a:solidFill>
+                <a:latin typeface="Courier"/>
+              </a:rPr>
+              <a:t> </a:t>
+            </a:r>
+            <a:r>
+              <a:rPr>
+                <a:solidFill>
+                  <a:srgbClr val="AD0000"/>
+                </a:solidFill>
+                <a:latin typeface="Courier"/>
+              </a:rPr>
+              <a:t>1000</a:t>
+            </a:r>
+            <a:r>
+              <a:rPr>
+                <a:solidFill>
+                  <a:srgbClr val="003B4F"/>
+                </a:solidFill>
+                <a:latin typeface="Courier"/>
+              </a:rPr>
+              <a:t>,</a:t>
+            </a:r>
+            <a:br/>
+            <a:r>
+              <a:rPr>
+                <a:solidFill>
+                  <a:srgbClr val="003B4F"/>
+                </a:solidFill>
+                <a:latin typeface="Courier"/>
+              </a:rPr>
+              <a:t>    </a:t>
+            </a:r>
+            <a:r>
+              <a:rPr>
+                <a:solidFill>
+                  <a:srgbClr val="657422"/>
+                </a:solidFill>
+                <a:latin typeface="Courier"/>
+              </a:rPr>
+              <a:t>petiole_cm =</a:t>
+            </a:r>
+            <a:r>
+              <a:rPr>
+                <a:solidFill>
+                  <a:srgbClr val="003B4F"/>
+                </a:solidFill>
+                <a:latin typeface="Courier"/>
+              </a:rPr>
+              <a:t> petiole_mm </a:t>
+            </a:r>
+            <a:r>
+              <a:rPr>
+                <a:solidFill>
+                  <a:srgbClr val="5E5E5E"/>
+                </a:solidFill>
+                <a:latin typeface="Courier"/>
+              </a:rPr>
+              <a:t>/</a:t>
+            </a:r>
+            <a:r>
+              <a:rPr>
+                <a:solidFill>
+                  <a:srgbClr val="003B4F"/>
+                </a:solidFill>
+                <a:latin typeface="Courier"/>
+              </a:rPr>
+              <a:t> </a:t>
+            </a:r>
+            <a:r>
+              <a:rPr>
+                <a:solidFill>
+                  <a:srgbClr val="AD0000"/>
+                </a:solidFill>
+                <a:latin typeface="Courier"/>
+              </a:rPr>
+              <a:t>10</a:t>
+            </a:r>
+            <a:r>
+              <a:rPr>
+                <a:solidFill>
+                  <a:srgbClr val="003B4F"/>
+                </a:solidFill>
+                <a:latin typeface="Courier"/>
+              </a:rPr>
+              <a:t> </a:t>
+            </a:r>
+            <a:r>
+              <a:rPr>
+                <a:solidFill>
+                  <a:srgbClr val="5E5E5E"/>
+                </a:solidFill>
+                <a:latin typeface="Courier"/>
+              </a:rPr>
+              <a:t># petiole length in cm</a:t>
+            </a:r>
+            <a:br/>
+            <a:r>
+              <a:rPr>
+                <a:solidFill>
+                  <a:srgbClr val="003B4F"/>
+                </a:solidFill>
+                <a:latin typeface="Courier"/>
+              </a:rPr>
+              <a:t>  ) </a:t>
+            </a:r>
+            <a:r>
+              <a:rPr>
+                <a:solidFill>
+                  <a:srgbClr val="5E5E5E"/>
+                </a:solidFill>
+                <a:latin typeface="Courier"/>
+              </a:rPr>
+              <a:t>%&gt;%</a:t>
+            </a:r>
+            <a:br/>
+            <a:r>
+              <a:rPr>
+                <a:solidFill>
+                  <a:srgbClr val="003B4F"/>
+                </a:solidFill>
+                <a:latin typeface="Courier"/>
+              </a:rPr>
+              <a:t>  </a:t>
+            </a:r>
+            <a:r>
+              <a:rPr>
+                <a:solidFill>
+                  <a:srgbClr val="4758AB"/>
+                </a:solidFill>
+                <a:latin typeface="Courier"/>
+              </a:rPr>
+              <a:t>head</a:t>
+            </a:r>
+            <a:r>
+              <a:rPr>
+                <a:solidFill>
+                  <a:srgbClr val="003B4F"/>
+                </a:solidFill>
+                <a:latin typeface="Courier"/>
+              </a:rPr>
+              <a:t>(</a:t>
+            </a:r>
+            <a:r>
+              <a:rPr>
+                <a:solidFill>
+                  <a:srgbClr val="AD0000"/>
+                </a:solidFill>
+                <a:latin typeface="Courier"/>
+              </a:rPr>
+              <a:t>2</a:t>
+            </a:r>
+            <a:r>
+              <a:rPr>
+                <a:solidFill>
+                  <a:srgbClr val="003B4F"/>
+                </a:solidFill>
+                <a:latin typeface="Courier"/>
+              </a:rPr>
+              <a:t>)</a:t>
+            </a:r>
+          </a:p>
+          <a:p>
+            <a:pPr lvl="0" indent="0">
+              <a:buNone/>
+            </a:pPr>
+            <a:r>
+              <a:rPr>
+                <a:latin typeface="Courier"/>
+              </a:rPr>
+              <a:t># A tibble: 2 × 10
+  twig_id leaf_id teams shade mass_g petiole_mm thickness_mm paper_mass_g
+  &lt;chr&gt;   &lt;chr&gt;   &lt;chr&gt; &lt;chr&gt;  &lt;dbl&gt;      &lt;dbl&gt;        &lt;dbl&gt;        &lt;dbl&gt;
+1 &lt;NA&gt;    &lt;NA&gt;    12345 sunny   0.4          79         0.15         0.21
+2 &lt;NA&gt;    &lt;NA&gt;    12345 sunny   0.48         63         0.14         0.21
+# ℹ 2 more variables: mass_mg &lt;dbl&gt;, petiole_cm &lt;dbl&gt;</a:t>
             </a:r>
           </a:p>
         </p:txBody>
@@ -5314,99 +5633,48 @@
           <a:p>
             <a:pPr lvl="0"/>
             <a:r>
-              <a:rPr>
-                <a:latin typeface="Courier"/>
-              </a:rPr>
-              <a:t>mutate()</a:t>
-            </a:r>
-            <a:r>
-              <a:rPr/>
-              <a:t> keeps </a:t>
-            </a:r>
-            <a:r>
               <a:rPr b="1"/>
-              <a:t>all existing columns</a:t>
-            </a:r>
-            <a:r>
-              <a:rPr/>
-              <a:t> and adds new ones</a:t>
-            </a:r>
-          </a:p>
-          <a:p>
-            <a:pPr lvl="0" indent="0" marL="1270000">
+              <a:t>Use </a:t>
+            </a:r>
+            <a:r>
+              <a:rPr b="1">
+                <a:latin typeface="Courier"/>
+              </a:rPr>
+              <a:t>if_else(condition, value_if_true, value_if_false)</a:t>
+            </a:r>
+            <a:r>
+              <a:rPr/>
+              <a:t> to create categories</a:t>
+            </a:r>
+          </a:p>
+          <a:p>
+            <a:pPr lvl="0"/>
+            <a:r>
+              <a:rPr/>
+              <a:t>Separate several new columns with </a:t>
+            </a:r>
+            <a:r>
+              <a:rPr b="1"/>
+              <a:t>commas</a:t>
+            </a:r>
+            <a:r>
+              <a:rPr/>
+              <a:t>, like the arguments they are</a:t>
+            </a:r>
+          </a:p>
+          <a:p>
+            <a:pPr lvl="0" indent="0" marL="0">
               <a:buNone/>
             </a:pPr>
             <a:r>
-              <a:rPr sz="2000" b="1"/>
-              <a:t>Note</a:t>
-            </a:r>
-          </a:p>
-          <a:p>
-            <a:pPr lvl="0" indent="0" marL="1270000">
-              <a:buNone/>
-            </a:pPr>
-            <a:r>
-              <a:rPr sz="2000" b="1"/>
-              <a:t>✅ Watch the column count</a:t>
-            </a:r>
-          </a:p>
-          <a:p>
-            <a:pPr lvl="0"/>
-            <a:r>
-              <a:rPr sz="2000">
-                <a:latin typeface="Courier"/>
-              </a:rPr>
-              <a:t>mutate()</a:t>
-            </a:r>
-            <a:r>
-              <a:rPr sz="2000"/>
-              <a:t> never removes columns</a:t>
-            </a:r>
-          </a:p>
-          <a:p>
-            <a:pPr lvl="1"/>
-            <a:r>
-              <a:rPr sz="2000"/>
-              <a:t>it adds to the </a:t>
-            </a:r>
-            <a:r>
-              <a:rPr sz="2000" b="1"/>
-              <a:t>right</a:t>
-            </a:r>
-            <a:r>
-              <a:rPr sz="2000"/>
-              <a:t> of your data frame</a:t>
-            </a:r>
-          </a:p>
-          <a:p>
-            <a:pPr lvl="1"/>
-            <a:r>
-              <a:rPr sz="2000"/>
-              <a:t>one new column per variable you create</a:t>
-            </a:r>
-          </a:p>
-          <a:p>
-            <a:pPr lvl="0"/>
-            <a:r>
-              <a:rPr sz="2000"/>
-              <a:t>To </a:t>
-            </a:r>
-            <a:r>
-              <a:rPr sz="2000" b="1"/>
-              <a:t>overwrite</a:t>
-            </a:r>
-            <a:r>
-              <a:rPr sz="2000"/>
-              <a:t> instead, reuse the name on the left:</a:t>
-            </a:r>
-          </a:p>
-          <a:p>
-            <a:pPr lvl="1"/>
-            <a:r>
-              <a:rPr sz="2000">
-                <a:latin typeface="Courier"/>
-              </a:rPr>
-              <a:t>mutate(mass_g = round(mass_g, 2))</a:t>
+              <a:rPr/>
+              <a:t>📖 </a:t>
+            </a:r>
+            <a:r>
+              <a:rPr>
+                <a:hlinkClick r:id="rId2"/>
+              </a:rPr>
+              <a:t>R4DS §3.3</a:t>
             </a:r>
           </a:p>
         </p:txBody>
@@ -5463,11 +5731,11 @@
               <a:rPr>
                 <a:latin typeface="Courier"/>
               </a:rPr>
-              <a:t>mutate()</a:t>
-            </a:r>
-            <a:r>
-              <a:rPr/>
-              <a:t> — Categories and Several at Once</a:t>
+              <a:t>arrange()</a:t>
+            </a:r>
+            <a:r>
+              <a:rPr/>
+              <a:t> — Sorting Rows</a:t>
             </a:r>
           </a:p>
         </p:txBody>
@@ -5497,9 +5765,20 @@
                 </a:solidFill>
                 <a:latin typeface="Courier"/>
               </a:rPr>
-              <a:t># Add a size category based on mass</a:t>
+              <a:t># arrange() sorts rows by one or more columns ----------</a:t>
             </a:r>
             <a:br/>
+            <a:br/>
+            <a:r>
+              <a:rPr>
+                <a:solidFill>
+                  <a:srgbClr val="5E5E5E"/>
+                </a:solidFill>
+                <a:latin typeface="Courier"/>
+              </a:rPr>
+              <a:t># Lightest leaves first</a:t>
+            </a:r>
+            <a:br/>
             <a:r>
               <a:rPr>
                 <a:solidFill>
@@ -5518,6 +5797,117 @@
               </a:rPr>
               <a:t>%&gt;%</a:t>
             </a:r>
+            <a:r>
+              <a:rPr>
+                <a:solidFill>
+                  <a:srgbClr val="003B4F"/>
+                </a:solidFill>
+                <a:latin typeface="Courier"/>
+              </a:rPr>
+              <a:t> </a:t>
+            </a:r>
+            <a:r>
+              <a:rPr>
+                <a:solidFill>
+                  <a:srgbClr val="4758AB"/>
+                </a:solidFill>
+                <a:latin typeface="Courier"/>
+              </a:rPr>
+              <a:t>arrange</a:t>
+            </a:r>
+            <a:r>
+              <a:rPr>
+                <a:solidFill>
+                  <a:srgbClr val="003B4F"/>
+                </a:solidFill>
+                <a:latin typeface="Courier"/>
+              </a:rPr>
+              <a:t>(mass_g) </a:t>
+            </a:r>
+            <a:r>
+              <a:rPr>
+                <a:solidFill>
+                  <a:srgbClr val="5E5E5E"/>
+                </a:solidFill>
+                <a:latin typeface="Courier"/>
+              </a:rPr>
+              <a:t>%&gt;%</a:t>
+            </a:r>
+            <a:r>
+              <a:rPr>
+                <a:solidFill>
+                  <a:srgbClr val="003B4F"/>
+                </a:solidFill>
+                <a:latin typeface="Courier"/>
+              </a:rPr>
+              <a:t> </a:t>
+            </a:r>
+            <a:r>
+              <a:rPr>
+                <a:solidFill>
+                  <a:srgbClr val="4758AB"/>
+                </a:solidFill>
+                <a:latin typeface="Courier"/>
+              </a:rPr>
+              <a:t>head</a:t>
+            </a:r>
+            <a:r>
+              <a:rPr>
+                <a:solidFill>
+                  <a:srgbClr val="003B4F"/>
+                </a:solidFill>
+                <a:latin typeface="Courier"/>
+              </a:rPr>
+              <a:t>(</a:t>
+            </a:r>
+            <a:r>
+              <a:rPr>
+                <a:solidFill>
+                  <a:srgbClr val="AD0000"/>
+                </a:solidFill>
+                <a:latin typeface="Courier"/>
+              </a:rPr>
+              <a:t>3</a:t>
+            </a:r>
+            <a:r>
+              <a:rPr>
+                <a:solidFill>
+                  <a:srgbClr val="003B4F"/>
+                </a:solidFill>
+                <a:latin typeface="Courier"/>
+              </a:rPr>
+              <a:t>)</a:t>
+            </a:r>
+          </a:p>
+          <a:p>
+            <a:pPr lvl="0" indent="0">
+              <a:buNone/>
+            </a:pPr>
+            <a:r>
+              <a:rPr>
+                <a:latin typeface="Courier"/>
+              </a:rPr>
+              <a:t># A tibble: 3 × 8
+  twig_id leaf_id teams        shade mass_g petiole_mm thickness_mm paper_mass_g
+  &lt;chr&gt;   &lt;chr&gt;   &lt;chr&gt;        &lt;chr&gt;  &lt;dbl&gt;      &lt;dbl&gt;        &lt;dbl&gt;        &lt;dbl&gt;
+1 twig_6  l06     fighting_mo… sunny  0.193       29           0.13        0.113
+2 &lt;NA&gt;    4       Oscar_Karl   sunny  0.230       35.7         0.36       NA    
+3 &lt;NA&gt;    &lt;NA&gt;    12345        sunny  0.27        34           0.11        0.15 </a:t>
+            </a:r>
+          </a:p>
+          <a:p>
+            <a:pPr lvl="0" indent="0">
+              <a:buNone/>
+            </a:pPr>
+            <a:r>
+              <a:rPr>
+                <a:solidFill>
+                  <a:srgbClr val="5E5E5E"/>
+                </a:solidFill>
+                <a:latin typeface="Courier"/>
+              </a:rPr>
+              <a:t># Heaviest leaves first (use desc() to reverse)</a:t>
+            </a:r>
             <a:br/>
             <a:r>
               <a:rPr>
@@ -5526,7 +5916,25 @@
                 </a:solidFill>
                 <a:latin typeface="Courier"/>
               </a:rPr>
-              <a:t>  </a:t>
+              <a:t>leaf_df </a:t>
+            </a:r>
+            <a:r>
+              <a:rPr>
+                <a:solidFill>
+                  <a:srgbClr val="5E5E5E"/>
+                </a:solidFill>
+                <a:latin typeface="Courier"/>
+              </a:rPr>
+              <a:t>%&gt;%</a:t>
+            </a:r>
+            <a:r>
+              <a:rPr>
+                <a:solidFill>
+                  <a:srgbClr val="003B4F"/>
+                </a:solidFill>
+                <a:latin typeface="Courier"/>
+              </a:rPr>
+              <a:t> </a:t>
             </a:r>
             <a:r>
               <a:rPr>
@@ -5535,7 +5943,7 @@
                 </a:solidFill>
                 <a:latin typeface="Courier"/>
               </a:rPr>
-              <a:t>mutate</a:t>
+              <a:t>arrange</a:t>
             </a:r>
             <a:r>
               <a:rPr>
@@ -5549,11 +5957,29 @@
             <a:r>
               <a:rPr>
                 <a:solidFill>
-                  <a:srgbClr val="657422"/>
-                </a:solidFill>
-                <a:latin typeface="Courier"/>
-              </a:rPr>
-              <a:t>size_class =</a:t>
+                  <a:srgbClr val="4758AB"/>
+                </a:solidFill>
+                <a:latin typeface="Courier"/>
+              </a:rPr>
+              <a:t>desc</a:t>
+            </a:r>
+            <a:r>
+              <a:rPr>
+                <a:solidFill>
+                  <a:srgbClr val="003B4F"/>
+                </a:solidFill>
+                <a:latin typeface="Courier"/>
+              </a:rPr>
+              <a:t>(mass_g)) </a:t>
+            </a:r>
+            <a:r>
+              <a:rPr>
+                <a:solidFill>
+                  <a:srgbClr val="5E5E5E"/>
+                </a:solidFill>
+                <a:latin typeface="Courier"/>
+              </a:rPr>
+              <a:t>%&gt;%</a:t>
             </a:r>
             <a:r>
               <a:rPr>
@@ -5571,34 +5997,16 @@
                 </a:solidFill>
                 <a:latin typeface="Courier"/>
               </a:rPr>
-              <a:t>if_else</a:t>
-            </a:r>
-            <a:r>
-              <a:rPr>
-                <a:solidFill>
-                  <a:srgbClr val="003B4F"/>
-                </a:solidFill>
-                <a:latin typeface="Courier"/>
-              </a:rPr>
-              <a:t>(mass_g </a:t>
-            </a:r>
-            <a:r>
-              <a:rPr>
-                <a:solidFill>
-                  <a:srgbClr val="5E5E5E"/>
-                </a:solidFill>
-                <a:latin typeface="Courier"/>
-              </a:rPr>
-              <a:t>&gt;</a:t>
-            </a:r>
-            <a:r>
-              <a:rPr>
-                <a:solidFill>
-                  <a:srgbClr val="003B4F"/>
-                </a:solidFill>
-                <a:latin typeface="Courier"/>
-              </a:rPr>
-              <a:t> </a:t>
+              <a:t>head</a:t>
+            </a:r>
+            <a:r>
+              <a:rPr>
+                <a:solidFill>
+                  <a:srgbClr val="003B4F"/>
+                </a:solidFill>
+                <a:latin typeface="Courier"/>
+              </a:rPr>
+              <a:t>(</a:t>
             </a:r>
             <a:r>
               <a:rPr>
@@ -5607,108 +6015,7 @@
                 </a:solidFill>
                 <a:latin typeface="Courier"/>
               </a:rPr>
-              <a:t>0.5</a:t>
-            </a:r>
-            <a:r>
-              <a:rPr>
-                <a:solidFill>
-                  <a:srgbClr val="003B4F"/>
-                </a:solidFill>
-                <a:latin typeface="Courier"/>
-              </a:rPr>
-              <a:t>, </a:t>
-            </a:r>
-            <a:r>
-              <a:rPr>
-                <a:solidFill>
-                  <a:srgbClr val="20794D"/>
-                </a:solidFill>
-                <a:latin typeface="Courier"/>
-              </a:rPr>
-              <a:t>"large"</a:t>
-            </a:r>
-            <a:r>
-              <a:rPr>
-                <a:solidFill>
-                  <a:srgbClr val="003B4F"/>
-                </a:solidFill>
-                <a:latin typeface="Courier"/>
-              </a:rPr>
-              <a:t>,</a:t>
-            </a:r>
-            <a:br/>
-            <a:r>
-              <a:rPr>
-                <a:solidFill>
-                  <a:srgbClr val="003B4F"/>
-                </a:solidFill>
-                <a:latin typeface="Courier"/>
-              </a:rPr>
-              <a:t>                              </a:t>
-            </a:r>
-            <a:r>
-              <a:rPr>
-                <a:solidFill>
-                  <a:srgbClr val="20794D"/>
-                </a:solidFill>
-                <a:latin typeface="Courier"/>
-              </a:rPr>
-              <a:t>"small"</a:t>
-            </a:r>
-            <a:r>
-              <a:rPr>
-                <a:solidFill>
-                  <a:srgbClr val="003B4F"/>
-                </a:solidFill>
-                <a:latin typeface="Courier"/>
-              </a:rPr>
-              <a:t>)) </a:t>
-            </a:r>
-            <a:r>
-              <a:rPr>
-                <a:solidFill>
-                  <a:srgbClr val="5E5E5E"/>
-                </a:solidFill>
-                <a:latin typeface="Courier"/>
-              </a:rPr>
-              <a:t>%&gt;%</a:t>
-            </a:r>
-            <a:br/>
-            <a:r>
-              <a:rPr>
-                <a:solidFill>
-                  <a:srgbClr val="003B4F"/>
-                </a:solidFill>
-                <a:latin typeface="Courier"/>
-              </a:rPr>
-              <a:t>  </a:t>
-            </a:r>
-            <a:r>
-              <a:rPr>
-                <a:solidFill>
-                  <a:srgbClr val="4758AB"/>
-                </a:solidFill>
-                <a:latin typeface="Courier"/>
-              </a:rPr>
-              <a:t>head</a:t>
-            </a:r>
-            <a:r>
-              <a:rPr>
-                <a:solidFill>
-                  <a:srgbClr val="003B4F"/>
-                </a:solidFill>
-                <a:latin typeface="Courier"/>
-              </a:rPr>
-              <a:t>(</a:t>
-            </a:r>
-            <a:r>
-              <a:rPr>
-                <a:solidFill>
-                  <a:srgbClr val="AD0000"/>
-                </a:solidFill>
-                <a:latin typeface="Courier"/>
-              </a:rPr>
-              <a:t>2</a:t>
+              <a:t>3</a:t>
             </a:r>
             <a:r>
               <a:rPr>
@@ -5728,291 +6035,12 @@
               <a:rPr>
                 <a:latin typeface="Courier"/>
               </a:rPr>
-              <a:t># A tibble: 2 × 9
-  twig_id leaf_id teams shade mass_g petiole_mm thickness_mm paper_mass_g
-  &lt;chr&gt;   &lt;chr&gt;   &lt;chr&gt; &lt;chr&gt;  &lt;dbl&gt;      &lt;dbl&gt;        &lt;dbl&gt;        &lt;dbl&gt;
-1 &lt;NA&gt;    &lt;NA&gt;    12345 sunny   0.4          79         0.15         0.21
-2 &lt;NA&gt;    &lt;NA&gt;    12345 sunny   0.48         63         0.14         0.21
-# ℹ 1 more variable: size_class &lt;chr&gt;</a:t>
-            </a:r>
-          </a:p>
-          <a:p>
-            <a:pPr lvl="0" indent="0">
-              <a:buNone/>
-            </a:pPr>
-            <a:r>
-              <a:rPr>
-                <a:solidFill>
-                  <a:srgbClr val="5E5E5E"/>
-                </a:solidFill>
-                <a:latin typeface="Courier"/>
-              </a:rPr>
-              <a:t># mutate() can create several new columns at once</a:t>
-            </a:r>
-            <a:br/>
-            <a:r>
-              <a:rPr>
-                <a:solidFill>
-                  <a:srgbClr val="003B4F"/>
-                </a:solidFill>
-                <a:latin typeface="Courier"/>
-              </a:rPr>
-              <a:t>leaf_df </a:t>
-            </a:r>
-            <a:r>
-              <a:rPr>
-                <a:solidFill>
-                  <a:srgbClr val="5E5E5E"/>
-                </a:solidFill>
-                <a:latin typeface="Courier"/>
-              </a:rPr>
-              <a:t>%&gt;%</a:t>
-            </a:r>
-            <a:br/>
-            <a:r>
-              <a:rPr>
-                <a:solidFill>
-                  <a:srgbClr val="003B4F"/>
-                </a:solidFill>
-                <a:latin typeface="Courier"/>
-              </a:rPr>
-              <a:t>  </a:t>
-            </a:r>
-            <a:r>
-              <a:rPr>
-                <a:solidFill>
-                  <a:srgbClr val="4758AB"/>
-                </a:solidFill>
-                <a:latin typeface="Courier"/>
-              </a:rPr>
-              <a:t>mutate</a:t>
-            </a:r>
-            <a:r>
-              <a:rPr>
-                <a:solidFill>
-                  <a:srgbClr val="003B4F"/>
-                </a:solidFill>
-                <a:latin typeface="Courier"/>
-              </a:rPr>
-              <a:t>(</a:t>
-            </a:r>
-            <a:br/>
-            <a:r>
-              <a:rPr>
-                <a:solidFill>
-                  <a:srgbClr val="003B4F"/>
-                </a:solidFill>
-                <a:latin typeface="Courier"/>
-              </a:rPr>
-              <a:t>    </a:t>
-            </a:r>
-            <a:r>
-              <a:rPr>
-                <a:solidFill>
-                  <a:srgbClr val="657422"/>
-                </a:solidFill>
-                <a:latin typeface="Courier"/>
-              </a:rPr>
-              <a:t>mass_mg    =</a:t>
-            </a:r>
-            <a:r>
-              <a:rPr>
-                <a:solidFill>
-                  <a:srgbClr val="003B4F"/>
-                </a:solidFill>
-                <a:latin typeface="Courier"/>
-              </a:rPr>
-              <a:t> mass_g </a:t>
-            </a:r>
-            <a:r>
-              <a:rPr>
-                <a:solidFill>
-                  <a:srgbClr val="5E5E5E"/>
-                </a:solidFill>
-                <a:latin typeface="Courier"/>
-              </a:rPr>
-              <a:t>*</a:t>
-            </a:r>
-            <a:r>
-              <a:rPr>
-                <a:solidFill>
-                  <a:srgbClr val="003B4F"/>
-                </a:solidFill>
-                <a:latin typeface="Courier"/>
-              </a:rPr>
-              <a:t> </a:t>
-            </a:r>
-            <a:r>
-              <a:rPr>
-                <a:solidFill>
-                  <a:srgbClr val="AD0000"/>
-                </a:solidFill>
-                <a:latin typeface="Courier"/>
-              </a:rPr>
-              <a:t>1000</a:t>
-            </a:r>
-            <a:r>
-              <a:rPr>
-                <a:solidFill>
-                  <a:srgbClr val="003B4F"/>
-                </a:solidFill>
-                <a:latin typeface="Courier"/>
-              </a:rPr>
-              <a:t>,</a:t>
-            </a:r>
-            <a:br/>
-            <a:r>
-              <a:rPr>
-                <a:solidFill>
-                  <a:srgbClr val="003B4F"/>
-                </a:solidFill>
-                <a:latin typeface="Courier"/>
-              </a:rPr>
-              <a:t>    </a:t>
-            </a:r>
-            <a:r>
-              <a:rPr>
-                <a:solidFill>
-                  <a:srgbClr val="657422"/>
-                </a:solidFill>
-                <a:latin typeface="Courier"/>
-              </a:rPr>
-              <a:t>petiole_cm =</a:t>
-            </a:r>
-            <a:r>
-              <a:rPr>
-                <a:solidFill>
-                  <a:srgbClr val="003B4F"/>
-                </a:solidFill>
-                <a:latin typeface="Courier"/>
-              </a:rPr>
-              <a:t> petiole_mm </a:t>
-            </a:r>
-            <a:r>
-              <a:rPr>
-                <a:solidFill>
-                  <a:srgbClr val="5E5E5E"/>
-                </a:solidFill>
-                <a:latin typeface="Courier"/>
-              </a:rPr>
-              <a:t>/</a:t>
-            </a:r>
-            <a:r>
-              <a:rPr>
-                <a:solidFill>
-                  <a:srgbClr val="003B4F"/>
-                </a:solidFill>
-                <a:latin typeface="Courier"/>
-              </a:rPr>
-              <a:t> </a:t>
-            </a:r>
-            <a:r>
-              <a:rPr>
-                <a:solidFill>
-                  <a:srgbClr val="AD0000"/>
-                </a:solidFill>
-                <a:latin typeface="Courier"/>
-              </a:rPr>
-              <a:t>10</a:t>
-            </a:r>
-            <a:r>
-              <a:rPr>
-                <a:solidFill>
-                  <a:srgbClr val="003B4F"/>
-                </a:solidFill>
-                <a:latin typeface="Courier"/>
-              </a:rPr>
-              <a:t> </a:t>
-            </a:r>
-            <a:r>
-              <a:rPr>
-                <a:solidFill>
-                  <a:srgbClr val="5E5E5E"/>
-                </a:solidFill>
-                <a:latin typeface="Courier"/>
-              </a:rPr>
-              <a:t># petiole length in cm</a:t>
-            </a:r>
-            <a:br/>
-            <a:r>
-              <a:rPr>
-                <a:solidFill>
-                  <a:srgbClr val="003B4F"/>
-                </a:solidFill>
-                <a:latin typeface="Courier"/>
-              </a:rPr>
-              <a:t>  ) </a:t>
-            </a:r>
-            <a:r>
-              <a:rPr>
-                <a:solidFill>
-                  <a:srgbClr val="5E5E5E"/>
-                </a:solidFill>
-                <a:latin typeface="Courier"/>
-              </a:rPr>
-              <a:t>%&gt;%</a:t>
-            </a:r>
-            <a:br/>
-            <a:r>
-              <a:rPr>
-                <a:solidFill>
-                  <a:srgbClr val="003B4F"/>
-                </a:solidFill>
-                <a:latin typeface="Courier"/>
-              </a:rPr>
-              <a:t>  </a:t>
-            </a:r>
-            <a:r>
-              <a:rPr>
-                <a:solidFill>
-                  <a:srgbClr val="4758AB"/>
-                </a:solidFill>
-                <a:latin typeface="Courier"/>
-              </a:rPr>
-              <a:t>head</a:t>
-            </a:r>
-            <a:r>
-              <a:rPr>
-                <a:solidFill>
-                  <a:srgbClr val="003B4F"/>
-                </a:solidFill>
-                <a:latin typeface="Courier"/>
-              </a:rPr>
-              <a:t>(</a:t>
-            </a:r>
-            <a:r>
-              <a:rPr>
-                <a:solidFill>
-                  <a:srgbClr val="AD0000"/>
-                </a:solidFill>
-                <a:latin typeface="Courier"/>
-              </a:rPr>
-              <a:t>2</a:t>
-            </a:r>
-            <a:r>
-              <a:rPr>
-                <a:solidFill>
-                  <a:srgbClr val="003B4F"/>
-                </a:solidFill>
-                <a:latin typeface="Courier"/>
-              </a:rPr>
-              <a:t>)</a:t>
-            </a:r>
-          </a:p>
-          <a:p>
-            <a:pPr lvl="0" indent="0">
-              <a:buNone/>
-            </a:pPr>
-            <a:r>
-              <a:rPr>
-                <a:latin typeface="Courier"/>
-              </a:rPr>
-              <a:t># A tibble: 2 × 10
-  twig_id leaf_id teams shade mass_g petiole_mm thickness_mm paper_mass_g
-  &lt;chr&gt;   &lt;chr&gt;   &lt;chr&gt; &lt;chr&gt;  &lt;dbl&gt;      &lt;dbl&gt;        &lt;dbl&gt;        &lt;dbl&gt;
-1 &lt;NA&gt;    &lt;NA&gt;    12345 sunny   0.4          79         0.15         0.21
-2 &lt;NA&gt;    &lt;NA&gt;    12345 sunny   0.48         63         0.14         0.21
-# ℹ 2 more variables: mass_mg &lt;dbl&gt;, petiole_cm &lt;dbl&gt;</a:t>
+              <a:t># A tibble: 3 × 8
+  twig_id leaf_id teams        shade mass_g petiole_mm thickness_mm paper_mass_g
+  &lt;chr&gt;   &lt;chr&gt;   &lt;chr&gt;        &lt;chr&gt;  &lt;dbl&gt;      &lt;dbl&gt;        &lt;dbl&gt;        &lt;dbl&gt;
+1 &lt;NA&gt;    &lt;NA&gt;    still_loadi… sunny  1.08      84             0.68        0.420
+2 twig_2  l09     fighting_mo… shady  0.920      0.383        NA          NA    
+3 &lt;NA&gt;    &lt;NA&gt;    leaf_oglers  shady  0.8       41.2           0.5         0.3  </a:t>
             </a:r>
           </a:p>
         </p:txBody>
@@ -6034,48 +6062,76 @@
           <a:p>
             <a:pPr lvl="0"/>
             <a:r>
+              <a:rPr/>
+              <a:t>Default: </a:t>
+            </a:r>
+            <a:r>
               <a:rPr b="1"/>
-              <a:t>Use </a:t>
-            </a:r>
-            <a:r>
-              <a:rPr b="1">
-                <a:latin typeface="Courier"/>
-              </a:rPr>
-              <a:t>if_else(condition, value_if_true, value_if_false)</a:t>
-            </a:r>
-            <a:r>
-              <a:rPr/>
-              <a:t> to create categories</a:t>
+              <a:t>ascending</a:t>
+            </a:r>
+            <a:r>
+              <a:rPr/>
+              <a:t> order (smallest first)</a:t>
             </a:r>
           </a:p>
           <a:p>
             <a:pPr lvl="0"/>
             <a:r>
-              <a:rPr/>
-              <a:t>Separate several new columns with </a:t>
+              <a:rPr>
+                <a:latin typeface="Courier"/>
+              </a:rPr>
+              <a:t>desc(column)</a:t>
+            </a:r>
+            <a:r>
+              <a:rPr/>
+              <a:t> → </a:t>
             </a:r>
             <a:r>
               <a:rPr b="1"/>
-              <a:t>commas</a:t>
-            </a:r>
-            <a:r>
-              <a:rPr/>
-              <a:t>, like the arguments they are</a:t>
-            </a:r>
-          </a:p>
-          <a:p>
-            <a:pPr lvl="0" indent="0" marL="0">
+              <a:t>descending</a:t>
+            </a:r>
+            <a:r>
+              <a:rPr/>
+              <a:t> order (largest first)</a:t>
+            </a:r>
+          </a:p>
+          <a:p>
+            <a:pPr lvl="0"/>
+            <a:r>
+              <a:rPr/>
+              <a:t>Very useful before printing a table or checking outliers</a:t>
+            </a:r>
+          </a:p>
+          <a:p>
+            <a:pPr lvl="0" indent="0" marL="1270000">
               <a:buNone/>
             </a:pPr>
             <a:r>
-              <a:rPr/>
-              <a:t>📖 </a:t>
-            </a:r>
-            <a:r>
-              <a:rPr>
-                <a:hlinkClick r:id="rId2"/>
-              </a:rPr>
-              <a:t>R4DS §3.3</a:t>
+              <a:rPr sz="2000" b="1"/>
+              <a:t>Tip</a:t>
+            </a:r>
+          </a:p>
+          <a:p>
+            <a:pPr lvl="0" indent="0" marL="1270000">
+              <a:buNone/>
+            </a:pPr>
+            <a:r>
+              <a:rPr sz="2000">
+                <a:latin typeface="Courier"/>
+              </a:rPr>
+              <a:t>arrange()</a:t>
+            </a:r>
+            <a:r>
+              <a:rPr sz="2000"/>
+              <a:t> is rarely used in the middle of a pipeline — it is most useful at the </a:t>
+            </a:r>
+            <a:r>
+              <a:rPr sz="2000" b="1"/>
+              <a:t>end</a:t>
+            </a:r>
+            <a:r>
+              <a:rPr sz="2000"/>
+              <a:t>, when you want to inspect your results in a specific order.</a:t>
             </a:r>
           </a:p>
         </p:txBody>
@@ -6136,7 +6192,7 @@
             </a:r>
             <a:r>
               <a:rPr/>
-              <a:t> — Sorting Rows</a:t>
+              <a:t> — Sorting by Two Columns</a:t>
             </a:r>
           </a:p>
         </p:txBody>
@@ -6166,10 +6222,18 @@
                 </a:solidFill>
                 <a:latin typeface="Courier"/>
               </a:rPr>
-              <a:t># arrange() sorts rows by one or more columns ----------</a:t>
+              <a:t># Sort by shade, then by mass within each shade</a:t>
             </a:r>
             <a:br/>
-            <a:br/>
+            <a:r>
+              <a:rPr>
+                <a:solidFill>
+                  <a:srgbClr val="003B4F"/>
+                </a:solidFill>
+                <a:latin typeface="Courier"/>
+              </a:rPr>
+              <a:t>leaf_df </a:t>
+            </a:r>
             <a:r>
               <a:rPr>
                 <a:solidFill>
@@ -6177,25 +6241,6 @@
                 </a:solidFill>
                 <a:latin typeface="Courier"/>
               </a:rPr>
-              <a:t># Lightest leaves first</a:t>
-            </a:r>
-            <a:br/>
-            <a:r>
-              <a:rPr>
-                <a:solidFill>
-                  <a:srgbClr val="003B4F"/>
-                </a:solidFill>
-                <a:latin typeface="Courier"/>
-              </a:rPr>
-              <a:t>leaf_df </a:t>
-            </a:r>
-            <a:r>
-              <a:rPr>
-                <a:solidFill>
-                  <a:srgbClr val="5E5E5E"/>
-                </a:solidFill>
-                <a:latin typeface="Courier"/>
-              </a:rPr>
               <a:t>%&gt;%</a:t>
             </a:r>
             <a:r>
@@ -6223,7 +6268,25 @@
                 </a:solidFill>
                 <a:latin typeface="Courier"/>
               </a:rPr>
-              <a:t>(mass_g) </a:t>
+              <a:t>(shade, </a:t>
+            </a:r>
+            <a:r>
+              <a:rPr>
+                <a:solidFill>
+                  <a:srgbClr val="4758AB"/>
+                </a:solidFill>
+                <a:latin typeface="Courier"/>
+              </a:rPr>
+              <a:t>desc</a:t>
+            </a:r>
+            <a:r>
+              <a:rPr>
+                <a:solidFill>
+                  <a:srgbClr val="003B4F"/>
+                </a:solidFill>
+                <a:latin typeface="Courier"/>
+              </a:rPr>
+              <a:t>(mass_g)) </a:t>
             </a:r>
             <a:r>
               <a:rPr>
@@ -6291,157 +6354,9 @@
               <a:t># A tibble: 3 × 8
   twig_id leaf_id teams        shade mass_g petiole_mm thickness_mm paper_mass_g
   &lt;chr&gt;   &lt;chr&gt;   &lt;chr&gt;        &lt;chr&gt;  &lt;dbl&gt;      &lt;dbl&gt;        &lt;dbl&gt;        &lt;dbl&gt;
-1 twig_6  l06     fighting_mo… sunny  0.193       29           0.13        0.113
-2 &lt;NA&gt;    4       Oscar_Karl   sunny  0.230       35.7         0.36       NA    
-3 &lt;NA&gt;    &lt;NA&gt;    12345        sunny  0.27        34           0.11        0.15 </a:t>
-            </a:r>
-          </a:p>
-          <a:p>
-            <a:pPr lvl="0" indent="0">
-              <a:buNone/>
-            </a:pPr>
-            <a:r>
-              <a:rPr>
-                <a:solidFill>
-                  <a:srgbClr val="5E5E5E"/>
-                </a:solidFill>
-                <a:latin typeface="Courier"/>
-              </a:rPr>
-              <a:t># Heaviest leaves first (use desc() to reverse)</a:t>
-            </a:r>
-            <a:br/>
-            <a:r>
-              <a:rPr>
-                <a:solidFill>
-                  <a:srgbClr val="003B4F"/>
-                </a:solidFill>
-                <a:latin typeface="Courier"/>
-              </a:rPr>
-              <a:t>leaf_df </a:t>
-            </a:r>
-            <a:r>
-              <a:rPr>
-                <a:solidFill>
-                  <a:srgbClr val="5E5E5E"/>
-                </a:solidFill>
-                <a:latin typeface="Courier"/>
-              </a:rPr>
-              <a:t>%&gt;%</a:t>
-            </a:r>
-            <a:r>
-              <a:rPr>
-                <a:solidFill>
-                  <a:srgbClr val="003B4F"/>
-                </a:solidFill>
-                <a:latin typeface="Courier"/>
-              </a:rPr>
-              <a:t> </a:t>
-            </a:r>
-            <a:r>
-              <a:rPr>
-                <a:solidFill>
-                  <a:srgbClr val="4758AB"/>
-                </a:solidFill>
-                <a:latin typeface="Courier"/>
-              </a:rPr>
-              <a:t>arrange</a:t>
-            </a:r>
-            <a:r>
-              <a:rPr>
-                <a:solidFill>
-                  <a:srgbClr val="003B4F"/>
-                </a:solidFill>
-                <a:latin typeface="Courier"/>
-              </a:rPr>
-              <a:t>(</a:t>
-            </a:r>
-            <a:r>
-              <a:rPr>
-                <a:solidFill>
-                  <a:srgbClr val="4758AB"/>
-                </a:solidFill>
-                <a:latin typeface="Courier"/>
-              </a:rPr>
-              <a:t>desc</a:t>
-            </a:r>
-            <a:r>
-              <a:rPr>
-                <a:solidFill>
-                  <a:srgbClr val="003B4F"/>
-                </a:solidFill>
-                <a:latin typeface="Courier"/>
-              </a:rPr>
-              <a:t>(mass_g)) </a:t>
-            </a:r>
-            <a:r>
-              <a:rPr>
-                <a:solidFill>
-                  <a:srgbClr val="5E5E5E"/>
-                </a:solidFill>
-                <a:latin typeface="Courier"/>
-              </a:rPr>
-              <a:t>%&gt;%</a:t>
-            </a:r>
-            <a:r>
-              <a:rPr>
-                <a:solidFill>
-                  <a:srgbClr val="003B4F"/>
-                </a:solidFill>
-                <a:latin typeface="Courier"/>
-              </a:rPr>
-              <a:t> </a:t>
-            </a:r>
-            <a:r>
-              <a:rPr>
-                <a:solidFill>
-                  <a:srgbClr val="4758AB"/>
-                </a:solidFill>
-                <a:latin typeface="Courier"/>
-              </a:rPr>
-              <a:t>head</a:t>
-            </a:r>
-            <a:r>
-              <a:rPr>
-                <a:solidFill>
-                  <a:srgbClr val="003B4F"/>
-                </a:solidFill>
-                <a:latin typeface="Courier"/>
-              </a:rPr>
-              <a:t>(</a:t>
-            </a:r>
-            <a:r>
-              <a:rPr>
-                <a:solidFill>
-                  <a:srgbClr val="AD0000"/>
-                </a:solidFill>
-                <a:latin typeface="Courier"/>
-              </a:rPr>
-              <a:t>3</a:t>
-            </a:r>
-            <a:r>
-              <a:rPr>
-                <a:solidFill>
-                  <a:srgbClr val="003B4F"/>
-                </a:solidFill>
-                <a:latin typeface="Courier"/>
-              </a:rPr>
-              <a:t>)</a:t>
-            </a:r>
-          </a:p>
-          <a:p>
-            <a:pPr lvl="0" indent="0">
-              <a:buNone/>
-            </a:pPr>
-            <a:r>
-              <a:rPr>
-                <a:latin typeface="Courier"/>
-              </a:rPr>
-              <a:t># A tibble: 3 × 8
-  twig_id leaf_id teams        shade mass_g petiole_mm thickness_mm paper_mass_g
-  &lt;chr&gt;   &lt;chr&gt;   &lt;chr&gt;        &lt;chr&gt;  &lt;dbl&gt;      &lt;dbl&gt;        &lt;dbl&gt;        &lt;dbl&gt;
-1 &lt;NA&gt;    &lt;NA&gt;    still_loadi… sunny  1.08      84             0.68        0.420
-2 twig_2  l09     fighting_mo… shady  0.920      0.383        NA          NA    
-3 &lt;NA&gt;    &lt;NA&gt;    leaf_oglers  shady  0.8       41.2           0.5         0.3  </a:t>
+1 twig_2  l09     fighting_mo… shady  0.920      0.383        NA          NA    
+2 &lt;NA&gt;    &lt;NA&gt;    leaf_oglers  shady  0.8       41.2           0.5         0.3  
+3 twig_2  l10     fighting_mo… shady  0.782     67             0.27        0.342</a:t>
             </a:r>
           </a:p>
         </p:txBody>
@@ -6464,43 +6379,45 @@
             <a:pPr lvl="0"/>
             <a:r>
               <a:rPr/>
-              <a:t>Default: </a:t>
+              <a:t>The </a:t>
             </a:r>
             <a:r>
               <a:rPr b="1"/>
-              <a:t>ascending</a:t>
-            </a:r>
-            <a:r>
-              <a:rPr/>
-              <a:t> order (smallest first)</a:t>
+              <a:t>first</a:t>
+            </a:r>
+            <a:r>
+              <a:rPr/>
+              <a:t> column sorts the whole data frame</a:t>
             </a:r>
           </a:p>
           <a:p>
             <a:pPr lvl="0"/>
             <a:r>
-              <a:rPr>
-                <a:latin typeface="Courier"/>
-              </a:rPr>
-              <a:t>desc(column)</a:t>
-            </a:r>
-            <a:r>
-              <a:rPr/>
-              <a:t> → </a:t>
+              <a:rPr/>
+              <a:t>The </a:t>
             </a:r>
             <a:r>
               <a:rPr b="1"/>
-              <a:t>descending</a:t>
-            </a:r>
-            <a:r>
-              <a:rPr/>
-              <a:t> order (largest first)</a:t>
+              <a:t>second</a:t>
+            </a:r>
+            <a:r>
+              <a:rPr/>
+              <a:t> breaks ties </a:t>
+            </a:r>
+            <a:r>
+              <a:rPr i="1"/>
+              <a:t>inside</a:t>
+            </a:r>
+            <a:r>
+              <a:rPr/>
+              <a:t> each group of the first</a:t>
             </a:r>
           </a:p>
           <a:p>
             <a:pPr lvl="0"/>
             <a:r>
               <a:rPr/>
-              <a:t>Very useful before printing a table or checking outliers</a:t>
+              <a:t>Here: shady leaves first, and within shady, heaviest first</a:t>
             </a:r>
           </a:p>
           <a:p>
@@ -6509,7 +6426,7 @@
             </a:pPr>
             <a:r>
               <a:rPr sz="2000" b="1"/>
-              <a:t>Tip</a:t>
+              <a:t>Note</a:t>
             </a:r>
           </a:p>
           <a:p>
@@ -6517,22 +6434,18 @@
               <a:buNone/>
             </a:pPr>
             <a:r>
+              <a:rPr sz="2000"/>
+              <a:t>You can mix directions — </a:t>
+            </a:r>
+            <a:r>
               <a:rPr sz="2000">
                 <a:latin typeface="Courier"/>
               </a:rPr>
-              <a:t>arrange()</a:t>
+              <a:t>arrange(shade, desc(mass_g))</a:t>
             </a:r>
             <a:r>
               <a:rPr sz="2000"/>
-              <a:t> is rarely used in the middle of a pipeline — it is most useful at the </a:t>
-            </a:r>
-            <a:r>
-              <a:rPr sz="2000" b="1"/>
-              <a:t>end</a:t>
-            </a:r>
-            <a:r>
-              <a:rPr sz="2000"/>
-              <a:t>, when you want to inspect your results in a specific order.</a:t>
+              <a:t> sorts shade ascending and mass descending in the same call.</a:t>
             </a:r>
           </a:p>
         </p:txBody>
@@ -6543,320 +6456,6 @@
 </file>
 
 <file path=ppt/slides/slide17.xml><?xml version="1.0" encoding="utf-8"?>
-<p:sld xmlns:a="http://schemas.openxmlformats.org/drawingml/2006/main" xmlns:r="http://schemas.openxmlformats.org/officeDocument/2006/relationships" xmlns:p="http://schemas.openxmlformats.org/presentationml/2006/main">
-  <p:cSld>
-    <p:spTree>
-      <p:nvGrpSpPr>
-        <p:cNvPr id="1" name=""/>
-        <p:cNvGrpSpPr/>
-        <p:nvPr/>
-      </p:nvGrpSpPr>
-      <p:grpSpPr>
-        <a:xfrm>
-          <a:off x="0" y="0"/>
-          <a:ext cx="0" cy="0"/>
-          <a:chOff x="0" y="0"/>
-          <a:chExt cx="0" cy="0"/>
-        </a:xfrm>
-      </p:grpSpPr>
-      <p:sp>
-        <p:nvSpPr>
-          <p:cNvPr id="2" name="Title 1"/>
-          <p:cNvSpPr>
-            <a:spLocks noGrp="1"/>
-          </p:cNvSpPr>
-          <p:nvPr>
-            <p:ph type="title"/>
-          </p:nvPr>
-        </p:nvSpPr>
-        <p:spPr>
-          <a:xfrm>
-            <a:off x="0" y="0"/>
-            <a:ext cx="9144000" cy="602780"/>
-          </a:xfrm>
-          <a:solidFill>
-            <a:srgbClr val="1A1A2E"/>
-          </a:solidFill>
-        </p:spPr>
-        <p:txBody>
-          <a:bodyPr/>
-          <a:lstStyle/>
-          <a:p>
-            <a:pPr lvl="0" indent="0" marL="0">
-              <a:buNone/>
-            </a:pPr>
-            <a:r>
-              <a:rPr>
-                <a:latin typeface="Courier"/>
-              </a:rPr>
-              <a:t>arrange()</a:t>
-            </a:r>
-            <a:r>
-              <a:rPr/>
-              <a:t> — Sorting by Two Columns</a:t>
-            </a:r>
-          </a:p>
-        </p:txBody>
-      </p:sp>
-      <p:sp>
-        <p:nvSpPr>
-          <p:cNvPr id="3" name="Content Placeholder 2"/>
-          <p:cNvSpPr>
-            <a:spLocks noGrp="1"/>
-          </p:cNvSpPr>
-          <p:nvPr>
-            <p:ph idx="1" sz="half"/>
-          </p:nvPr>
-        </p:nvSpPr>
-        <p:spPr/>
-        <p:txBody>
-          <a:bodyPr/>
-          <a:lstStyle/>
-          <a:p>
-            <a:pPr lvl="0" indent="0">
-              <a:buNone/>
-            </a:pPr>
-            <a:r>
-              <a:rPr>
-                <a:solidFill>
-                  <a:srgbClr val="5E5E5E"/>
-                </a:solidFill>
-                <a:latin typeface="Courier"/>
-              </a:rPr>
-              <a:t># Sort by shade, then by mass within each shade</a:t>
-            </a:r>
-            <a:br/>
-            <a:r>
-              <a:rPr>
-                <a:solidFill>
-                  <a:srgbClr val="003B4F"/>
-                </a:solidFill>
-                <a:latin typeface="Courier"/>
-              </a:rPr>
-              <a:t>leaf_df </a:t>
-            </a:r>
-            <a:r>
-              <a:rPr>
-                <a:solidFill>
-                  <a:srgbClr val="5E5E5E"/>
-                </a:solidFill>
-                <a:latin typeface="Courier"/>
-              </a:rPr>
-              <a:t>%&gt;%</a:t>
-            </a:r>
-            <a:r>
-              <a:rPr>
-                <a:solidFill>
-                  <a:srgbClr val="003B4F"/>
-                </a:solidFill>
-                <a:latin typeface="Courier"/>
-              </a:rPr>
-              <a:t> </a:t>
-            </a:r>
-            <a:r>
-              <a:rPr>
-                <a:solidFill>
-                  <a:srgbClr val="4758AB"/>
-                </a:solidFill>
-                <a:latin typeface="Courier"/>
-              </a:rPr>
-              <a:t>arrange</a:t>
-            </a:r>
-            <a:r>
-              <a:rPr>
-                <a:solidFill>
-                  <a:srgbClr val="003B4F"/>
-                </a:solidFill>
-                <a:latin typeface="Courier"/>
-              </a:rPr>
-              <a:t>(shade, </a:t>
-            </a:r>
-            <a:r>
-              <a:rPr>
-                <a:solidFill>
-                  <a:srgbClr val="4758AB"/>
-                </a:solidFill>
-                <a:latin typeface="Courier"/>
-              </a:rPr>
-              <a:t>desc</a:t>
-            </a:r>
-            <a:r>
-              <a:rPr>
-                <a:solidFill>
-                  <a:srgbClr val="003B4F"/>
-                </a:solidFill>
-                <a:latin typeface="Courier"/>
-              </a:rPr>
-              <a:t>(mass_g)) </a:t>
-            </a:r>
-            <a:r>
-              <a:rPr>
-                <a:solidFill>
-                  <a:srgbClr val="5E5E5E"/>
-                </a:solidFill>
-                <a:latin typeface="Courier"/>
-              </a:rPr>
-              <a:t>%&gt;%</a:t>
-            </a:r>
-            <a:r>
-              <a:rPr>
-                <a:solidFill>
-                  <a:srgbClr val="003B4F"/>
-                </a:solidFill>
-                <a:latin typeface="Courier"/>
-              </a:rPr>
-              <a:t> </a:t>
-            </a:r>
-            <a:r>
-              <a:rPr>
-                <a:solidFill>
-                  <a:srgbClr val="4758AB"/>
-                </a:solidFill>
-                <a:latin typeface="Courier"/>
-              </a:rPr>
-              <a:t>head</a:t>
-            </a:r>
-            <a:r>
-              <a:rPr>
-                <a:solidFill>
-                  <a:srgbClr val="003B4F"/>
-                </a:solidFill>
-                <a:latin typeface="Courier"/>
-              </a:rPr>
-              <a:t>(</a:t>
-            </a:r>
-            <a:r>
-              <a:rPr>
-                <a:solidFill>
-                  <a:srgbClr val="AD0000"/>
-                </a:solidFill>
-                <a:latin typeface="Courier"/>
-              </a:rPr>
-              <a:t>3</a:t>
-            </a:r>
-            <a:r>
-              <a:rPr>
-                <a:solidFill>
-                  <a:srgbClr val="003B4F"/>
-                </a:solidFill>
-                <a:latin typeface="Courier"/>
-              </a:rPr>
-              <a:t>)</a:t>
-            </a:r>
-          </a:p>
-          <a:p>
-            <a:pPr lvl="0" indent="0">
-              <a:buNone/>
-            </a:pPr>
-            <a:r>
-              <a:rPr>
-                <a:latin typeface="Courier"/>
-              </a:rPr>
-              <a:t># A tibble: 3 × 8
-  twig_id leaf_id teams        shade mass_g petiole_mm thickness_mm paper_mass_g
-  &lt;chr&gt;   &lt;chr&gt;   &lt;chr&gt;        &lt;chr&gt;  &lt;dbl&gt;      &lt;dbl&gt;        &lt;dbl&gt;        &lt;dbl&gt;
-1 twig_2  l09     fighting_mo… shady  0.920      0.383        NA          NA    
-2 &lt;NA&gt;    &lt;NA&gt;    leaf_oglers  shady  0.8       41.2           0.5         0.3  
-3 twig_2  l10     fighting_mo… shady  0.782     67             0.27        0.342</a:t>
-            </a:r>
-          </a:p>
-        </p:txBody>
-      </p:sp>
-      <p:sp>
-        <p:nvSpPr>
-          <p:cNvPr id="4" name="Content Placeholder 3"/>
-          <p:cNvSpPr>
-            <a:spLocks noGrp="1"/>
-          </p:cNvSpPr>
-          <p:nvPr>
-            <p:ph idx="2" sz="half"/>
-          </p:nvPr>
-        </p:nvSpPr>
-        <p:spPr/>
-        <p:txBody>
-          <a:bodyPr/>
-          <a:lstStyle/>
-          <a:p>
-            <a:pPr lvl="0"/>
-            <a:r>
-              <a:rPr/>
-              <a:t>The </a:t>
-            </a:r>
-            <a:r>
-              <a:rPr b="1"/>
-              <a:t>first</a:t>
-            </a:r>
-            <a:r>
-              <a:rPr/>
-              <a:t> column sorts the whole data frame</a:t>
-            </a:r>
-          </a:p>
-          <a:p>
-            <a:pPr lvl="0"/>
-            <a:r>
-              <a:rPr/>
-              <a:t>The </a:t>
-            </a:r>
-            <a:r>
-              <a:rPr b="1"/>
-              <a:t>second</a:t>
-            </a:r>
-            <a:r>
-              <a:rPr/>
-              <a:t> breaks ties </a:t>
-            </a:r>
-            <a:r>
-              <a:rPr i="1"/>
-              <a:t>inside</a:t>
-            </a:r>
-            <a:r>
-              <a:rPr/>
-              <a:t> each group of the first</a:t>
-            </a:r>
-          </a:p>
-          <a:p>
-            <a:pPr lvl="0"/>
-            <a:r>
-              <a:rPr/>
-              <a:t>Here: shady leaves first, and within shady, heaviest first</a:t>
-            </a:r>
-          </a:p>
-          <a:p>
-            <a:pPr lvl="0" indent="0" marL="1270000">
-              <a:buNone/>
-            </a:pPr>
-            <a:r>
-              <a:rPr sz="2000" b="1"/>
-              <a:t>Note</a:t>
-            </a:r>
-          </a:p>
-          <a:p>
-            <a:pPr lvl="0" indent="0" marL="1270000">
-              <a:buNone/>
-            </a:pPr>
-            <a:r>
-              <a:rPr sz="2000"/>
-              <a:t>You can mix directions — </a:t>
-            </a:r>
-            <a:r>
-              <a:rPr sz="2000">
-                <a:latin typeface="Courier"/>
-              </a:rPr>
-              <a:t>arrange(shade, desc(mass_g))</a:t>
-            </a:r>
-            <a:r>
-              <a:rPr sz="2000"/>
-              <a:t> sorts shade ascending and mass descending in the same call.</a:t>
-            </a:r>
-          </a:p>
-        </p:txBody>
-      </p:sp>
-    </p:spTree>
-  </p:cSld>
-</p:sld>
-</file>
-
-<file path=ppt/slides/slide18.xml><?xml version="1.0" encoding="utf-8"?>
 <p:sld xmlns:a="http://schemas.openxmlformats.org/drawingml/2006/main" xmlns:r="http://schemas.openxmlformats.org/officeDocument/2006/relationships" xmlns:p="http://schemas.openxmlformats.org/presentationml/2006/main">
   <p:cSld>
     <p:spTree>
@@ -7859,6 +7458,132 @@
 </p:sld>
 </file>
 
+<file path=ppt/slides/slide18.xml><?xml version="1.0" encoding="utf-8"?>
+<p:sld xmlns:a="http://schemas.openxmlformats.org/drawingml/2006/main" xmlns:r="http://schemas.openxmlformats.org/officeDocument/2006/relationships" xmlns:p="http://schemas.openxmlformats.org/presentationml/2006/main">
+  <p:cSld>
+    <p:spTree>
+      <p:nvGrpSpPr>
+        <p:cNvPr id="1" name=""/>
+        <p:cNvGrpSpPr/>
+        <p:nvPr/>
+      </p:nvGrpSpPr>
+      <p:grpSpPr>
+        <a:xfrm>
+          <a:off x="0" y="0"/>
+          <a:ext cx="0" cy="0"/>
+          <a:chOff x="0" y="0"/>
+          <a:chExt cx="0" cy="0"/>
+        </a:xfrm>
+      </p:grpSpPr>
+      <p:sp>
+        <p:nvSpPr>
+          <p:cNvPr id="2" name="Title 1"/>
+          <p:cNvSpPr>
+            <a:spLocks noGrp="1"/>
+          </p:cNvSpPr>
+          <p:nvPr>
+            <p:ph type="title"/>
+          </p:nvPr>
+        </p:nvSpPr>
+        <p:spPr>
+          <a:xfrm>
+            <a:off x="0" y="0"/>
+            <a:ext cx="9144000" cy="582780"/>
+          </a:xfrm>
+        </p:spPr>
+        <p:txBody>
+          <a:bodyPr/>
+          <a:lstStyle/>
+          <a:p>
+            <a:pPr lvl="0" indent="0" marL="0">
+              <a:buNone/>
+            </a:pPr>
+            <a:r>
+              <a:rPr/>
+              <a:t>→ ACTIVITY 5 starts now</a:t>
+            </a:r>
+          </a:p>
+        </p:txBody>
+      </p:sp>
+      <p:sp>
+        <p:nvSpPr>
+          <p:cNvPr id="3" name="Content Placeholder 2"/>
+          <p:cNvSpPr>
+            <a:spLocks noGrp="1"/>
+          </p:cNvSpPr>
+          <p:nvPr>
+            <p:ph idx="1"/>
+          </p:nvPr>
+        </p:nvSpPr>
+        <p:spPr/>
+        <p:txBody>
+          <a:bodyPr/>
+          <a:lstStyle/>
+          <a:p>
+            <a:pPr lvl="0" indent="0" marL="0">
+              <a:buNone/>
+            </a:pPr>
+            <a:r>
+              <a:rPr b="1"/>
+              <a:t>🛑 Go to Activity 5 — Wrangling</a:t>
+            </a:r>
+          </a:p>
+          <a:p>
+            <a:pPr lvl="0" indent="0" marL="0">
+              <a:buNone/>
+            </a:pPr>
+            <a:r>
+              <a:rPr/>
+              <a:t>Close the slides. Open the Activity 5 and work through </a:t>
+            </a:r>
+            <a:r>
+              <a:rPr>
+                <a:latin typeface="Courier"/>
+              </a:rPr>
+              <a:t>filter</a:t>
+            </a:r>
+            <a:r>
+              <a:rPr/>
+              <a:t>, </a:t>
+            </a:r>
+            <a:r>
+              <a:rPr>
+                <a:latin typeface="Courier"/>
+              </a:rPr>
+              <a:t>select</a:t>
+            </a:r>
+            <a:r>
+              <a:rPr/>
+              <a:t>, </a:t>
+            </a:r>
+            <a:r>
+              <a:rPr>
+                <a:latin typeface="Courier"/>
+              </a:rPr>
+              <a:t>mutate</a:t>
+            </a:r>
+            <a:r>
+              <a:rPr/>
+              <a:t>, </a:t>
+            </a:r>
+            <a:r>
+              <a:rPr>
+                <a:latin typeface="Courier"/>
+              </a:rPr>
+              <a:t>arrange</a:t>
+            </a:r>
+            <a:r>
+              <a:rPr/>
+              <a:t>, and the full pipeline. Type every line yourself into your script; predict before you run.</a:t>
+            </a:r>
+          </a:p>
+        </p:txBody>
+      </p:sp>
+    </p:spTree>
+  </p:cSld>
+</p:sld>
+</file>
+
 <file path=ppt/slides/slide19.xml><?xml version="1.0" encoding="utf-8"?>
 <p:sld xmlns:a="http://schemas.openxmlformats.org/drawingml/2006/main" xmlns:r="http://schemas.openxmlformats.org/officeDocument/2006/relationships" xmlns:p="http://schemas.openxmlformats.org/presentationml/2006/main">
   <p:cSld>
@@ -7889,8 +7614,11 @@
         <p:spPr>
           <a:xfrm>
             <a:off x="0" y="0"/>
-            <a:ext cx="9144000" cy="582780"/>
+            <a:ext cx="9144000" cy="602780"/>
           </a:xfrm>
+          <a:solidFill>
+            <a:srgbClr val="1A1A2E"/>
+          </a:solidFill>
         </p:spPr>
         <p:txBody>
           <a:bodyPr/>
@@ -7901,7 +7629,7 @@
             </a:pPr>
             <a:r>
               <a:rPr/>
-              <a:t>→ ACTIVITY 5 starts now</a:t>
+              <a:t>What We Learned Today</a:t>
             </a:r>
           </a:p>
         </p:txBody>
@@ -7913,7 +7641,7 @@
             <a:spLocks noGrp="1"/>
           </p:cNvSpPr>
           <p:nvPr>
-            <p:ph idx="1"/>
+            <p:ph idx="1" sz="half"/>
           </p:nvPr>
         </p:nvSpPr>
         <p:spPr/>
@@ -7921,12 +7649,140 @@
           <a:bodyPr/>
           <a:lstStyle/>
           <a:p>
+            <a:pPr lvl="0"/>
+            <a:r>
+              <a:rPr>
+                <a:latin typeface="Courier"/>
+              </a:rPr>
+              <a:t>filter()</a:t>
+            </a:r>
+            <a:r>
+              <a:rPr/>
+              <a:t> — keep rows by condition</a:t>
+            </a:r>
+          </a:p>
+          <a:p>
+            <a:pPr lvl="0"/>
+            <a:r>
+              <a:rPr>
+                <a:latin typeface="Courier"/>
+              </a:rPr>
+              <a:t>select()</a:t>
+            </a:r>
+            <a:r>
+              <a:rPr/>
+              <a:t> — keep columns by name</a:t>
+            </a:r>
+          </a:p>
+          <a:p>
+            <a:pPr lvl="0"/>
+            <a:r>
+              <a:rPr>
+                <a:latin typeface="Courier"/>
+              </a:rPr>
+              <a:t>mutate()</a:t>
+            </a:r>
+            <a:r>
+              <a:rPr/>
+              <a:t> — add new calculated columns</a:t>
+            </a:r>
+          </a:p>
+          <a:p>
+            <a:pPr lvl="0"/>
+            <a:r>
+              <a:rPr>
+                <a:latin typeface="Courier"/>
+              </a:rPr>
+              <a:t>arrange()</a:t>
+            </a:r>
+            <a:r>
+              <a:rPr/>
+              <a:t> — sort rows</a:t>
+            </a:r>
+          </a:p>
+          <a:p>
+            <a:pPr lvl="0"/>
+            <a:r>
+              <a:rPr/>
+              <a:t>Full pipeline: chain all verbs with </a:t>
+            </a:r>
+            <a:r>
+              <a:rPr>
+                <a:latin typeface="Courier"/>
+              </a:rPr>
+              <a:t>%&gt;%</a:t>
+            </a:r>
+          </a:p>
+        </p:txBody>
+      </p:sp>
+      <p:sp>
+        <p:nvSpPr>
+          <p:cNvPr id="4" name="Content Placeholder 3"/>
+          <p:cNvSpPr>
+            <a:spLocks noGrp="1"/>
+          </p:cNvSpPr>
+          <p:nvPr>
+            <p:ph idx="2" sz="half"/>
+          </p:nvPr>
+        </p:nvSpPr>
+        <p:spPr/>
+        <p:txBody>
+          <a:bodyPr/>
+          <a:lstStyle/>
+          <a:p>
             <a:pPr lvl="0" indent="0" marL="0">
               <a:buNone/>
             </a:pPr>
             <a:r>
               <a:rPr b="1"/>
-              <a:t>🛑 Go to Activity 5 — Wrangling</a:t>
+              <a:t>References:</a:t>
+            </a:r>
+          </a:p>
+          <a:p>
+            <a:pPr lvl="0"/>
+            <a:r>
+              <a:rPr/>
+              <a:t>📖 </a:t>
+            </a:r>
+            <a:r>
+              <a:rPr>
+                <a:hlinkClick r:id="rId2"/>
+              </a:rPr>
+              <a:t>R4DS §3</a:t>
+            </a:r>
+            <a:r>
+              <a:rPr/>
+              <a:t> — Data Transformation</a:t>
+            </a:r>
+          </a:p>
+          <a:p>
+            <a:pPr lvl="0"/>
+            <a:r>
+              <a:rPr/>
+              <a:t>📖 </a:t>
+            </a:r>
+            <a:r>
+              <a:rPr>
+                <a:hlinkClick r:id="rId3"/>
+              </a:rPr>
+              <a:t>R4DS §5</a:t>
+            </a:r>
+            <a:r>
+              <a:rPr/>
+              <a:t> — Data Tidying</a:t>
+            </a:r>
+          </a:p>
+          <a:p>
+            <a:pPr lvl="0"/>
+            <a:r>
+              <a:rPr/>
+              <a:t>🌐 </a:t>
+            </a:r>
+            <a:r>
+              <a:rPr>
+                <a:hlinkClick r:id="rId4"/>
+              </a:rPr>
+              <a:t>Data Carpentry</a:t>
             </a:r>
           </a:p>
           <a:p>
@@ -7934,48 +7790,57 @@
               <a:buNone/>
             </a:pPr>
             <a:r>
-              <a:rPr/>
-              <a:t>Close the slides. Open the Activity 5 and work through </a:t>
-            </a:r>
-            <a:r>
-              <a:rPr>
-                <a:latin typeface="Courier"/>
-              </a:rPr>
-              <a:t>filter</a:t>
-            </a:r>
-            <a:r>
-              <a:rPr/>
-              <a:t>, </a:t>
-            </a:r>
-            <a:r>
-              <a:rPr>
-                <a:latin typeface="Courier"/>
-              </a:rPr>
-              <a:t>select</a:t>
-            </a:r>
-            <a:r>
-              <a:rPr/>
-              <a:t>, </a:t>
-            </a:r>
-            <a:r>
-              <a:rPr>
-                <a:latin typeface="Courier"/>
-              </a:rPr>
-              <a:t>mutate</a:t>
-            </a:r>
-            <a:r>
-              <a:rPr/>
-              <a:t>, </a:t>
-            </a:r>
-            <a:r>
-              <a:rPr>
-                <a:latin typeface="Courier"/>
-              </a:rPr>
-              <a:t>arrange</a:t>
-            </a:r>
-            <a:r>
-              <a:rPr/>
-              <a:t>, and the full pipeline. Type every line yourself into your script; predict before you run.</a:t>
+              <a:rPr b="1"/>
+              <a:t>Up next — Lecture 06, Summary Statistics:</a:t>
+            </a:r>
+          </a:p>
+          <a:p>
+            <a:pPr lvl="0"/>
+            <a:r>
+              <a:rPr/>
+              <a:t>Mean, median, variance, SD, SE</a:t>
+            </a:r>
+          </a:p>
+          <a:p>
+            <a:pPr lvl="0"/>
+            <a:r>
+              <a:rPr/>
+              <a:t>Counting correctly with </a:t>
+            </a:r>
+            <a:r>
+              <a:rPr>
+                <a:latin typeface="Courier"/>
+              </a:rPr>
+              <a:t>sum(!is.na())</a:t>
+            </a:r>
+          </a:p>
+          <a:p>
+            <a:pPr lvl="0"/>
+            <a:r>
+              <a:rPr>
+                <a:latin typeface="Courier"/>
+              </a:rPr>
+              <a:t>group_by()</a:t>
+            </a:r>
+            <a:r>
+              <a:rPr/>
+              <a:t> + </a:t>
+            </a:r>
+            <a:r>
+              <a:rPr>
+                <a:latin typeface="Courier"/>
+              </a:rPr>
+              <a:t>summarize()</a:t>
+            </a:r>
+            <a:r>
+              <a:rPr/>
+              <a:t>, and </a:t>
+            </a:r>
+            <a:r>
+              <a:rPr>
+                <a:latin typeface="Courier"/>
+              </a:rPr>
+              <a:t>skimr</a:t>
             </a:r>
           </a:p>
         </p:txBody>
@@ -8219,272 +8084,6 @@
             <a:r>
               <a:rPr sz="2000"/>
               <a:t>.</a:t>
-            </a:r>
-          </a:p>
-        </p:txBody>
-      </p:sp>
-    </p:spTree>
-  </p:cSld>
-</p:sld>
-</file>
-
-<file path=ppt/slides/slide20.xml><?xml version="1.0" encoding="utf-8"?>
-<p:sld xmlns:a="http://schemas.openxmlformats.org/drawingml/2006/main" xmlns:r="http://schemas.openxmlformats.org/officeDocument/2006/relationships" xmlns:p="http://schemas.openxmlformats.org/presentationml/2006/main">
-  <p:cSld>
-    <p:spTree>
-      <p:nvGrpSpPr>
-        <p:cNvPr id="1" name=""/>
-        <p:cNvGrpSpPr/>
-        <p:nvPr/>
-      </p:nvGrpSpPr>
-      <p:grpSpPr>
-        <a:xfrm>
-          <a:off x="0" y="0"/>
-          <a:ext cx="0" cy="0"/>
-          <a:chOff x="0" y="0"/>
-          <a:chExt cx="0" cy="0"/>
-        </a:xfrm>
-      </p:grpSpPr>
-      <p:sp>
-        <p:nvSpPr>
-          <p:cNvPr id="2" name="Title 1"/>
-          <p:cNvSpPr>
-            <a:spLocks noGrp="1"/>
-          </p:cNvSpPr>
-          <p:nvPr>
-            <p:ph type="title"/>
-          </p:nvPr>
-        </p:nvSpPr>
-        <p:spPr>
-          <a:xfrm>
-            <a:off x="0" y="0"/>
-            <a:ext cx="9144000" cy="602780"/>
-          </a:xfrm>
-          <a:solidFill>
-            <a:srgbClr val="1A1A2E"/>
-          </a:solidFill>
-        </p:spPr>
-        <p:txBody>
-          <a:bodyPr/>
-          <a:lstStyle/>
-          <a:p>
-            <a:pPr lvl="0" indent="0" marL="0">
-              <a:buNone/>
-            </a:pPr>
-            <a:r>
-              <a:rPr/>
-              <a:t>What We Learned Today</a:t>
-            </a:r>
-          </a:p>
-        </p:txBody>
-      </p:sp>
-      <p:sp>
-        <p:nvSpPr>
-          <p:cNvPr id="3" name="Content Placeholder 2"/>
-          <p:cNvSpPr>
-            <a:spLocks noGrp="1"/>
-          </p:cNvSpPr>
-          <p:nvPr>
-            <p:ph idx="1" sz="half"/>
-          </p:nvPr>
-        </p:nvSpPr>
-        <p:spPr/>
-        <p:txBody>
-          <a:bodyPr/>
-          <a:lstStyle/>
-          <a:p>
-            <a:pPr lvl="0"/>
-            <a:r>
-              <a:rPr>
-                <a:latin typeface="Courier"/>
-              </a:rPr>
-              <a:t>filter()</a:t>
-            </a:r>
-            <a:r>
-              <a:rPr/>
-              <a:t> — keep rows by condition</a:t>
-            </a:r>
-          </a:p>
-          <a:p>
-            <a:pPr lvl="0"/>
-            <a:r>
-              <a:rPr>
-                <a:latin typeface="Courier"/>
-              </a:rPr>
-              <a:t>select()</a:t>
-            </a:r>
-            <a:r>
-              <a:rPr/>
-              <a:t> — keep columns by name</a:t>
-            </a:r>
-          </a:p>
-          <a:p>
-            <a:pPr lvl="0"/>
-            <a:r>
-              <a:rPr>
-                <a:latin typeface="Courier"/>
-              </a:rPr>
-              <a:t>mutate()</a:t>
-            </a:r>
-            <a:r>
-              <a:rPr/>
-              <a:t> — add new calculated columns</a:t>
-            </a:r>
-          </a:p>
-          <a:p>
-            <a:pPr lvl="0"/>
-            <a:r>
-              <a:rPr>
-                <a:latin typeface="Courier"/>
-              </a:rPr>
-              <a:t>arrange()</a:t>
-            </a:r>
-            <a:r>
-              <a:rPr/>
-              <a:t> — sort rows</a:t>
-            </a:r>
-          </a:p>
-          <a:p>
-            <a:pPr lvl="0"/>
-            <a:r>
-              <a:rPr/>
-              <a:t>Full pipeline: chain all verbs with </a:t>
-            </a:r>
-            <a:r>
-              <a:rPr>
-                <a:latin typeface="Courier"/>
-              </a:rPr>
-              <a:t>%&gt;%</a:t>
-            </a:r>
-          </a:p>
-        </p:txBody>
-      </p:sp>
-      <p:sp>
-        <p:nvSpPr>
-          <p:cNvPr id="4" name="Content Placeholder 3"/>
-          <p:cNvSpPr>
-            <a:spLocks noGrp="1"/>
-          </p:cNvSpPr>
-          <p:nvPr>
-            <p:ph idx="2" sz="half"/>
-          </p:nvPr>
-        </p:nvSpPr>
-        <p:spPr/>
-        <p:txBody>
-          <a:bodyPr/>
-          <a:lstStyle/>
-          <a:p>
-            <a:pPr lvl="0" indent="0" marL="0">
-              <a:buNone/>
-            </a:pPr>
-            <a:r>
-              <a:rPr b="1"/>
-              <a:t>References:</a:t>
-            </a:r>
-          </a:p>
-          <a:p>
-            <a:pPr lvl="0"/>
-            <a:r>
-              <a:rPr/>
-              <a:t>📖 </a:t>
-            </a:r>
-            <a:r>
-              <a:rPr>
-                <a:hlinkClick r:id="rId2"/>
-              </a:rPr>
-              <a:t>R4DS §3</a:t>
-            </a:r>
-            <a:r>
-              <a:rPr/>
-              <a:t> — Data Transformation</a:t>
-            </a:r>
-          </a:p>
-          <a:p>
-            <a:pPr lvl="0"/>
-            <a:r>
-              <a:rPr/>
-              <a:t>📖 </a:t>
-            </a:r>
-            <a:r>
-              <a:rPr>
-                <a:hlinkClick r:id="rId3"/>
-              </a:rPr>
-              <a:t>R4DS §5</a:t>
-            </a:r>
-            <a:r>
-              <a:rPr/>
-              <a:t> — Data Tidying</a:t>
-            </a:r>
-          </a:p>
-          <a:p>
-            <a:pPr lvl="0"/>
-            <a:r>
-              <a:rPr/>
-              <a:t>🌐 </a:t>
-            </a:r>
-            <a:r>
-              <a:rPr>
-                <a:hlinkClick r:id="rId4"/>
-              </a:rPr>
-              <a:t>Data Carpentry</a:t>
-            </a:r>
-          </a:p>
-          <a:p>
-            <a:pPr lvl="0" indent="0" marL="0">
-              <a:buNone/>
-            </a:pPr>
-            <a:r>
-              <a:rPr b="1"/>
-              <a:t>Up next — Lecture 06, Summary Statistics:</a:t>
-            </a:r>
-          </a:p>
-          <a:p>
-            <a:pPr lvl="0"/>
-            <a:r>
-              <a:rPr/>
-              <a:t>Mean, median, variance, SD, SE</a:t>
-            </a:r>
-          </a:p>
-          <a:p>
-            <a:pPr lvl="0"/>
-            <a:r>
-              <a:rPr/>
-              <a:t>Counting correctly with </a:t>
-            </a:r>
-            <a:r>
-              <a:rPr>
-                <a:latin typeface="Courier"/>
-              </a:rPr>
-              <a:t>sum(!is.na())</a:t>
-            </a:r>
-          </a:p>
-          <a:p>
-            <a:pPr lvl="0"/>
-            <a:r>
-              <a:rPr>
-                <a:latin typeface="Courier"/>
-              </a:rPr>
-              <a:t>group_by()</a:t>
-            </a:r>
-            <a:r>
-              <a:rPr/>
-              <a:t> + </a:t>
-            </a:r>
-            <a:r>
-              <a:rPr>
-                <a:latin typeface="Courier"/>
-              </a:rPr>
-              <a:t>summarize()</a:t>
-            </a:r>
-            <a:r>
-              <a:rPr/>
-              <a:t>, and </a:t>
-            </a:r>
-            <a:r>
-              <a:rPr>
-                <a:latin typeface="Courier"/>
-              </a:rPr>
-              <a:t>skimr</a:t>
             </a:r>
           </a:p>
         </p:txBody>

--- a/docs/content/wrangling/wrangling_lecture.pptx
+++ b/docs/content/wrangling/wrangling_lecture.pptx
@@ -3358,7 +3358,7 @@
             </a:pPr>
             <a:r>
               <a:rPr/>
-              <a:t>2026-10-19</a:t>
+              <a:t>2026-10-22</a:t>
             </a:r>
           </a:p>
         </p:txBody>
